--- a/docs/ipoe-lab/slides/handson.pptx
+++ b/docs/ipoe-lab/slides/handson.pptx
@@ -7,33 +7,33 @@
   <p:sldIdLst>
     <p:sldId id="256" r:id="rId7"/>
     <p:sldId id="257" r:id="rId8"/>
-    <p:sldId id="258" r:id="rId9"/>
-    <p:sldId id="259" r:id="rId10"/>
-    <p:sldId id="260" r:id="rId11"/>
-    <p:sldId id="261" r:id="rId12"/>
-    <p:sldId id="262" r:id="rId13"/>
-    <p:sldId id="263" r:id="rId14"/>
-    <p:sldId id="264" r:id="rId15"/>
-    <p:sldId id="265" r:id="rId16"/>
-    <p:sldId id="266" r:id="rId17"/>
-    <p:sldId id="267" r:id="rId18"/>
-    <p:sldId id="268" r:id="rId19"/>
-    <p:sldId id="269" r:id="rId20"/>
-    <p:sldId id="270" r:id="rId21"/>
-    <p:sldId id="271" r:id="rId22"/>
-    <p:sldId id="272" r:id="rId23"/>
-    <p:sldId id="273" r:id="rId24"/>
-    <p:sldId id="274" r:id="rId25"/>
-    <p:sldId id="275" r:id="rId26"/>
-    <p:sldId id="276" r:id="rId27"/>
-    <p:sldId id="277" r:id="rId28"/>
-    <p:sldId id="278" r:id="rId29"/>
-    <p:sldId id="279" r:id="rId30"/>
-    <p:sldId id="280" r:id="rId31"/>
-    <p:sldId id="281" r:id="rId32"/>
-    <p:sldId id="282" r:id="rId33"/>
-    <p:sldId id="283" r:id="rId34"/>
-    <p:sldId id="284" r:id="rId35"/>
+    <p:sldId id="258" r:id="rId10"/>
+    <p:sldId id="259" r:id="rId11"/>
+    <p:sldId id="260" r:id="rId12"/>
+    <p:sldId id="261" r:id="rId13"/>
+    <p:sldId id="262" r:id="rId14"/>
+    <p:sldId id="263" r:id="rId15"/>
+    <p:sldId id="264" r:id="rId16"/>
+    <p:sldId id="265" r:id="rId17"/>
+    <p:sldId id="266" r:id="rId18"/>
+    <p:sldId id="267" r:id="rId19"/>
+    <p:sldId id="268" r:id="rId20"/>
+    <p:sldId id="269" r:id="rId21"/>
+    <p:sldId id="270" r:id="rId22"/>
+    <p:sldId id="271" r:id="rId23"/>
+    <p:sldId id="272" r:id="rId24"/>
+    <p:sldId id="273" r:id="rId25"/>
+    <p:sldId id="274" r:id="rId26"/>
+    <p:sldId id="275" r:id="rId27"/>
+    <p:sldId id="276" r:id="rId28"/>
+    <p:sldId id="277" r:id="rId29"/>
+    <p:sldId id="278" r:id="rId30"/>
+    <p:sldId id="279" r:id="rId31"/>
+    <p:sldId id="280" r:id="rId32"/>
+    <p:sldId id="281" r:id="rId33"/>
+    <p:sldId id="282" r:id="rId34"/>
+    <p:sldId id="283" r:id="rId35"/>
+    <p:sldId id="284" r:id="rId36"/>
   </p:sldIdLst>
   <p:sldSz cx="12191695" cy="6858000" type="screen4x3"/>
   <p:notesSz cx="6858000" cy="9144000"/>
@@ -133,6 +133,906 @@
     </a:lvl9pPr>
   </p:defaultTextStyle>
 </p:presentation>
+</file>
+
+<file path=ppt/notesMasters/notesMaster1.xml><?xml version="1.0" encoding="utf-8"?>
+<p:notesMaster xmlns:a="http://schemas.openxmlformats.org/drawingml/2006/main" xmlns:p="http://schemas.openxmlformats.org/presentationml/2006/main" xmlns:r="http://schemas.openxmlformats.org/officeDocument/2006/relationships">
+  <p:cSld>
+    <p:bg>
+      <p:bgRef idx="1001">
+        <a:schemeClr val="bg1"/>
+      </p:bgRef>
+    </p:bg>
+    <p:spTree>
+      <p:nvGrpSpPr>
+        <p:cNvPr id="1" name=""/>
+        <p:cNvGrpSpPr/>
+        <p:nvPr/>
+      </p:nvGrpSpPr>
+      <p:grpSpPr>
+        <a:xfrm>
+          <a:off x="0" y="0"/>
+          <a:ext cx="0" cy="0"/>
+          <a:chOff x="0" y="0"/>
+          <a:chExt cx="0" cy="0"/>
+        </a:xfrm>
+      </p:grpSpPr>
+      <p:sp>
+        <p:nvSpPr>
+          <p:cNvPr id="2" name="Header Placeholder 1"/>
+          <p:cNvSpPr>
+            <a:spLocks noGrp="1"/>
+          </p:cNvSpPr>
+          <p:nvPr>
+            <p:ph type="hdr" sz="quarter"/>
+          </p:nvPr>
+        </p:nvSpPr>
+        <p:spPr>
+          <a:xfrm>
+            <a:off x="0" y="0"/>
+            <a:ext cx="2971800" cy="457200"/>
+          </a:xfrm>
+          <a:prstGeom prst="rect">
+            <a:avLst/>
+          </a:prstGeom>
+        </p:spPr>
+        <p:txBody>
+          <a:bodyPr vert="horz" lIns="91440" tIns="45720" rIns="91440" bIns="45720" rtlCol="0"/>
+          <a:lstStyle>
+            <a:lvl1pPr algn="l">
+              <a:defRPr sz="1200"/>
+            </a:lvl1pPr>
+          </a:lstStyle>
+          <a:p>
+            <a:endParaRPr lang="en-US"/>
+          </a:p>
+        </p:txBody>
+      </p:sp>
+      <p:sp>
+        <p:nvSpPr>
+          <p:cNvPr id="3" name="Date Placeholder 2"/>
+          <p:cNvSpPr>
+            <a:spLocks noGrp="1"/>
+          </p:cNvSpPr>
+          <p:nvPr>
+            <p:ph type="dt" idx="1"/>
+          </p:nvPr>
+        </p:nvSpPr>
+        <p:spPr>
+          <a:xfrm>
+            <a:off x="3884613" y="0"/>
+            <a:ext cx="2971800" cy="457200"/>
+          </a:xfrm>
+          <a:prstGeom prst="rect">
+            <a:avLst/>
+          </a:prstGeom>
+        </p:spPr>
+        <p:txBody>
+          <a:bodyPr vert="horz" lIns="91440" tIns="45720" rIns="91440" bIns="45720" rtlCol="0"/>
+          <a:lstStyle>
+            <a:lvl1pPr algn="r">
+              <a:defRPr sz="1200"/>
+            </a:lvl1pPr>
+          </a:lstStyle>
+          <a:p>
+            <a:fld id="{0F89C1C7-3DCD-1040-A9CF-14679D8B5DDD}" type="datetimeFigureOut">
+              <a:rPr lang="en-US" smtClean="0"/>
+              <a:t>10/17/16</a:t>
+            </a:fld>
+            <a:endParaRPr lang="en-US"/>
+          </a:p>
+        </p:txBody>
+      </p:sp>
+      <p:sp>
+        <p:nvSpPr>
+          <p:cNvPr id="4" name="Slide Image Placeholder 3"/>
+          <p:cNvSpPr>
+            <a:spLocks noGrp="1" noRot="1" noChangeAspect="1"/>
+          </p:cNvSpPr>
+          <p:nvPr>
+            <p:ph type="sldImg" idx="2"/>
+          </p:nvPr>
+        </p:nvSpPr>
+        <p:spPr>
+          <a:xfrm>
+            <a:off x="1143000" y="685800"/>
+            <a:ext cx="4572000" cy="3429000"/>
+          </a:xfrm>
+          <a:prstGeom prst="rect">
+            <a:avLst/>
+          </a:prstGeom>
+          <a:noFill/>
+          <a:ln w="12700">
+            <a:solidFill>
+              <a:prstClr val="black"/>
+            </a:solidFill>
+          </a:ln>
+        </p:spPr>
+        <p:txBody>
+          <a:bodyPr vert="horz" lIns="91440" tIns="45720" rIns="91440" bIns="45720" rtlCol="0" anchor="ctr"/>
+          <a:lstStyle/>
+          <a:p>
+            <a:endParaRPr lang="en-US"/>
+          </a:p>
+        </p:txBody>
+      </p:sp>
+      <p:sp>
+        <p:nvSpPr>
+          <p:cNvPr id="5" name="Notes Placeholder 4"/>
+          <p:cNvSpPr>
+            <a:spLocks noGrp="1"/>
+          </p:cNvSpPr>
+          <p:nvPr>
+            <p:ph type="body" sz="quarter" idx="3"/>
+          </p:nvPr>
+        </p:nvSpPr>
+        <p:spPr>
+          <a:xfrm>
+            <a:off x="685800" y="4343400"/>
+            <a:ext cx="5486400" cy="4114800"/>
+          </a:xfrm>
+          <a:prstGeom prst="rect">
+            <a:avLst/>
+          </a:prstGeom>
+        </p:spPr>
+        <p:txBody>
+          <a:bodyPr vert="horz" lIns="91440" tIns="45720" rIns="91440" bIns="45720" rtlCol="0"/>
+          <a:lstStyle/>
+          <a:p>
+            <a:pPr lvl="0"/>
+            <a:r>
+              <a:rPr lang="en-US" smtClean="0"/>
+              <a:t>Click to edit Master text styles</a:t>
+            </a:r>
+          </a:p>
+          <a:p>
+            <a:pPr lvl="1"/>
+            <a:r>
+              <a:rPr lang="en-US" smtClean="0"/>
+              <a:t>Second level</a:t>
+            </a:r>
+          </a:p>
+          <a:p>
+            <a:pPr lvl="2"/>
+            <a:r>
+              <a:rPr lang="en-US" smtClean="0"/>
+              <a:t>Third level</a:t>
+            </a:r>
+          </a:p>
+          <a:p>
+            <a:pPr lvl="3"/>
+            <a:r>
+              <a:rPr lang="en-US" smtClean="0"/>
+              <a:t>Fourth level</a:t>
+            </a:r>
+          </a:p>
+          <a:p>
+            <a:pPr lvl="4"/>
+            <a:r>
+              <a:rPr lang="en-US" smtClean="0"/>
+              <a:t>Fifth level</a:t>
+            </a:r>
+            <a:endParaRPr lang="en-US"/>
+          </a:p>
+        </p:txBody>
+      </p:sp>
+      <p:sp>
+        <p:nvSpPr>
+          <p:cNvPr id="6" name="Footer Placeholder 5"/>
+          <p:cNvSpPr>
+            <a:spLocks noGrp="1"/>
+          </p:cNvSpPr>
+          <p:nvPr>
+            <p:ph type="ftr" sz="quarter" idx="4"/>
+          </p:nvPr>
+        </p:nvSpPr>
+        <p:spPr>
+          <a:xfrm>
+            <a:off x="0" y="8685213"/>
+            <a:ext cx="2971800" cy="457200"/>
+          </a:xfrm>
+          <a:prstGeom prst="rect">
+            <a:avLst/>
+          </a:prstGeom>
+        </p:spPr>
+        <p:txBody>
+          <a:bodyPr vert="horz" lIns="91440" tIns="45720" rIns="91440" bIns="45720" rtlCol="0" anchor="b"/>
+          <a:lstStyle>
+            <a:lvl1pPr algn="l">
+              <a:defRPr sz="1200"/>
+            </a:lvl1pPr>
+          </a:lstStyle>
+          <a:p>
+            <a:endParaRPr lang="en-US"/>
+          </a:p>
+        </p:txBody>
+      </p:sp>
+      <p:sp>
+        <p:nvSpPr>
+          <p:cNvPr id="7" name="Slide Number Placeholder 6"/>
+          <p:cNvSpPr>
+            <a:spLocks noGrp="1"/>
+          </p:cNvSpPr>
+          <p:nvPr>
+            <p:ph type="sldNum" sz="quarter" idx="5"/>
+          </p:nvPr>
+        </p:nvSpPr>
+        <p:spPr>
+          <a:xfrm>
+            <a:off x="3884613" y="8685213"/>
+            <a:ext cx="2971800" cy="457200"/>
+          </a:xfrm>
+          <a:prstGeom prst="rect">
+            <a:avLst/>
+          </a:prstGeom>
+        </p:spPr>
+        <p:txBody>
+          <a:bodyPr vert="horz" lIns="91440" tIns="45720" rIns="91440" bIns="45720" rtlCol="0" anchor="b"/>
+          <a:lstStyle>
+            <a:lvl1pPr algn="r">
+              <a:defRPr sz="1200"/>
+            </a:lvl1pPr>
+          </a:lstStyle>
+          <a:p>
+            <a:fld id="{BB5E49A5-4136-284D-997B-48E1D791AD67}" type="slidenum">
+              <a:rPr lang="en-US" smtClean="0"/>
+              <a:t>‹#›</a:t>
+            </a:fld>
+            <a:endParaRPr lang="en-US"/>
+          </a:p>
+        </p:txBody>
+      </p:sp>
+    </p:spTree>
+    <p:extLst>
+      <p:ext uri="{BB962C8B-B14F-4D97-AF65-F5344CB8AC3E}">
+        <p14:creationId xmlns:p14="http://schemas.microsoft.com/office/powerpoint/2010/main" val="2623252185"/>
+      </p:ext>
+    </p:extLst>
+  </p:cSld>
+  <p:clrMap bg1="lt1" tx1="dk1" bg2="lt2" tx2="dk2" accent1="accent1" accent2="accent2" accent3="accent3" accent4="accent4" accent5="accent5" accent6="accent6" hlink="hlink" folHlink="folHlink"/>
+  <p:notesStyle>
+    <a:lvl1pPr marL="0" algn="l" defTabSz="457200" rtl="0" eaLnBrk="1" latinLnBrk="0" hangingPunct="1">
+      <a:defRPr sz="1200" kern="1200">
+        <a:solidFill>
+          <a:schemeClr val="tx1"/>
+        </a:solidFill>
+        <a:latin typeface="+mn-lt"/>
+        <a:ea typeface="+mn-ea"/>
+        <a:cs typeface="+mn-cs"/>
+      </a:defRPr>
+    </a:lvl1pPr>
+    <a:lvl2pPr marL="457200" algn="l" defTabSz="457200" rtl="0" eaLnBrk="1" latinLnBrk="0" hangingPunct="1">
+      <a:defRPr sz="1200" kern="1200">
+        <a:solidFill>
+          <a:schemeClr val="tx1"/>
+        </a:solidFill>
+        <a:latin typeface="+mn-lt"/>
+        <a:ea typeface="+mn-ea"/>
+        <a:cs typeface="+mn-cs"/>
+      </a:defRPr>
+    </a:lvl2pPr>
+    <a:lvl3pPr marL="914400" algn="l" defTabSz="457200" rtl="0" eaLnBrk="1" latinLnBrk="0" hangingPunct="1">
+      <a:defRPr sz="1200" kern="1200">
+        <a:solidFill>
+          <a:schemeClr val="tx1"/>
+        </a:solidFill>
+        <a:latin typeface="+mn-lt"/>
+        <a:ea typeface="+mn-ea"/>
+        <a:cs typeface="+mn-cs"/>
+      </a:defRPr>
+    </a:lvl3pPr>
+    <a:lvl4pPr marL="1371600" algn="l" defTabSz="457200" rtl="0" eaLnBrk="1" latinLnBrk="0" hangingPunct="1">
+      <a:defRPr sz="1200" kern="1200">
+        <a:solidFill>
+          <a:schemeClr val="tx1"/>
+        </a:solidFill>
+        <a:latin typeface="+mn-lt"/>
+        <a:ea typeface="+mn-ea"/>
+        <a:cs typeface="+mn-cs"/>
+      </a:defRPr>
+    </a:lvl4pPr>
+    <a:lvl5pPr marL="1828800" algn="l" defTabSz="457200" rtl="0" eaLnBrk="1" latinLnBrk="0" hangingPunct="1">
+      <a:defRPr sz="1200" kern="1200">
+        <a:solidFill>
+          <a:schemeClr val="tx1"/>
+        </a:solidFill>
+        <a:latin typeface="+mn-lt"/>
+        <a:ea typeface="+mn-ea"/>
+        <a:cs typeface="+mn-cs"/>
+      </a:defRPr>
+    </a:lvl5pPr>
+    <a:lvl6pPr marL="2286000" algn="l" defTabSz="457200" rtl="0" eaLnBrk="1" latinLnBrk="0" hangingPunct="1">
+      <a:defRPr sz="1200" kern="1200">
+        <a:solidFill>
+          <a:schemeClr val="tx1"/>
+        </a:solidFill>
+        <a:latin typeface="+mn-lt"/>
+        <a:ea typeface="+mn-ea"/>
+        <a:cs typeface="+mn-cs"/>
+      </a:defRPr>
+    </a:lvl6pPr>
+    <a:lvl7pPr marL="2743200" algn="l" defTabSz="457200" rtl="0" eaLnBrk="1" latinLnBrk="0" hangingPunct="1">
+      <a:defRPr sz="1200" kern="1200">
+        <a:solidFill>
+          <a:schemeClr val="tx1"/>
+        </a:solidFill>
+        <a:latin typeface="+mn-lt"/>
+        <a:ea typeface="+mn-ea"/>
+        <a:cs typeface="+mn-cs"/>
+      </a:defRPr>
+    </a:lvl7pPr>
+    <a:lvl8pPr marL="3200400" algn="l" defTabSz="457200" rtl="0" eaLnBrk="1" latinLnBrk="0" hangingPunct="1">
+      <a:defRPr sz="1200" kern="1200">
+        <a:solidFill>
+          <a:schemeClr val="tx1"/>
+        </a:solidFill>
+        <a:latin typeface="+mn-lt"/>
+        <a:ea typeface="+mn-ea"/>
+        <a:cs typeface="+mn-cs"/>
+      </a:defRPr>
+    </a:lvl8pPr>
+    <a:lvl9pPr marL="3657600" algn="l" defTabSz="457200" rtl="0" eaLnBrk="1" latinLnBrk="0" hangingPunct="1">
+      <a:defRPr sz="1200" kern="1200">
+        <a:solidFill>
+          <a:schemeClr val="tx1"/>
+        </a:solidFill>
+        <a:latin typeface="+mn-lt"/>
+        <a:ea typeface="+mn-ea"/>
+        <a:cs typeface="+mn-cs"/>
+      </a:defRPr>
+    </a:lvl9pPr>
+  </p:notesStyle>
+</p:notesMaster>
+</file>
+
+<file path=ppt/notesSlides/notesSlide1.xml><?xml version="1.0" encoding="utf-8"?>
+<p:notes xmlns:a="http://schemas.openxmlformats.org/drawingml/2006/main" xmlns:p="http://schemas.openxmlformats.org/presentationml/2006/main" xmlns:r="http://schemas.openxmlformats.org/officeDocument/2006/relationships">
+  <p:cSld>
+    <p:spTree>
+      <p:nvGrpSpPr>
+        <p:cNvPr id="1" name=""/>
+        <p:cNvGrpSpPr/>
+        <p:nvPr/>
+      </p:nvGrpSpPr>
+      <p:grpSpPr>
+        <a:xfrm>
+          <a:off x="0" y="0"/>
+          <a:ext cx="0" cy="0"/>
+          <a:chOff x="0" y="0"/>
+          <a:chExt cx="0" cy="0"/>
+        </a:xfrm>
+      </p:grpSpPr>
+      <p:sp>
+        <p:nvSpPr>
+          <p:cNvPr id="2" name="Slide Image Placeholder 1"/>
+          <p:cNvSpPr>
+            <a:spLocks noGrp="1"/>
+          </p:cNvSpPr>
+          <p:nvPr>
+            <p:ph type="sldImg" idx="2"/>
+          </p:nvPr>
+        </p:nvSpPr>
+        <p:spPr/>
+      </p:sp>
+      <p:sp>
+        <p:nvSpPr>
+          <p:cNvPr id="3" name="Notes Placeholder 2"/>
+          <p:cNvSpPr>
+            <a:spLocks noGrp="1"/>
+          </p:cNvSpPr>
+          <p:nvPr>
+            <p:ph type="body" idx="3" sz="quarter"/>
+          </p:nvPr>
+        </p:nvSpPr>
+        <p:spPr/>
+        <p:txBody>
+          <a:bodyPr/>
+          <a:lstStyle/>
+          <a:p>
+            <a:r>
+              <a:t>【司会へ】</a:t>
+            </a:r>
+          </a:p>
+          <a:p>
+            <a:r>
+              <a:t>・開始前に lab-mode.sh status を叩いて、いまの方式を把握しておくこと。</a:t>
+            </a:r>
+          </a:p>
+          <a:p>
+            <a:r>
+              <a:t>・受講者がサーバに触ろうとしたら止める。ここを混ぜると学びが薄まる。</a:t>
+            </a:r>
+          </a:p>
+          <a:p>
+            <a:r>
+              <a:t>・「3 つめ(いま何が起きたか)が本体です」と最初に言い切っておくと、</a:t>
+            </a:r>
+          </a:p>
+          <a:p>
+            <a:r>
+              <a:t>  受講者がコマンドの写経で満足しなくなる。</a:t>
+            </a:r>
+          </a:p>
+        </p:txBody>
+      </p:sp>
+      <p:sp>
+        <p:nvSpPr>
+          <p:cNvPr id="4" name="Slide Number Placeholder 3"/>
+          <p:cNvSpPr>
+            <a:spLocks noGrp="1"/>
+          </p:cNvSpPr>
+          <p:nvPr>
+            <p:ph type="sldNum" idx="5" sz="quarter"/>
+          </p:nvPr>
+        </p:nvSpPr>
+        <p:spPr/>
+      </p:sp>
+    </p:spTree>
+  </p:cSld>
+  <p:clrMapOvr>
+    <a:masterClrMapping/>
+  </p:clrMapOvr>
+</p:notes>
+</file>
+
+<file path=ppt/notesSlides/notesSlide2.xml><?xml version="1.0" encoding="utf-8"?>
+<p:notes xmlns:a="http://schemas.openxmlformats.org/drawingml/2006/main" xmlns:p="http://schemas.openxmlformats.org/presentationml/2006/main" xmlns:r="http://schemas.openxmlformats.org/officeDocument/2006/relationships">
+  <p:cSld>
+    <p:spTree>
+      <p:nvGrpSpPr>
+        <p:cNvPr id="1" name=""/>
+        <p:cNvGrpSpPr/>
+        <p:nvPr/>
+      </p:nvGrpSpPr>
+      <p:grpSpPr>
+        <a:xfrm>
+          <a:off x="0" y="0"/>
+          <a:ext cx="0" cy="0"/>
+          <a:chOff x="0" y="0"/>
+          <a:chExt cx="0" cy="0"/>
+        </a:xfrm>
+      </p:grpSpPr>
+      <p:sp>
+        <p:nvSpPr>
+          <p:cNvPr id="2" name="Slide Image Placeholder 1"/>
+          <p:cNvSpPr>
+            <a:spLocks noGrp="1"/>
+          </p:cNvSpPr>
+          <p:nvPr>
+            <p:ph type="sldImg" idx="2"/>
+          </p:nvPr>
+        </p:nvSpPr>
+        <p:spPr/>
+      </p:sp>
+      <p:sp>
+        <p:nvSpPr>
+          <p:cNvPr id="3" name="Notes Placeholder 2"/>
+          <p:cNvSpPr>
+            <a:spLocks noGrp="1"/>
+          </p:cNvSpPr>
+          <p:nvPr>
+            <p:ph type="body" idx="3" sz="quarter"/>
+          </p:nvPr>
+        </p:nvSpPr>
+        <p:spPr/>
+        <p:txBody>
+          <a:bodyPr/>
+          <a:lstStyle/>
+          <a:p>
+            <a:r>
+              <a:t>【司会へ】</a:t>
+            </a:r>
+          </a:p>
+          <a:p>
+            <a:r>
+              <a:t>・切り替えるたびに「いま何方式か」と「期待する出口アドレス」を必ず読み上げること。</a:t>
+            </a:r>
+          </a:p>
+          <a:p>
+            <a:r>
+              <a:t>  lab-mode.sh がその 2 つを画面に出すので、それをそのまま読めばよい。</a:t>
+            </a:r>
+          </a:p>
+          <a:p>
+            <a:r>
+              <a:t>・ホワイトボードに 5 つの登場人物 (司会端末 / NGN-SIM / VNE / 892FJ / 検証用 PC) を</a:t>
+            </a:r>
+          </a:p>
+          <a:p>
+            <a:r>
+              <a:t>  書いておくと、受講者が「いまどこの話か」で迷わなくなる。</a:t>
+            </a:r>
+          </a:p>
+        </p:txBody>
+      </p:sp>
+      <p:sp>
+        <p:nvSpPr>
+          <p:cNvPr id="4" name="Slide Number Placeholder 3"/>
+          <p:cNvSpPr>
+            <a:spLocks noGrp="1"/>
+          </p:cNvSpPr>
+          <p:nvPr>
+            <p:ph type="sldNum" idx="5" sz="quarter"/>
+          </p:nvPr>
+        </p:nvSpPr>
+        <p:spPr/>
+      </p:sp>
+    </p:spTree>
+  </p:cSld>
+  <p:clrMapOvr>
+    <a:masterClrMapping/>
+  </p:clrMapOvr>
+</p:notes>
+</file>
+
+<file path=ppt/notesSlides/notesSlide3.xml><?xml version="1.0" encoding="utf-8"?>
+<p:notes xmlns:a="http://schemas.openxmlformats.org/drawingml/2006/main" xmlns:p="http://schemas.openxmlformats.org/presentationml/2006/main" xmlns:r="http://schemas.openxmlformats.org/officeDocument/2006/relationships">
+  <p:cSld>
+    <p:spTree>
+      <p:nvGrpSpPr>
+        <p:cNvPr id="1" name=""/>
+        <p:cNvGrpSpPr/>
+        <p:nvPr/>
+      </p:nvGrpSpPr>
+      <p:grpSpPr>
+        <a:xfrm>
+          <a:off x="0" y="0"/>
+          <a:ext cx="0" cy="0"/>
+          <a:chOff x="0" y="0"/>
+          <a:chExt cx="0" cy="0"/>
+        </a:xfrm>
+      </p:grpSpPr>
+      <p:sp>
+        <p:nvSpPr>
+          <p:cNvPr id="2" name="Slide Image Placeholder 1"/>
+          <p:cNvSpPr>
+            <a:spLocks noGrp="1"/>
+          </p:cNvSpPr>
+          <p:nvPr>
+            <p:ph type="sldImg" idx="2"/>
+          </p:nvPr>
+        </p:nvSpPr>
+        <p:spPr/>
+      </p:sp>
+      <p:sp>
+        <p:nvSpPr>
+          <p:cNvPr id="3" name="Notes Placeholder 2"/>
+          <p:cNvSpPr>
+            <a:spLocks noGrp="1"/>
+          </p:cNvSpPr>
+          <p:nvPr>
+            <p:ph type="body" idx="3" sz="quarter"/>
+          </p:nvPr>
+        </p:nvSpPr>
+        <p:spPr/>
+        <p:txBody>
+          <a:bodyPr/>
+          <a:lstStyle/>
+          <a:p>
+            <a:r>
+              <a:t>【司会へ】</a:t>
+            </a:r>
+          </a:p>
+          <a:p>
+            <a:r>
+              <a:t>・lab-mode.sh ra を叩いたら「いまラボは RA 方式です。ひかり電話なしのお客様と</a:t>
+            </a:r>
+          </a:p>
+          <a:p>
+            <a:r>
+              <a:t>  同じ状態です」と宣言してから、受講者に打たせること。</a:t>
+            </a:r>
+          </a:p>
+          <a:p>
+            <a:r>
+              <a:t>・全員のアドレスが付くまで待つ。1 人でも付かなければ次に進まない。</a:t>
+            </a:r>
+          </a:p>
+          <a:p>
+            <a:r>
+              <a:t>・付かない人がいたら: インタフェース名が違う (show ip interface brief で確認)、</a:t>
+            </a:r>
+          </a:p>
+          <a:p>
+            <a:r>
+              <a:t>  または ipv6 unicast-routing が入っていない。</a:t>
+            </a:r>
+          </a:p>
+          <a:p>
+            <a:r>
+              <a:t>・次の演習 2 との対比が本体なので、ここでは深追いせず 10 分で切ること。</a:t>
+            </a:r>
+          </a:p>
+        </p:txBody>
+      </p:sp>
+      <p:sp>
+        <p:nvSpPr>
+          <p:cNvPr id="4" name="Slide Number Placeholder 3"/>
+          <p:cNvSpPr>
+            <a:spLocks noGrp="1"/>
+          </p:cNvSpPr>
+          <p:nvPr>
+            <p:ph type="sldNum" idx="5" sz="quarter"/>
+          </p:nvPr>
+        </p:nvSpPr>
+        <p:spPr/>
+      </p:sp>
+    </p:spTree>
+  </p:cSld>
+  <p:clrMapOvr>
+    <a:masterClrMapping/>
+  </p:clrMapOvr>
+</p:notes>
+</file>
+
+<file path=ppt/notesSlides/notesSlide4.xml><?xml version="1.0" encoding="utf-8"?>
+<p:notes xmlns:a="http://schemas.openxmlformats.org/drawingml/2006/main" xmlns:p="http://schemas.openxmlformats.org/presentationml/2006/main" xmlns:r="http://schemas.openxmlformats.org/officeDocument/2006/relationships">
+  <p:cSld>
+    <p:spTree>
+      <p:nvGrpSpPr>
+        <p:cNvPr id="1" name=""/>
+        <p:cNvGrpSpPr/>
+        <p:nvPr/>
+      </p:nvGrpSpPr>
+      <p:grpSpPr>
+        <a:xfrm>
+          <a:off x="0" y="0"/>
+          <a:ext cx="0" cy="0"/>
+          <a:chOff x="0" y="0"/>
+          <a:chExt cx="0" cy="0"/>
+        </a:xfrm>
+      </p:grpSpPr>
+      <p:sp>
+        <p:nvSpPr>
+          <p:cNvPr id="2" name="Slide Image Placeholder 1"/>
+          <p:cNvSpPr>
+            <a:spLocks noGrp="1"/>
+          </p:cNvSpPr>
+          <p:nvPr>
+            <p:ph type="sldImg" idx="2"/>
+          </p:nvPr>
+        </p:nvSpPr>
+        <p:spPr/>
+      </p:sp>
+      <p:sp>
+        <p:nvSpPr>
+          <p:cNvPr id="3" name="Notes Placeholder 2"/>
+          <p:cNvSpPr>
+            <a:spLocks noGrp="1"/>
+          </p:cNvSpPr>
+          <p:nvPr>
+            <p:ph type="body" idx="3" sz="quarter"/>
+          </p:nvPr>
+        </p:nvSpPr>
+        <p:spPr/>
+        <p:txBody>
+          <a:bodyPr/>
+          <a:lstStyle/>
+          <a:p>
+            <a:r>
+              <a:t>【司会へ】</a:t>
+            </a:r>
+          </a:p>
+          <a:p>
+            <a:r>
+              <a:t>・lab-mode.sh pd を叩いたら「いま PD 方式にしました。ひかり電話ありのお客様と</a:t>
+            </a:r>
+          </a:p>
+          <a:p>
+            <a:r>
+              <a:t>  同じ状態です」と宣言してから、受講者に打たせること。</a:t>
+            </a:r>
+          </a:p>
+          <a:p>
+            <a:r>
+              <a:t>・**受講者に設定を触らせないこと。**「同じ操作をもう一度」が効きどころ。</a:t>
+            </a:r>
+          </a:p>
+          <a:p>
+            <a:r>
+              <a:t>・付かないことを全員が確認するまで待つ。ここで驚いてもらうのが目的。</a:t>
+            </a:r>
+          </a:p>
+          <a:p>
+            <a:r>
+              <a:t>・「なんで付かないと思いますか?」と 30 秒だけ考えさせてから次のページへ。</a:t>
+            </a:r>
+          </a:p>
+        </p:txBody>
+      </p:sp>
+      <p:sp>
+        <p:nvSpPr>
+          <p:cNvPr id="4" name="Slide Number Placeholder 3"/>
+          <p:cNvSpPr>
+            <a:spLocks noGrp="1"/>
+          </p:cNvSpPr>
+          <p:nvPr>
+            <p:ph type="sldNum" idx="5" sz="quarter"/>
+          </p:nvPr>
+        </p:nvSpPr>
+        <p:spPr/>
+      </p:sp>
+    </p:spTree>
+  </p:cSld>
+  <p:clrMapOvr>
+    <a:masterClrMapping/>
+  </p:clrMapOvr>
+</p:notes>
+</file>
+
+<file path=ppt/notesSlides/notesSlide5.xml><?xml version="1.0" encoding="utf-8"?>
+<p:notes xmlns:a="http://schemas.openxmlformats.org/drawingml/2006/main" xmlns:p="http://schemas.openxmlformats.org/presentationml/2006/main" xmlns:r="http://schemas.openxmlformats.org/officeDocument/2006/relationships">
+  <p:cSld>
+    <p:spTree>
+      <p:nvGrpSpPr>
+        <p:cNvPr id="1" name=""/>
+        <p:cNvGrpSpPr/>
+        <p:nvPr/>
+      </p:nvGrpSpPr>
+      <p:grpSpPr>
+        <a:xfrm>
+          <a:off x="0" y="0"/>
+          <a:ext cx="0" cy="0"/>
+          <a:chOff x="0" y="0"/>
+          <a:chExt cx="0" cy="0"/>
+        </a:xfrm>
+      </p:grpSpPr>
+      <p:sp>
+        <p:nvSpPr>
+          <p:cNvPr id="2" name="Slide Image Placeholder 1"/>
+          <p:cNvSpPr>
+            <a:spLocks noGrp="1"/>
+          </p:cNvSpPr>
+          <p:nvPr>
+            <p:ph type="sldImg" idx="2"/>
+          </p:nvPr>
+        </p:nvSpPr>
+        <p:spPr/>
+      </p:sp>
+      <p:sp>
+        <p:nvSpPr>
+          <p:cNvPr id="3" name="Notes Placeholder 2"/>
+          <p:cNvSpPr>
+            <a:spLocks noGrp="1"/>
+          </p:cNvSpPr>
+          <p:nvPr>
+            <p:ph type="body" idx="3" sz="quarter"/>
+          </p:nvPr>
+        </p:nvSpPr>
+        <p:spPr/>
+        <p:txBody>
+          <a:bodyPr/>
+          <a:lstStyle/>
+          <a:p>
+            <a:r>
+              <a:t>【司会へ】</a:t>
+            </a:r>
+          </a:p>
+          <a:p>
+            <a:r>
+              <a:t>・**ここは 5 分かけて説明すること。**今日の中心です。急がない。</a:t>
+            </a:r>
+          </a:p>
+          <a:p>
+            <a:r>
+              <a:t>・PD 方式では網が「プレフィックスは DHCPv6 で取りに来い」としか言わないので、</a:t>
+            </a:r>
+          </a:p>
+          <a:p>
+            <a:r>
+              <a:t>  autoconfig は材料が無くて何も作れない、という筋道を口で説明する。</a:t>
+            </a:r>
+          </a:p>
+          <a:p>
+            <a:r>
+              <a:t>・次ページで「RA 自体は届いている」を見せると効く。そこまでを 1 セットで。</a:t>
+            </a:r>
+          </a:p>
+        </p:txBody>
+      </p:sp>
+      <p:sp>
+        <p:nvSpPr>
+          <p:cNvPr id="4" name="Slide Number Placeholder 3"/>
+          <p:cNvSpPr>
+            <a:spLocks noGrp="1"/>
+          </p:cNvSpPr>
+          <p:nvPr>
+            <p:ph type="sldNum" idx="5" sz="quarter"/>
+          </p:nvPr>
+        </p:nvSpPr>
+        <p:spPr/>
+      </p:sp>
+    </p:spTree>
+  </p:cSld>
+  <p:clrMapOvr>
+    <a:masterClrMapping/>
+  </p:clrMapOvr>
+</p:notes>
+</file>
+
+<file path=ppt/notesSlides/notesSlide6.xml><?xml version="1.0" encoding="utf-8"?>
+<p:notes xmlns:a="http://schemas.openxmlformats.org/drawingml/2006/main" xmlns:p="http://schemas.openxmlformats.org/presentationml/2006/main" xmlns:r="http://schemas.openxmlformats.org/officeDocument/2006/relationships">
+  <p:cSld>
+    <p:spTree>
+      <p:nvGrpSpPr>
+        <p:cNvPr id="1" name=""/>
+        <p:cNvGrpSpPr/>
+        <p:nvPr/>
+      </p:nvGrpSpPr>
+      <p:grpSpPr>
+        <a:xfrm>
+          <a:off x="0" y="0"/>
+          <a:ext cx="0" cy="0"/>
+          <a:chOff x="0" y="0"/>
+          <a:chExt cx="0" cy="0"/>
+        </a:xfrm>
+      </p:grpSpPr>
+      <p:sp>
+        <p:nvSpPr>
+          <p:cNvPr id="2" name="Slide Image Placeholder 1"/>
+          <p:cNvSpPr>
+            <a:spLocks noGrp="1"/>
+          </p:cNvSpPr>
+          <p:nvPr>
+            <p:ph type="sldImg" idx="2"/>
+          </p:nvPr>
+        </p:nvSpPr>
+        <p:spPr/>
+      </p:sp>
+      <p:sp>
+        <p:nvSpPr>
+          <p:cNvPr id="3" name="Notes Placeholder 2"/>
+          <p:cNvSpPr>
+            <a:spLocks noGrp="1"/>
+          </p:cNvSpPr>
+          <p:nvPr>
+            <p:ph type="body" idx="3" sz="quarter"/>
+          </p:nvPr>
+        </p:nvSpPr>
+        <p:spPr/>
+        <p:txBody>
+          <a:bodyPr/>
+          <a:lstStyle/>
+          <a:p>
+            <a:r>
+              <a:t>【司会へ】</a:t>
+            </a:r>
+          </a:p>
+          <a:p>
+            <a:r>
+              <a:t>・**全員が FAIL=0 に戻るまで解散しないこと。**戻し忘れが次回の演習を壊す。</a:t>
+            </a:r>
+          </a:p>
+          <a:p>
+            <a:r>
+              <a:t>・とくに 892FJ 側の adjust-mss と ip nat inside source の消し忘れが多い。</a:t>
+            </a:r>
+          </a:p>
+          <a:p>
+            <a:r>
+              <a:t>・lab-mode.sh status で「障害の注入: なし」を全員に見せてから締める。</a:t>
+            </a:r>
+          </a:p>
+        </p:txBody>
+      </p:sp>
+      <p:sp>
+        <p:nvSpPr>
+          <p:cNvPr id="4" name="Slide Number Placeholder 3"/>
+          <p:cNvSpPr>
+            <a:spLocks noGrp="1"/>
+          </p:cNvSpPr>
+          <p:nvPr>
+            <p:ph type="sldNum" idx="5" sz="quarter"/>
+          </p:nvPr>
+        </p:nvSpPr>
+        <p:spPr/>
+      </p:sp>
+    </p:spTree>
+  </p:cSld>
+  <p:clrMapOvr>
+    <a:masterClrMapping/>
+  </p:clrMapOvr>
+</p:notes>
 </file>
 
 <file path=ppt/slideLayouts/slideLayout1.xml><?xml version="1.0" encoding="utf-8"?>
@@ -3330,7 +4230,7 @@
                 </a:solidFill>
                 <a:latin typeface="Meiryo UI"/>
               </a:rPr>
-              <a:t>演習 2 で何が起きたか — ここを 5 分かけて説明してください</a:t>
+              <a:t>演習 2 で何が起きたか</a:t>
             </a:r>
           </a:p>
         </p:txBody>
@@ -6781,7 +7681,7 @@
                 </a:solidFill>
                 <a:latin typeface="Meiryo UI"/>
               </a:rPr>
-              <a:t>各演習は「打つコマンド → 出てくる出力 → いま何が起きたか」の 3 点セットです。3 つめが本体です</a:t>
+              <a:t>各演習は「打つコマンド → 出てくる出力 → いま何が起きたか」の 3 点セットです</a:t>
             </a:r>
           </a:p>
         </p:txBody>
@@ -8714,7 +9614,7 @@
                 </a:solidFill>
                 <a:latin typeface="Meiryo UI"/>
               </a:rPr>
-              <a:t>「障害の注入: なし」を全員で確認してから解散してください</a:t>
+              <a:t>「障害の注入: なし」になっていることを全員で確認します</a:t>
             </a:r>
           </a:p>
           <a:p>
@@ -9860,22 +10760,6 @@
               <a:t>  ./lab-mode.sh break mtu|dns / restore … 障害を注入する / 戻す</a:t>
             </a:r>
           </a:p>
-          <a:p>
-            <a:pPr algn="l">
-              <a:spcAft>
-                <a:spcPts val="600"/>
-              </a:spcAft>
-            </a:pPr>
-            <a:r>
-              <a:rPr sz="1400" b="1">
-                <a:solidFill>
-                  <a:srgbClr val="C0392B"/>
-                </a:solidFill>
-                <a:latin typeface="Meiryo UI"/>
-              </a:rPr>
-              <a:t>※ 切り替えるたびに、司会は「いま何方式か」と「期待する出口アドレス」を読み上げてください。</a:t>
-            </a:r>
-          </a:p>
         </p:txBody>
       </p:sp>
     </p:spTree>
@@ -10777,22 +11661,6 @@
             </a:r>
           </a:p>
           <a:p>
-            <a:pPr lvl="1" algn="l">
-              <a:spcAft>
-                <a:spcPts val="600"/>
-              </a:spcAft>
-            </a:pPr>
-            <a:r>
-              <a:rPr sz="1700" b="0">
-                <a:solidFill>
-                  <a:srgbClr val="555555"/>
-                </a:solidFill>
-                <a:latin typeface="Meiryo UI"/>
-              </a:rPr>
-              <a:t>「いまラボは RA 方式です。ひかり電話なしのお客様と同じ状態です」と宣言</a:t>
-            </a:r>
-          </a:p>
-          <a:p>
             <a:pPr algn="l">
               <a:spcAft>
                 <a:spcPts val="1000"/>
@@ -11300,22 +12168,6 @@
                 <a:latin typeface="Consolas"/>
               </a:rPr>
               <a:t>【司会】 ./lab-mode.sh pd</a:t>
-            </a:r>
-          </a:p>
-          <a:p>
-            <a:pPr lvl="1" algn="l">
-              <a:spcAft>
-                <a:spcPts val="600"/>
-              </a:spcAft>
-            </a:pPr>
-            <a:r>
-              <a:rPr sz="1700" b="0">
-                <a:solidFill>
-                  <a:srgbClr val="555555"/>
-                </a:solidFill>
-                <a:latin typeface="Meiryo UI"/>
-              </a:rPr>
-              <a:t>「いま PD 方式にしました。ひかり電話ありのお客様と同じ状態です」と宣言</a:t>
             </a:r>
           </a:p>
           <a:p>
@@ -11774,4 +12626,324 @@
   </a:objectDefaults>
   <a:extraClrSchemeLst/>
 </a:theme>
+</file>
+
+<file path=ppt/theme/theme2.xml><?xml version="1.0" encoding="utf-8"?>
+<a:theme xmlns:a="http://schemas.openxmlformats.org/drawingml/2006/main" name="Office Theme">
+  <a:themeElements>
+    <a:clrScheme name="Office">
+      <a:dk1>
+        <a:sysClr val="windowText" lastClr="000000"/>
+      </a:dk1>
+      <a:lt1>
+        <a:sysClr val="window" lastClr="FFFFFF"/>
+      </a:lt1>
+      <a:dk2>
+        <a:srgbClr val="1F497D"/>
+      </a:dk2>
+      <a:lt2>
+        <a:srgbClr val="EEECE1"/>
+      </a:lt2>
+      <a:accent1>
+        <a:srgbClr val="4F81BD"/>
+      </a:accent1>
+      <a:accent2>
+        <a:srgbClr val="C0504D"/>
+      </a:accent2>
+      <a:accent3>
+        <a:srgbClr val="9BBB59"/>
+      </a:accent3>
+      <a:accent4>
+        <a:srgbClr val="8064A2"/>
+      </a:accent4>
+      <a:accent5>
+        <a:srgbClr val="4BACC6"/>
+      </a:accent5>
+      <a:accent6>
+        <a:srgbClr val="F79646"/>
+      </a:accent6>
+      <a:hlink>
+        <a:srgbClr val="0000FF"/>
+      </a:hlink>
+      <a:folHlink>
+        <a:srgbClr val="800080"/>
+      </a:folHlink>
+    </a:clrScheme>
+    <a:fontScheme name="Office">
+      <a:majorFont>
+        <a:latin typeface="Calibri"/>
+        <a:ea typeface=""/>
+        <a:cs typeface=""/>
+        <a:font script="Jpan" typeface="ＭＳ Ｐゴシック"/>
+        <a:font script="Hang" typeface="맑은 고딕"/>
+        <a:font script="Hans" typeface="宋体"/>
+        <a:font script="Hant" typeface="新細明體"/>
+        <a:font script="Arab" typeface="Times New Roman"/>
+        <a:font script="Hebr" typeface="Times New Roman"/>
+        <a:font script="Thai" typeface="Angsana New"/>
+        <a:font script="Ethi" typeface="Nyala"/>
+        <a:font script="Beng" typeface="Vrinda"/>
+        <a:font script="Gujr" typeface="Shruti"/>
+        <a:font script="Khmr" typeface="MoolBoran"/>
+        <a:font script="Knda" typeface="Tunga"/>
+        <a:font script="Guru" typeface="Raavi"/>
+        <a:font script="Cans" typeface="Euphemia"/>
+        <a:font script="Cher" typeface="Plantagenet Cherokee"/>
+        <a:font script="Yiii" typeface="Microsoft Yi Baiti"/>
+        <a:font script="Tibt" typeface="Microsoft Himalaya"/>
+        <a:font script="Thaa" typeface="MV Boli"/>
+        <a:font script="Deva" typeface="Mangal"/>
+        <a:font script="Telu" typeface="Gautami"/>
+        <a:font script="Taml" typeface="Latha"/>
+        <a:font script="Syrc" typeface="Estrangelo Edessa"/>
+        <a:font script="Orya" typeface="Kalinga"/>
+        <a:font script="Mlym" typeface="Kartika"/>
+        <a:font script="Laoo" typeface="DokChampa"/>
+        <a:font script="Sinh" typeface="Iskoola Pota"/>
+        <a:font script="Mong" typeface="Mongolian Baiti"/>
+        <a:font script="Viet" typeface="Times New Roman"/>
+        <a:font script="Uigh" typeface="Microsoft Uighur"/>
+        <a:font script="Geor" typeface="Sylfaen"/>
+      </a:majorFont>
+      <a:minorFont>
+        <a:latin typeface="Calibri"/>
+        <a:ea typeface=""/>
+        <a:cs typeface=""/>
+        <a:font script="Jpan" typeface="ＭＳ Ｐゴシック"/>
+        <a:font script="Hang" typeface="맑은 고딕"/>
+        <a:font script="Hans" typeface="宋体"/>
+        <a:font script="Hant" typeface="新細明體"/>
+        <a:font script="Arab" typeface="Arial"/>
+        <a:font script="Hebr" typeface="Arial"/>
+        <a:font script="Thai" typeface="Cordia New"/>
+        <a:font script="Ethi" typeface="Nyala"/>
+        <a:font script="Beng" typeface="Vrinda"/>
+        <a:font script="Gujr" typeface="Shruti"/>
+        <a:font script="Khmr" typeface="DaunPenh"/>
+        <a:font script="Knda" typeface="Tunga"/>
+        <a:font script="Guru" typeface="Raavi"/>
+        <a:font script="Cans" typeface="Euphemia"/>
+        <a:font script="Cher" typeface="Plantagenet Cherokee"/>
+        <a:font script="Yiii" typeface="Microsoft Yi Baiti"/>
+        <a:font script="Tibt" typeface="Microsoft Himalaya"/>
+        <a:font script="Thaa" typeface="MV Boli"/>
+        <a:font script="Deva" typeface="Mangal"/>
+        <a:font script="Telu" typeface="Gautami"/>
+        <a:font script="Taml" typeface="Latha"/>
+        <a:font script="Syrc" typeface="Estrangelo Edessa"/>
+        <a:font script="Orya" typeface="Kalinga"/>
+        <a:font script="Mlym" typeface="Kartika"/>
+        <a:font script="Laoo" typeface="DokChampa"/>
+        <a:font script="Sinh" typeface="Iskoola Pota"/>
+        <a:font script="Mong" typeface="Mongolian Baiti"/>
+        <a:font script="Viet" typeface="Arial"/>
+        <a:font script="Uigh" typeface="Microsoft Uighur"/>
+        <a:font script="Geor" typeface="Sylfaen"/>
+      </a:minorFont>
+    </a:fontScheme>
+    <a:fmtScheme name="Office">
+      <a:fillStyleLst>
+        <a:solidFill>
+          <a:schemeClr val="phClr"/>
+        </a:solidFill>
+        <a:gradFill rotWithShape="1">
+          <a:gsLst>
+            <a:gs pos="0">
+              <a:schemeClr val="phClr">
+                <a:tint val="50000"/>
+                <a:satMod val="300000"/>
+              </a:schemeClr>
+            </a:gs>
+            <a:gs pos="35000">
+              <a:schemeClr val="phClr">
+                <a:tint val="37000"/>
+                <a:satMod val="300000"/>
+              </a:schemeClr>
+            </a:gs>
+            <a:gs pos="100000">
+              <a:schemeClr val="phClr">
+                <a:tint val="15000"/>
+                <a:satMod val="350000"/>
+              </a:schemeClr>
+            </a:gs>
+          </a:gsLst>
+          <a:lin ang="16200000" scaled="1"/>
+        </a:gradFill>
+        <a:gradFill rotWithShape="1">
+          <a:gsLst>
+            <a:gs pos="0">
+              <a:schemeClr val="phClr">
+                <a:tint val="100000"/>
+                <a:shade val="100000"/>
+                <a:satMod val="130000"/>
+              </a:schemeClr>
+            </a:gs>
+            <a:gs pos="100000">
+              <a:schemeClr val="phClr">
+                <a:tint val="50000"/>
+                <a:shade val="100000"/>
+                <a:satMod val="350000"/>
+              </a:schemeClr>
+            </a:gs>
+          </a:gsLst>
+          <a:lin ang="16200000" scaled="0"/>
+        </a:gradFill>
+      </a:fillStyleLst>
+      <a:lnStyleLst>
+        <a:ln w="9525" cap="flat" cmpd="sng" algn="ctr">
+          <a:solidFill>
+            <a:schemeClr val="phClr">
+              <a:shade val="95000"/>
+              <a:satMod val="105000"/>
+            </a:schemeClr>
+          </a:solidFill>
+          <a:prstDash val="solid"/>
+        </a:ln>
+        <a:ln w="25400" cap="flat" cmpd="sng" algn="ctr">
+          <a:solidFill>
+            <a:schemeClr val="phClr"/>
+          </a:solidFill>
+          <a:prstDash val="solid"/>
+        </a:ln>
+        <a:ln w="38100" cap="flat" cmpd="sng" algn="ctr">
+          <a:solidFill>
+            <a:schemeClr val="phClr"/>
+          </a:solidFill>
+          <a:prstDash val="solid"/>
+        </a:ln>
+      </a:lnStyleLst>
+      <a:effectStyleLst>
+        <a:effectStyle>
+          <a:effectLst>
+            <a:outerShdw blurRad="40000" dist="20000" dir="5400000" rotWithShape="0">
+              <a:srgbClr val="000000">
+                <a:alpha val="38000"/>
+              </a:srgbClr>
+            </a:outerShdw>
+          </a:effectLst>
+        </a:effectStyle>
+        <a:effectStyle>
+          <a:effectLst>
+            <a:outerShdw blurRad="40000" dist="23000" dir="5400000" rotWithShape="0">
+              <a:srgbClr val="000000">
+                <a:alpha val="35000"/>
+              </a:srgbClr>
+            </a:outerShdw>
+          </a:effectLst>
+        </a:effectStyle>
+        <a:effectStyle>
+          <a:effectLst>
+            <a:outerShdw blurRad="40000" dist="23000" dir="5400000" rotWithShape="0">
+              <a:srgbClr val="000000">
+                <a:alpha val="35000"/>
+              </a:srgbClr>
+            </a:outerShdw>
+          </a:effectLst>
+          <a:scene3d>
+            <a:camera prst="orthographicFront">
+              <a:rot lat="0" lon="0" rev="0"/>
+            </a:camera>
+            <a:lightRig rig="threePt" dir="t">
+              <a:rot lat="0" lon="0" rev="1200000"/>
+            </a:lightRig>
+          </a:scene3d>
+          <a:sp3d>
+            <a:bevelT w="63500" h="25400"/>
+          </a:sp3d>
+        </a:effectStyle>
+      </a:effectStyleLst>
+      <a:bgFillStyleLst>
+        <a:solidFill>
+          <a:schemeClr val="phClr"/>
+        </a:solidFill>
+        <a:gradFill rotWithShape="1">
+          <a:gsLst>
+            <a:gs pos="0">
+              <a:schemeClr val="phClr">
+                <a:tint val="40000"/>
+                <a:satMod val="350000"/>
+              </a:schemeClr>
+            </a:gs>
+            <a:gs pos="40000">
+              <a:schemeClr val="phClr">
+                <a:tint val="45000"/>
+                <a:shade val="99000"/>
+                <a:satMod val="350000"/>
+              </a:schemeClr>
+            </a:gs>
+            <a:gs pos="100000">
+              <a:schemeClr val="phClr">
+                <a:shade val="20000"/>
+                <a:satMod val="255000"/>
+              </a:schemeClr>
+            </a:gs>
+          </a:gsLst>
+          <a:path path="circle">
+            <a:fillToRect l="50000" t="-80000" r="50000" b="180000"/>
+          </a:path>
+        </a:gradFill>
+        <a:gradFill rotWithShape="1">
+          <a:gsLst>
+            <a:gs pos="0">
+              <a:schemeClr val="phClr">
+                <a:tint val="80000"/>
+                <a:satMod val="300000"/>
+              </a:schemeClr>
+            </a:gs>
+            <a:gs pos="100000">
+              <a:schemeClr val="phClr">
+                <a:shade val="30000"/>
+                <a:satMod val="200000"/>
+              </a:schemeClr>
+            </a:gs>
+          </a:gsLst>
+          <a:path path="circle">
+            <a:fillToRect l="50000" t="50000" r="50000" b="50000"/>
+          </a:path>
+        </a:gradFill>
+      </a:bgFillStyleLst>
+    </a:fmtScheme>
+  </a:themeElements>
+  <a:objectDefaults>
+    <a:spDef>
+      <a:spPr/>
+      <a:bodyPr/>
+      <a:lstStyle/>
+      <a:style>
+        <a:lnRef idx="1">
+          <a:schemeClr val="accent1"/>
+        </a:lnRef>
+        <a:fillRef idx="3">
+          <a:schemeClr val="accent1"/>
+        </a:fillRef>
+        <a:effectRef idx="2">
+          <a:schemeClr val="accent1"/>
+        </a:effectRef>
+        <a:fontRef idx="minor">
+          <a:schemeClr val="lt1"/>
+        </a:fontRef>
+      </a:style>
+    </a:spDef>
+    <a:lnDef>
+      <a:spPr/>
+      <a:bodyPr/>
+      <a:lstStyle/>
+      <a:style>
+        <a:lnRef idx="2">
+          <a:schemeClr val="accent1"/>
+        </a:lnRef>
+        <a:fillRef idx="0">
+          <a:schemeClr val="accent1"/>
+        </a:fillRef>
+        <a:effectRef idx="1">
+          <a:schemeClr val="accent1"/>
+        </a:effectRef>
+        <a:fontRef idx="minor">
+          <a:schemeClr val="tx1"/>
+        </a:fontRef>
+      </a:style>
+    </a:lnDef>
+  </a:objectDefaults>
+  <a:extraClrSchemeLst/>
+</a:theme>
 </file>
--- a/docs/ipoe-lab/slides/handson.pptx
+++ b/docs/ipoe-lab/slides/handson.pptx
@@ -34,6 +34,7 @@
     <p:sldId id="282" r:id="rId34"/>
     <p:sldId id="283" r:id="rId35"/>
     <p:sldId id="284" r:id="rId36"/>
+    <p:sldId id="285" r:id="rId37"/>
   </p:sldIdLst>
   <p:sldSz cx="12191695" cy="6858000" type="screen4x3"/>
   <p:notesSz cx="6858000" cy="9144000"/>
@@ -625,22 +626,17 @@
           </a:p>
           <a:p>
             <a:r>
-              <a:t>・切り替えるたびに「いま何方式か」と「期待する出口アドレス」を必ず読み上げること。</a:t>
-            </a:r>
-          </a:p>
-          <a:p>
-            <a:r>
-              <a:t>  lab-mode.sh がその 2 つを画面に出すので、それをそのまま読めばよい。</a:t>
-            </a:r>
-          </a:p>
-          <a:p>
-            <a:r>
-              <a:t>・ホワイトボードに 5 つの登場人物 (司会端末 / NGN-SIM / VNE / 892FJ / 検証用 PC) を</a:t>
-            </a:r>
-          </a:p>
-          <a:p>
-            <a:r>
-              <a:t>  書いておくと、受講者が「いまどこの話か」で迷わなくなる。</a:t>
+              <a:t>・**このページは飛ばさないこと。**ここが頭に入っていないと以降が全部ぼやける。</a:t>
+            </a:r>
+          </a:p>
+          <a:p>
+            <a:r>
+              <a:t>・ホワイトボードにも同じ絵を描いて、演習中ずっと残しておくとよい。</a:t>
+            </a:r>
+          </a:p>
+          <a:p>
+            <a:r>
+              <a:t>・「いまどこの話か」を毎回この絵で指すこと。</a:t>
             </a:r>
           </a:p>
         </p:txBody>
@@ -715,32 +711,22 @@
           </a:p>
           <a:p>
             <a:r>
-              <a:t>・lab-mode.sh ra を叩いたら「いまラボは RA 方式です。ひかり電話なしのお客様と</a:t>
-            </a:r>
-          </a:p>
-          <a:p>
-            <a:r>
-              <a:t>  同じ状態です」と宣言してから、受講者に打たせること。</a:t>
-            </a:r>
-          </a:p>
-          <a:p>
-            <a:r>
-              <a:t>・全員のアドレスが付くまで待つ。1 人でも付かなければ次に進まない。</a:t>
-            </a:r>
-          </a:p>
-          <a:p>
-            <a:r>
-              <a:t>・付かない人がいたら: インタフェース名が違う (show ip interface brief で確認)、</a:t>
-            </a:r>
-          </a:p>
-          <a:p>
-            <a:r>
-              <a:t>  または ipv6 unicast-routing が入っていない。</a:t>
-            </a:r>
-          </a:p>
-          <a:p>
-            <a:r>
-              <a:t>・次の演習 2 との対比が本体なので、ここでは深追いせず 10 分で切ること。</a:t>
+              <a:t>・切り替えるたびに「いま何方式か」と「期待する出口アドレス」を必ず読み上げること。</a:t>
+            </a:r>
+          </a:p>
+          <a:p>
+            <a:r>
+              <a:t>  lab-mode.sh がその 2 つを画面に出すので、それをそのまま読めばよい。</a:t>
+            </a:r>
+          </a:p>
+          <a:p>
+            <a:r>
+              <a:t>・ホワイトボードに 5 つの登場人物 (司会端末 / NGN-SIM / VNE / 892FJ / 検証用 PC) を</a:t>
+            </a:r>
+          </a:p>
+          <a:p>
+            <a:r>
+              <a:t>  書いておくと、受講者が「いまどこの話か」で迷わなくなる。</a:t>
             </a:r>
           </a:p>
         </p:txBody>
@@ -815,7 +801,7 @@
           </a:p>
           <a:p>
             <a:r>
-              <a:t>・lab-mode.sh pd を叩いたら「いま PD 方式にしました。ひかり電話ありのお客様と</a:t>
+              <a:t>・lab-mode.sh ra を叩いたら「いまラボは RA 方式です。ひかり電話なしのお客様と</a:t>
             </a:r>
           </a:p>
           <a:p>
@@ -825,17 +811,22 @@
           </a:p>
           <a:p>
             <a:r>
-              <a:t>・**受講者に設定を触らせないこと。**「同じ操作をもう一度」が効きどころ。</a:t>
-            </a:r>
-          </a:p>
-          <a:p>
-            <a:r>
-              <a:t>・付かないことを全員が確認するまで待つ。ここで驚いてもらうのが目的。</a:t>
-            </a:r>
-          </a:p>
-          <a:p>
-            <a:r>
-              <a:t>・「なんで付かないと思いますか?」と 30 秒だけ考えさせてから次のページへ。</a:t>
+              <a:t>・全員のアドレスが付くまで待つ。1 人でも付かなければ次に進まない。</a:t>
+            </a:r>
+          </a:p>
+          <a:p>
+            <a:r>
+              <a:t>・付かない人がいたら: インタフェース名が違う (show ip interface brief で確認)、</a:t>
+            </a:r>
+          </a:p>
+          <a:p>
+            <a:r>
+              <a:t>  または ipv6 unicast-routing が入っていない。</a:t>
+            </a:r>
+          </a:p>
+          <a:p>
+            <a:r>
+              <a:t>・次の演習 2 との対比が本体なので、ここでは深追いせず 10 分で切ること。</a:t>
             </a:r>
           </a:p>
         </p:txBody>
@@ -910,22 +901,27 @@
           </a:p>
           <a:p>
             <a:r>
-              <a:t>・**ここは 5 分かけて説明すること。**今日の中心です。急がない。</a:t>
-            </a:r>
-          </a:p>
-          <a:p>
-            <a:r>
-              <a:t>・PD 方式では網が「プレフィックスは DHCPv6 で取りに来い」としか言わないので、</a:t>
-            </a:r>
-          </a:p>
-          <a:p>
-            <a:r>
-              <a:t>  autoconfig は材料が無くて何も作れない、という筋道を口で説明する。</a:t>
-            </a:r>
-          </a:p>
-          <a:p>
-            <a:r>
-              <a:t>・次ページで「RA 自体は届いている」を見せると効く。そこまでを 1 セットで。</a:t>
+              <a:t>・lab-mode.sh pd を叩いたら「いま PD 方式にしました。ひかり電話ありのお客様と</a:t>
+            </a:r>
+          </a:p>
+          <a:p>
+            <a:r>
+              <a:t>  同じ状態です」と宣言してから、受講者に打たせること。</a:t>
+            </a:r>
+          </a:p>
+          <a:p>
+            <a:r>
+              <a:t>・**受講者に設定を触らせないこと。**「同じ操作をもう一度」が効きどころ。</a:t>
+            </a:r>
+          </a:p>
+          <a:p>
+            <a:r>
+              <a:t>・付かないことを全員が確認するまで待つ。ここで驚いてもらうのが目的。</a:t>
+            </a:r>
+          </a:p>
+          <a:p>
+            <a:r>
+              <a:t>・「なんで付かないと思いますか?」と 30 秒だけ考えさせてから次のページへ。</a:t>
             </a:r>
           </a:p>
         </p:txBody>
@@ -951,6 +947,96 @@
 </file>
 
 <file path=ppt/notesSlides/notesSlide6.xml><?xml version="1.0" encoding="utf-8"?>
+<p:notes xmlns:a="http://schemas.openxmlformats.org/drawingml/2006/main" xmlns:p="http://schemas.openxmlformats.org/presentationml/2006/main" xmlns:r="http://schemas.openxmlformats.org/officeDocument/2006/relationships">
+  <p:cSld>
+    <p:spTree>
+      <p:nvGrpSpPr>
+        <p:cNvPr id="1" name=""/>
+        <p:cNvGrpSpPr/>
+        <p:nvPr/>
+      </p:nvGrpSpPr>
+      <p:grpSpPr>
+        <a:xfrm>
+          <a:off x="0" y="0"/>
+          <a:ext cx="0" cy="0"/>
+          <a:chOff x="0" y="0"/>
+          <a:chExt cx="0" cy="0"/>
+        </a:xfrm>
+      </p:grpSpPr>
+      <p:sp>
+        <p:nvSpPr>
+          <p:cNvPr id="2" name="Slide Image Placeholder 1"/>
+          <p:cNvSpPr>
+            <a:spLocks noGrp="1"/>
+          </p:cNvSpPr>
+          <p:nvPr>
+            <p:ph type="sldImg" idx="2"/>
+          </p:nvPr>
+        </p:nvSpPr>
+        <p:spPr/>
+      </p:sp>
+      <p:sp>
+        <p:nvSpPr>
+          <p:cNvPr id="3" name="Notes Placeholder 2"/>
+          <p:cNvSpPr>
+            <a:spLocks noGrp="1"/>
+          </p:cNvSpPr>
+          <p:nvPr>
+            <p:ph type="body" idx="3" sz="quarter"/>
+          </p:nvPr>
+        </p:nvSpPr>
+        <p:spPr/>
+        <p:txBody>
+          <a:bodyPr/>
+          <a:lstStyle/>
+          <a:p>
+            <a:r>
+              <a:t>【司会へ】</a:t>
+            </a:r>
+          </a:p>
+          <a:p>
+            <a:r>
+              <a:t>・**ここは 5 分かけて説明すること。**今日の中心です。急がない。</a:t>
+            </a:r>
+          </a:p>
+          <a:p>
+            <a:r>
+              <a:t>・PD 方式では網が「プレフィックスは DHCPv6 で取りに来い」としか言わないので、</a:t>
+            </a:r>
+          </a:p>
+          <a:p>
+            <a:r>
+              <a:t>  autoconfig は材料が無くて何も作れない、という筋道を口で説明する。</a:t>
+            </a:r>
+          </a:p>
+          <a:p>
+            <a:r>
+              <a:t>・次ページで「RA 自体は届いている」を見せると効く。そこまでを 1 セットで。</a:t>
+            </a:r>
+          </a:p>
+        </p:txBody>
+      </p:sp>
+      <p:sp>
+        <p:nvSpPr>
+          <p:cNvPr id="4" name="Slide Number Placeholder 3"/>
+          <p:cNvSpPr>
+            <a:spLocks noGrp="1"/>
+          </p:cNvSpPr>
+          <p:nvPr>
+            <p:ph type="sldNum" idx="5" sz="quarter"/>
+          </p:nvPr>
+        </p:nvSpPr>
+        <p:spPr/>
+      </p:sp>
+    </p:spTree>
+  </p:cSld>
+  <p:clrMapOvr>
+    <a:masterClrMapping/>
+  </p:clrMapOvr>
+</p:notes>
+</file>
+
+<file path=ppt/notesSlides/notesSlide7.xml><?xml version="1.0" encoding="utf-8"?>
 <p:notes xmlns:a="http://schemas.openxmlformats.org/drawingml/2006/main" xmlns:p="http://schemas.openxmlformats.org/presentationml/2006/main" xmlns:r="http://schemas.openxmlformats.org/officeDocument/2006/relationships">
   <p:cSld>
     <p:spTree>
@@ -4208,6 +4294,269 @@
         </p:nvSpPr>
         <p:spPr>
           <a:xfrm>
+            <a:off x="502920" y="320040"/>
+            <a:ext cx="11155680" cy="822960"/>
+          </a:xfrm>
+          <a:prstGeom prst="rect">
+            <a:avLst/>
+          </a:prstGeom>
+          <a:noFill/>
+        </p:spPr>
+        <p:txBody>
+          <a:bodyPr wrap="square">
+            <a:spAutoFit/>
+          </a:bodyPr>
+          <a:lstStyle/>
+          <a:p>
+            <a:pPr algn="l"/>
+            <a:r>
+              <a:rPr sz="2800" b="1">
+                <a:solidFill>
+                  <a:srgbClr val="1F3355"/>
+                </a:solidFill>
+                <a:latin typeface="Meiryo UI"/>
+              </a:rPr>
+              <a:t>演習 2: PD 方式にすると、アドレスが付かなくなる (15 分) ← 今日いちばん大事</a:t>
+            </a:r>
+          </a:p>
+        </p:txBody>
+      </p:sp>
+      <p:sp>
+        <p:nvSpPr>
+          <p:cNvPr id="3" name="Rectangle 2"/>
+          <p:cNvSpPr/>
+          <p:nvPr/>
+        </p:nvSpPr>
+        <p:spPr>
+          <a:xfrm>
+            <a:off x="502920" y="1115568"/>
+            <a:ext cx="11155680" cy="31750"/>
+          </a:xfrm>
+          <a:prstGeom prst="rect">
+            <a:avLst/>
+          </a:prstGeom>
+          <a:solidFill>
+            <a:srgbClr val="007ACC"/>
+          </a:solidFill>
+          <a:ln>
+            <a:noFill/>
+          </a:ln>
+        </p:spPr>
+        <p:style>
+          <a:lnRef idx="1">
+            <a:schemeClr val="accent1"/>
+          </a:lnRef>
+          <a:fillRef idx="3">
+            <a:schemeClr val="accent1"/>
+          </a:fillRef>
+          <a:effectRef idx="2">
+            <a:schemeClr val="accent1"/>
+          </a:effectRef>
+          <a:fontRef idx="minor">
+            <a:schemeClr val="lt1"/>
+          </a:fontRef>
+        </p:style>
+        <p:txBody>
+          <a:bodyPr rtlCol="0" anchor="ctr"/>
+          <a:lstStyle/>
+          <a:p>
+            <a:pPr algn="ctr"/>
+          </a:p>
+        </p:txBody>
+      </p:sp>
+      <p:sp>
+        <p:nvSpPr>
+          <p:cNvPr id="4" name="TextBox 3"/>
+          <p:cNvSpPr txBox="1"/>
+          <p:nvPr/>
+        </p:nvSpPr>
+        <p:spPr>
+          <a:xfrm>
+            <a:off x="594360" y="1371600"/>
+            <a:ext cx="10972800" cy="4983480"/>
+          </a:xfrm>
+          <a:prstGeom prst="rect">
+            <a:avLst/>
+          </a:prstGeom>
+          <a:noFill/>
+        </p:spPr>
+        <p:txBody>
+          <a:bodyPr wrap="square">
+            <a:spAutoFit/>
+          </a:bodyPr>
+          <a:lstStyle/>
+          <a:p>
+            <a:pPr algn="l">
+              <a:spcAft>
+                <a:spcPts val="1000"/>
+              </a:spcAft>
+            </a:pPr>
+            <a:r>
+              <a:rPr sz="2000" b="0">
+                <a:solidFill>
+                  <a:srgbClr val="0B6040"/>
+                </a:solidFill>
+                <a:latin typeface="Consolas"/>
+              </a:rPr>
+              <a:t>【司会】 ./lab-mode.sh pd</a:t>
+            </a:r>
+          </a:p>
+          <a:p>
+            <a:pPr algn="l">
+              <a:spcAft>
+                <a:spcPts val="1000"/>
+              </a:spcAft>
+            </a:pPr>
+            <a:r>
+              <a:rPr sz="2000" b="1">
+                <a:solidFill>
+                  <a:srgbClr val="1F3355"/>
+                </a:solidFill>
+                <a:latin typeface="Meiryo UI"/>
+              </a:rPr>
+              <a:t>【あなた】さっきと まったく同じ操作を もう一度</a:t>
+            </a:r>
+          </a:p>
+          <a:p>
+            <a:pPr lvl="1" algn="l">
+              <a:spcAft>
+                <a:spcPts val="600"/>
+              </a:spcAft>
+            </a:pPr>
+            <a:r>
+              <a:rPr sz="1700" b="0">
+                <a:solidFill>
+                  <a:srgbClr val="0B6040"/>
+                </a:solidFill>
+                <a:latin typeface="Consolas"/>
+              </a:rPr>
+              <a:t>CPE(config-if)# shutdown</a:t>
+            </a:r>
+          </a:p>
+          <a:p>
+            <a:pPr lvl="1" algn="l">
+              <a:spcAft>
+                <a:spcPts val="600"/>
+              </a:spcAft>
+            </a:pPr>
+            <a:r>
+              <a:rPr sz="1700" b="0">
+                <a:solidFill>
+                  <a:srgbClr val="0B6040"/>
+                </a:solidFill>
+                <a:latin typeface="Consolas"/>
+              </a:rPr>
+              <a:t>CPE(config-if)# no shutdown</a:t>
+            </a:r>
+          </a:p>
+          <a:p>
+            <a:pPr lvl="1" algn="l">
+              <a:spcAft>
+                <a:spcPts val="600"/>
+              </a:spcAft>
+            </a:pPr>
+            <a:r>
+              <a:rPr sz="1700" b="0">
+                <a:solidFill>
+                  <a:srgbClr val="0B6040"/>
+                </a:solidFill>
+                <a:latin typeface="Consolas"/>
+              </a:rPr>
+              <a:t>CPE# show ipv6 interface GigabitEthernet0</a:t>
+            </a:r>
+          </a:p>
+          <a:p>
+            <a:pPr algn="l">
+              <a:spcAft>
+                <a:spcPts val="1000"/>
+              </a:spcAft>
+            </a:pPr>
+            <a:r>
+              <a:rPr sz="2000" b="1">
+                <a:solidFill>
+                  <a:srgbClr val="1F3355"/>
+                </a:solidFill>
+                <a:latin typeface="Meiryo UI"/>
+              </a:rPr>
+              <a:t>出てくる出力</a:t>
+            </a:r>
+          </a:p>
+          <a:p>
+            <a:pPr lvl="1" algn="l">
+              <a:spcAft>
+                <a:spcPts val="600"/>
+              </a:spcAft>
+            </a:pPr>
+            <a:r>
+              <a:rPr sz="1700" b="0">
+                <a:solidFill>
+                  <a:srgbClr val="0B6040"/>
+                </a:solidFill>
+                <a:latin typeface="Consolas"/>
+              </a:rPr>
+              <a:t>  IPv6 is enabled, link-local address is FE80::E6AA:5DFF:FE82:364A</a:t>
+            </a:r>
+          </a:p>
+          <a:p>
+            <a:pPr lvl="1" algn="l">
+              <a:spcAft>
+                <a:spcPts val="600"/>
+              </a:spcAft>
+            </a:pPr>
+            <a:r>
+              <a:rPr sz="1700" b="0">
+                <a:solidFill>
+                  <a:srgbClr val="0B6040"/>
+                </a:solidFill>
+                <a:latin typeface="Consolas"/>
+              </a:rPr>
+              <a:t>  No global unicast address is configured        ← ★ 付かない</a:t>
+            </a:r>
+          </a:p>
+          <a:p>
+            <a:pPr algn="l">
+              <a:spcAft>
+                <a:spcPts val="1000"/>
+              </a:spcAft>
+            </a:pPr>
+            <a:r>
+              <a:rPr sz="2000" b="1">
+                <a:solidFill>
+                  <a:srgbClr val="C0392B"/>
+                </a:solidFill>
+                <a:latin typeface="Meiryo UI"/>
+              </a:rPr>
+              <a:t>設定は 1 文字も変えていません。網の方式が変わっただけです</a:t>
+            </a:r>
+          </a:p>
+        </p:txBody>
+      </p:sp>
+    </p:spTree>
+  </p:cSld>
+  <p:clrMapOvr>
+    <a:masterClrMapping/>
+  </p:clrMapOvr>
+</p:sld>
+</file>
+
+<file path=ppt/slides/slide11.xml><?xml version="1.0" encoding="utf-8"?>
+<p:sld xmlns:a="http://schemas.openxmlformats.org/drawingml/2006/main" xmlns:p="http://schemas.openxmlformats.org/presentationml/2006/main" xmlns:r="http://schemas.openxmlformats.org/officeDocument/2006/relationships">
+  <p:cSld>
+    <p:spTree>
+      <p:nvGrpSpPr>
+        <p:cNvPr id="1" name=""/>
+        <p:cNvGrpSpPr/>
+        <p:nvPr/>
+      </p:nvGrpSpPr>
+      <p:grpSpPr/>
+      <p:sp>
+        <p:nvSpPr>
+          <p:cNvPr id="2" name="TextBox 1"/>
+          <p:cNvSpPr txBox="1"/>
+          <p:nvPr/>
+        </p:nvSpPr>
+        <p:spPr>
+          <a:xfrm>
             <a:off x="502920" y="274320"/>
             <a:ext cx="11155680" cy="731520"/>
           </a:xfrm>
@@ -4518,7 +4867,7 @@
 </p:sld>
 </file>
 
-<file path=ppt/slides/slide11.xml><?xml version="1.0" encoding="utf-8"?>
+<file path=ppt/slides/slide12.xml><?xml version="1.0" encoding="utf-8"?>
 <p:sld xmlns:a="http://schemas.openxmlformats.org/drawingml/2006/main" xmlns:p="http://schemas.openxmlformats.org/presentationml/2006/main" xmlns:r="http://schemas.openxmlformats.org/officeDocument/2006/relationships">
   <p:cSld>
     <p:spTree>
@@ -4797,7 +5146,7 @@
 </p:sld>
 </file>
 
-<file path=ppt/slides/slide12.xml><?xml version="1.0" encoding="utf-8"?>
+<file path=ppt/slides/slide13.xml><?xml version="1.0" encoding="utf-8"?>
 <p:sld xmlns:a="http://schemas.openxmlformats.org/drawingml/2006/main" xmlns:p="http://schemas.openxmlformats.org/presentationml/2006/main" xmlns:r="http://schemas.openxmlformats.org/officeDocument/2006/relationships">
   <p:cSld>
     <p:spTree>
@@ -5195,7 +5544,7 @@
 </p:sld>
 </file>
 
-<file path=ppt/slides/slide13.xml><?xml version="1.0" encoding="utf-8"?>
+<file path=ppt/slides/slide14.xml><?xml version="1.0" encoding="utf-8"?>
 <p:sld xmlns:a="http://schemas.openxmlformats.org/drawingml/2006/main" xmlns:p="http://schemas.openxmlformats.org/presentationml/2006/main" xmlns:r="http://schemas.openxmlformats.org/officeDocument/2006/relationships">
   <p:cSld>
     <p:spTree>
@@ -5522,7 +5871,7 @@
 </p:sld>
 </file>
 
-<file path=ppt/slides/slide14.xml><?xml version="1.0" encoding="utf-8"?>
+<file path=ppt/slides/slide15.xml><?xml version="1.0" encoding="utf-8"?>
 <p:sld xmlns:a="http://schemas.openxmlformats.org/drawingml/2006/main" xmlns:p="http://schemas.openxmlformats.org/presentationml/2006/main" xmlns:r="http://schemas.openxmlformats.org/officeDocument/2006/relationships">
   <p:cSld>
     <p:spTree>
@@ -5865,7 +6214,7 @@
 </p:sld>
 </file>
 
-<file path=ppt/slides/slide15.xml><?xml version="1.0" encoding="utf-8"?>
+<file path=ppt/slides/slide16.xml><?xml version="1.0" encoding="utf-8"?>
 <p:sld xmlns:a="http://schemas.openxmlformats.org/drawingml/2006/main" xmlns:p="http://schemas.openxmlformats.org/presentationml/2006/main" xmlns:r="http://schemas.openxmlformats.org/officeDocument/2006/relationships">
   <p:cSld>
     <p:spTree>
@@ -5989,7 +6338,7 @@
 </p:sld>
 </file>
 
-<file path=ppt/slides/slide16.xml><?xml version="1.0" encoding="utf-8"?>
+<file path=ppt/slides/slide17.xml><?xml version="1.0" encoding="utf-8"?>
 <p:sld xmlns:a="http://schemas.openxmlformats.org/drawingml/2006/main" xmlns:p="http://schemas.openxmlformats.org/presentationml/2006/main" xmlns:r="http://schemas.openxmlformats.org/officeDocument/2006/relationships">
   <p:cSld>
     <p:spTree>
@@ -6364,7 +6713,7 @@
 </p:sld>
 </file>
 
-<file path=ppt/slides/slide17.xml><?xml version="1.0" encoding="utf-8"?>
+<file path=ppt/slides/slide18.xml><?xml version="1.0" encoding="utf-8"?>
 <p:sld xmlns:a="http://schemas.openxmlformats.org/drawingml/2006/main" xmlns:p="http://schemas.openxmlformats.org/presentationml/2006/main" xmlns:r="http://schemas.openxmlformats.org/officeDocument/2006/relationships">
   <p:cSld>
     <p:spTree>
@@ -6814,7 +7163,7 @@
 </p:sld>
 </file>
 
-<file path=ppt/slides/slide18.xml><?xml version="1.0" encoding="utf-8"?>
+<file path=ppt/slides/slide19.xml><?xml version="1.0" encoding="utf-8"?>
 <p:sld xmlns:a="http://schemas.openxmlformats.org/drawingml/2006/main" xmlns:p="http://schemas.openxmlformats.org/presentationml/2006/main" xmlns:r="http://schemas.openxmlformats.org/officeDocument/2006/relationships">
   <p:cSld>
     <p:spTree>
@@ -7129,301 +7478,6 @@
                 <a:latin typeface="Meiryo UI"/>
               </a:rPr>
               <a:t>ついでに TTL を見る: ping すると TTL=62。相手は 64 で返すので ルータを 2 つ越えた</a:t>
-            </a:r>
-          </a:p>
-        </p:txBody>
-      </p:sp>
-    </p:spTree>
-  </p:cSld>
-  <p:clrMapOvr>
-    <a:masterClrMapping/>
-  </p:clrMapOvr>
-</p:sld>
-</file>
-
-<file path=ppt/slides/slide19.xml><?xml version="1.0" encoding="utf-8"?>
-<p:sld xmlns:a="http://schemas.openxmlformats.org/drawingml/2006/main" xmlns:p="http://schemas.openxmlformats.org/presentationml/2006/main" xmlns:r="http://schemas.openxmlformats.org/officeDocument/2006/relationships">
-  <p:cSld>
-    <p:spTree>
-      <p:nvGrpSpPr>
-        <p:cNvPr id="1" name=""/>
-        <p:cNvGrpSpPr/>
-        <p:nvPr/>
-      </p:nvGrpSpPr>
-      <p:grpSpPr/>
-      <p:sp>
-        <p:nvSpPr>
-          <p:cNvPr id="2" name="TextBox 1"/>
-          <p:cNvSpPr txBox="1"/>
-          <p:nvPr/>
-        </p:nvSpPr>
-        <p:spPr>
-          <a:xfrm>
-            <a:off x="502920" y="320040"/>
-            <a:ext cx="11155680" cy="822960"/>
-          </a:xfrm>
-          <a:prstGeom prst="rect">
-            <a:avLst/>
-          </a:prstGeom>
-          <a:noFill/>
-        </p:spPr>
-        <p:txBody>
-          <a:bodyPr wrap="square">
-            <a:spAutoFit/>
-          </a:bodyPr>
-          <a:lstStyle/>
-          <a:p>
-            <a:pPr algn="l"/>
-            <a:r>
-              <a:rPr sz="2800" b="1">
-                <a:solidFill>
-                  <a:srgbClr val="1F3355"/>
-                </a:solidFill>
-                <a:latin typeface="Meiryo UI"/>
-              </a:rPr>
-              <a:t>演習 6: 892FJ では MAP-E ができない (10 分)</a:t>
-            </a:r>
-          </a:p>
-        </p:txBody>
-      </p:sp>
-      <p:sp>
-        <p:nvSpPr>
-          <p:cNvPr id="3" name="Rectangle 2"/>
-          <p:cNvSpPr/>
-          <p:nvPr/>
-        </p:nvSpPr>
-        <p:spPr>
-          <a:xfrm>
-            <a:off x="502920" y="1115568"/>
-            <a:ext cx="11155680" cy="31750"/>
-          </a:xfrm>
-          <a:prstGeom prst="rect">
-            <a:avLst/>
-          </a:prstGeom>
-          <a:solidFill>
-            <a:srgbClr val="007ACC"/>
-          </a:solidFill>
-          <a:ln>
-            <a:noFill/>
-          </a:ln>
-        </p:spPr>
-        <p:style>
-          <a:lnRef idx="1">
-            <a:schemeClr val="accent1"/>
-          </a:lnRef>
-          <a:fillRef idx="3">
-            <a:schemeClr val="accent1"/>
-          </a:fillRef>
-          <a:effectRef idx="2">
-            <a:schemeClr val="accent1"/>
-          </a:effectRef>
-          <a:fontRef idx="minor">
-            <a:schemeClr val="lt1"/>
-          </a:fontRef>
-        </p:style>
-        <p:txBody>
-          <a:bodyPr rtlCol="0" anchor="ctr"/>
-          <a:lstStyle/>
-          <a:p>
-            <a:pPr algn="ctr"/>
-          </a:p>
-        </p:txBody>
-      </p:sp>
-      <p:sp>
-        <p:nvSpPr>
-          <p:cNvPr id="4" name="TextBox 3"/>
-          <p:cNvSpPr txBox="1"/>
-          <p:nvPr/>
-        </p:nvSpPr>
-        <p:spPr>
-          <a:xfrm>
-            <a:off x="594360" y="1371600"/>
-            <a:ext cx="10972800" cy="4983480"/>
-          </a:xfrm>
-          <a:prstGeom prst="rect">
-            <a:avLst/>
-          </a:prstGeom>
-          <a:noFill/>
-        </p:spPr>
-        <p:txBody>
-          <a:bodyPr wrap="square">
-            <a:spAutoFit/>
-          </a:bodyPr>
-          <a:lstStyle/>
-          <a:p>
-            <a:pPr algn="l">
-              <a:spcAft>
-                <a:spcPts val="1000"/>
-              </a:spcAft>
-            </a:pPr>
-            <a:r>
-              <a:rPr sz="2000" b="1">
-                <a:solidFill>
-                  <a:srgbClr val="1F3355"/>
-                </a:solidFill>
-                <a:latin typeface="Meiryo UI"/>
-              </a:rPr>
-              <a:t>【あなた】892FJ で試してみる</a:t>
-            </a:r>
-          </a:p>
-          <a:p>
-            <a:pPr lvl="1" algn="l">
-              <a:spcAft>
-                <a:spcPts val="600"/>
-              </a:spcAft>
-            </a:pPr>
-            <a:r>
-              <a:rPr sz="1700" b="0">
-                <a:solidFill>
-                  <a:srgbClr val="0B6040"/>
-                </a:solidFill>
-                <a:latin typeface="Consolas"/>
-              </a:rPr>
-              <a:t>CPE(config)# nat64 ?</a:t>
-            </a:r>
-          </a:p>
-          <a:p>
-            <a:pPr lvl="1" algn="l">
-              <a:spcAft>
-                <a:spcPts val="600"/>
-              </a:spcAft>
-            </a:pPr>
-            <a:r>
-              <a:rPr sz="1700" b="0">
-                <a:solidFill>
-                  <a:srgbClr val="555555"/>
-                </a:solidFill>
-                <a:latin typeface="Meiryo UI"/>
-              </a:rPr>
-              <a:t>→ nat64 というコマンド自体がありません</a:t>
-            </a:r>
-          </a:p>
-          <a:p>
-            <a:pPr algn="l">
-              <a:spcAft>
-                <a:spcPts val="1000"/>
-              </a:spcAft>
-            </a:pPr>
-            <a:r>
-              <a:rPr sz="2000" b="1">
-                <a:solidFill>
-                  <a:srgbClr val="1F3355"/>
-                </a:solidFill>
-                <a:latin typeface="Meiryo UI"/>
-              </a:rPr>
-              <a:t>いま何が起きたか</a:t>
-            </a:r>
-          </a:p>
-          <a:p>
-            <a:pPr lvl="1" algn="l">
-              <a:spcAft>
-                <a:spcPts val="600"/>
-              </a:spcAft>
-            </a:pPr>
-            <a:r>
-              <a:rPr sz="1700" b="0">
-                <a:solidFill>
-                  <a:srgbClr val="555555"/>
-                </a:solidFill>
-                <a:latin typeface="Meiryo UI"/>
-              </a:rPr>
-              <a:t>892FJ の IOS (classic IOS 15.x) には MAP-E の機能がありません</a:t>
-            </a:r>
-          </a:p>
-          <a:p>
-            <a:pPr lvl="1" algn="l">
-              <a:spcAft>
-                <a:spcPts val="600"/>
-              </a:spcAft>
-            </a:pPr>
-            <a:r>
-              <a:rPr sz="1700" b="0">
-                <a:solidFill>
-                  <a:srgbClr val="555555"/>
-                </a:solidFill>
-                <a:latin typeface="Meiryo UI"/>
-              </a:rPr>
-              <a:t>DS-Lite は組めます (tunnel mode ipv6 だけで済むため)</a:t>
-            </a:r>
-          </a:p>
-          <a:p>
-            <a:pPr lvl="1" algn="l">
-              <a:spcAft>
-                <a:spcPts val="600"/>
-              </a:spcAft>
-            </a:pPr>
-            <a:r>
-              <a:rPr sz="1700" b="0">
-                <a:solidFill>
-                  <a:srgbClr val="555555"/>
-                </a:solidFill>
-                <a:latin typeface="Meiryo UI"/>
-              </a:rPr>
-              <a:t>MAP-E は組めません (アドレスとポートの計算をする機能が要るため)</a:t>
-            </a:r>
-          </a:p>
-          <a:p>
-            <a:pPr algn="l">
-              <a:spcAft>
-                <a:spcPts val="1000"/>
-              </a:spcAft>
-            </a:pPr>
-            <a:r>
-              <a:rPr sz="2000" b="1">
-                <a:solidFill>
-                  <a:srgbClr val="C0392B"/>
-                </a:solidFill>
-                <a:latin typeface="Meiryo UI"/>
-              </a:rPr>
-              <a:t>これが実案件だとどう効くか</a:t>
-            </a:r>
-          </a:p>
-          <a:p>
-            <a:pPr lvl="1" algn="l">
-              <a:spcAft>
-                <a:spcPts val="600"/>
-              </a:spcAft>
-            </a:pPr>
-            <a:r>
-              <a:rPr sz="1700" b="0">
-                <a:solidFill>
-                  <a:srgbClr val="555555"/>
-                </a:solidFill>
-                <a:latin typeface="Meiryo UI"/>
-              </a:rPr>
-              <a:t>お客様の VNE が MAP-E 系 (v6プラス / OCN バーチャルコネクト等) だと 892FJ は使えません</a:t>
-            </a:r>
-          </a:p>
-          <a:p>
-            <a:pPr lvl="1" algn="l">
-              <a:spcAft>
-                <a:spcPts val="600"/>
-              </a:spcAft>
-            </a:pPr>
-            <a:r>
-              <a:rPr sz="1700" b="0">
-                <a:solidFill>
-                  <a:srgbClr val="555555"/>
-                </a:solidFill>
-                <a:latin typeface="Meiryo UI"/>
-              </a:rPr>
-              <a:t>機器リプレース前提の見積になります</a:t>
-            </a:r>
-          </a:p>
-          <a:p>
-            <a:pPr lvl="1" algn="l">
-              <a:spcAft>
-                <a:spcPts val="600"/>
-              </a:spcAft>
-            </a:pPr>
-            <a:r>
-              <a:rPr sz="1700" b="0">
-                <a:solidFill>
-                  <a:srgbClr val="555555"/>
-                </a:solidFill>
-                <a:latin typeface="Meiryo UI"/>
-              </a:rPr>
-              <a:t>納入実績に 892FJ が多いなら、契約書で VNE を確認する時点でこれが分かります</a:t>
             </a:r>
           </a:p>
         </p:txBody>
@@ -7706,6 +7760,301 @@
       <p:grpSpPr/>
       <p:sp>
         <p:nvSpPr>
+          <p:cNvPr id="2" name="TextBox 1"/>
+          <p:cNvSpPr txBox="1"/>
+          <p:nvPr/>
+        </p:nvSpPr>
+        <p:spPr>
+          <a:xfrm>
+            <a:off x="502920" y="320040"/>
+            <a:ext cx="11155680" cy="822960"/>
+          </a:xfrm>
+          <a:prstGeom prst="rect">
+            <a:avLst/>
+          </a:prstGeom>
+          <a:noFill/>
+        </p:spPr>
+        <p:txBody>
+          <a:bodyPr wrap="square">
+            <a:spAutoFit/>
+          </a:bodyPr>
+          <a:lstStyle/>
+          <a:p>
+            <a:pPr algn="l"/>
+            <a:r>
+              <a:rPr sz="2800" b="1">
+                <a:solidFill>
+                  <a:srgbClr val="1F3355"/>
+                </a:solidFill>
+                <a:latin typeface="Meiryo UI"/>
+              </a:rPr>
+              <a:t>演習 6: 892FJ では MAP-E ができない (10 分)</a:t>
+            </a:r>
+          </a:p>
+        </p:txBody>
+      </p:sp>
+      <p:sp>
+        <p:nvSpPr>
+          <p:cNvPr id="3" name="Rectangle 2"/>
+          <p:cNvSpPr/>
+          <p:nvPr/>
+        </p:nvSpPr>
+        <p:spPr>
+          <a:xfrm>
+            <a:off x="502920" y="1115568"/>
+            <a:ext cx="11155680" cy="31750"/>
+          </a:xfrm>
+          <a:prstGeom prst="rect">
+            <a:avLst/>
+          </a:prstGeom>
+          <a:solidFill>
+            <a:srgbClr val="007ACC"/>
+          </a:solidFill>
+          <a:ln>
+            <a:noFill/>
+          </a:ln>
+        </p:spPr>
+        <p:style>
+          <a:lnRef idx="1">
+            <a:schemeClr val="accent1"/>
+          </a:lnRef>
+          <a:fillRef idx="3">
+            <a:schemeClr val="accent1"/>
+          </a:fillRef>
+          <a:effectRef idx="2">
+            <a:schemeClr val="accent1"/>
+          </a:effectRef>
+          <a:fontRef idx="minor">
+            <a:schemeClr val="lt1"/>
+          </a:fontRef>
+        </p:style>
+        <p:txBody>
+          <a:bodyPr rtlCol="0" anchor="ctr"/>
+          <a:lstStyle/>
+          <a:p>
+            <a:pPr algn="ctr"/>
+          </a:p>
+        </p:txBody>
+      </p:sp>
+      <p:sp>
+        <p:nvSpPr>
+          <p:cNvPr id="4" name="TextBox 3"/>
+          <p:cNvSpPr txBox="1"/>
+          <p:nvPr/>
+        </p:nvSpPr>
+        <p:spPr>
+          <a:xfrm>
+            <a:off x="594360" y="1371600"/>
+            <a:ext cx="10972800" cy="4983480"/>
+          </a:xfrm>
+          <a:prstGeom prst="rect">
+            <a:avLst/>
+          </a:prstGeom>
+          <a:noFill/>
+        </p:spPr>
+        <p:txBody>
+          <a:bodyPr wrap="square">
+            <a:spAutoFit/>
+          </a:bodyPr>
+          <a:lstStyle/>
+          <a:p>
+            <a:pPr algn="l">
+              <a:spcAft>
+                <a:spcPts val="1000"/>
+              </a:spcAft>
+            </a:pPr>
+            <a:r>
+              <a:rPr sz="2000" b="1">
+                <a:solidFill>
+                  <a:srgbClr val="1F3355"/>
+                </a:solidFill>
+                <a:latin typeface="Meiryo UI"/>
+              </a:rPr>
+              <a:t>【あなた】892FJ で試してみる</a:t>
+            </a:r>
+          </a:p>
+          <a:p>
+            <a:pPr lvl="1" algn="l">
+              <a:spcAft>
+                <a:spcPts val="600"/>
+              </a:spcAft>
+            </a:pPr>
+            <a:r>
+              <a:rPr sz="1700" b="0">
+                <a:solidFill>
+                  <a:srgbClr val="0B6040"/>
+                </a:solidFill>
+                <a:latin typeface="Consolas"/>
+              </a:rPr>
+              <a:t>CPE(config)# nat64 ?</a:t>
+            </a:r>
+          </a:p>
+          <a:p>
+            <a:pPr lvl="1" algn="l">
+              <a:spcAft>
+                <a:spcPts val="600"/>
+              </a:spcAft>
+            </a:pPr>
+            <a:r>
+              <a:rPr sz="1700" b="0">
+                <a:solidFill>
+                  <a:srgbClr val="555555"/>
+                </a:solidFill>
+                <a:latin typeface="Meiryo UI"/>
+              </a:rPr>
+              <a:t>→ nat64 というコマンド自体がありません</a:t>
+            </a:r>
+          </a:p>
+          <a:p>
+            <a:pPr algn="l">
+              <a:spcAft>
+                <a:spcPts val="1000"/>
+              </a:spcAft>
+            </a:pPr>
+            <a:r>
+              <a:rPr sz="2000" b="1">
+                <a:solidFill>
+                  <a:srgbClr val="1F3355"/>
+                </a:solidFill>
+                <a:latin typeface="Meiryo UI"/>
+              </a:rPr>
+              <a:t>いま何が起きたか</a:t>
+            </a:r>
+          </a:p>
+          <a:p>
+            <a:pPr lvl="1" algn="l">
+              <a:spcAft>
+                <a:spcPts val="600"/>
+              </a:spcAft>
+            </a:pPr>
+            <a:r>
+              <a:rPr sz="1700" b="0">
+                <a:solidFill>
+                  <a:srgbClr val="555555"/>
+                </a:solidFill>
+                <a:latin typeface="Meiryo UI"/>
+              </a:rPr>
+              <a:t>892FJ の IOS (classic IOS 15.x) には MAP-E の機能がありません</a:t>
+            </a:r>
+          </a:p>
+          <a:p>
+            <a:pPr lvl="1" algn="l">
+              <a:spcAft>
+                <a:spcPts val="600"/>
+              </a:spcAft>
+            </a:pPr>
+            <a:r>
+              <a:rPr sz="1700" b="0">
+                <a:solidFill>
+                  <a:srgbClr val="555555"/>
+                </a:solidFill>
+                <a:latin typeface="Meiryo UI"/>
+              </a:rPr>
+              <a:t>DS-Lite は組めます (tunnel mode ipv6 だけで済むため)</a:t>
+            </a:r>
+          </a:p>
+          <a:p>
+            <a:pPr lvl="1" algn="l">
+              <a:spcAft>
+                <a:spcPts val="600"/>
+              </a:spcAft>
+            </a:pPr>
+            <a:r>
+              <a:rPr sz="1700" b="0">
+                <a:solidFill>
+                  <a:srgbClr val="555555"/>
+                </a:solidFill>
+                <a:latin typeface="Meiryo UI"/>
+              </a:rPr>
+              <a:t>MAP-E は組めません (アドレスとポートの計算をする機能が要るため)</a:t>
+            </a:r>
+          </a:p>
+          <a:p>
+            <a:pPr algn="l">
+              <a:spcAft>
+                <a:spcPts val="1000"/>
+              </a:spcAft>
+            </a:pPr>
+            <a:r>
+              <a:rPr sz="2000" b="1">
+                <a:solidFill>
+                  <a:srgbClr val="C0392B"/>
+                </a:solidFill>
+                <a:latin typeface="Meiryo UI"/>
+              </a:rPr>
+              <a:t>これが実案件だとどう効くか</a:t>
+            </a:r>
+          </a:p>
+          <a:p>
+            <a:pPr lvl="1" algn="l">
+              <a:spcAft>
+                <a:spcPts val="600"/>
+              </a:spcAft>
+            </a:pPr>
+            <a:r>
+              <a:rPr sz="1700" b="0">
+                <a:solidFill>
+                  <a:srgbClr val="555555"/>
+                </a:solidFill>
+                <a:latin typeface="Meiryo UI"/>
+              </a:rPr>
+              <a:t>お客様の VNE が MAP-E 系 (v6プラス / OCN バーチャルコネクト等) だと 892FJ は使えません</a:t>
+            </a:r>
+          </a:p>
+          <a:p>
+            <a:pPr lvl="1" algn="l">
+              <a:spcAft>
+                <a:spcPts val="600"/>
+              </a:spcAft>
+            </a:pPr>
+            <a:r>
+              <a:rPr sz="1700" b="0">
+                <a:solidFill>
+                  <a:srgbClr val="555555"/>
+                </a:solidFill>
+                <a:latin typeface="Meiryo UI"/>
+              </a:rPr>
+              <a:t>機器リプレース前提の見積になります</a:t>
+            </a:r>
+          </a:p>
+          <a:p>
+            <a:pPr lvl="1" algn="l">
+              <a:spcAft>
+                <a:spcPts val="600"/>
+              </a:spcAft>
+            </a:pPr>
+            <a:r>
+              <a:rPr sz="1700" b="0">
+                <a:solidFill>
+                  <a:srgbClr val="555555"/>
+                </a:solidFill>
+                <a:latin typeface="Meiryo UI"/>
+              </a:rPr>
+              <a:t>納入実績に 892FJ が多いなら、契約書で VNE を確認する時点でこれが分かります</a:t>
+            </a:r>
+          </a:p>
+        </p:txBody>
+      </p:sp>
+    </p:spTree>
+  </p:cSld>
+  <p:clrMapOvr>
+    <a:masterClrMapping/>
+  </p:clrMapOvr>
+</p:sld>
+</file>
+
+<file path=ppt/slides/slide21.xml><?xml version="1.0" encoding="utf-8"?>
+<p:sld xmlns:a="http://schemas.openxmlformats.org/drawingml/2006/main" xmlns:p="http://schemas.openxmlformats.org/presentationml/2006/main" xmlns:r="http://schemas.openxmlformats.org/officeDocument/2006/relationships">
+  <p:cSld>
+    <p:spTree>
+      <p:nvGrpSpPr>
+        <p:cNvPr id="1" name=""/>
+        <p:cNvGrpSpPr/>
+        <p:nvPr/>
+      </p:nvGrpSpPr>
+      <p:grpSpPr/>
+      <p:sp>
+        <p:nvSpPr>
           <p:cNvPr id="2" name="Rectangle 1"/>
           <p:cNvSpPr/>
           <p:nvPr/>
@@ -7818,7 +8167,7 @@
 </p:sld>
 </file>
 
-<file path=ppt/slides/slide21.xml><?xml version="1.0" encoding="utf-8"?>
+<file path=ppt/slides/slide22.xml><?xml version="1.0" encoding="utf-8"?>
 <p:sld xmlns:a="http://schemas.openxmlformats.org/drawingml/2006/main" xmlns:p="http://schemas.openxmlformats.org/presentationml/2006/main" xmlns:r="http://schemas.openxmlformats.org/officeDocument/2006/relationships">
   <p:cSld>
     <p:spTree>
@@ -8097,7 +8446,7 @@
 </p:sld>
 </file>
 
-<file path=ppt/slides/slide22.xml><?xml version="1.0" encoding="utf-8"?>
+<file path=ppt/slides/slide23.xml><?xml version="1.0" encoding="utf-8"?>
 <p:sld xmlns:a="http://schemas.openxmlformats.org/drawingml/2006/main" xmlns:p="http://schemas.openxmlformats.org/presentationml/2006/main" xmlns:r="http://schemas.openxmlformats.org/officeDocument/2006/relationships">
   <p:cSld>
     <p:spTree>
@@ -8403,7 +8752,7 @@
 </p:sld>
 </file>
 
-<file path=ppt/slides/slide23.xml><?xml version="1.0" encoding="utf-8"?>
+<file path=ppt/slides/slide24.xml><?xml version="1.0" encoding="utf-8"?>
 <p:sld xmlns:a="http://schemas.openxmlformats.org/drawingml/2006/main" xmlns:p="http://schemas.openxmlformats.org/presentationml/2006/main" xmlns:r="http://schemas.openxmlformats.org/officeDocument/2006/relationships">
   <p:cSld>
     <p:spTree>
@@ -8666,7 +9015,7 @@
 </p:sld>
 </file>
 
-<file path=ppt/slides/slide24.xml><?xml version="1.0" encoding="utf-8"?>
+<file path=ppt/slides/slide25.xml><?xml version="1.0" encoding="utf-8"?>
 <p:sld xmlns:a="http://schemas.openxmlformats.org/drawingml/2006/main" xmlns:p="http://schemas.openxmlformats.org/presentationml/2006/main" xmlns:r="http://schemas.openxmlformats.org/officeDocument/2006/relationships">
   <p:cSld>
     <p:spTree>
@@ -8961,7 +9310,7 @@
 </p:sld>
 </file>
 
-<file path=ppt/slides/slide25.xml><?xml version="1.0" encoding="utf-8"?>
+<file path=ppt/slides/slide26.xml><?xml version="1.0" encoding="utf-8"?>
 <p:sld xmlns:a="http://schemas.openxmlformats.org/drawingml/2006/main" xmlns:p="http://schemas.openxmlformats.org/presentationml/2006/main" xmlns:r="http://schemas.openxmlformats.org/officeDocument/2006/relationships">
   <p:cSld>
     <p:spTree>
@@ -9272,7 +9621,7 @@
 </p:sld>
 </file>
 
-<file path=ppt/slides/slide26.xml><?xml version="1.0" encoding="utf-8"?>
+<file path=ppt/slides/slide27.xml><?xml version="1.0" encoding="utf-8"?>
 <p:sld xmlns:a="http://schemas.openxmlformats.org/drawingml/2006/main" xmlns:p="http://schemas.openxmlformats.org/presentationml/2006/main" xmlns:r="http://schemas.openxmlformats.org/officeDocument/2006/relationships">
   <p:cSld>
     <p:spTree>
@@ -9396,7 +9745,7 @@
 </p:sld>
 </file>
 
-<file path=ppt/slides/slide27.xml><?xml version="1.0" encoding="utf-8"?>
+<file path=ppt/slides/slide28.xml><?xml version="1.0" encoding="utf-8"?>
 <p:sld xmlns:a="http://schemas.openxmlformats.org/drawingml/2006/main" xmlns:p="http://schemas.openxmlformats.org/presentationml/2006/main" xmlns:r="http://schemas.openxmlformats.org/officeDocument/2006/relationships">
   <p:cSld>
     <p:spTree>
@@ -9659,7 +10008,7 @@
 </p:sld>
 </file>
 
-<file path=ppt/slides/slide28.xml><?xml version="1.0" encoding="utf-8"?>
+<file path=ppt/slides/slide29.xml><?xml version="1.0" encoding="utf-8"?>
 <p:sld xmlns:a="http://schemas.openxmlformats.org/drawingml/2006/main" xmlns:p="http://schemas.openxmlformats.org/presentationml/2006/main" xmlns:r="http://schemas.openxmlformats.org/officeDocument/2006/relationships">
   <p:cSld>
     <p:spTree>
@@ -9954,7 +10303,264 @@
 </p:sld>
 </file>
 
-<file path=ppt/slides/slide29.xml><?xml version="1.0" encoding="utf-8"?>
+<file path=ppt/slides/slide3.xml><?xml version="1.0" encoding="utf-8"?>
+<p:sld xmlns:a="http://schemas.openxmlformats.org/drawingml/2006/main" xmlns:p="http://schemas.openxmlformats.org/presentationml/2006/main" xmlns:r="http://schemas.openxmlformats.org/officeDocument/2006/relationships">
+  <p:cSld>
+    <p:spTree>
+      <p:nvGrpSpPr>
+        <p:cNvPr id="1" name=""/>
+        <p:cNvGrpSpPr/>
+        <p:nvPr/>
+      </p:nvGrpSpPr>
+      <p:grpSpPr/>
+      <p:pic>
+        <p:nvPicPr>
+          <p:cNvPr id="2" name="Picture 1" descr="topology.png"/>
+          <p:cNvPicPr>
+            <a:picLocks noChangeAspect="1"/>
+          </p:cNvPicPr>
+          <p:nvPr/>
+        </p:nvPicPr>
+        <p:blipFill>
+          <a:blip r:embed="rId2"/>
+          <a:stretch>
+            <a:fillRect/>
+          </a:stretch>
+        </p:blipFill>
+        <p:spPr>
+          <a:xfrm>
+            <a:off x="274320" y="228600"/>
+            <a:ext cx="7214461" cy="6400800"/>
+          </a:xfrm>
+          <a:prstGeom prst="rect">
+            <a:avLst/>
+          </a:prstGeom>
+        </p:spPr>
+      </p:pic>
+      <p:sp>
+        <p:nvSpPr>
+          <p:cNvPr id="3" name="TextBox 2"/>
+          <p:cNvSpPr txBox="1"/>
+          <p:nvPr/>
+        </p:nvSpPr>
+        <p:spPr>
+          <a:xfrm>
+            <a:off x="7763101" y="548640"/>
+            <a:ext cx="4124098" cy="5760720"/>
+          </a:xfrm>
+          <a:prstGeom prst="rect">
+            <a:avLst/>
+          </a:prstGeom>
+          <a:noFill/>
+        </p:spPr>
+        <p:txBody>
+          <a:bodyPr wrap="square">
+            <a:spAutoFit/>
+          </a:bodyPr>
+          <a:lstStyle/>
+          <a:p>
+            <a:pPr algn="l">
+              <a:spcAft>
+                <a:spcPts val="800"/>
+              </a:spcAft>
+            </a:pPr>
+            <a:r>
+              <a:rPr sz="1500" b="1">
+                <a:solidFill>
+                  <a:srgbClr val="1F3355"/>
+                </a:solidFill>
+                <a:latin typeface="Meiryo UI"/>
+              </a:rPr>
+              <a:t>検証ラボの全体像</a:t>
+            </a:r>
+          </a:p>
+          <a:p>
+            <a:pPr lvl="1" algn="l">
+              <a:spcAft>
+                <a:spcPts val="500"/>
+              </a:spcAft>
+            </a:pPr>
+            <a:r>
+              <a:rPr sz="1300" b="0">
+                <a:solidFill>
+                  <a:srgbClr val="555555"/>
+                </a:solidFill>
+                <a:latin typeface="Meiryo UI"/>
+              </a:rPr>
+              <a:t>NTT の網も VNE も、全部 Linux VM で作ってあります</a:t>
+            </a:r>
+          </a:p>
+          <a:p>
+            <a:pPr lvl="1" algn="l">
+              <a:spcAft>
+                <a:spcPts val="500"/>
+              </a:spcAft>
+            </a:pPr>
+            <a:r>
+              <a:rPr sz="1300" b="0">
+                <a:solidFill>
+                  <a:srgbClr val="555555"/>
+                </a:solidFill>
+                <a:latin typeface="Meiryo UI"/>
+              </a:rPr>
+              <a:t>実機の CPE は 物理 NIC 経由で PG-ACCESS に繋ぎます</a:t>
+            </a:r>
+          </a:p>
+          <a:p>
+            <a:pPr algn="l">
+              <a:spcAft>
+                <a:spcPts val="800"/>
+              </a:spcAft>
+            </a:pPr>
+            <a:r>
+              <a:rPr sz="1500" b="1">
+                <a:solidFill>
+                  <a:srgbClr val="1F3355"/>
+                </a:solidFill>
+                <a:latin typeface="Meiryo UI"/>
+              </a:rPr>
+              <a:t>今日あなたが触るのは 2 つだけ</a:t>
+            </a:r>
+          </a:p>
+          <a:p>
+            <a:pPr lvl="1" algn="l">
+              <a:spcAft>
+                <a:spcPts val="500"/>
+              </a:spcAft>
+            </a:pPr>
+            <a:r>
+              <a:rPr sz="1300" b="0">
+                <a:solidFill>
+                  <a:srgbClr val="555555"/>
+                </a:solidFill>
+                <a:latin typeface="Meiryo UI"/>
+              </a:rPr>
+              <a:t>赤枠の 実機 CPE と 検証用 PC です</a:t>
+            </a:r>
+          </a:p>
+          <a:p>
+            <a:pPr lvl="1" algn="l">
+              <a:spcAft>
+                <a:spcPts val="500"/>
+              </a:spcAft>
+            </a:pPr>
+            <a:r>
+              <a:rPr sz="1300" b="0">
+                <a:solidFill>
+                  <a:srgbClr val="555555"/>
+                </a:solidFill>
+                <a:latin typeface="Meiryo UI"/>
+              </a:rPr>
+              <a:t>青枠のサーバ側は 司会が動かします</a:t>
+            </a:r>
+          </a:p>
+          <a:p>
+            <a:pPr algn="l">
+              <a:spcAft>
+                <a:spcPts val="800"/>
+              </a:spcAft>
+            </a:pPr>
+            <a:r>
+              <a:rPr sz="1500" b="1">
+                <a:solidFill>
+                  <a:srgbClr val="1F3355"/>
+                </a:solidFill>
+                <a:latin typeface="Meiryo UI"/>
+              </a:rPr>
+              <a:t>覚えておくと迷わない</a:t>
+            </a:r>
+          </a:p>
+          <a:p>
+            <a:pPr lvl="1" algn="l">
+              <a:spcAft>
+                <a:spcPts val="500"/>
+              </a:spcAft>
+            </a:pPr>
+            <a:r>
+              <a:rPr sz="1300" b="0">
+                <a:solidFill>
+                  <a:srgbClr val="555555"/>
+                </a:solidFill>
+                <a:latin typeface="Meiryo UI"/>
+              </a:rPr>
+              <a:t>PG-ACCESS … アドレスが配られる場所</a:t>
+            </a:r>
+          </a:p>
+          <a:p>
+            <a:pPr lvl="1" algn="l">
+              <a:spcAft>
+                <a:spcPts val="500"/>
+              </a:spcAft>
+            </a:pPr>
+            <a:r>
+              <a:rPr sz="1300" b="0">
+                <a:solidFill>
+                  <a:srgbClr val="555555"/>
+                </a:solidFill>
+                <a:latin typeface="Meiryo UI"/>
+              </a:rPr>
+              <a:t>VNE … IPv4 を IPv6 から取り出す場所</a:t>
+            </a:r>
+          </a:p>
+          <a:p>
+            <a:pPr lvl="1" algn="l">
+              <a:spcAft>
+                <a:spcPts val="500"/>
+              </a:spcAft>
+            </a:pPr>
+            <a:r>
+              <a:rPr sz="1300" b="0">
+                <a:solidFill>
+                  <a:srgbClr val="555555"/>
+                </a:solidFill>
+                <a:latin typeface="Meiryo UI"/>
+              </a:rPr>
+              <a:t>INET-SIM … 行き先。出口アドレスを教えてくれる</a:t>
+            </a:r>
+          </a:p>
+          <a:p>
+            <a:pPr algn="l">
+              <a:spcAft>
+                <a:spcPts val="800"/>
+              </a:spcAft>
+            </a:pPr>
+            <a:r>
+              <a:rPr sz="1500" b="1">
+                <a:solidFill>
+                  <a:srgbClr val="C0392B"/>
+                </a:solidFill>
+                <a:latin typeface="Meiryo UI"/>
+              </a:rPr>
+              <a:t>図の一番下を見てください</a:t>
+            </a:r>
+          </a:p>
+          <a:p>
+            <a:pPr lvl="1" algn="l">
+              <a:spcAft>
+                <a:spcPts val="500"/>
+              </a:spcAft>
+            </a:pPr>
+            <a:r>
+              <a:rPr sz="1300" b="0">
+                <a:solidFill>
+                  <a:srgbClr val="555555"/>
+                </a:solidFill>
+                <a:latin typeface="Meiryo UI"/>
+              </a:rPr>
+              <a:t>方式ごとにどこを通るかと、出口アドレスが書いてあります</a:t>
+            </a:r>
+          </a:p>
+        </p:txBody>
+      </p:sp>
+    </p:spTree>
+  </p:cSld>
+  <p:clrMapOvr>
+    <a:masterClrMapping/>
+  </p:clrMapOvr>
+</p:sld>
+</file>
+
+<file path=ppt/slides/slide30.xml><?xml version="1.0" encoding="utf-8"?>
 <p:sld xmlns:a="http://schemas.openxmlformats.org/drawingml/2006/main" xmlns:p="http://schemas.openxmlformats.org/presentationml/2006/main" xmlns:r="http://schemas.openxmlformats.org/officeDocument/2006/relationships">
   <p:cSld>
     <p:spTree>
@@ -10233,7 +10839,7 @@
 </p:sld>
 </file>
 
-<file path=ppt/slides/slide3.xml><?xml version="1.0" encoding="utf-8"?>
+<file path=ppt/slides/slide4.xml><?xml version="1.0" encoding="utf-8"?>
 <p:sld xmlns:a="http://schemas.openxmlformats.org/drawingml/2006/main" xmlns:p="http://schemas.openxmlformats.org/presentationml/2006/main" xmlns:r="http://schemas.openxmlformats.org/officeDocument/2006/relationships">
   <p:cSld>
     <p:spTree>
@@ -10770,7 +11376,7 @@
 </p:sld>
 </file>
 
-<file path=ppt/slides/slide4.xml><?xml version="1.0" encoding="utf-8"?>
+<file path=ppt/slides/slide5.xml><?xml version="1.0" encoding="utf-8"?>
 <p:sld xmlns:a="http://schemas.openxmlformats.org/drawingml/2006/main" xmlns:p="http://schemas.openxmlformats.org/presentationml/2006/main" xmlns:r="http://schemas.openxmlformats.org/officeDocument/2006/relationships">
   <p:cSld>
     <p:spTree>
@@ -11049,7 +11655,7 @@
 </p:sld>
 </file>
 
-<file path=ppt/slides/slide5.xml><?xml version="1.0" encoding="utf-8"?>
+<file path=ppt/slides/slide6.xml><?xml version="1.0" encoding="utf-8"?>
 <p:sld xmlns:a="http://schemas.openxmlformats.org/drawingml/2006/main" xmlns:p="http://schemas.openxmlformats.org/presentationml/2006/main" xmlns:r="http://schemas.openxmlformats.org/officeDocument/2006/relationships">
   <p:cSld>
     <p:spTree>
@@ -11411,7 +12017,7 @@
 </p:sld>
 </file>
 
-<file path=ppt/slides/slide6.xml><?xml version="1.0" encoding="utf-8"?>
+<file path=ppt/slides/slide7.xml><?xml version="1.0" encoding="utf-8"?>
 <p:sld xmlns:a="http://schemas.openxmlformats.org/drawingml/2006/main" xmlns:p="http://schemas.openxmlformats.org/presentationml/2006/main" xmlns:r="http://schemas.openxmlformats.org/officeDocument/2006/relationships">
   <p:cSld>
     <p:spTree>
@@ -11535,7 +12141,7 @@
 </p:sld>
 </file>
 
-<file path=ppt/slides/slide7.xml><?xml version="1.0" encoding="utf-8"?>
+<file path=ppt/slides/slide8.xml><?xml version="1.0" encoding="utf-8"?>
 <p:sld xmlns:a="http://schemas.openxmlformats.org/drawingml/2006/main" xmlns:p="http://schemas.openxmlformats.org/presentationml/2006/main" xmlns:r="http://schemas.openxmlformats.org/officeDocument/2006/relationships">
   <p:cSld>
     <p:spTree>
@@ -11798,7 +12404,7 @@
 </p:sld>
 </file>
 
-<file path=ppt/slides/slide8.xml><?xml version="1.0" encoding="utf-8"?>
+<file path=ppt/slides/slide9.xml><?xml version="1.0" encoding="utf-8"?>
 <p:sld xmlns:a="http://schemas.openxmlformats.org/drawingml/2006/main" xmlns:p="http://schemas.openxmlformats.org/presentationml/2006/main" xmlns:r="http://schemas.openxmlformats.org/officeDocument/2006/relationships">
   <p:cSld>
     <p:spTree>
@@ -12033,269 +12639,6 @@
                 <a:latin typeface="Meiryo UI"/>
               </a:rPr>
               <a:t>だから「事前にアドレスが分からない」。これが後の演習 4 で効いてきます</a:t>
-            </a:r>
-          </a:p>
-        </p:txBody>
-      </p:sp>
-    </p:spTree>
-  </p:cSld>
-  <p:clrMapOvr>
-    <a:masterClrMapping/>
-  </p:clrMapOvr>
-</p:sld>
-</file>
-
-<file path=ppt/slides/slide9.xml><?xml version="1.0" encoding="utf-8"?>
-<p:sld xmlns:a="http://schemas.openxmlformats.org/drawingml/2006/main" xmlns:p="http://schemas.openxmlformats.org/presentationml/2006/main" xmlns:r="http://schemas.openxmlformats.org/officeDocument/2006/relationships">
-  <p:cSld>
-    <p:spTree>
-      <p:nvGrpSpPr>
-        <p:cNvPr id="1" name=""/>
-        <p:cNvGrpSpPr/>
-        <p:nvPr/>
-      </p:nvGrpSpPr>
-      <p:grpSpPr/>
-      <p:sp>
-        <p:nvSpPr>
-          <p:cNvPr id="2" name="TextBox 1"/>
-          <p:cNvSpPr txBox="1"/>
-          <p:nvPr/>
-        </p:nvSpPr>
-        <p:spPr>
-          <a:xfrm>
-            <a:off x="502920" y="320040"/>
-            <a:ext cx="11155680" cy="822960"/>
-          </a:xfrm>
-          <a:prstGeom prst="rect">
-            <a:avLst/>
-          </a:prstGeom>
-          <a:noFill/>
-        </p:spPr>
-        <p:txBody>
-          <a:bodyPr wrap="square">
-            <a:spAutoFit/>
-          </a:bodyPr>
-          <a:lstStyle/>
-          <a:p>
-            <a:pPr algn="l"/>
-            <a:r>
-              <a:rPr sz="2800" b="1">
-                <a:solidFill>
-                  <a:srgbClr val="1F3355"/>
-                </a:solidFill>
-                <a:latin typeface="Meiryo UI"/>
-              </a:rPr>
-              <a:t>演習 2: PD 方式にすると、アドレスが付かなくなる (15 分) ← 今日いちばん大事</a:t>
-            </a:r>
-          </a:p>
-        </p:txBody>
-      </p:sp>
-      <p:sp>
-        <p:nvSpPr>
-          <p:cNvPr id="3" name="Rectangle 2"/>
-          <p:cNvSpPr/>
-          <p:nvPr/>
-        </p:nvSpPr>
-        <p:spPr>
-          <a:xfrm>
-            <a:off x="502920" y="1115568"/>
-            <a:ext cx="11155680" cy="31750"/>
-          </a:xfrm>
-          <a:prstGeom prst="rect">
-            <a:avLst/>
-          </a:prstGeom>
-          <a:solidFill>
-            <a:srgbClr val="007ACC"/>
-          </a:solidFill>
-          <a:ln>
-            <a:noFill/>
-          </a:ln>
-        </p:spPr>
-        <p:style>
-          <a:lnRef idx="1">
-            <a:schemeClr val="accent1"/>
-          </a:lnRef>
-          <a:fillRef idx="3">
-            <a:schemeClr val="accent1"/>
-          </a:fillRef>
-          <a:effectRef idx="2">
-            <a:schemeClr val="accent1"/>
-          </a:effectRef>
-          <a:fontRef idx="minor">
-            <a:schemeClr val="lt1"/>
-          </a:fontRef>
-        </p:style>
-        <p:txBody>
-          <a:bodyPr rtlCol="0" anchor="ctr"/>
-          <a:lstStyle/>
-          <a:p>
-            <a:pPr algn="ctr"/>
-          </a:p>
-        </p:txBody>
-      </p:sp>
-      <p:sp>
-        <p:nvSpPr>
-          <p:cNvPr id="4" name="TextBox 3"/>
-          <p:cNvSpPr txBox="1"/>
-          <p:nvPr/>
-        </p:nvSpPr>
-        <p:spPr>
-          <a:xfrm>
-            <a:off x="594360" y="1371600"/>
-            <a:ext cx="10972800" cy="4983480"/>
-          </a:xfrm>
-          <a:prstGeom prst="rect">
-            <a:avLst/>
-          </a:prstGeom>
-          <a:noFill/>
-        </p:spPr>
-        <p:txBody>
-          <a:bodyPr wrap="square">
-            <a:spAutoFit/>
-          </a:bodyPr>
-          <a:lstStyle/>
-          <a:p>
-            <a:pPr algn="l">
-              <a:spcAft>
-                <a:spcPts val="1000"/>
-              </a:spcAft>
-            </a:pPr>
-            <a:r>
-              <a:rPr sz="2000" b="0">
-                <a:solidFill>
-                  <a:srgbClr val="0B6040"/>
-                </a:solidFill>
-                <a:latin typeface="Consolas"/>
-              </a:rPr>
-              <a:t>【司会】 ./lab-mode.sh pd</a:t>
-            </a:r>
-          </a:p>
-          <a:p>
-            <a:pPr algn="l">
-              <a:spcAft>
-                <a:spcPts val="1000"/>
-              </a:spcAft>
-            </a:pPr>
-            <a:r>
-              <a:rPr sz="2000" b="1">
-                <a:solidFill>
-                  <a:srgbClr val="1F3355"/>
-                </a:solidFill>
-                <a:latin typeface="Meiryo UI"/>
-              </a:rPr>
-              <a:t>【あなた】さっきと まったく同じ操作を もう一度</a:t>
-            </a:r>
-          </a:p>
-          <a:p>
-            <a:pPr lvl="1" algn="l">
-              <a:spcAft>
-                <a:spcPts val="600"/>
-              </a:spcAft>
-            </a:pPr>
-            <a:r>
-              <a:rPr sz="1700" b="0">
-                <a:solidFill>
-                  <a:srgbClr val="0B6040"/>
-                </a:solidFill>
-                <a:latin typeface="Consolas"/>
-              </a:rPr>
-              <a:t>CPE(config-if)# shutdown</a:t>
-            </a:r>
-          </a:p>
-          <a:p>
-            <a:pPr lvl="1" algn="l">
-              <a:spcAft>
-                <a:spcPts val="600"/>
-              </a:spcAft>
-            </a:pPr>
-            <a:r>
-              <a:rPr sz="1700" b="0">
-                <a:solidFill>
-                  <a:srgbClr val="0B6040"/>
-                </a:solidFill>
-                <a:latin typeface="Consolas"/>
-              </a:rPr>
-              <a:t>CPE(config-if)# no shutdown</a:t>
-            </a:r>
-          </a:p>
-          <a:p>
-            <a:pPr lvl="1" algn="l">
-              <a:spcAft>
-                <a:spcPts val="600"/>
-              </a:spcAft>
-            </a:pPr>
-            <a:r>
-              <a:rPr sz="1700" b="0">
-                <a:solidFill>
-                  <a:srgbClr val="0B6040"/>
-                </a:solidFill>
-                <a:latin typeface="Consolas"/>
-              </a:rPr>
-              <a:t>CPE# show ipv6 interface GigabitEthernet0</a:t>
-            </a:r>
-          </a:p>
-          <a:p>
-            <a:pPr algn="l">
-              <a:spcAft>
-                <a:spcPts val="1000"/>
-              </a:spcAft>
-            </a:pPr>
-            <a:r>
-              <a:rPr sz="2000" b="1">
-                <a:solidFill>
-                  <a:srgbClr val="1F3355"/>
-                </a:solidFill>
-                <a:latin typeface="Meiryo UI"/>
-              </a:rPr>
-              <a:t>出てくる出力</a:t>
-            </a:r>
-          </a:p>
-          <a:p>
-            <a:pPr lvl="1" algn="l">
-              <a:spcAft>
-                <a:spcPts val="600"/>
-              </a:spcAft>
-            </a:pPr>
-            <a:r>
-              <a:rPr sz="1700" b="0">
-                <a:solidFill>
-                  <a:srgbClr val="0B6040"/>
-                </a:solidFill>
-                <a:latin typeface="Consolas"/>
-              </a:rPr>
-              <a:t>  IPv6 is enabled, link-local address is FE80::E6AA:5DFF:FE82:364A</a:t>
-            </a:r>
-          </a:p>
-          <a:p>
-            <a:pPr lvl="1" algn="l">
-              <a:spcAft>
-                <a:spcPts val="600"/>
-              </a:spcAft>
-            </a:pPr>
-            <a:r>
-              <a:rPr sz="1700" b="0">
-                <a:solidFill>
-                  <a:srgbClr val="0B6040"/>
-                </a:solidFill>
-                <a:latin typeface="Consolas"/>
-              </a:rPr>
-              <a:t>  No global unicast address is configured        ← ★ 付かない</a:t>
-            </a:r>
-          </a:p>
-          <a:p>
-            <a:pPr algn="l">
-              <a:spcAft>
-                <a:spcPts val="1000"/>
-              </a:spcAft>
-            </a:pPr>
-            <a:r>
-              <a:rPr sz="2000" b="1">
-                <a:solidFill>
-                  <a:srgbClr val="C0392B"/>
-                </a:solidFill>
-                <a:latin typeface="Meiryo UI"/>
-              </a:rPr>
-              <a:t>設定は 1 文字も変えていません。網の方式が変わっただけです</a:t>
             </a:r>
           </a:p>
         </p:txBody>

--- a/docs/ipoe-lab/slides/handson.pptx
+++ b/docs/ipoe-lab/slides/handson.pptx
@@ -35,6 +35,7 @@
     <p:sldId id="283" r:id="rId35"/>
     <p:sldId id="284" r:id="rId36"/>
     <p:sldId id="285" r:id="rId37"/>
+    <p:sldId id="286" r:id="rId38"/>
   </p:sldIdLst>
   <p:sldSz cx="12191695" cy="6858000" type="screen4x3"/>
   <p:notesSz cx="6858000" cy="9144000"/>
@@ -576,6 +577,476 @@
 </p:notes>
 </file>
 
+<file path=ppt/notesSlides/notesSlide10.xml><?xml version="1.0" encoding="utf-8"?>
+<p:notes xmlns:a="http://schemas.openxmlformats.org/drawingml/2006/main" xmlns:p="http://schemas.openxmlformats.org/presentationml/2006/main" xmlns:r="http://schemas.openxmlformats.org/officeDocument/2006/relationships">
+  <p:cSld>
+    <p:spTree>
+      <p:nvGrpSpPr>
+        <p:cNvPr id="1" name=""/>
+        <p:cNvGrpSpPr/>
+        <p:nvPr/>
+      </p:nvGrpSpPr>
+      <p:grpSpPr>
+        <a:xfrm>
+          <a:off x="0" y="0"/>
+          <a:ext cx="0" cy="0"/>
+          <a:chOff x="0" y="0"/>
+          <a:chExt cx="0" cy="0"/>
+        </a:xfrm>
+      </p:grpSpPr>
+      <p:sp>
+        <p:nvSpPr>
+          <p:cNvPr id="2" name="Slide Image Placeholder 1"/>
+          <p:cNvSpPr>
+            <a:spLocks noGrp="1"/>
+          </p:cNvSpPr>
+          <p:nvPr>
+            <p:ph type="sldImg" idx="2"/>
+          </p:nvPr>
+        </p:nvSpPr>
+        <p:spPr/>
+      </p:sp>
+      <p:sp>
+        <p:nvSpPr>
+          <p:cNvPr id="3" name="Notes Placeholder 2"/>
+          <p:cNvSpPr>
+            <a:spLocks noGrp="1"/>
+          </p:cNvSpPr>
+          <p:nvPr>
+            <p:ph type="body" idx="3" sz="quarter"/>
+          </p:nvPr>
+        </p:nvSpPr>
+        <p:spPr/>
+        <p:txBody>
+          <a:bodyPr/>
+          <a:lstStyle/>
+          <a:p>
+            <a:r>
+              <a:t>【司会へ】</a:t>
+            </a:r>
+          </a:p>
+          <a:p>
+            <a:r>
+              <a:t>・**なぜ「両側」なのかを必ず説明すること。**経路 MTU は送る側が覚える。</a:t>
+            </a:r>
+          </a:p>
+          <a:p>
+            <a:r>
+              <a:t>  このダウンロードで大きいパケットを送っているのは **INET-SIM (サーバ) 側**なので、</a:t>
+            </a:r>
+          </a:p>
+          <a:p>
+            <a:r>
+              <a:t>  手元の PC だけ消してもサーバが小さいまま送り続けて再現しない。</a:t>
+            </a:r>
+          </a:p>
+          <a:p>
+            <a:r>
+              <a:t>・「片側だけ消して再現しない」は現場でもよくある足踏み。ここが持ち帰りどころ。</a:t>
+            </a:r>
+          </a:p>
+          <a:p>
+            <a:r>
+              <a:t>・**⚠ この演習は 892FJ での通し実走がまだ。**手順は OpenWrt CE での実測から組んである。</a:t>
+            </a:r>
+          </a:p>
+          <a:p>
+            <a:r>
+              <a:t>  **実施前に司会が一度通すこと。**出力が違ったら build-log.md に記録する。</a:t>
+            </a:r>
+          </a:p>
+        </p:txBody>
+      </p:sp>
+      <p:sp>
+        <p:nvSpPr>
+          <p:cNvPr id="4" name="Slide Number Placeholder 3"/>
+          <p:cNvSpPr>
+            <a:spLocks noGrp="1"/>
+          </p:cNvSpPr>
+          <p:nvPr>
+            <p:ph type="sldNum" idx="5" sz="quarter"/>
+          </p:nvPr>
+        </p:nvSpPr>
+        <p:spPr/>
+      </p:sp>
+    </p:spTree>
+  </p:cSld>
+  <p:clrMapOvr>
+    <a:masterClrMapping/>
+  </p:clrMapOvr>
+</p:notes>
+</file>
+
+<file path=ppt/notesSlides/notesSlide11.xml><?xml version="1.0" encoding="utf-8"?>
+<p:notes xmlns:a="http://schemas.openxmlformats.org/drawingml/2006/main" xmlns:p="http://schemas.openxmlformats.org/presentationml/2006/main" xmlns:r="http://schemas.openxmlformats.org/officeDocument/2006/relationships">
+  <p:cSld>
+    <p:spTree>
+      <p:nvGrpSpPr>
+        <p:cNvPr id="1" name=""/>
+        <p:cNvGrpSpPr/>
+        <p:nvPr/>
+      </p:nvGrpSpPr>
+      <p:grpSpPr>
+        <a:xfrm>
+          <a:off x="0" y="0"/>
+          <a:ext cx="0" cy="0"/>
+          <a:chOff x="0" y="0"/>
+          <a:chExt cx="0" cy="0"/>
+        </a:xfrm>
+      </p:grpSpPr>
+      <p:sp>
+        <p:nvSpPr>
+          <p:cNvPr id="2" name="Slide Image Placeholder 1"/>
+          <p:cNvSpPr>
+            <a:spLocks noGrp="1"/>
+          </p:cNvSpPr>
+          <p:nvPr>
+            <p:ph type="sldImg" idx="2"/>
+          </p:nvPr>
+        </p:nvSpPr>
+        <p:spPr/>
+      </p:sp>
+      <p:sp>
+        <p:nvSpPr>
+          <p:cNvPr id="3" name="Notes Placeholder 2"/>
+          <p:cNvSpPr>
+            <a:spLocks noGrp="1"/>
+          </p:cNvSpPr>
+          <p:nvPr>
+            <p:ph type="body" idx="3" sz="quarter"/>
+          </p:nvPr>
+        </p:nvSpPr>
+        <p:spPr/>
+        <p:txBody>
+          <a:bodyPr/>
+          <a:lstStyle/>
+          <a:p>
+            <a:r>
+              <a:t>【司会へ】</a:t>
+            </a:r>
+          </a:p>
+          <a:p>
+            <a:r>
+              <a:t>・**LAN 内からの対照実験を飛ばさないこと。**これが無いと実験として成立しない</a:t>
+            </a:r>
+          </a:p>
+          <a:p>
+            <a:r>
+              <a:t>  (IPv4 の実務が長い受講者ほど、ここを突いてくる)。</a:t>
+            </a:r>
+          </a:p>
+          <a:p>
+            <a:r>
+              <a:t>・ip nat inside / outside を付けさせるのも同じ理由。付けずに落ちても</a:t>
+            </a:r>
+          </a:p>
+          <a:p>
+            <a:r>
+              <a:t>  「設定不備で落ちただけでは?」と言われて教訓が伝わらない。</a:t>
+            </a:r>
+          </a:p>
+          <a:p>
+            <a:r>
+              <a:t>・**⚠ この演習も 892FJ での通し実走がまだ。**出力は OpenWrt CE での実測 (R4) から。</a:t>
+            </a:r>
+          </a:p>
+          <a:p>
+            <a:r>
+              <a:t>  **実施前に司会が一度通すこと。**</a:t>
+            </a:r>
+          </a:p>
+          <a:p>
+            <a:r>
+              <a:t>・後始末: 静的 NAT の削除 + no ip nat inside / outside + ファイアウォール規則の削除。</a:t>
+            </a:r>
+          </a:p>
+        </p:txBody>
+      </p:sp>
+      <p:sp>
+        <p:nvSpPr>
+          <p:cNvPr id="4" name="Slide Number Placeholder 3"/>
+          <p:cNvSpPr>
+            <a:spLocks noGrp="1"/>
+          </p:cNvSpPr>
+          <p:nvPr>
+            <p:ph type="sldNum" idx="5" sz="quarter"/>
+          </p:nvPr>
+        </p:nvSpPr>
+        <p:spPr/>
+      </p:sp>
+    </p:spTree>
+  </p:cSld>
+  <p:clrMapOvr>
+    <a:masterClrMapping/>
+  </p:clrMapOvr>
+</p:notes>
+</file>
+
+<file path=ppt/notesSlides/notesSlide12.xml><?xml version="1.0" encoding="utf-8"?>
+<p:notes xmlns:a="http://schemas.openxmlformats.org/drawingml/2006/main" xmlns:p="http://schemas.openxmlformats.org/presentationml/2006/main" xmlns:r="http://schemas.openxmlformats.org/officeDocument/2006/relationships">
+  <p:cSld>
+    <p:spTree>
+      <p:nvGrpSpPr>
+        <p:cNvPr id="1" name=""/>
+        <p:cNvGrpSpPr/>
+        <p:nvPr/>
+      </p:nvGrpSpPr>
+      <p:grpSpPr>
+        <a:xfrm>
+          <a:off x="0" y="0"/>
+          <a:ext cx="0" cy="0"/>
+          <a:chOff x="0" y="0"/>
+          <a:chExt cx="0" cy="0"/>
+        </a:xfrm>
+      </p:grpSpPr>
+      <p:sp>
+        <p:nvSpPr>
+          <p:cNvPr id="2" name="Slide Image Placeholder 1"/>
+          <p:cNvSpPr>
+            <a:spLocks noGrp="1"/>
+          </p:cNvSpPr>
+          <p:nvPr>
+            <p:ph type="sldImg" idx="2"/>
+          </p:nvPr>
+        </p:nvSpPr>
+        <p:spPr/>
+      </p:sp>
+      <p:sp>
+        <p:nvSpPr>
+          <p:cNvPr id="3" name="Notes Placeholder 2"/>
+          <p:cNvSpPr>
+            <a:spLocks noGrp="1"/>
+          </p:cNvSpPr>
+          <p:nvPr>
+            <p:ph type="body" idx="3" sz="quarter"/>
+          </p:nvPr>
+        </p:nvSpPr>
+        <p:spPr/>
+        <p:txBody>
+          <a:bodyPr/>
+          <a:lstStyle/>
+          <a:p>
+            <a:r>
+              <a:t>【司会へ】</a:t>
+            </a:r>
+          </a:p>
+          <a:p>
+            <a:r>
+              <a:t>・15 秒 / 0.2 秒 は自宅ラボの Linux クライアントでの実測値 (サイクル 5)。</a:t>
+            </a:r>
+          </a:p>
+          <a:p>
+            <a:r>
+              <a:t>  Windows 側の数字は端末によって多少ぶれる、と添えること。</a:t>
+            </a:r>
+          </a:p>
+        </p:txBody>
+      </p:sp>
+      <p:sp>
+        <p:nvSpPr>
+          <p:cNvPr id="4" name="Slide Number Placeholder 3"/>
+          <p:cNvSpPr>
+            <a:spLocks noGrp="1"/>
+          </p:cNvSpPr>
+          <p:nvPr>
+            <p:ph type="sldNum" idx="5" sz="quarter"/>
+          </p:nvPr>
+        </p:nvSpPr>
+        <p:spPr/>
+      </p:sp>
+    </p:spTree>
+  </p:cSld>
+  <p:clrMapOvr>
+    <a:masterClrMapping/>
+  </p:clrMapOvr>
+</p:notes>
+</file>
+
+<file path=ppt/notesSlides/notesSlide13.xml><?xml version="1.0" encoding="utf-8"?>
+<p:notes xmlns:a="http://schemas.openxmlformats.org/drawingml/2006/main" xmlns:p="http://schemas.openxmlformats.org/presentationml/2006/main" xmlns:r="http://schemas.openxmlformats.org/officeDocument/2006/relationships">
+  <p:cSld>
+    <p:spTree>
+      <p:nvGrpSpPr>
+        <p:cNvPr id="1" name=""/>
+        <p:cNvGrpSpPr/>
+        <p:nvPr/>
+      </p:nvGrpSpPr>
+      <p:grpSpPr>
+        <a:xfrm>
+          <a:off x="0" y="0"/>
+          <a:ext cx="0" cy="0"/>
+          <a:chOff x="0" y="0"/>
+          <a:chExt cx="0" cy="0"/>
+        </a:xfrm>
+      </p:grpSpPr>
+      <p:sp>
+        <p:nvSpPr>
+          <p:cNvPr id="2" name="Slide Image Placeholder 1"/>
+          <p:cNvSpPr>
+            <a:spLocks noGrp="1"/>
+          </p:cNvSpPr>
+          <p:nvPr>
+            <p:ph type="sldImg" idx="2"/>
+          </p:nvPr>
+        </p:nvSpPr>
+        <p:spPr/>
+      </p:sp>
+      <p:sp>
+        <p:nvSpPr>
+          <p:cNvPr id="3" name="Notes Placeholder 2"/>
+          <p:cNvSpPr>
+            <a:spLocks noGrp="1"/>
+          </p:cNvSpPr>
+          <p:nvPr>
+            <p:ph type="body" idx="3" sz="quarter"/>
+          </p:nvPr>
+        </p:nvSpPr>
+        <p:spPr/>
+        <p:txBody>
+          <a:bodyPr/>
+          <a:lstStyle/>
+          <a:p>
+            <a:r>
+              <a:t>【司会へ】</a:t>
+            </a:r>
+          </a:p>
+          <a:p>
+            <a:r>
+              <a:t>・**全員が FAIL=0 に戻るまで解散しないこと。**戻し忘れが次回の演習を壊す。</a:t>
+            </a:r>
+          </a:p>
+          <a:p>
+            <a:r>
+              <a:t>・とくに 892FJ 側の adjust-mss / ip nat inside source / ip nat inside・outside の</a:t>
+            </a:r>
+          </a:p>
+          <a:p>
+            <a:r>
+              <a:t>  消し忘れが多い。</a:t>
+            </a:r>
+          </a:p>
+          <a:p>
+            <a:r>
+              <a:t>・**検証用 PC を dhcp に戻させるのを絶対に忘れないこと。**</a:t>
+            </a:r>
+          </a:p>
+          <a:p>
+            <a:r>
+              <a:t>  固定のまま席に戻ると社内ネットワークに繋がらず、問い合わせが来る。</a:t>
+            </a:r>
+          </a:p>
+          <a:p>
+            <a:r>
+              <a:t>・lab-mode.sh status で「障害の注入: なし」を全員に見せてから締める。</a:t>
+            </a:r>
+          </a:p>
+        </p:txBody>
+      </p:sp>
+      <p:sp>
+        <p:nvSpPr>
+          <p:cNvPr id="4" name="Slide Number Placeholder 3"/>
+          <p:cNvSpPr>
+            <a:spLocks noGrp="1"/>
+          </p:cNvSpPr>
+          <p:nvPr>
+            <p:ph type="sldNum" idx="5" sz="quarter"/>
+          </p:nvPr>
+        </p:nvSpPr>
+        <p:spPr/>
+      </p:sp>
+    </p:spTree>
+  </p:cSld>
+  <p:clrMapOvr>
+    <a:masterClrMapping/>
+  </p:clrMapOvr>
+</p:notes>
+</file>
+
+<file path=ppt/notesSlides/notesSlide14.xml><?xml version="1.0" encoding="utf-8"?>
+<p:notes xmlns:a="http://schemas.openxmlformats.org/drawingml/2006/main" xmlns:p="http://schemas.openxmlformats.org/presentationml/2006/main" xmlns:r="http://schemas.openxmlformats.org/officeDocument/2006/relationships">
+  <p:cSld>
+    <p:spTree>
+      <p:nvGrpSpPr>
+        <p:cNvPr id="1" name=""/>
+        <p:cNvGrpSpPr/>
+        <p:nvPr/>
+      </p:nvGrpSpPr>
+      <p:grpSpPr>
+        <a:xfrm>
+          <a:off x="0" y="0"/>
+          <a:ext cx="0" cy="0"/>
+          <a:chOff x="0" y="0"/>
+          <a:chExt cx="0" cy="0"/>
+        </a:xfrm>
+      </p:grpSpPr>
+      <p:sp>
+        <p:nvSpPr>
+          <p:cNvPr id="2" name="Slide Image Placeholder 1"/>
+          <p:cNvSpPr>
+            <a:spLocks noGrp="1"/>
+          </p:cNvSpPr>
+          <p:nvPr>
+            <p:ph type="sldImg" idx="2"/>
+          </p:nvPr>
+        </p:nvSpPr>
+        <p:spPr/>
+      </p:sp>
+      <p:sp>
+        <p:nvSpPr>
+          <p:cNvPr id="3" name="Notes Placeholder 2"/>
+          <p:cNvSpPr>
+            <a:spLocks noGrp="1"/>
+          </p:cNvSpPr>
+          <p:nvPr>
+            <p:ph type="body" idx="3" sz="quarter"/>
+          </p:nvPr>
+        </p:nvSpPr>
+        <p:spPr/>
+        <p:txBody>
+          <a:bodyPr/>
+          <a:lstStyle/>
+          <a:p>
+            <a:r>
+              <a:t>【司会へ】</a:t>
+            </a:r>
+          </a:p>
+          <a:p>
+            <a:r>
+              <a:t>・**このページが今日いちばんの持ち帰りです。**「自分でも試せる」で終わらせること。</a:t>
+            </a:r>
+          </a:p>
+          <a:p>
+            <a:r>
+              <a:t>・**窓口の名前を事前に埋めておくこと。**空欄のまま出すと誰も使いに来ない。</a:t>
+            </a:r>
+          </a:p>
+          <a:p>
+            <a:r>
+              <a:t>・**同時に検証できる CPE は 1 台**なので、日程を先に押さえるよう言うこと。</a:t>
+            </a:r>
+          </a:p>
+        </p:txBody>
+      </p:sp>
+      <p:sp>
+        <p:nvSpPr>
+          <p:cNvPr id="4" name="Slide Number Placeholder 3"/>
+          <p:cNvSpPr>
+            <a:spLocks noGrp="1"/>
+          </p:cNvSpPr>
+          <p:nvPr>
+            <p:ph type="sldNum" idx="5" sz="quarter"/>
+          </p:nvPr>
+        </p:nvSpPr>
+        <p:spPr/>
+      </p:sp>
+    </p:spTree>
+  </p:cSld>
+  <p:clrMapOvr>
+    <a:masterClrMapping/>
+  </p:clrMapOvr>
+</p:notes>
+</file>
+
 <file path=ppt/notesSlides/notesSlide2.xml><?xml version="1.0" encoding="utf-8"?>
 <p:notes xmlns:a="http://schemas.openxmlformats.org/drawingml/2006/main" xmlns:p="http://schemas.openxmlformats.org/presentationml/2006/main" xmlns:r="http://schemas.openxmlformats.org/officeDocument/2006/relationships">
   <p:cSld>
@@ -637,6 +1108,52 @@
           <a:p>
             <a:r>
               <a:t>・「いまどこの話か」を毎回この絵で指すこと。</a:t>
+            </a:r>
+          </a:p>
+          <a:p/>
+          <a:p>
+            <a:r>
+              <a:t>【司会が使うコマンド — 受講者は打ちません】</a:t>
+            </a:r>
+          </a:p>
+          <a:p>
+            <a:r>
+              <a:t>  ./lab-mode.sh status              … いま何方式か (実機を見て判定します)</a:t>
+            </a:r>
+          </a:p>
+          <a:p>
+            <a:r>
+              <a:t>  ./lab-mode.sh ra / pd             … 網の IPv6 の配り方を切り替える</a:t>
+            </a:r>
+          </a:p>
+          <a:p>
+            <a:r>
+              <a:t>  ./lab-mode.sh dslite &lt;CEのIPv6&gt;   … IPv4 の運び方を DS-Lite にする</a:t>
+            </a:r>
+          </a:p>
+          <a:p>
+            <a:r>
+              <a:t>  ./lab-mode.sh mape                … IPv4 の運び方を MAP-E にする (CE は OpenWrt)</a:t>
+            </a:r>
+          </a:p>
+          <a:p>
+            <a:r>
+              <a:t>  ./lab-mode.sh break mtu|dns       … 障害を注入する</a:t>
+            </a:r>
+          </a:p>
+          <a:p>
+            <a:r>
+              <a:t>  ./lab-mode.sh restore             … 障害を戻す</a:t>
+            </a:r>
+          </a:p>
+          <a:p>
+            <a:r>
+              <a:t>・**切り替えるたびに「いま何方式か」と「期待する出口アドレス」を読み上げること。**</a:t>
+            </a:r>
+          </a:p>
+          <a:p>
+            <a:r>
+              <a:t>  lab-mode.sh がその 2 つを画面に出すので、そのまま読めばよい。</a:t>
             </a:r>
           </a:p>
         </p:txBody>
@@ -711,22 +1228,17 @@
           </a:p>
           <a:p>
             <a:r>
-              <a:t>・切り替えるたびに「いま何方式か」と「期待する出口アドレス」を必ず読み上げること。</a:t>
-            </a:r>
-          </a:p>
-          <a:p>
-            <a:r>
-              <a:t>  lab-mode.sh がその 2 つを画面に出すので、それをそのまま読めばよい。</a:t>
-            </a:r>
-          </a:p>
-          <a:p>
-            <a:r>
-              <a:t>・ホワイトボードに 5 つの登場人物 (司会端末 / NGN-SIM / VNE / 892FJ / 検証用 PC) を</a:t>
-            </a:r>
-          </a:p>
-          <a:p>
-            <a:r>
-              <a:t>  書いておくと、受講者が「いまどこの話か」で迷わなくなる。</a:t>
+              <a:t>・**ipv6 unicast-routing を飛ばす人が必ず出る。**入っていないと演習 1 でアドレスが付かない。</a:t>
+            </a:r>
+          </a:p>
+          <a:p>
+            <a:r>
+              <a:t>・FastEthernet0 の switchport access vlan 1 も忘れやすい。PC が LAN に乗らない。</a:t>
+            </a:r>
+          </a:p>
+          <a:p>
+            <a:r>
+              <a:t>・write memory まで全員がやったか確認すること。</a:t>
             </a:r>
           </a:p>
         </p:txBody>
@@ -801,32 +1313,22 @@
           </a:p>
           <a:p>
             <a:r>
-              <a:t>・lab-mode.sh ra を叩いたら「いまラボは RA 方式です。ひかり電話なしのお客様と</a:t>
-            </a:r>
-          </a:p>
-          <a:p>
-            <a:r>
-              <a:t>  同じ状態です」と宣言してから、受講者に打たせること。</a:t>
-            </a:r>
-          </a:p>
-          <a:p>
-            <a:r>
-              <a:t>・全員のアドレスが付くまで待つ。1 人でも付かなければ次に進まない。</a:t>
-            </a:r>
-          </a:p>
-          <a:p>
-            <a:r>
-              <a:t>・付かない人がいたら: インタフェース名が違う (show ip interface brief で確認)、</a:t>
-            </a:r>
-          </a:p>
-          <a:p>
-            <a:r>
-              <a:t>  または ipv6 unicast-routing が入っていない。</a:t>
-            </a:r>
-          </a:p>
-          <a:p>
-            <a:r>
-              <a:t>・次の演習 2 との対比が本体なので、ここでは深追いせず 10 分で切ること。</a:t>
+              <a:t>・**固定 IP にするのは 892FJ の DHCP を避けるため**(サイクル 4 で実際に踏んだ)。</a:t>
+            </a:r>
+          </a:p>
+          <a:p>
+            <a:r>
+              <a:t>  「実務では DHCP を使います。今日は本題に集中するため固定にします」と一言添えること。</a:t>
+            </a:r>
+          </a:p>
+          <a:p>
+            <a:r>
+              <a:t>・社用 PC だと有線アダプタが無い人がいる。**事前に確認しておくこと。**</a:t>
+            </a:r>
+          </a:p>
+          <a:p>
+            <a:r>
+              <a:t>・解散前に必ず dhcp に戻させる。戻し忘れると席で社内ネットに繋がらなくなる。</a:t>
             </a:r>
           </a:p>
         </p:txBody>
@@ -901,7 +1403,7 @@
           </a:p>
           <a:p>
             <a:r>
-              <a:t>・lab-mode.sh pd を叩いたら「いま PD 方式にしました。ひかり電話ありのお客様と</a:t>
+              <a:t>・lab-mode.sh ra を叩いたら「いまラボは RA 方式です。ひかり電話なしのお客様と</a:t>
             </a:r>
           </a:p>
           <a:p>
@@ -911,17 +1413,32 @@
           </a:p>
           <a:p>
             <a:r>
-              <a:t>・**受講者に設定を触らせないこと。**「同じ操作をもう一度」が効きどころ。</a:t>
-            </a:r>
-          </a:p>
-          <a:p>
-            <a:r>
-              <a:t>・付かないことを全員が確認するまで待つ。ここで驚いてもらうのが目的。</a:t>
-            </a:r>
-          </a:p>
-          <a:p>
-            <a:r>
-              <a:t>・「なんで付かないと思いますか?」と 30 秒だけ考えさせてから次のページへ。</a:t>
+              <a:t>・**debug を先に仕掛けさせるのを忘れないこと。**後から打っても流れは見えない。</a:t>
+            </a:r>
+          </a:p>
+          <a:p>
+            <a:r>
+              <a:t>・全員のアドレスが付くまで待つ。1 人でも付かなければ次に進まない。</a:t>
+            </a:r>
+          </a:p>
+          <a:p>
+            <a:r>
+              <a:t>・付かない人がいたら: インタフェース名が違う (show ip interface brief で確認)、</a:t>
+            </a:r>
+          </a:p>
+          <a:p>
+            <a:r>
+              <a:t>  または ipv6 unicast-routing が入っていない。</a:t>
+            </a:r>
+          </a:p>
+          <a:p>
+            <a:r>
+              <a:t>・**undebug all を全員がやったか確認すること。**流しっぱなしだと以降が読めなくなる。</a:t>
+            </a:r>
+          </a:p>
+          <a:p>
+            <a:r>
+              <a:t>・次の演習 2 との対比が本体。ここでは深追いしない。</a:t>
             </a:r>
           </a:p>
         </p:txBody>
@@ -996,22 +1513,27 @@
           </a:p>
           <a:p>
             <a:r>
-              <a:t>・**ここは 5 分かけて説明すること。**今日の中心です。急がない。</a:t>
-            </a:r>
-          </a:p>
-          <a:p>
-            <a:r>
-              <a:t>・PD 方式では網が「プレフィックスは DHCPv6 で取りに来い」としか言わないので、</a:t>
-            </a:r>
-          </a:p>
-          <a:p>
-            <a:r>
-              <a:t>  autoconfig は材料が無くて何も作れない、という筋道を口で説明する。</a:t>
-            </a:r>
-          </a:p>
-          <a:p>
-            <a:r>
-              <a:t>・次ページで「RA 自体は届いている」を見せると効く。そこまでを 1 セットで。</a:t>
+              <a:t>・lab-mode.sh pd を叩いたら「いま PD 方式にしました。ひかり電話ありのお客様と</a:t>
+            </a:r>
+          </a:p>
+          <a:p>
+            <a:r>
+              <a:t>  同じ状態です」と宣言してから、受講者に打たせること。</a:t>
+            </a:r>
+          </a:p>
+          <a:p>
+            <a:r>
+              <a:t>・**受講者に設定を触らせないこと。**「同じ操作をもう一度」が効きどころ。</a:t>
+            </a:r>
+          </a:p>
+          <a:p>
+            <a:r>
+              <a:t>・付かないことを全員が確認するまで待つ。ここで驚いてもらうのが目的。</a:t>
+            </a:r>
+          </a:p>
+          <a:p>
+            <a:r>
+              <a:t>・「なんで付かないと思いますか?」と 30 秒だけ考えさせてから次のページへ。</a:t>
             </a:r>
           </a:p>
         </p:txBody>
@@ -1086,17 +1608,197 @@
           </a:p>
           <a:p>
             <a:r>
-              <a:t>・**全員が FAIL=0 に戻るまで解散しないこと。**戻し忘れが次回の演習を壊す。</a:t>
-            </a:r>
-          </a:p>
-          <a:p>
-            <a:r>
-              <a:t>・とくに 892FJ 側の adjust-mss と ip nat inside source の消し忘れが多い。</a:t>
-            </a:r>
-          </a:p>
-          <a:p>
-            <a:r>
-              <a:t>・lab-mode.sh status で「障害の注入: なし」を全員に見せてから締める。</a:t>
+              <a:t>・**ここは 5 分かけて説明すること。**今日の中心です。急がない。</a:t>
+            </a:r>
+          </a:p>
+          <a:p>
+            <a:r>
+              <a:t>・PD 方式では網が「プレフィックスは DHCPv6 で取りに来い」としか言わないので、</a:t>
+            </a:r>
+          </a:p>
+          <a:p>
+            <a:r>
+              <a:t>  autoconfig は材料が無くて何も作れない、という筋道を口で説明する。</a:t>
+            </a:r>
+          </a:p>
+          <a:p>
+            <a:r>
+              <a:t>・次ページで「RA 自体は届いている」を見せると効く。そこまでを 1 セットで。</a:t>
+            </a:r>
+          </a:p>
+        </p:txBody>
+      </p:sp>
+      <p:sp>
+        <p:nvSpPr>
+          <p:cNvPr id="4" name="Slide Number Placeholder 3"/>
+          <p:cNvSpPr>
+            <a:spLocks noGrp="1"/>
+          </p:cNvSpPr>
+          <p:nvPr>
+            <p:ph type="sldNum" idx="5" sz="quarter"/>
+          </p:nvPr>
+        </p:nvSpPr>
+        <p:spPr/>
+      </p:sp>
+    </p:spTree>
+  </p:cSld>
+  <p:clrMapOvr>
+    <a:masterClrMapping/>
+  </p:clrMapOvr>
+</p:notes>
+</file>
+
+<file path=ppt/notesSlides/notesSlide8.xml><?xml version="1.0" encoding="utf-8"?>
+<p:notes xmlns:a="http://schemas.openxmlformats.org/drawingml/2006/main" xmlns:p="http://schemas.openxmlformats.org/presentationml/2006/main" xmlns:r="http://schemas.openxmlformats.org/officeDocument/2006/relationships">
+  <p:cSld>
+    <p:spTree>
+      <p:nvGrpSpPr>
+        <p:cNvPr id="1" name=""/>
+        <p:cNvGrpSpPr/>
+        <p:nvPr/>
+      </p:nvGrpSpPr>
+      <p:grpSpPr>
+        <a:xfrm>
+          <a:off x="0" y="0"/>
+          <a:ext cx="0" cy="0"/>
+          <a:chOff x="0" y="0"/>
+          <a:chExt cx="0" cy="0"/>
+        </a:xfrm>
+      </p:grpSpPr>
+      <p:sp>
+        <p:nvSpPr>
+          <p:cNvPr id="2" name="Slide Image Placeholder 1"/>
+          <p:cNvSpPr>
+            <a:spLocks noGrp="1"/>
+          </p:cNvSpPr>
+          <p:nvPr>
+            <p:ph type="sldImg" idx="2"/>
+          </p:nvPr>
+        </p:nvSpPr>
+        <p:spPr/>
+      </p:sp>
+      <p:sp>
+        <p:nvSpPr>
+          <p:cNvPr id="3" name="Notes Placeholder 2"/>
+          <p:cNvSpPr>
+            <a:spLocks noGrp="1"/>
+          </p:cNvSpPr>
+          <p:nvPr>
+            <p:ph type="body" idx="3" sz="quarter"/>
+          </p:nvPr>
+        </p:nvSpPr>
+        <p:spPr/>
+        <p:txBody>
+          <a:bodyPr/>
+          <a:lstStyle/>
+          <a:p>
+            <a:r>
+              <a:t>【司会へ】</a:t>
+            </a:r>
+          </a:p>
+          <a:p>
+            <a:r>
+              <a:t>・**show ipv6 routers が「受信した RA」の一覧。**ここを強調すること。</a:t>
+            </a:r>
+          </a:p>
+          <a:p>
+            <a:r>
+              <a:t>・よく似た show ipv6 interface | include Router advertisement は</a:t>
+            </a:r>
+          </a:p>
+          <a:p>
+            <a:r>
+              <a:t>  **自分が送る RA の設定値**なので、受信の確認には使えない。間違えやすい。</a:t>
+            </a:r>
+          </a:p>
+          <a:p>
+            <a:r>
+              <a:t>  (しかも 0-3 で ipv6 nd ra suppress all を入れているので、そもそも出ない)</a:t>
+            </a:r>
+          </a:p>
+          <a:p>
+            <a:r>
+              <a:t>・この症状は自宅の検証でも実際に踏んだ。原因に辿り着くまで時間を使った、と添えると効く。</a:t>
+            </a:r>
+          </a:p>
+        </p:txBody>
+      </p:sp>
+      <p:sp>
+        <p:nvSpPr>
+          <p:cNvPr id="4" name="Slide Number Placeholder 3"/>
+          <p:cNvSpPr>
+            <a:spLocks noGrp="1"/>
+          </p:cNvSpPr>
+          <p:nvPr>
+            <p:ph type="sldNum" idx="5" sz="quarter"/>
+          </p:nvPr>
+        </p:nvSpPr>
+        <p:spPr/>
+      </p:sp>
+    </p:spTree>
+  </p:cSld>
+  <p:clrMapOvr>
+    <a:masterClrMapping/>
+  </p:clrMapOvr>
+</p:notes>
+</file>
+
+<file path=ppt/notesSlides/notesSlide9.xml><?xml version="1.0" encoding="utf-8"?>
+<p:notes xmlns:a="http://schemas.openxmlformats.org/drawingml/2006/main" xmlns:p="http://schemas.openxmlformats.org/presentationml/2006/main" xmlns:r="http://schemas.openxmlformats.org/officeDocument/2006/relationships">
+  <p:cSld>
+    <p:spTree>
+      <p:nvGrpSpPr>
+        <p:cNvPr id="1" name=""/>
+        <p:cNvGrpSpPr/>
+        <p:nvPr/>
+      </p:nvGrpSpPr>
+      <p:grpSpPr>
+        <a:xfrm>
+          <a:off x="0" y="0"/>
+          <a:ext cx="0" cy="0"/>
+          <a:chOff x="0" y="0"/>
+          <a:chExt cx="0" cy="0"/>
+        </a:xfrm>
+      </p:grpSpPr>
+      <p:sp>
+        <p:nvSpPr>
+          <p:cNvPr id="2" name="Slide Image Placeholder 1"/>
+          <p:cNvSpPr>
+            <a:spLocks noGrp="1"/>
+          </p:cNvSpPr>
+          <p:nvPr>
+            <p:ph type="sldImg" idx="2"/>
+          </p:nvPr>
+        </p:nvSpPr>
+        <p:spPr/>
+      </p:sp>
+      <p:sp>
+        <p:nvSpPr>
+          <p:cNvPr id="3" name="Notes Placeholder 2"/>
+          <p:cNvSpPr>
+            <a:spLocks noGrp="1"/>
+          </p:cNvSpPr>
+          <p:nvPr>
+            <p:ph type="body" idx="3" sz="quarter"/>
+          </p:nvPr>
+        </p:nvSpPr>
+        <p:spPr/>
+        <p:txBody>
+          <a:bodyPr/>
+          <a:lstStyle/>
+          <a:p>
+            <a:r>
+              <a:t>【司会へ】</a:t>
+            </a:r>
+          </a:p>
+          <a:p>
+            <a:r>
+              <a:t>・**この表を演習 2 の説明の中で読むこと。**別枠の時間は取らない。</a:t>
+            </a:r>
+          </a:p>
+          <a:p>
+            <a:r>
+              <a:t>・読んだら ./lab-mode.sh ra で RA 方式に戻してから第2部へ進む。</a:t>
             </a:r>
           </a:p>
         </p:txBody>
@@ -4183,7 +4885,23 @@
                 </a:solidFill>
                 <a:latin typeface="Meiryo UI"/>
               </a:rPr>
-              <a:t>対象: 説明会を受けた人 / 時間: 150 分 (休憩 10 分を含む)</a:t>
+              <a:t>対象: 説明会を受けた人 / 時間: 150 分 (休憩 10 分を含む。時間配分は仮案です)</a:t>
+            </a:r>
+          </a:p>
+          <a:p>
+            <a:pPr algn="l">
+              <a:spcAft>
+                <a:spcPts val="800"/>
+              </a:spcAft>
+            </a:pPr>
+            <a:r>
+              <a:rPr sz="1400" b="0">
+                <a:solidFill>
+                  <a:srgbClr val="555555"/>
+                </a:solidFill>
+                <a:latin typeface="Meiryo UI"/>
+              </a:rPr>
+              <a:t>使う端末: 実機の Cisco 892FJ (コンソール接続) と Windows の検証用 PC</a:t>
             </a:r>
           </a:p>
           <a:p>
@@ -4414,7 +5132,7 @@
                 </a:solidFill>
                 <a:latin typeface="Meiryo UI"/>
               </a:rPr>
-              <a:t>【あなた】さっきと まったく同じ操作を もう一度</a:t>
+              <a:t>【あなた】さっきと まったく同じ操作を もう一度 (debug も同じように)</a:t>
             </a:r>
           </a:p>
           <a:p>
@@ -4430,6 +5148,22 @@
                 </a:solidFill>
                 <a:latin typeface="Consolas"/>
               </a:rPr>
+              <a:t>CPE# debug ipv6 nd</a:t>
+            </a:r>
+          </a:p>
+          <a:p>
+            <a:pPr lvl="1" algn="l">
+              <a:spcAft>
+                <a:spcPts val="600"/>
+              </a:spcAft>
+            </a:pPr>
+            <a:r>
+              <a:rPr sz="1700" b="0">
+                <a:solidFill>
+                  <a:srgbClr val="0B6040"/>
+                </a:solidFill>
+                <a:latin typeface="Consolas"/>
+              </a:rPr>
               <a:t>CPE(config-if)# shutdown</a:t>
             </a:r>
           </a:p>
@@ -4447,6 +5181,22 @@
                 <a:latin typeface="Consolas"/>
               </a:rPr>
               <a:t>CPE(config-if)# no shutdown</a:t>
+            </a:r>
+          </a:p>
+          <a:p>
+            <a:pPr lvl="1" algn="l">
+              <a:spcAft>
+                <a:spcPts val="600"/>
+              </a:spcAft>
+            </a:pPr>
+            <a:r>
+              <a:rPr sz="1700" b="0">
+                <a:solidFill>
+                  <a:srgbClr val="0B6040"/>
+                </a:solidFill>
+                <a:latin typeface="Consolas"/>
+              </a:rPr>
+              <a:t>CPE# undebug all</a:t>
             </a:r>
           </a:p>
           <a:p>
@@ -4989,7 +5739,7 @@
                 </a:solidFill>
                 <a:latin typeface="Meiryo UI"/>
               </a:rPr>
-              <a:t>RA 自体は届いています</a:t>
+              <a:t>RA 自体は届いています。さっきのデバッグ出力を見比べてください</a:t>
             </a:r>
           </a:p>
           <a:p>
@@ -5005,7 +5755,7 @@
                 </a:solidFill>
                 <a:latin typeface="Consolas"/>
               </a:rPr>
-              <a:t>CPE# show ipv6 interface GigabitEthernet0 | include Router advertisement</a:t>
+              <a:t>ICMPv6-ND: Sending RS on GigabitEthernet0</a:t>
             </a:r>
           </a:p>
           <a:p>
@@ -5021,7 +5771,23 @@
                 </a:solidFill>
                 <a:latin typeface="Consolas"/>
               </a:rPr>
-              <a:t>  ND router advertisements are sent every 200 seconds</a:t>
+              <a:t>ICMPv6-ND: Received RA from FE80::AC:FF:FE00:1   ← RA は届いている</a:t>
+            </a:r>
+          </a:p>
+          <a:p>
+            <a:pPr lvl="1" algn="l">
+              <a:spcAft>
+                <a:spcPts val="600"/>
+              </a:spcAft>
+            </a:pPr>
+            <a:r>
+              <a:rPr sz="1700" b="0">
+                <a:solidFill>
+                  <a:srgbClr val="0B6040"/>
+                </a:solidFill>
+                <a:latin typeface="Consolas"/>
+              </a:rPr>
+              <a:t>                                          ← ★ Prefix の行が無い</a:t>
             </a:r>
           </a:p>
           <a:p>
@@ -5037,6 +5803,70 @@
                 </a:solidFill>
                 <a:latin typeface="Meiryo UI"/>
               </a:rPr>
+              <a:t>消えたのは Prefix ... autoconfig の 1 行だけです</a:t>
+            </a:r>
+          </a:p>
+          <a:p>
+            <a:pPr lvl="1" algn="l">
+              <a:spcAft>
+                <a:spcPts val="600"/>
+              </a:spcAft>
+            </a:pPr>
+            <a:r>
+              <a:rPr sz="1700" b="0">
+                <a:solidFill>
+                  <a:srgbClr val="555555"/>
+                </a:solidFill>
+                <a:latin typeface="Meiryo UI"/>
+              </a:rPr>
+              <a:t>受け取ったルータも、ちゃんと見えています</a:t>
+            </a:r>
+          </a:p>
+          <a:p>
+            <a:pPr lvl="1" algn="l">
+              <a:spcAft>
+                <a:spcPts val="600"/>
+              </a:spcAft>
+            </a:pPr>
+            <a:r>
+              <a:rPr sz="1700" b="0">
+                <a:solidFill>
+                  <a:srgbClr val="0B6040"/>
+                </a:solidFill>
+                <a:latin typeface="Consolas"/>
+              </a:rPr>
+              <a:t>CPE# show ipv6 routers</a:t>
+            </a:r>
+          </a:p>
+          <a:p>
+            <a:pPr lvl="1" algn="l">
+              <a:spcAft>
+                <a:spcPts val="600"/>
+              </a:spcAft>
+            </a:pPr>
+            <a:r>
+              <a:rPr sz="1700" b="0">
+                <a:solidFill>
+                  <a:srgbClr val="0B6040"/>
+                </a:solidFill>
+                <a:latin typeface="Consolas"/>
+              </a:rPr>
+              <a:t>  Router FE80::AC:FF:FE00:1 on GigabitEthernet0, last update 0 min</a:t>
+            </a:r>
+          </a:p>
+          <a:p>
+            <a:pPr algn="l">
+              <a:spcAft>
+                <a:spcPts val="1000"/>
+              </a:spcAft>
+            </a:pPr>
+            <a:r>
+              <a:rPr sz="2000" b="1">
+                <a:solidFill>
+                  <a:srgbClr val="1F3355"/>
+                </a:solidFill>
+                <a:latin typeface="Meiryo UI"/>
+              </a:rPr>
               <a:t>つまり現場ではこう見えます</a:t>
             </a:r>
           </a:p>
@@ -5085,55 +5915,7 @@
                 </a:solidFill>
                 <a:latin typeface="Meiryo UI"/>
               </a:rPr>
-              <a:t>対処</a:t>
-            </a:r>
-          </a:p>
-          <a:p>
-            <a:pPr lvl="1" algn="l">
-              <a:spcAft>
-                <a:spcPts val="600"/>
-              </a:spcAft>
-            </a:pPr>
-            <a:r>
-              <a:rPr sz="1700" b="0">
-                <a:solidFill>
-                  <a:srgbClr val="555555"/>
-                </a:solidFill>
-                <a:latin typeface="Meiryo UI"/>
-              </a:rPr>
-              <a:t>PD 方式のお客様には DHCPv6-PD に対応した CPE が要ります</a:t>
-            </a:r>
-          </a:p>
-          <a:p>
-            <a:pPr lvl="1" algn="l">
-              <a:spcAft>
-                <a:spcPts val="600"/>
-              </a:spcAft>
-            </a:pPr>
-            <a:r>
-              <a:rPr sz="1700" b="0">
-                <a:solidFill>
-                  <a:srgbClr val="555555"/>
-                </a:solidFill>
-                <a:latin typeface="Meiryo UI"/>
-              </a:rPr>
-              <a:t>autoconfig だけの設定では成立しません</a:t>
-            </a:r>
-          </a:p>
-          <a:p>
-            <a:pPr algn="l">
-              <a:spcAft>
-                <a:spcPts val="1000"/>
-              </a:spcAft>
-            </a:pPr>
-            <a:r>
-              <a:rPr sz="2000" b="0">
-                <a:solidFill>
-                  <a:srgbClr val="1F3355"/>
-                </a:solidFill>
-                <a:latin typeface="Meiryo UI"/>
-              </a:rPr>
-              <a:t>※ この症状は自宅の検証で実際に踏みました。原因に辿り着くまで時間を使いました</a:t>
+              <a:t>対処: PD 方式のお客様には DHCPv6-PD に対応した CPE が要ります</a:t>
             </a:r>
           </a:p>
         </p:txBody>
@@ -5889,6 +6671,529 @@
         </p:nvSpPr>
         <p:spPr>
           <a:xfrm>
+            <a:off x="502920" y="274320"/>
+            <a:ext cx="11155680" cy="731520"/>
+          </a:xfrm>
+          <a:prstGeom prst="rect">
+            <a:avLst/>
+          </a:prstGeom>
+          <a:noFill/>
+        </p:spPr>
+        <p:txBody>
+          <a:bodyPr wrap="square">
+            <a:spAutoFit/>
+          </a:bodyPr>
+          <a:lstStyle/>
+          <a:p>
+            <a:pPr algn="l"/>
+            <a:r>
+              <a:rPr sz="2600" b="1">
+                <a:solidFill>
+                  <a:srgbClr val="1F3355"/>
+                </a:solidFill>
+                <a:latin typeface="Meiryo UI"/>
+              </a:rPr>
+              <a:t>第1部のまとめ — 見るべきは「RA が来たか」ではありません</a:t>
+            </a:r>
+          </a:p>
+        </p:txBody>
+      </p:sp>
+      <p:graphicFrame>
+        <p:nvGraphicFramePr>
+          <p:cNvPr id="3" name="Table 2"/>
+          <p:cNvGraphicFramePr>
+            <a:graphicFrameLocks noGrp="1"/>
+          </p:cNvGraphicFramePr>
+          <p:nvPr/>
+        </p:nvGraphicFramePr>
+        <p:xfrm>
+          <a:off x="502920" y="1143000"/>
+          <a:ext cx="10789920" cy="1243584"/>
+        </p:xfrm>
+        <a:graphic>
+          <a:graphicData uri="http://schemas.openxmlformats.org/drawingml/2006/table">
+            <a:tbl>
+              <a:tblPr>
+                <a:tableStyleId>{5C22544A-7EE6-4342-B048-85BDC9FD1C3A}</a:tableStyleId>
+              </a:tblPr>
+              <a:tblGrid>
+                <a:gridCol w="3108960"/>
+                <a:gridCol w="3840480"/>
+                <a:gridCol w="3840480"/>
+              </a:tblGrid>
+              <a:tr h="310896">
+                <a:tc>
+                  <a:txBody>
+                    <a:bodyPr/>
+                    <a:lstStyle/>
+                    <a:p>
+                      <a:pPr algn="l"/>
+                      <a:r>
+                        <a:rPr sz="1500" b="1">
+                          <a:solidFill>
+                            <a:srgbClr val="FFFFFF"/>
+                          </a:solidFill>
+                          <a:latin typeface="Meiryo UI"/>
+                        </a:rPr>
+                        <a:t/>
+                      </a:r>
+                    </a:p>
+                  </a:txBody>
+                  <a:tcPr>
+                    <a:solidFill>
+                      <a:srgbClr val="1F3355"/>
+                    </a:solidFill>
+                  </a:tcPr>
+                </a:tc>
+                <a:tc>
+                  <a:txBody>
+                    <a:bodyPr/>
+                    <a:lstStyle/>
+                    <a:p>
+                      <a:pPr algn="l"/>
+                      <a:r>
+                        <a:rPr sz="1500" b="1">
+                          <a:solidFill>
+                            <a:srgbClr val="FFFFFF"/>
+                          </a:solidFill>
+                          <a:latin typeface="Meiryo UI"/>
+                        </a:rPr>
+                        <a:t>演習 1 (RA 方式)</a:t>
+                      </a:r>
+                    </a:p>
+                  </a:txBody>
+                  <a:tcPr>
+                    <a:solidFill>
+                      <a:srgbClr val="1F3355"/>
+                    </a:solidFill>
+                  </a:tcPr>
+                </a:tc>
+                <a:tc>
+                  <a:txBody>
+                    <a:bodyPr/>
+                    <a:lstStyle/>
+                    <a:p>
+                      <a:pPr algn="l"/>
+                      <a:r>
+                        <a:rPr sz="1500" b="1">
+                          <a:solidFill>
+                            <a:srgbClr val="FFFFFF"/>
+                          </a:solidFill>
+                          <a:latin typeface="Meiryo UI"/>
+                        </a:rPr>
+                        <a:t>演習 2 (PD 方式)</a:t>
+                      </a:r>
+                    </a:p>
+                  </a:txBody>
+                  <a:tcPr>
+                    <a:solidFill>
+                      <a:srgbClr val="1F3355"/>
+                    </a:solidFill>
+                  </a:tcPr>
+                </a:tc>
+              </a:tr>
+              <a:tr h="310896">
+                <a:tc>
+                  <a:txBody>
+                    <a:bodyPr/>
+                    <a:lstStyle/>
+                    <a:p>
+                      <a:pPr algn="l"/>
+                      <a:r>
+                        <a:rPr sz="1400" b="0">
+                          <a:solidFill>
+                            <a:srgbClr val="1F3355"/>
+                          </a:solidFill>
+                          <a:latin typeface="Meiryo UI"/>
+                        </a:rPr>
+                        <a:t>Received RA</a:t>
+                      </a:r>
+                    </a:p>
+                  </a:txBody>
+                  <a:tcPr>
+                    <a:solidFill>
+                      <a:srgbClr val="FFFFFF"/>
+                    </a:solidFill>
+                  </a:tcPr>
+                </a:tc>
+                <a:tc>
+                  <a:txBody>
+                    <a:bodyPr/>
+                    <a:lstStyle/>
+                    <a:p>
+                      <a:pPr algn="l"/>
+                      <a:r>
+                        <a:rPr sz="1400" b="0">
+                          <a:solidFill>
+                            <a:srgbClr val="1F3355"/>
+                          </a:solidFill>
+                          <a:latin typeface="Meiryo UI"/>
+                        </a:rPr>
+                        <a:t>出る</a:t>
+                      </a:r>
+                    </a:p>
+                  </a:txBody>
+                  <a:tcPr>
+                    <a:solidFill>
+                      <a:srgbClr val="FFFFFF"/>
+                    </a:solidFill>
+                  </a:tcPr>
+                </a:tc>
+                <a:tc>
+                  <a:txBody>
+                    <a:bodyPr/>
+                    <a:lstStyle/>
+                    <a:p>
+                      <a:pPr algn="l"/>
+                      <a:r>
+                        <a:rPr sz="1400" b="0">
+                          <a:solidFill>
+                            <a:srgbClr val="1F3355"/>
+                          </a:solidFill>
+                          <a:latin typeface="Meiryo UI"/>
+                        </a:rPr>
+                        <a:t>出る ← ここが罠</a:t>
+                      </a:r>
+                    </a:p>
+                  </a:txBody>
+                  <a:tcPr>
+                    <a:solidFill>
+                      <a:srgbClr val="FFFFFF"/>
+                    </a:solidFill>
+                  </a:tcPr>
+                </a:tc>
+              </a:tr>
+              <a:tr h="310896">
+                <a:tc>
+                  <a:txBody>
+                    <a:bodyPr/>
+                    <a:lstStyle/>
+                    <a:p>
+                      <a:pPr algn="l"/>
+                      <a:r>
+                        <a:rPr sz="1400" b="0">
+                          <a:solidFill>
+                            <a:srgbClr val="1F3355"/>
+                          </a:solidFill>
+                          <a:latin typeface="Meiryo UI"/>
+                        </a:rPr>
+                        <a:t>Prefix ... autoconfig</a:t>
+                      </a:r>
+                    </a:p>
+                  </a:txBody>
+                  <a:tcPr>
+                    <a:solidFill>
+                      <a:srgbClr val="F2F6FA"/>
+                    </a:solidFill>
+                  </a:tcPr>
+                </a:tc>
+                <a:tc>
+                  <a:txBody>
+                    <a:bodyPr/>
+                    <a:lstStyle/>
+                    <a:p>
+                      <a:pPr algn="l"/>
+                      <a:r>
+                        <a:rPr sz="1400" b="0">
+                          <a:solidFill>
+                            <a:srgbClr val="1F3355"/>
+                          </a:solidFill>
+                          <a:latin typeface="Meiryo UI"/>
+                        </a:rPr>
+                        <a:t>出る</a:t>
+                      </a:r>
+                    </a:p>
+                  </a:txBody>
+                  <a:tcPr>
+                    <a:solidFill>
+                      <a:srgbClr val="F2F6FA"/>
+                    </a:solidFill>
+                  </a:tcPr>
+                </a:tc>
+                <a:tc>
+                  <a:txBody>
+                    <a:bodyPr/>
+                    <a:lstStyle/>
+                    <a:p>
+                      <a:pPr algn="l"/>
+                      <a:r>
+                        <a:rPr sz="1400" b="0">
+                          <a:solidFill>
+                            <a:srgbClr val="1F3355"/>
+                          </a:solidFill>
+                          <a:latin typeface="Meiryo UI"/>
+                        </a:rPr>
+                        <a:t>出ない ← 本当の差はここ</a:t>
+                      </a:r>
+                    </a:p>
+                  </a:txBody>
+                  <a:tcPr>
+                    <a:solidFill>
+                      <a:srgbClr val="F2F6FA"/>
+                    </a:solidFill>
+                  </a:tcPr>
+                </a:tc>
+              </a:tr>
+              <a:tr h="310896">
+                <a:tc>
+                  <a:txBody>
+                    <a:bodyPr/>
+                    <a:lstStyle/>
+                    <a:p>
+                      <a:pPr algn="l"/>
+                      <a:r>
+                        <a:rPr sz="1400" b="0">
+                          <a:solidFill>
+                            <a:srgbClr val="1F3355"/>
+                          </a:solidFill>
+                          <a:latin typeface="Meiryo UI"/>
+                        </a:rPr>
+                        <a:t>アドレス</a:t>
+                      </a:r>
+                    </a:p>
+                  </a:txBody>
+                  <a:tcPr>
+                    <a:solidFill>
+                      <a:srgbClr val="FFFFFF"/>
+                    </a:solidFill>
+                  </a:tcPr>
+                </a:tc>
+                <a:tc>
+                  <a:txBody>
+                    <a:bodyPr/>
+                    <a:lstStyle/>
+                    <a:p>
+                      <a:pPr algn="l"/>
+                      <a:r>
+                        <a:rPr sz="1400" b="0">
+                          <a:solidFill>
+                            <a:srgbClr val="1F3355"/>
+                          </a:solidFill>
+                          <a:latin typeface="Meiryo UI"/>
+                        </a:rPr>
+                        <a:t>付く</a:t>
+                      </a:r>
+                    </a:p>
+                  </a:txBody>
+                  <a:tcPr>
+                    <a:solidFill>
+                      <a:srgbClr val="FFFFFF"/>
+                    </a:solidFill>
+                  </a:tcPr>
+                </a:tc>
+                <a:tc>
+                  <a:txBody>
+                    <a:bodyPr/>
+                    <a:lstStyle/>
+                    <a:p>
+                      <a:pPr algn="l"/>
+                      <a:r>
+                        <a:rPr sz="1400" b="0">
+                          <a:solidFill>
+                            <a:srgbClr val="1F3355"/>
+                          </a:solidFill>
+                          <a:latin typeface="Meiryo UI"/>
+                        </a:rPr>
+                        <a:t>付かない</a:t>
+                      </a:r>
+                    </a:p>
+                  </a:txBody>
+                  <a:tcPr>
+                    <a:solidFill>
+                      <a:srgbClr val="FFFFFF"/>
+                    </a:solidFill>
+                  </a:tcPr>
+                </a:tc>
+              </a:tr>
+            </a:tbl>
+          </a:graphicData>
+        </a:graphic>
+      </p:graphicFrame>
+      <p:sp>
+        <p:nvSpPr>
+          <p:cNvPr id="4" name="TextBox 3"/>
+          <p:cNvSpPr txBox="1"/>
+          <p:nvPr/>
+        </p:nvSpPr>
+        <p:spPr>
+          <a:xfrm>
+            <a:off x="502920" y="2642616"/>
+            <a:ext cx="11155680" cy="548640"/>
+          </a:xfrm>
+          <a:prstGeom prst="rect">
+            <a:avLst/>
+          </a:prstGeom>
+          <a:noFill/>
+        </p:spPr>
+        <p:txBody>
+          <a:bodyPr wrap="square">
+            <a:spAutoFit/>
+          </a:bodyPr>
+          <a:lstStyle/>
+          <a:p>
+            <a:pPr algn="l"/>
+            <a:r>
+              <a:rPr sz="1200" b="0">
+                <a:solidFill>
+                  <a:srgbClr val="007ACC"/>
+                </a:solidFill>
+                <a:latin typeface="Meiryo UI"/>
+              </a:rPr>
+              <a:t>現場では「RA が来ているか」だけを見て『網は正常』と判断しがちです。見るべきは Prefix ... autoconfig の 1 行でした</a:t>
+            </a:r>
+          </a:p>
+        </p:txBody>
+      </p:sp>
+    </p:spTree>
+  </p:cSld>
+  <p:clrMapOvr>
+    <a:masterClrMapping/>
+  </p:clrMapOvr>
+</p:sld>
+</file>
+
+<file path=ppt/slides/slide16.xml><?xml version="1.0" encoding="utf-8"?>
+<p:sld xmlns:a="http://schemas.openxmlformats.org/drawingml/2006/main" xmlns:p="http://schemas.openxmlformats.org/presentationml/2006/main" xmlns:r="http://schemas.openxmlformats.org/officeDocument/2006/relationships">
+  <p:cSld>
+    <p:spTree>
+      <p:nvGrpSpPr>
+        <p:cNvPr id="1" name=""/>
+        <p:cNvGrpSpPr/>
+        <p:nvPr/>
+      </p:nvGrpSpPr>
+      <p:grpSpPr/>
+      <p:sp>
+        <p:nvSpPr>
+          <p:cNvPr id="2" name="Rectangle 1"/>
+          <p:cNvSpPr/>
+          <p:nvPr/>
+        </p:nvSpPr>
+        <p:spPr>
+          <a:xfrm>
+            <a:off x="0" y="0"/>
+            <a:ext cx="12191695" cy="6858000"/>
+          </a:xfrm>
+          <a:prstGeom prst="rect">
+            <a:avLst/>
+          </a:prstGeom>
+          <a:solidFill>
+            <a:srgbClr val="1F3355"/>
+          </a:solidFill>
+          <a:ln>
+            <a:noFill/>
+          </a:ln>
+        </p:spPr>
+        <p:style>
+          <a:lnRef idx="1">
+            <a:schemeClr val="accent1"/>
+          </a:lnRef>
+          <a:fillRef idx="3">
+            <a:schemeClr val="accent1"/>
+          </a:fillRef>
+          <a:effectRef idx="2">
+            <a:schemeClr val="accent1"/>
+          </a:effectRef>
+          <a:fontRef idx="minor">
+            <a:schemeClr val="lt1"/>
+          </a:fontRef>
+        </p:style>
+        <p:txBody>
+          <a:bodyPr rtlCol="0" anchor="ctr"/>
+          <a:lstStyle/>
+          <a:p>
+            <a:pPr algn="ctr"/>
+          </a:p>
+        </p:txBody>
+      </p:sp>
+      <p:sp>
+        <p:nvSpPr>
+          <p:cNvPr id="3" name="TextBox 2"/>
+          <p:cNvSpPr txBox="1"/>
+          <p:nvPr/>
+        </p:nvSpPr>
+        <p:spPr>
+          <a:xfrm>
+            <a:off x="914400" y="2194560"/>
+            <a:ext cx="10332720" cy="2377440"/>
+          </a:xfrm>
+          <a:prstGeom prst="rect">
+            <a:avLst/>
+          </a:prstGeom>
+          <a:noFill/>
+        </p:spPr>
+        <p:txBody>
+          <a:bodyPr wrap="square">
+            <a:spAutoFit/>
+          </a:bodyPr>
+          <a:lstStyle/>
+          <a:p>
+            <a:pPr algn="l"/>
+            <a:r>
+              <a:rPr sz="2000" b="1">
+                <a:solidFill>
+                  <a:srgbClr val="7FB8E0"/>
+                </a:solidFill>
+                <a:latin typeface="Meiryo UI"/>
+              </a:rPr>
+              <a:t>第2部</a:t>
+            </a:r>
+          </a:p>
+          <a:p>
+            <a:pPr algn="l"/>
+            <a:r>
+              <a:rPr sz="3600" b="1">
+                <a:solidFill>
+                  <a:srgbClr val="FFFFFF"/>
+                </a:solidFill>
+                <a:latin typeface="Meiryo UI"/>
+              </a:rPr>
+              <a:t>IPv4 を通す</a:t>
+            </a:r>
+          </a:p>
+          <a:p>
+            <a:pPr algn="l">
+              <a:spcBef>
+                <a:spcPts val="1600"/>
+              </a:spcBef>
+            </a:pPr>
+            <a:r>
+              <a:rPr sz="1600" b="0">
+                <a:solidFill>
+                  <a:srgbClr val="D5E5F2"/>
+                </a:solidFill>
+                <a:latin typeface="Meiryo UI"/>
+              </a:rPr>
+              <a:t>ゴール: 40 分。IPv6 は通っていますが IPv4 はまだ通りません</a:t>
+            </a:r>
+          </a:p>
+        </p:txBody>
+      </p:sp>
+    </p:spTree>
+  </p:cSld>
+  <p:clrMapOvr>
+    <a:masterClrMapping/>
+  </p:clrMapOvr>
+</p:sld>
+</file>
+
+<file path=ppt/slides/slide17.xml><?xml version="1.0" encoding="utf-8"?>
+<p:sld xmlns:a="http://schemas.openxmlformats.org/drawingml/2006/main" xmlns:p="http://schemas.openxmlformats.org/presentationml/2006/main" xmlns:r="http://schemas.openxmlformats.org/officeDocument/2006/relationships">
+  <p:cSld>
+    <p:spTree>
+      <p:nvGrpSpPr>
+        <p:cNvPr id="1" name=""/>
+        <p:cNvGrpSpPr/>
+        <p:nvPr/>
+      </p:nvGrpSpPr>
+      <p:grpSpPr/>
+      <p:sp>
+        <p:nvSpPr>
+          <p:cNvPr id="2" name="TextBox 1"/>
+          <p:cNvSpPr txBox="1"/>
+          <p:nvPr/>
+        </p:nvSpPr>
+        <p:spPr>
+          <a:xfrm>
             <a:off x="502920" y="320040"/>
             <a:ext cx="11155680" cy="822960"/>
           </a:xfrm>
@@ -5911,7 +7216,7 @@
                 </a:solidFill>
                 <a:latin typeface="Meiryo UI"/>
               </a:rPr>
-              <a:t>演習 3: RA を実際に目で見る (10 分)</a:t>
+              <a:t>演習 3: DS-Lite のトンネルを張る (20 分)</a:t>
             </a:r>
           </a:p>
         </p:txBody>
@@ -5983,473 +7288,6 @@
           <a:p>
             <a:pPr algn="l">
               <a:spcAft>
-                <a:spcPts val="800"/>
-              </a:spcAft>
-            </a:pPr>
-            <a:r>
-              <a:rPr sz="1800" b="0">
-                <a:solidFill>
-                  <a:srgbClr val="0B6040"/>
-                </a:solidFill>
-                <a:latin typeface="Consolas"/>
-              </a:rPr>
-              <a:t>【司会】 ./lab-mode.sh ra        ← RA 方式に戻す</a:t>
-            </a:r>
-          </a:p>
-          <a:p>
-            <a:pPr algn="l">
-              <a:spcAft>
-                <a:spcPts val="800"/>
-              </a:spcAft>
-            </a:pPr>
-            <a:r>
-              <a:rPr sz="1800" b="1">
-                <a:solidFill>
-                  <a:srgbClr val="1F3355"/>
-                </a:solidFill>
-                <a:latin typeface="Meiryo UI"/>
-              </a:rPr>
-              <a:t>【あなた】892FJ で</a:t>
-            </a:r>
-          </a:p>
-          <a:p>
-            <a:pPr lvl="1" algn="l">
-              <a:spcAft>
-                <a:spcPts val="400"/>
-              </a:spcAft>
-            </a:pPr>
-            <a:r>
-              <a:rPr sz="1500" b="0">
-                <a:solidFill>
-                  <a:srgbClr val="0B6040"/>
-                </a:solidFill>
-                <a:latin typeface="Consolas"/>
-              </a:rPr>
-              <a:t>CPE# debug ipv6 nd</a:t>
-            </a:r>
-          </a:p>
-          <a:p>
-            <a:pPr lvl="1" algn="l">
-              <a:spcAft>
-                <a:spcPts val="400"/>
-              </a:spcAft>
-            </a:pPr>
-            <a:r>
-              <a:rPr sz="1500" b="0">
-                <a:solidFill>
-                  <a:srgbClr val="0B6040"/>
-                </a:solidFill>
-                <a:latin typeface="Consolas"/>
-              </a:rPr>
-              <a:t>  (そのあと shutdown / no shutdown)</a:t>
-            </a:r>
-          </a:p>
-          <a:p>
-            <a:pPr algn="l">
-              <a:spcAft>
-                <a:spcPts val="800"/>
-              </a:spcAft>
-            </a:pPr>
-            <a:r>
-              <a:rPr sz="1800" b="1">
-                <a:solidFill>
-                  <a:srgbClr val="1F3355"/>
-                </a:solidFill>
-                <a:latin typeface="Meiryo UI"/>
-              </a:rPr>
-              <a:t>出てくる出力 — 演習 1 の 3 段階がそのまま流れます</a:t>
-            </a:r>
-          </a:p>
-          <a:p>
-            <a:pPr lvl="1" algn="l">
-              <a:spcAft>
-                <a:spcPts val="400"/>
-              </a:spcAft>
-            </a:pPr>
-            <a:r>
-              <a:rPr sz="1500" b="0">
-                <a:solidFill>
-                  <a:srgbClr val="0B6040"/>
-                </a:solidFill>
-                <a:latin typeface="Consolas"/>
-              </a:rPr>
-              <a:t>ICMPv6-ND: Sending RS on GigabitEthernet0</a:t>
-            </a:r>
-          </a:p>
-          <a:p>
-            <a:pPr lvl="1" algn="l">
-              <a:spcAft>
-                <a:spcPts val="400"/>
-              </a:spcAft>
-            </a:pPr>
-            <a:r>
-              <a:rPr sz="1500" b="0">
-                <a:solidFill>
-                  <a:srgbClr val="0B6040"/>
-                </a:solidFill>
-                <a:latin typeface="Consolas"/>
-              </a:rPr>
-              <a:t>ICMPv6-ND: Received RA from FE80::AC:FF:FE00:1</a:t>
-            </a:r>
-          </a:p>
-          <a:p>
-            <a:pPr lvl="1" algn="l">
-              <a:spcAft>
-                <a:spcPts val="400"/>
-              </a:spcAft>
-            </a:pPr>
-            <a:r>
-              <a:rPr sz="1500" b="0">
-                <a:solidFill>
-                  <a:srgbClr val="0B6040"/>
-                </a:solidFill>
-                <a:latin typeface="Consolas"/>
-              </a:rPr>
-              <a:t>ICMPv6-ND:   Prefix 2001:DB8:1014:300::/64 onlink autoconfig</a:t>
-            </a:r>
-          </a:p>
-          <a:p>
-            <a:pPr lvl="1" algn="l">
-              <a:spcAft>
-                <a:spcPts val="400"/>
-              </a:spcAft>
-            </a:pPr>
-            <a:r>
-              <a:rPr sz="1500" b="0">
-                <a:solidFill>
-                  <a:srgbClr val="0B6040"/>
-                </a:solidFill>
-                <a:latin typeface="Consolas"/>
-              </a:rPr>
-              <a:t>ICMPv6-ND: Autoconfiguring address 2001:DB8:1014:300:E6AA:...</a:t>
-            </a:r>
-          </a:p>
-          <a:p>
-            <a:pPr algn="l">
-              <a:spcAft>
-                <a:spcPts val="800"/>
-              </a:spcAft>
-            </a:pPr>
-            <a:r>
-              <a:rPr sz="1800" b="1">
-                <a:solidFill>
-                  <a:srgbClr val="1F3355"/>
-                </a:solidFill>
-                <a:latin typeface="Meiryo UI"/>
-              </a:rPr>
-              <a:t>読み方</a:t>
-            </a:r>
-          </a:p>
-          <a:p>
-            <a:pPr lvl="1" algn="l">
-              <a:spcAft>
-                <a:spcPts val="400"/>
-              </a:spcAft>
-            </a:pPr>
-            <a:r>
-              <a:rPr sz="1500" b="0">
-                <a:solidFill>
-                  <a:srgbClr val="555555"/>
-                </a:solidFill>
-                <a:latin typeface="Meiryo UI"/>
-              </a:rPr>
-              <a:t>Received RA from FE80::... ← 送信元がリンクローカル。説明会のとおりです</a:t>
-            </a:r>
-          </a:p>
-          <a:p>
-            <a:pPr lvl="1" algn="l">
-              <a:spcAft>
-                <a:spcPts val="400"/>
-              </a:spcAft>
-            </a:pPr>
-            <a:r>
-              <a:rPr sz="1500" b="0">
-                <a:solidFill>
-                  <a:srgbClr val="555555"/>
-                </a:solidFill>
-                <a:latin typeface="Meiryo UI"/>
-              </a:rPr>
-              <a:t>Prefix ... autoconfig ← この印が付いているから自分で作ってよい</a:t>
-            </a:r>
-          </a:p>
-          <a:p>
-            <a:pPr lvl="1" algn="l">
-              <a:spcAft>
-                <a:spcPts val="400"/>
-              </a:spcAft>
-            </a:pPr>
-            <a:r>
-              <a:rPr sz="1500" b="1">
-                <a:solidFill>
-                  <a:srgbClr val="C0392B"/>
-                </a:solidFill>
-                <a:latin typeface="Meiryo UI"/>
-              </a:rPr>
-              <a:t>PD 方式のときは この Prefix の行が出ません。それが演習 2 の正体です</a:t>
-            </a:r>
-          </a:p>
-          <a:p>
-            <a:pPr algn="l">
-              <a:spcAft>
-                <a:spcPts val="800"/>
-              </a:spcAft>
-            </a:pPr>
-            <a:r>
-              <a:rPr sz="1800" b="1">
-                <a:solidFill>
-                  <a:srgbClr val="C0392B"/>
-                </a:solidFill>
-                <a:latin typeface="Meiryo UI"/>
-              </a:rPr>
-              <a:t>終わったら必ず止めてください: CPE# undebug all</a:t>
-            </a:r>
-          </a:p>
-        </p:txBody>
-      </p:sp>
-    </p:spTree>
-  </p:cSld>
-  <p:clrMapOvr>
-    <a:masterClrMapping/>
-  </p:clrMapOvr>
-</p:sld>
-</file>
-
-<file path=ppt/slides/slide16.xml><?xml version="1.0" encoding="utf-8"?>
-<p:sld xmlns:a="http://schemas.openxmlformats.org/drawingml/2006/main" xmlns:p="http://schemas.openxmlformats.org/presentationml/2006/main" xmlns:r="http://schemas.openxmlformats.org/officeDocument/2006/relationships">
-  <p:cSld>
-    <p:spTree>
-      <p:nvGrpSpPr>
-        <p:cNvPr id="1" name=""/>
-        <p:cNvGrpSpPr/>
-        <p:nvPr/>
-      </p:nvGrpSpPr>
-      <p:grpSpPr/>
-      <p:sp>
-        <p:nvSpPr>
-          <p:cNvPr id="2" name="Rectangle 1"/>
-          <p:cNvSpPr/>
-          <p:nvPr/>
-        </p:nvSpPr>
-        <p:spPr>
-          <a:xfrm>
-            <a:off x="0" y="0"/>
-            <a:ext cx="12191695" cy="6858000"/>
-          </a:xfrm>
-          <a:prstGeom prst="rect">
-            <a:avLst/>
-          </a:prstGeom>
-          <a:solidFill>
-            <a:srgbClr val="1F3355"/>
-          </a:solidFill>
-          <a:ln>
-            <a:noFill/>
-          </a:ln>
-        </p:spPr>
-        <p:style>
-          <a:lnRef idx="1">
-            <a:schemeClr val="accent1"/>
-          </a:lnRef>
-          <a:fillRef idx="3">
-            <a:schemeClr val="accent1"/>
-          </a:fillRef>
-          <a:effectRef idx="2">
-            <a:schemeClr val="accent1"/>
-          </a:effectRef>
-          <a:fontRef idx="minor">
-            <a:schemeClr val="lt1"/>
-          </a:fontRef>
-        </p:style>
-        <p:txBody>
-          <a:bodyPr rtlCol="0" anchor="ctr"/>
-          <a:lstStyle/>
-          <a:p>
-            <a:pPr algn="ctr"/>
-          </a:p>
-        </p:txBody>
-      </p:sp>
-      <p:sp>
-        <p:nvSpPr>
-          <p:cNvPr id="3" name="TextBox 2"/>
-          <p:cNvSpPr txBox="1"/>
-          <p:nvPr/>
-        </p:nvSpPr>
-        <p:spPr>
-          <a:xfrm>
-            <a:off x="914400" y="2194560"/>
-            <a:ext cx="10332720" cy="2377440"/>
-          </a:xfrm>
-          <a:prstGeom prst="rect">
-            <a:avLst/>
-          </a:prstGeom>
-          <a:noFill/>
-        </p:spPr>
-        <p:txBody>
-          <a:bodyPr wrap="square">
-            <a:spAutoFit/>
-          </a:bodyPr>
-          <a:lstStyle/>
-          <a:p>
-            <a:pPr algn="l"/>
-            <a:r>
-              <a:rPr sz="2000" b="1">
-                <a:solidFill>
-                  <a:srgbClr val="7FB8E0"/>
-                </a:solidFill>
-                <a:latin typeface="Meiryo UI"/>
-              </a:rPr>
-              <a:t>第2部</a:t>
-            </a:r>
-          </a:p>
-          <a:p>
-            <a:pPr algn="l"/>
-            <a:r>
-              <a:rPr sz="3600" b="1">
-                <a:solidFill>
-                  <a:srgbClr val="FFFFFF"/>
-                </a:solidFill>
-                <a:latin typeface="Meiryo UI"/>
-              </a:rPr>
-              <a:t>IPv4 を通す</a:t>
-            </a:r>
-          </a:p>
-          <a:p>
-            <a:pPr algn="l">
-              <a:spcBef>
-                <a:spcPts val="1600"/>
-              </a:spcBef>
-            </a:pPr>
-            <a:r>
-              <a:rPr sz="1600" b="0">
-                <a:solidFill>
-                  <a:srgbClr val="D5E5F2"/>
-                </a:solidFill>
-                <a:latin typeface="Meiryo UI"/>
-              </a:rPr>
-              <a:t>ゴール: 40 分。IPv6 は通っていますが IPv4 はまだ通りません</a:t>
-            </a:r>
-          </a:p>
-        </p:txBody>
-      </p:sp>
-    </p:spTree>
-  </p:cSld>
-  <p:clrMapOvr>
-    <a:masterClrMapping/>
-  </p:clrMapOvr>
-</p:sld>
-</file>
-
-<file path=ppt/slides/slide17.xml><?xml version="1.0" encoding="utf-8"?>
-<p:sld xmlns:a="http://schemas.openxmlformats.org/drawingml/2006/main" xmlns:p="http://schemas.openxmlformats.org/presentationml/2006/main" xmlns:r="http://schemas.openxmlformats.org/officeDocument/2006/relationships">
-  <p:cSld>
-    <p:spTree>
-      <p:nvGrpSpPr>
-        <p:cNvPr id="1" name=""/>
-        <p:cNvGrpSpPr/>
-        <p:nvPr/>
-      </p:nvGrpSpPr>
-      <p:grpSpPr/>
-      <p:sp>
-        <p:nvSpPr>
-          <p:cNvPr id="2" name="TextBox 1"/>
-          <p:cNvSpPr txBox="1"/>
-          <p:nvPr/>
-        </p:nvSpPr>
-        <p:spPr>
-          <a:xfrm>
-            <a:off x="502920" y="320040"/>
-            <a:ext cx="11155680" cy="822960"/>
-          </a:xfrm>
-          <a:prstGeom prst="rect">
-            <a:avLst/>
-          </a:prstGeom>
-          <a:noFill/>
-        </p:spPr>
-        <p:txBody>
-          <a:bodyPr wrap="square">
-            <a:spAutoFit/>
-          </a:bodyPr>
-          <a:lstStyle/>
-          <a:p>
-            <a:pPr algn="l"/>
-            <a:r>
-              <a:rPr sz="2800" b="1">
-                <a:solidFill>
-                  <a:srgbClr val="1F3355"/>
-                </a:solidFill>
-                <a:latin typeface="Meiryo UI"/>
-              </a:rPr>
-              <a:t>演習 4: DS-Lite のトンネルを張る (20 分)</a:t>
-            </a:r>
-          </a:p>
-        </p:txBody>
-      </p:sp>
-      <p:sp>
-        <p:nvSpPr>
-          <p:cNvPr id="3" name="Rectangle 2"/>
-          <p:cNvSpPr/>
-          <p:nvPr/>
-        </p:nvSpPr>
-        <p:spPr>
-          <a:xfrm>
-            <a:off x="502920" y="1115568"/>
-            <a:ext cx="11155680" cy="31750"/>
-          </a:xfrm>
-          <a:prstGeom prst="rect">
-            <a:avLst/>
-          </a:prstGeom>
-          <a:solidFill>
-            <a:srgbClr val="007ACC"/>
-          </a:solidFill>
-          <a:ln>
-            <a:noFill/>
-          </a:ln>
-        </p:spPr>
-        <p:style>
-          <a:lnRef idx="1">
-            <a:schemeClr val="accent1"/>
-          </a:lnRef>
-          <a:fillRef idx="3">
-            <a:schemeClr val="accent1"/>
-          </a:fillRef>
-          <a:effectRef idx="2">
-            <a:schemeClr val="accent1"/>
-          </a:effectRef>
-          <a:fontRef idx="minor">
-            <a:schemeClr val="lt1"/>
-          </a:fontRef>
-        </p:style>
-        <p:txBody>
-          <a:bodyPr rtlCol="0" anchor="ctr"/>
-          <a:lstStyle/>
-          <a:p>
-            <a:pPr algn="ctr"/>
-          </a:p>
-        </p:txBody>
-      </p:sp>
-      <p:sp>
-        <p:nvSpPr>
-          <p:cNvPr id="4" name="TextBox 3"/>
-          <p:cNvSpPr txBox="1"/>
-          <p:nvPr/>
-        </p:nvSpPr>
-        <p:spPr>
-          <a:xfrm>
-            <a:off x="594360" y="1371600"/>
-            <a:ext cx="10972800" cy="4983480"/>
-          </a:xfrm>
-          <a:prstGeom prst="rect">
-            <a:avLst/>
-          </a:prstGeom>
-          <a:noFill/>
-        </p:spPr>
-        <p:txBody>
-          <a:bodyPr wrap="square">
-            <a:spAutoFit/>
-          </a:bodyPr>
-          <a:lstStyle/>
-          <a:p>
-            <a:pPr algn="l">
-              <a:spcAft>
                 <a:spcPts val="700"/>
               </a:spcAft>
             </a:pPr>
@@ -6753,7 +7591,7 @@
                 </a:solidFill>
                 <a:latin typeface="Meiryo UI"/>
               </a:rPr>
-              <a:t>演習 4 で何が起きたか — 1 行ずつ意味があります</a:t>
+              <a:t>演習 3 で何が起きたか — 1 行ずつ意味があります</a:t>
             </a:r>
           </a:p>
         </p:txBody>
@@ -7203,7 +8041,7 @@
                 </a:solidFill>
                 <a:latin typeface="Meiryo UI"/>
               </a:rPr>
-              <a:t>演習 5: 「通った」で終わらせない — 出口アドレスを見る (10 分)</a:t>
+              <a:t>演習 4: 「通った」で終わらせない — 出口アドレスを見る (10 分)</a:t>
             </a:r>
           </a:p>
         </p:txBody>
@@ -7381,7 +8219,7 @@
                 </a:solidFill>
                 <a:latin typeface="Meiryo UI"/>
               </a:rPr>
-              <a:t>192.168.100.x のまま → 経路が間違っています (NAT が効いていない)</a:t>
+              <a:t>192.168.100.x のまま → どこでも NAT されていない (経路の誤り か NAT の不適用)</a:t>
             </a:r>
           </a:p>
           <a:p>
@@ -7413,7 +8251,7 @@
                 </a:solidFill>
                 <a:latin typeface="Meiryo UI"/>
               </a:rPr>
-              <a:t>検証スクリプトが 全項目 PASS したのに経路が間違っていたことがあります</a:t>
+              <a:t>検証スクリプトが 全項目 PASS したのに 網側 NAT が効いていなかったことがあります</a:t>
             </a:r>
           </a:p>
           <a:p>
@@ -7788,7 +8626,7 @@
                 </a:solidFill>
                 <a:latin typeface="Meiryo UI"/>
               </a:rPr>
-              <a:t>演習 6: 892FJ では MAP-E ができない (10 分)</a:t>
+              <a:t>演習 5: 892FJ では MAP-E ができない (10 分)</a:t>
             </a:r>
           </a:p>
         </p:txBody>
@@ -8207,7 +9045,7 @@
                 </a:solidFill>
                 <a:latin typeface="Meiryo UI"/>
               </a:rPr>
-              <a:t>演習 7: MTU ブラックホール (20 分) — 3 つそろわないと壊れません</a:t>
+              <a:t>演習 6: MTU ブラックホール (20 分) — 3 つそろわないと壊れません</a:t>
             </a:r>
           </a:p>
         </p:txBody>
@@ -8305,7 +9143,7 @@
                 </a:solidFill>
                 <a:latin typeface="Consolas"/>
               </a:rPr>
-              <a:t>curl -o NUL -w "size=%{size_download}\n" http://203.0.113.80/big.bin</a:t>
+              <a:t>curl.exe -o NUL -w "size=%{size_download}\n" http://203.0.113.80/big.bin</a:t>
             </a:r>
           </a:p>
           <a:p>
@@ -8381,11 +9219,11 @@
             <a:r>
               <a:rPr sz="2000" b="1">
                 <a:solidFill>
-                  <a:srgbClr val="1F3355"/>
-                </a:solidFill>
-                <a:latin typeface="Meiryo UI"/>
-              </a:rPr>
-              <a:t>③ 【あなた】経路の記憶を消す</a:t>
+                  <a:srgbClr val="C0392B"/>
+                </a:solidFill>
+                <a:latin typeface="Meiryo UI"/>
+              </a:rPr>
+              <a:t>③ 経路の記憶を 両側で 消す ← ここが一番間違えやすい</a:t>
             </a:r>
           </a:p>
           <a:p>
@@ -8401,7 +9239,7 @@
                 </a:solidFill>
                 <a:latin typeface="Consolas"/>
               </a:rPr>
-              <a:t>CPE# clear ipv6 traffic</a:t>
+              <a:t>【司会】 INET-SIM で: ssh &lt;INET-SIM&gt; sudo ip route flush cache</a:t>
             </a:r>
           </a:p>
           <a:p>
@@ -8417,7 +9255,7 @@
                 </a:solidFill>
                 <a:latin typeface="Consolas"/>
               </a:rPr>
-              <a:t>検証用 PC (Windows): netsh interface ipv4 delete destinationcache</a:t>
+              <a:t>【あなた】管理者 PowerShell で: netsh interface ipv4 delete destinationcache</a:t>
             </a:r>
           </a:p>
           <a:p>
@@ -8486,7 +9324,7 @@
                 </a:solidFill>
                 <a:latin typeface="Meiryo UI"/>
               </a:rPr>
-              <a:t>演習 7 で何が起きたか — なぜ ①② では壊れなかったのか</a:t>
+              <a:t>演習 6 で何が起きたか — なぜ ①② では壊れなかったのか</a:t>
             </a:r>
           </a:p>
         </p:txBody>
@@ -8792,7 +9630,7 @@
                 </a:solidFill>
                 <a:latin typeface="Meiryo UI"/>
               </a:rPr>
-              <a:t>演習 8: ポート開放を試して、失敗させる (15 分)</a:t>
+              <a:t>演習 7: ポート開放を試して、失敗させる (15 分)</a:t>
             </a:r>
           </a:p>
         </p:txBody>
@@ -8864,91 +9702,203 @@
           <a:p>
             <a:pPr algn="l">
               <a:spcAft>
-                <a:spcPts val="1000"/>
-              </a:spcAft>
-            </a:pPr>
-            <a:r>
-              <a:rPr sz="2000" b="1">
+                <a:spcPts val="700"/>
+              </a:spcAft>
+            </a:pPr>
+            <a:r>
+              <a:rPr sz="1700" b="1">
                 <a:solidFill>
                   <a:srgbClr val="1F3355"/>
                 </a:solidFill>
                 <a:latin typeface="Meiryo UI"/>
               </a:rPr>
-              <a:t>【あなた】検証用 PC で待受を立てる</a:t>
-            </a:r>
-          </a:p>
-          <a:p>
-            <a:pPr lvl="1" algn="l">
-              <a:spcAft>
-                <a:spcPts val="600"/>
-              </a:spcAft>
-            </a:pPr>
-            <a:r>
-              <a:rPr sz="1700" b="0">
+              <a:t>【あなた】検証用 PC で待受を立てる (管理者 PowerShell)</a:t>
+            </a:r>
+          </a:p>
+          <a:p>
+            <a:pPr lvl="1" algn="l">
+              <a:spcAft>
+                <a:spcPts val="300"/>
+              </a:spcAft>
+            </a:pPr>
+            <a:r>
+              <a:rPr sz="1400" b="0">
                 <a:solidFill>
                   <a:srgbClr val="0B6040"/>
                 </a:solidFill>
                 <a:latin typeface="Consolas"/>
               </a:rPr>
-              <a:t>python3 -m http.server 8000</a:t>
+              <a:t>New-NetFirewallRule -DisplayName "ipoe-lab-8000" -Direction Inbound `</a:t>
+            </a:r>
+          </a:p>
+          <a:p>
+            <a:pPr lvl="1" algn="l">
+              <a:spcAft>
+                <a:spcPts val="300"/>
+              </a:spcAft>
+            </a:pPr>
+            <a:r>
+              <a:rPr sz="1400" b="0">
+                <a:solidFill>
+                  <a:srgbClr val="0B6040"/>
+                </a:solidFill>
+                <a:latin typeface="Consolas"/>
+              </a:rPr>
+              <a:t>  -LocalPort 8000 -Protocol TCP -Action Allow</a:t>
+            </a:r>
+          </a:p>
+          <a:p>
+            <a:pPr lvl="1" algn="l">
+              <a:spcAft>
+                <a:spcPts val="300"/>
+              </a:spcAft>
+            </a:pPr>
+            <a:r>
+              <a:rPr sz="1400" b="0">
+                <a:solidFill>
+                  <a:srgbClr val="0B6040"/>
+                </a:solidFill>
+                <a:latin typeface="Consolas"/>
+              </a:rPr>
+              <a:t>$l = [System.Net.Sockets.TcpListener]::new([System.Net.IPAddress]::Any, 8000); $l.Start()</a:t>
             </a:r>
           </a:p>
           <a:p>
             <a:pPr algn="l">
               <a:spcAft>
-                <a:spcPts val="1000"/>
-              </a:spcAft>
-            </a:pPr>
-            <a:r>
-              <a:rPr sz="2000" b="1">
+                <a:spcPts val="700"/>
+              </a:spcAft>
+            </a:pPr>
+            <a:r>
+              <a:rPr sz="1700" b="1">
+                <a:solidFill>
+                  <a:srgbClr val="C0392B"/>
+                </a:solidFill>
+                <a:latin typeface="Meiryo UI"/>
+              </a:rPr>
+              <a:t>先に LAN の中から叩いて、待受が生きていることを証明します</a:t>
+            </a:r>
+          </a:p>
+          <a:p>
+            <a:pPr lvl="1" algn="l">
+              <a:spcAft>
+                <a:spcPts val="300"/>
+              </a:spcAft>
+            </a:pPr>
+            <a:r>
+              <a:rPr sz="1400" b="0">
+                <a:solidFill>
+                  <a:srgbClr val="0B6040"/>
+                </a:solidFill>
+                <a:latin typeface="Consolas"/>
+              </a:rPr>
+              <a:t>curl.exe -m5 http://192.168.100.50:8000/     → OK が返る</a:t>
+            </a:r>
+          </a:p>
+          <a:p>
+            <a:pPr lvl="1" algn="l">
+              <a:spcAft>
+                <a:spcPts val="300"/>
+              </a:spcAft>
+            </a:pPr>
+            <a:r>
+              <a:rPr sz="1400" b="0">
+                <a:solidFill>
+                  <a:srgbClr val="555555"/>
+                </a:solidFill>
+                <a:latin typeface="Meiryo UI"/>
+              </a:rPr>
+              <a:t>これを飛ばすと「DS-Lite だから」なのか「待受が動いてないだけ」か区別できません</a:t>
+            </a:r>
+          </a:p>
+          <a:p>
+            <a:pPr algn="l">
+              <a:spcAft>
+                <a:spcPts val="700"/>
+              </a:spcAft>
+            </a:pPr>
+            <a:r>
+              <a:rPr sz="1700" b="1">
                 <a:solidFill>
                   <a:srgbClr val="1F3355"/>
                 </a:solidFill>
                 <a:latin typeface="Meiryo UI"/>
               </a:rPr>
-              <a:t>【あなた】892FJ でポート開放を設定してみる</a:t>
-            </a:r>
-          </a:p>
-          <a:p>
-            <a:pPr lvl="1" algn="l">
-              <a:spcAft>
-                <a:spcPts val="600"/>
-              </a:spcAft>
-            </a:pPr>
-            <a:r>
-              <a:rPr sz="1700" b="0">
+              <a:t>【あなた】892FJ で NAT の内側と外側を宣言してから、開放を設定</a:t>
+            </a:r>
+          </a:p>
+          <a:p>
+            <a:pPr lvl="1" algn="l">
+              <a:spcAft>
+                <a:spcPts val="300"/>
+              </a:spcAft>
+            </a:pPr>
+            <a:r>
+              <a:rPr sz="1400" b="0">
                 <a:solidFill>
                   <a:srgbClr val="0B6040"/>
                 </a:solidFill>
                 <a:latin typeface="Consolas"/>
               </a:rPr>
+              <a:t>interface Vlan1   →  ip nat inside</a:t>
+            </a:r>
+          </a:p>
+          <a:p>
+            <a:pPr lvl="1" algn="l">
+              <a:spcAft>
+                <a:spcPts val="300"/>
+              </a:spcAft>
+            </a:pPr>
+            <a:r>
+              <a:rPr sz="1400" b="0">
+                <a:solidFill>
+                  <a:srgbClr val="0B6040"/>
+                </a:solidFill>
+                <a:latin typeface="Consolas"/>
+              </a:rPr>
+              <a:t>interface Tunnel0 →  ip nat outside</a:t>
+            </a:r>
+          </a:p>
+          <a:p>
+            <a:pPr lvl="1" algn="l">
+              <a:spcAft>
+                <a:spcPts val="300"/>
+              </a:spcAft>
+            </a:pPr>
+            <a:r>
+              <a:rPr sz="1400" b="0">
+                <a:solidFill>
+                  <a:srgbClr val="0B6040"/>
+                </a:solidFill>
+                <a:latin typeface="Consolas"/>
+              </a:rPr>
               <a:t>ip nat inside source static tcp 192.168.100.50 8000 interface Tunnel0 8080</a:t>
             </a:r>
           </a:p>
           <a:p>
             <a:pPr lvl="1" algn="l">
               <a:spcAft>
-                <a:spcPts val="600"/>
-              </a:spcAft>
-            </a:pPr>
-            <a:r>
-              <a:rPr sz="1700" b="0">
+                <a:spcPts val="300"/>
+              </a:spcAft>
+            </a:pPr>
+            <a:r>
+              <a:rPr sz="1400" b="0">
                 <a:solidFill>
                   <a:srgbClr val="555555"/>
                 </a:solidFill>
                 <a:latin typeface="Meiryo UI"/>
               </a:rPr>
-              <a:t>設定は通ります</a:t>
+              <a:t>設定は通ります。show ip nat translations に変換エントリも出ます</a:t>
             </a:r>
           </a:p>
           <a:p>
             <a:pPr algn="l">
               <a:spcAft>
-                <a:spcPts val="1000"/>
-              </a:spcAft>
-            </a:pPr>
-            <a:r>
-              <a:rPr sz="2000" b="1">
+                <a:spcPts val="700"/>
+              </a:spcAft>
+            </a:pPr>
+            <a:r>
+              <a:rPr sz="1700" b="1">
                 <a:solidFill>
                   <a:srgbClr val="1F3355"/>
                 </a:solidFill>
@@ -8960,11 +9910,11 @@
           <a:p>
             <a:pPr lvl="1" algn="l">
               <a:spcAft>
-                <a:spcPts val="600"/>
-              </a:spcAft>
-            </a:pPr>
-            <a:r>
-              <a:rPr sz="1700" b="0">
+                <a:spcPts val="300"/>
+              </a:spcAft>
+            </a:pPr>
+            <a:r>
+              <a:rPr sz="1400" b="0">
                 <a:solidFill>
                   <a:srgbClr val="0B6040"/>
                 </a:solidFill>
@@ -8976,11 +9926,11 @@
           <a:p>
             <a:pPr lvl="1" algn="l">
               <a:spcAft>
-                <a:spcPts val="600"/>
-              </a:spcAft>
-            </a:pPr>
-            <a:r>
-              <a:rPr sz="1700" b="0">
+                <a:spcPts val="300"/>
+              </a:spcAft>
+            </a:pPr>
+            <a:r>
+              <a:rPr sz="1400" b="0">
                 <a:solidFill>
                   <a:srgbClr val="0B6040"/>
                 </a:solidFill>
@@ -8992,17 +9942,17 @@
           <a:p>
             <a:pPr algn="l">
               <a:spcAft>
-                <a:spcPts val="1000"/>
-              </a:spcAft>
-            </a:pPr>
-            <a:r>
-              <a:rPr sz="2000" b="1">
+                <a:spcPts val="700"/>
+              </a:spcAft>
+            </a:pPr>
+            <a:r>
+              <a:rPr sz="1700" b="1">
                 <a:solidFill>
                   <a:srgbClr val="C0392B"/>
                 </a:solidFill>
                 <a:latin typeface="Meiryo UI"/>
               </a:rPr>
-              <a:t>どちらも届きません</a:t>
+              <a:t>LAN の中からは繋がるのに、外からは届きません</a:t>
             </a:r>
           </a:p>
         </p:txBody>
@@ -9055,7 +10005,7 @@
                 </a:solidFill>
                 <a:latin typeface="Meiryo UI"/>
               </a:rPr>
-              <a:t>演習 8 で何が起きたか — 外から見えるアドレスが 1 つも無い</a:t>
+              <a:t>演習 7 で何が起きたか — 外から見えるアドレスが 1 つも無い</a:t>
             </a:r>
           </a:p>
         </p:txBody>
@@ -9350,7 +10300,7 @@
                 </a:solidFill>
                 <a:latin typeface="Meiryo UI"/>
               </a:rPr>
-              <a:t>演習 9: 同じ障害でも、端末によって症状が違う (5 分)</a:t>
+              <a:t>演習 8: 同じ障害でも、端末によって症状が違う (5 分)</a:t>
             </a:r>
           </a:p>
         </p:txBody>
@@ -9422,11 +10372,11 @@
           <a:p>
             <a:pPr algn="l">
               <a:spcAft>
-                <a:spcPts val="1000"/>
-              </a:spcAft>
-            </a:pPr>
-            <a:r>
-              <a:rPr sz="2000" b="0">
+                <a:spcPts val="700"/>
+              </a:spcAft>
+            </a:pPr>
+            <a:r>
+              <a:rPr sz="1700" b="0">
                 <a:solidFill>
                   <a:srgbClr val="0B6040"/>
                 </a:solidFill>
@@ -9438,59 +10388,107 @@
           <a:p>
             <a:pPr algn="l">
               <a:spcAft>
-                <a:spcPts val="1000"/>
-              </a:spcAft>
-            </a:pPr>
-            <a:r>
-              <a:rPr sz="2000" b="1">
+                <a:spcPts val="700"/>
+              </a:spcAft>
+            </a:pPr>
+            <a:r>
+              <a:rPr sz="1700" b="1">
                 <a:solidFill>
                   <a:srgbClr val="1F3355"/>
                 </a:solidFill>
                 <a:latin typeface="Meiryo UI"/>
               </a:rPr>
-              <a:t>【あなた】検証用 PC で 2 つ叩き比べる</a:t>
-            </a:r>
-          </a:p>
-          <a:p>
-            <a:pPr lvl="1" algn="l">
-              <a:spcAft>
-                <a:spcPts val="600"/>
-              </a:spcAft>
-            </a:pPr>
-            <a:r>
-              <a:rPr sz="1700" b="0">
+              <a:t>【あなた】検証用 PC (Windows) で</a:t>
+            </a:r>
+          </a:p>
+          <a:p>
+            <a:pPr lvl="1" algn="l">
+              <a:spcAft>
+                <a:spcPts val="300"/>
+              </a:spcAft>
+            </a:pPr>
+            <a:r>
+              <a:rPr sz="1400" b="0">
                 <a:solidFill>
                   <a:srgbClr val="0B6040"/>
                 </a:solidFill>
                 <a:latin typeface="Consolas"/>
               </a:rPr>
-              <a:t>curl -s -o NUL -w "%{time_total}\n" http://www.lab.example/</a:t>
-            </a:r>
-          </a:p>
-          <a:p>
-            <a:pPr lvl="1" algn="l">
-              <a:spcAft>
-                <a:spcPts val="600"/>
-              </a:spcAft>
-            </a:pPr>
-            <a:r>
-              <a:rPr sz="1700" b="0">
+              <a:t>curl.exe -s -o NUL -w "%{time_total}\n" http://www.lab.example/</a:t>
+            </a:r>
+          </a:p>
+          <a:p>
+            <a:pPr lvl="1" algn="l">
+              <a:spcAft>
+                <a:spcPts val="300"/>
+              </a:spcAft>
+            </a:pPr>
+            <a:r>
+              <a:rPr sz="1400" b="0">
+                <a:solidFill>
+                  <a:srgbClr val="555555"/>
+                </a:solidFill>
+                <a:latin typeface="Meiryo UI"/>
+              </a:rPr>
+              <a:t>→ 0.2 秒程度。速いので、障害が起きていることに気づけません</a:t>
+            </a:r>
+          </a:p>
+          <a:p>
+            <a:pPr algn="l">
+              <a:spcAft>
+                <a:spcPts val="700"/>
+              </a:spcAft>
+            </a:pPr>
+            <a:r>
+              <a:rPr sz="1700" b="1">
+                <a:solidFill>
+                  <a:srgbClr val="1F3355"/>
+                </a:solidFill>
+                <a:latin typeface="Meiryo UI"/>
+              </a:rPr>
+              <a:t>【司会】同じ URL を別の実装で叩いて見せる</a:t>
+            </a:r>
+          </a:p>
+          <a:p>
+            <a:pPr lvl="1" algn="l">
+              <a:spcAft>
+                <a:spcPts val="300"/>
+              </a:spcAft>
+            </a:pPr>
+            <a:r>
+              <a:rPr sz="1400" b="0">
+                <a:solidFill>
+                  <a:srgbClr val="555555"/>
+                </a:solidFill>
+                <a:latin typeface="Meiryo UI"/>
+              </a:rPr>
+              <a:t>wget は Windows に入っていません (PowerShell の wget は別物)</a:t>
+            </a:r>
+          </a:p>
+          <a:p>
+            <a:pPr lvl="1" algn="l">
+              <a:spcAft>
+                <a:spcPts val="300"/>
+              </a:spcAft>
+            </a:pPr>
+            <a:r>
+              <a:rPr sz="1400" b="0">
                 <a:solidFill>
                   <a:srgbClr val="0B6040"/>
                 </a:solidFill>
                 <a:latin typeface="Consolas"/>
               </a:rPr>
-              <a:t>wget -q -O NUL http://www.lab.example/</a:t>
+              <a:t>ssh &lt;LAB-CLIENT&gt; 'wget -q -O /dev/null http://www.lab.example/'</a:t>
             </a:r>
           </a:p>
           <a:p>
             <a:pPr algn="l">
               <a:spcAft>
-                <a:spcPts val="1000"/>
-              </a:spcAft>
-            </a:pPr>
-            <a:r>
-              <a:rPr sz="2000" b="1">
+                <a:spcPts val="700"/>
+              </a:spcAft>
+            </a:pPr>
+            <a:r>
+              <a:rPr sz="1700" b="1">
                 <a:solidFill>
                   <a:srgbClr val="1F3355"/>
                 </a:solidFill>
@@ -9502,113 +10500,129 @@
           <a:p>
             <a:pPr lvl="1" algn="l">
               <a:spcAft>
-                <a:spcPts val="600"/>
-              </a:spcAft>
-            </a:pPr>
-            <a:r>
-              <a:rPr sz="1700" b="0">
+                <a:spcPts val="300"/>
+              </a:spcAft>
+            </a:pPr>
+            <a:r>
+              <a:rPr sz="1400" b="0">
                 <a:solidFill>
                   <a:srgbClr val="555555"/>
                 </a:solidFill>
                 <a:latin typeface="Meiryo UI"/>
               </a:rPr>
-              <a:t>curl … 0.2 秒程度。速いので気づけません</a:t>
-            </a:r>
-          </a:p>
-          <a:p>
-            <a:pPr lvl="1" algn="l">
-              <a:spcAft>
-                <a:spcPts val="600"/>
+              <a:t>Windows の curl.exe … 0.2 秒程度。速いので気づけません</a:t>
+            </a:r>
+          </a:p>
+          <a:p>
+            <a:pPr lvl="1" algn="l">
+              <a:spcAft>
+                <a:spcPts val="300"/>
+              </a:spcAft>
+            </a:pPr>
+            <a:r>
+              <a:rPr sz="1400" b="1">
+                <a:solidFill>
+                  <a:srgbClr val="C0392B"/>
+                </a:solidFill>
+                <a:latin typeface="Meiryo UI"/>
+              </a:rPr>
+              <a:t>Linux の wget     … 15 秒でタイムアウト。完全に固まります</a:t>
+            </a:r>
+          </a:p>
+          <a:p>
+            <a:pPr algn="l">
+              <a:spcAft>
+                <a:spcPts val="700"/>
               </a:spcAft>
             </a:pPr>
             <a:r>
               <a:rPr sz="1700" b="1">
                 <a:solidFill>
+                  <a:srgbClr val="1F3355"/>
+                </a:solidFill>
+                <a:latin typeface="Meiryo UI"/>
+              </a:rPr>
+              <a:t>いま何が起きたか</a:t>
+            </a:r>
+          </a:p>
+          <a:p>
+            <a:pPr lvl="1" algn="l">
+              <a:spcAft>
+                <a:spcPts val="300"/>
+              </a:spcAft>
+            </a:pPr>
+            <a:r>
+              <a:rPr sz="1400" b="0">
+                <a:solidFill>
+                  <a:srgbClr val="555555"/>
+                </a:solidFill>
+                <a:latin typeface="Meiryo UI"/>
+              </a:rPr>
+              <a:t>AAAA (IPv6 のアドレス) は返るのに、IPv6 では到達できない状態を作りました</a:t>
+            </a:r>
+          </a:p>
+          <a:p>
+            <a:pPr lvl="1" algn="l">
+              <a:spcAft>
+                <a:spcPts val="300"/>
+              </a:spcAft>
+            </a:pPr>
+            <a:r>
+              <a:rPr sz="1400" b="0">
+                <a:solidFill>
+                  <a:srgbClr val="555555"/>
+                </a:solidFill>
+                <a:latin typeface="Meiryo UI"/>
+              </a:rPr>
+              <a:t>curl は IPv6 を少し試して すぐ IPv4 に切り替えます (Happy Eyeballs)</a:t>
+            </a:r>
+          </a:p>
+          <a:p>
+            <a:pPr lvl="1" algn="l">
+              <a:spcAft>
+                <a:spcPts val="300"/>
+              </a:spcAft>
+            </a:pPr>
+            <a:r>
+              <a:rPr sz="1400" b="0">
+                <a:solidFill>
+                  <a:srgbClr val="555555"/>
+                </a:solidFill>
+                <a:latin typeface="Meiryo UI"/>
+              </a:rPr>
+              <a:t>wget は IPv6 で待ち続けます</a:t>
+            </a:r>
+          </a:p>
+          <a:p>
+            <a:pPr algn="l">
+              <a:spcAft>
+                <a:spcPts val="700"/>
+              </a:spcAft>
+            </a:pPr>
+            <a:r>
+              <a:rPr sz="1700" b="1">
+                <a:solidFill>
                   <a:srgbClr val="C0392B"/>
                 </a:solidFill>
                 <a:latin typeface="Meiryo UI"/>
               </a:rPr>
-              <a:t>wget … 15 秒でタイムアウト。完全に固まります</a:t>
-            </a:r>
-          </a:p>
-          <a:p>
-            <a:pPr algn="l">
-              <a:spcAft>
-                <a:spcPts val="1000"/>
-              </a:spcAft>
-            </a:pPr>
-            <a:r>
-              <a:rPr sz="2000" b="1">
-                <a:solidFill>
-                  <a:srgbClr val="1F3355"/>
-                </a:solidFill>
-                <a:latin typeface="Meiryo UI"/>
-              </a:rPr>
-              <a:t>いま何が起きたか</a:t>
-            </a:r>
-          </a:p>
-          <a:p>
-            <a:pPr lvl="1" algn="l">
-              <a:spcAft>
-                <a:spcPts val="600"/>
-              </a:spcAft>
-            </a:pPr>
-            <a:r>
-              <a:rPr sz="1700" b="0">
+              <a:t>「A さんの PC は遅いが B さんは普通」というお客様申告の正体がこれです</a:t>
+            </a:r>
+          </a:p>
+          <a:p>
+            <a:pPr lvl="1" algn="l">
+              <a:spcAft>
+                <a:spcPts val="300"/>
+              </a:spcAft>
+            </a:pPr>
+            <a:r>
+              <a:rPr sz="1400" b="0">
                 <a:solidFill>
                   <a:srgbClr val="555555"/>
                 </a:solidFill>
                 <a:latin typeface="Meiryo UI"/>
               </a:rPr>
-              <a:t>AAAA (IPv6 のアドレス) は返るのに、IPv6 では到達できない状態を作りました</a:t>
-            </a:r>
-          </a:p>
-          <a:p>
-            <a:pPr lvl="1" algn="l">
-              <a:spcAft>
-                <a:spcPts val="600"/>
-              </a:spcAft>
-            </a:pPr>
-            <a:r>
-              <a:rPr sz="1700" b="0">
-                <a:solidFill>
-                  <a:srgbClr val="555555"/>
-                </a:solidFill>
-                <a:latin typeface="Meiryo UI"/>
-              </a:rPr>
-              <a:t>curl は IPv6 を少し試して すぐ IPv4 に切り替えます (Happy Eyeballs)</a:t>
-            </a:r>
-          </a:p>
-          <a:p>
-            <a:pPr lvl="1" algn="l">
-              <a:spcAft>
-                <a:spcPts val="600"/>
-              </a:spcAft>
-            </a:pPr>
-            <a:r>
-              <a:rPr sz="1700" b="0">
-                <a:solidFill>
-                  <a:srgbClr val="555555"/>
-                </a:solidFill>
-                <a:latin typeface="Meiryo UI"/>
-              </a:rPr>
-              <a:t>wget は IPv6 で待ち続けます</a:t>
-            </a:r>
-          </a:p>
-          <a:p>
-            <a:pPr algn="l">
-              <a:spcAft>
-                <a:spcPts val="1000"/>
-              </a:spcAft>
-            </a:pPr>
-            <a:r>
-              <a:rPr sz="2000" b="1">
-                <a:solidFill>
-                  <a:srgbClr val="C0392B"/>
-                </a:solidFill>
-                <a:latin typeface="Meiryo UI"/>
-              </a:rPr>
-              <a:t>「A さんの PC は遅いが B さんは普通」というお客様申告の正体がこれです</a:t>
+              <a:t>だから「私の PC では再現しません」は、障害が無いことの証明になりません</a:t>
             </a:r>
           </a:p>
         </p:txBody>
@@ -9732,7 +10746,7 @@
                 </a:solidFill>
                 <a:latin typeface="Meiryo UI"/>
               </a:rPr>
-              <a:t>ゴール: 15 分。戻し忘れは次の演習で「原因の分からない失敗」として出ます</a:t>
+              <a:t>ゴール: 10 分。戻し忘れは次の演習で「原因の分からない失敗」として出ます</a:t>
             </a:r>
           </a:p>
         </p:txBody>
@@ -9785,7 +10799,7 @@
                 </a:solidFill>
                 <a:latin typeface="Meiryo UI"/>
               </a:rPr>
-              <a:t>演習 10: 元に戻す</a:t>
+              <a:t>演習 9: 元に戻す</a:t>
             </a:r>
           </a:p>
         </p:txBody>
@@ -9931,7 +10945,7 @@
                 </a:solidFill>
                 <a:latin typeface="Meiryo UI"/>
               </a:rPr>
-              <a:t>何も出ないこと (演習 8 の設定が残っていないこと)</a:t>
+              <a:t>何も出ないこと (演習 7 の設定が残っていないこと)</a:t>
             </a:r>
           </a:p>
           <a:p>
@@ -9995,7 +11009,55 @@
                 </a:solidFill>
                 <a:latin typeface="Consolas"/>
               </a:rPr>
-              <a:t>curl http://203.0.113.80/     →  src: 203.0.113.1 に戻っていれば完了</a:t>
+              <a:t>curl.exe http://203.0.113.80/     →  src: 203.0.113.1 に戻っていれば完了</a:t>
+            </a:r>
+          </a:p>
+          <a:p>
+            <a:pPr algn="l">
+              <a:spcAft>
+                <a:spcPts val="1000"/>
+              </a:spcAft>
+            </a:pPr>
+            <a:r>
+              <a:rPr sz="2000" b="1">
+                <a:solidFill>
+                  <a:srgbClr val="C0392B"/>
+                </a:solidFill>
+                <a:latin typeface="Meiryo UI"/>
+              </a:rPr>
+              <a:t>【あなた】検証用 PC のアドレスを自動取得に戻す ← 忘れると席で繋がりません</a:t>
+            </a:r>
+          </a:p>
+          <a:p>
+            <a:pPr lvl="1" algn="l">
+              <a:spcAft>
+                <a:spcPts val="600"/>
+              </a:spcAft>
+            </a:pPr>
+            <a:r>
+              <a:rPr sz="1700" b="0">
+                <a:solidFill>
+                  <a:srgbClr val="0B6040"/>
+                </a:solidFill>
+                <a:latin typeface="Consolas"/>
+              </a:rPr>
+              <a:t>netsh interface ip set address "イーサネット" dhcp</a:t>
+            </a:r>
+          </a:p>
+          <a:p>
+            <a:pPr lvl="1" algn="l">
+              <a:spcAft>
+                <a:spcPts val="600"/>
+              </a:spcAft>
+            </a:pPr>
+            <a:r>
+              <a:rPr sz="1700" b="0">
+                <a:solidFill>
+                  <a:srgbClr val="0B6040"/>
+                </a:solidFill>
+                <a:latin typeface="Consolas"/>
+              </a:rPr>
+              <a:t>netsh interface ip set dns     "イーサネット" dhcp</a:t>
             </a:r>
           </a:p>
         </p:txBody>
@@ -10178,7 +11240,7 @@
                 </a:solidFill>
                 <a:latin typeface="Meiryo UI"/>
               </a:rPr>
-              <a:t>演習 5。見るべきは 出口アドレス だけです</a:t>
+              <a:t>演習 4。見るべきは 出口アドレス だけです</a:t>
             </a:r>
           </a:p>
           <a:p>
@@ -10210,7 +11272,7 @@
                 </a:solidFill>
                 <a:latin typeface="Meiryo UI"/>
               </a:rPr>
-              <a:t>演習 6。機器と方式の組み合わせは、契約書を見た時点で分かります</a:t>
+              <a:t>演習 5。機器と方式の組み合わせは、契約書を見た時点で分かります</a:t>
             </a:r>
           </a:p>
           <a:p>
@@ -10242,7 +11304,7 @@
                 </a:solidFill>
                 <a:latin typeface="Meiryo UI"/>
               </a:rPr>
-              <a:t>演習 7。「さっきまで再現していたのに」が起きます</a:t>
+              <a:t>演習 6。「さっきまで再現していたのに」が起きます</a:t>
             </a:r>
           </a:p>
           <a:p>
@@ -10274,7 +11336,7 @@
                 </a:solidFill>
                 <a:latin typeface="Meiryo UI"/>
               </a:rPr>
-              <a:t>演習 9</a:t>
+              <a:t>演習 8</a:t>
             </a:r>
           </a:p>
           <a:p>
@@ -10578,6 +11640,314 @@
         </p:nvSpPr>
         <p:spPr>
           <a:xfrm>
+            <a:off x="502920" y="274320"/>
+            <a:ext cx="11155680" cy="731520"/>
+          </a:xfrm>
+          <a:prstGeom prst="rect">
+            <a:avLst/>
+          </a:prstGeom>
+          <a:noFill/>
+        </p:spPr>
+        <p:txBody>
+          <a:bodyPr wrap="square">
+            <a:spAutoFit/>
+          </a:bodyPr>
+          <a:lstStyle/>
+          <a:p>
+            <a:pPr algn="l"/>
+            <a:r>
+              <a:rPr sz="2600" b="1">
+                <a:solidFill>
+                  <a:srgbClr val="1F3355"/>
+                </a:solidFill>
+                <a:latin typeface="Meiryo UI"/>
+              </a:rPr>
+              <a:t>自分の案件が来たら、この環境を使ってください</a:t>
+            </a:r>
+          </a:p>
+        </p:txBody>
+      </p:sp>
+      <p:graphicFrame>
+        <p:nvGraphicFramePr>
+          <p:cNvPr id="3" name="Table 2"/>
+          <p:cNvGraphicFramePr>
+            <a:graphicFrameLocks noGrp="1"/>
+          </p:cNvGraphicFramePr>
+          <p:nvPr/>
+        </p:nvGraphicFramePr>
+        <p:xfrm>
+          <a:off x="502920" y="1143000"/>
+          <a:ext cx="10789920" cy="1579371"/>
+        </p:xfrm>
+        <a:graphic>
+          <a:graphicData uri="http://schemas.openxmlformats.org/drawingml/2006/table">
+            <a:tbl>
+              <a:tblPr>
+                <a:tableStyleId>{5C22544A-7EE6-4342-B048-85BDC9FD1C3A}</a:tableStyleId>
+              </a:tblPr>
+              <a:tblGrid>
+                <a:gridCol w="4206240"/>
+                <a:gridCol w="6583680"/>
+              </a:tblGrid>
+              <a:tr h="394842">
+                <a:tc>
+                  <a:txBody>
+                    <a:bodyPr/>
+                    <a:lstStyle/>
+                    <a:p>
+                      <a:pPr algn="l"/>
+                      <a:r>
+                        <a:rPr sz="1400" b="1">
+                          <a:solidFill>
+                            <a:srgbClr val="FFFFFF"/>
+                          </a:solidFill>
+                          <a:latin typeface="Meiryo UI"/>
+                        </a:rPr>
+                        <a:t>契約書を見て分かったこと</a:t>
+                      </a:r>
+                    </a:p>
+                  </a:txBody>
+                  <a:tcPr>
+                    <a:solidFill>
+                      <a:srgbClr val="1F3355"/>
+                    </a:solidFill>
+                  </a:tcPr>
+                </a:tc>
+                <a:tc>
+                  <a:txBody>
+                    <a:bodyPr/>
+                    <a:lstStyle/>
+                    <a:p>
+                      <a:pPr algn="l"/>
+                      <a:r>
+                        <a:rPr sz="1400" b="1">
+                          <a:solidFill>
+                            <a:srgbClr val="FFFFFF"/>
+                          </a:solidFill>
+                          <a:latin typeface="Meiryo UI"/>
+                        </a:rPr>
+                        <a:t>この環境でどう試すか</a:t>
+                      </a:r>
+                    </a:p>
+                  </a:txBody>
+                  <a:tcPr>
+                    <a:solidFill>
+                      <a:srgbClr val="1F3355"/>
+                    </a:solidFill>
+                  </a:tcPr>
+                </a:tc>
+              </a:tr>
+              <a:tr h="394842">
+                <a:tc>
+                  <a:txBody>
+                    <a:bodyPr/>
+                    <a:lstStyle/>
+                    <a:p>
+                      <a:pPr algn="l"/>
+                      <a:r>
+                        <a:rPr sz="1300" b="0">
+                          <a:solidFill>
+                            <a:srgbClr val="1F3355"/>
+                          </a:solidFill>
+                          <a:latin typeface="Meiryo UI"/>
+                        </a:rPr>
+                        <a:t>DS-Lite 系
+(transix / クロスパス / v6コネクト)</a:t>
+                      </a:r>
+                    </a:p>
+                  </a:txBody>
+                  <a:tcPr>
+                    <a:solidFill>
+                      <a:srgbClr val="FFFFFF"/>
+                    </a:solidFill>
+                  </a:tcPr>
+                </a:tc>
+                <a:tc>
+                  <a:txBody>
+                    <a:bodyPr/>
+                    <a:lstStyle/>
+                    <a:p>
+                      <a:pPr algn="l"/>
+                      <a:r>
+                        <a:rPr sz="1300" b="0">
+                          <a:solidFill>
+                            <a:srgbClr val="1F3355"/>
+                          </a:solidFill>
+                          <a:latin typeface="Meiryo UI"/>
+                        </a:rPr>
+                        <a:t>今日やった構成そのままです。お客様と同型の CPE を持ち込んで、同じ手順で</a:t>
+                      </a:r>
+                    </a:p>
+                  </a:txBody>
+                  <a:tcPr>
+                    <a:solidFill>
+                      <a:srgbClr val="FFFFFF"/>
+                    </a:solidFill>
+                  </a:tcPr>
+                </a:tc>
+              </a:tr>
+              <a:tr h="394842">
+                <a:tc>
+                  <a:txBody>
+                    <a:bodyPr/>
+                    <a:lstStyle/>
+                    <a:p>
+                      <a:pPr algn="l"/>
+                      <a:r>
+                        <a:rPr sz="1300" b="0">
+                          <a:solidFill>
+                            <a:srgbClr val="1F3355"/>
+                          </a:solidFill>
+                          <a:latin typeface="Meiryo UI"/>
+                        </a:rPr>
+                        <a:t>MAP-E 系
+(v6プラス / OCN バーチャルコネクト / IPv6 オプション)</a:t>
+                      </a:r>
+                    </a:p>
+                  </a:txBody>
+                  <a:tcPr>
+                    <a:solidFill>
+                      <a:srgbClr val="F2F6FA"/>
+                    </a:solidFill>
+                  </a:tcPr>
+                </a:tc>
+                <a:tc>
+                  <a:txBody>
+                    <a:bodyPr/>
+                    <a:lstStyle/>
+                    <a:p>
+                      <a:pPr algn="l"/>
+                      <a:r>
+                        <a:rPr sz="1300" b="0">
+                          <a:solidFill>
+                            <a:srgbClr val="1F3355"/>
+                          </a:solidFill>
+                          <a:latin typeface="Meiryo UI"/>
+                        </a:rPr>
+                        <a:t>司会が lab-mode.sh mape に切り替えます。CE は OpenWrt を使います (892FJ では不可)</a:t>
+                      </a:r>
+                    </a:p>
+                  </a:txBody>
+                  <a:tcPr>
+                    <a:solidFill>
+                      <a:srgbClr val="F2F6FA"/>
+                    </a:solidFill>
+                  </a:tcPr>
+                </a:tc>
+              </a:tr>
+              <a:tr h="394845">
+                <a:tc>
+                  <a:txBody>
+                    <a:bodyPr/>
+                    <a:lstStyle/>
+                    <a:p>
+                      <a:pPr algn="l"/>
+                      <a:r>
+                        <a:rPr sz="1300" b="0">
+                          <a:solidFill>
+                            <a:srgbClr val="1F3355"/>
+                          </a:solidFill>
+                          <a:latin typeface="Meiryo UI"/>
+                        </a:rPr>
+                        <a:t>RA か PD か分からない</a:t>
+                      </a:r>
+                    </a:p>
+                  </a:txBody>
+                  <a:tcPr>
+                    <a:solidFill>
+                      <a:srgbClr val="FFFFFF"/>
+                    </a:solidFill>
+                  </a:tcPr>
+                </a:tc>
+                <a:tc>
+                  <a:txBody>
+                    <a:bodyPr/>
+                    <a:lstStyle/>
+                    <a:p>
+                      <a:pPr algn="l"/>
+                      <a:r>
+                        <a:rPr sz="1300" b="0">
+                          <a:solidFill>
+                            <a:srgbClr val="1F3355"/>
+                          </a:solidFill>
+                          <a:latin typeface="Meiryo UI"/>
+                        </a:rPr>
+                        <a:t>両方試せます。lab-mode.sh ra / pd を切り替えて、CPE の設定が両方で成立するか確認</a:t>
+                      </a:r>
+                    </a:p>
+                  </a:txBody>
+                  <a:tcPr>
+                    <a:solidFill>
+                      <a:srgbClr val="FFFFFF"/>
+                    </a:solidFill>
+                  </a:tcPr>
+                </a:tc>
+              </a:tr>
+            </a:tbl>
+          </a:graphicData>
+        </a:graphic>
+      </p:graphicFrame>
+      <p:sp>
+        <p:nvSpPr>
+          <p:cNvPr id="4" name="TextBox 3"/>
+          <p:cNvSpPr txBox="1"/>
+          <p:nvPr/>
+        </p:nvSpPr>
+        <p:spPr>
+          <a:xfrm>
+            <a:off x="502920" y="2978404"/>
+            <a:ext cx="11155680" cy="548640"/>
+          </a:xfrm>
+          <a:prstGeom prst="rect">
+            <a:avLst/>
+          </a:prstGeom>
+          <a:noFill/>
+        </p:spPr>
+        <p:txBody>
+          <a:bodyPr wrap="square">
+            <a:spAutoFit/>
+          </a:bodyPr>
+          <a:lstStyle/>
+          <a:p>
+            <a:pPr algn="l"/>
+            <a:r>
+              <a:rPr sz="1200" b="0">
+                <a:solidFill>
+                  <a:srgbClr val="007ACC"/>
+                </a:solidFill>
+                <a:latin typeface="Meiryo UI"/>
+              </a:rPr>
+              <a:t>環境を使いたいときの窓口: ____________  /  伝えること: ① VNE 名 ② RA か PD か (不明可) ③ 持ち込む CPE の機種</a:t>
+            </a:r>
+          </a:p>
+        </p:txBody>
+      </p:sp>
+    </p:spTree>
+  </p:cSld>
+  <p:clrMapOvr>
+    <a:masterClrMapping/>
+  </p:clrMapOvr>
+</p:sld>
+</file>
+
+<file path=ppt/slides/slide31.xml><?xml version="1.0" encoding="utf-8"?>
+<p:sld xmlns:a="http://schemas.openxmlformats.org/drawingml/2006/main" xmlns:p="http://schemas.openxmlformats.org/presentationml/2006/main" xmlns:r="http://schemas.openxmlformats.org/officeDocument/2006/relationships">
+  <p:cSld>
+    <p:spTree>
+      <p:nvGrpSpPr>
+        <p:cNvPr id="1" name=""/>
+        <p:cNvGrpSpPr/>
+        <p:nvPr/>
+      </p:nvGrpSpPr>
+      <p:grpSpPr/>
+      <p:sp>
+        <p:nvSpPr>
+          <p:cNvPr id="2" name="TextBox 1"/>
+          <p:cNvSpPr txBox="1"/>
+          <p:nvPr/>
+        </p:nvSpPr>
+        <p:spPr>
+          <a:xfrm>
             <a:off x="502920" y="320040"/>
             <a:ext cx="11155680" cy="822960"/>
           </a:xfrm>
@@ -10718,6 +12088,22 @@
             </a:r>
           </a:p>
           <a:p>
+            <a:pPr algn="l">
+              <a:spcAft>
+                <a:spcPts val="1000"/>
+              </a:spcAft>
+            </a:pPr>
+            <a:r>
+              <a:rPr sz="2000" b="1">
+                <a:solidFill>
+                  <a:srgbClr val="1F3355"/>
+                </a:solidFill>
+                <a:latin typeface="Meiryo UI"/>
+              </a:rPr>
+              <a:t>もっと壊したい人へ — test-matrix.md §4 に R1〜R13。今日やったのは 3 つだけです</a:t>
+            </a:r>
+          </a:p>
+          <a:p>
             <a:pPr lvl="1" algn="l">
               <a:spcAft>
                 <a:spcPts val="600"/>
@@ -10730,7 +12116,39 @@
                 </a:solidFill>
                 <a:latin typeface="Meiryo UI"/>
               </a:rPr>
-              <a:t>もっと壊したい人へ: test-matrix.md §4 に R1〜R13。今日やったのは 3 つだけです</a:t>
+              <a:t>R7  二重終端 … HGW と配下ルータの両方が IPv4 over IPv6 を終端してしまう</a:t>
+            </a:r>
+          </a:p>
+          <a:p>
+            <a:pPr lvl="1" algn="l">
+              <a:spcAft>
+                <a:spcPts val="600"/>
+              </a:spcAft>
+            </a:pPr>
+            <a:r>
+              <a:rPr sz="1700" b="0">
+                <a:solidFill>
+                  <a:srgbClr val="555555"/>
+                </a:solidFill>
+                <a:latin typeface="Meiryo UI"/>
+              </a:rPr>
+              <a:t>R9  プレフィックス変更への追従 … 網から降る住所が変わったとき LAN が付いてこられるか</a:t>
+            </a:r>
+          </a:p>
+          <a:p>
+            <a:pPr lvl="1" algn="l">
+              <a:spcAft>
+                <a:spcPts val="600"/>
+              </a:spcAft>
+            </a:pPr>
+            <a:r>
+              <a:rPr sz="1700" b="0">
+                <a:solidFill>
+                  <a:srgbClr val="555555"/>
+                </a:solidFill>
+                <a:latin typeface="Meiryo UI"/>
+              </a:rPr>
+              <a:t>R13 外→内の IPv6 直接着信 … NAT が無くなると外から直接届く。その是非</a:t>
             </a:r>
           </a:p>
           <a:p>
@@ -10778,7 +12196,7 @@
                 </a:solidFill>
                 <a:latin typeface="Meiryo UI"/>
               </a:rPr>
-              <a:t>詰まったとき           runbook-vmware.md §9 (A〜N)</a:t>
+              <a:t>詰まったとき           runbook-vmware.md §9 のトラブル一覧</a:t>
             </a:r>
           </a:p>
           <a:p>
@@ -10840,543 +12258,6 @@
 </file>
 
 <file path=ppt/slides/slide4.xml><?xml version="1.0" encoding="utf-8"?>
-<p:sld xmlns:a="http://schemas.openxmlformats.org/drawingml/2006/main" xmlns:p="http://schemas.openxmlformats.org/presentationml/2006/main" xmlns:r="http://schemas.openxmlformats.org/officeDocument/2006/relationships">
-  <p:cSld>
-    <p:spTree>
-      <p:nvGrpSpPr>
-        <p:cNvPr id="1" name=""/>
-        <p:cNvGrpSpPr/>
-        <p:nvPr/>
-      </p:nvGrpSpPr>
-      <p:grpSpPr/>
-      <p:sp>
-        <p:nvSpPr>
-          <p:cNvPr id="2" name="TextBox 1"/>
-          <p:cNvSpPr txBox="1"/>
-          <p:nvPr/>
-        </p:nvSpPr>
-        <p:spPr>
-          <a:xfrm>
-            <a:off x="502920" y="274320"/>
-            <a:ext cx="11155680" cy="731520"/>
-          </a:xfrm>
-          <a:prstGeom prst="rect">
-            <a:avLst/>
-          </a:prstGeom>
-          <a:noFill/>
-        </p:spPr>
-        <p:txBody>
-          <a:bodyPr wrap="square">
-            <a:spAutoFit/>
-          </a:bodyPr>
-          <a:lstStyle/>
-          <a:p>
-            <a:pPr algn="l"/>
-            <a:r>
-              <a:rPr sz="2600" b="1">
-                <a:solidFill>
-                  <a:srgbClr val="1F3355"/>
-                </a:solidFill>
-                <a:latin typeface="Meiryo UI"/>
-              </a:rPr>
-              <a:t>つながり方</a:t>
-            </a:r>
-          </a:p>
-        </p:txBody>
-      </p:sp>
-      <p:sp>
-        <p:nvSpPr>
-          <p:cNvPr id="3" name="Rounded Rectangle 2"/>
-          <p:cNvSpPr/>
-          <p:nvPr/>
-        </p:nvSpPr>
-        <p:spPr>
-          <a:xfrm>
-            <a:off x="685800" y="2377440"/>
-            <a:ext cx="2211933" cy="1371600"/>
-          </a:xfrm>
-          <a:prstGeom prst="roundRect">
-            <a:avLst/>
-          </a:prstGeom>
-          <a:solidFill>
-            <a:srgbClr val="EFF5FA"/>
-          </a:solidFill>
-          <a:ln w="22225">
-            <a:solidFill>
-              <a:srgbClr val="007ACC"/>
-            </a:solidFill>
-          </a:ln>
-        </p:spPr>
-        <p:style>
-          <a:lnRef idx="1">
-            <a:schemeClr val="accent1"/>
-          </a:lnRef>
-          <a:fillRef idx="3">
-            <a:schemeClr val="accent1"/>
-          </a:fillRef>
-          <a:effectRef idx="2">
-            <a:schemeClr val="accent1"/>
-          </a:effectRef>
-          <a:fontRef idx="minor">
-            <a:schemeClr val="lt1"/>
-          </a:fontRef>
-        </p:style>
-        <p:txBody>
-          <a:bodyPr rtlCol="0" anchor="ctr" wrap="square"/>
-          <a:lstStyle/>
-          <a:p>
-            <a:pPr algn="ctr"/>
-            <a:r>
-              <a:rPr sz="1500" b="1">
-                <a:solidFill>
-                  <a:srgbClr val="1F3355"/>
-                </a:solidFill>
-                <a:latin typeface="Meiryo UI"/>
-              </a:rPr>
-              <a:t>司会の端末</a:t>
-            </a:r>
-          </a:p>
-          <a:p>
-            <a:pPr algn="ctr"/>
-            <a:r>
-              <a:rPr sz="1100" b="0">
-                <a:solidFill>
-                  <a:srgbClr val="555555"/>
-                </a:solidFill>
-                <a:latin typeface="Meiryo UI"/>
-              </a:rPr>
-              <a:t>lab-mode.sh で
-方式を切り替える</a:t>
-            </a:r>
-          </a:p>
-        </p:txBody>
-      </p:sp>
-      <p:sp>
-        <p:nvSpPr>
-          <p:cNvPr id="4" name="Right Arrow 3"/>
-          <p:cNvSpPr/>
-          <p:nvPr/>
-        </p:nvSpPr>
-        <p:spPr>
-          <a:xfrm>
-            <a:off x="2897733" y="2926080"/>
-            <a:ext cx="647395" cy="292608"/>
-          </a:xfrm>
-          <a:prstGeom prst="rightArrow">
-            <a:avLst/>
-          </a:prstGeom>
-          <a:solidFill>
-            <a:srgbClr val="007ACC"/>
-          </a:solidFill>
-          <a:ln>
-            <a:noFill/>
-          </a:ln>
-        </p:spPr>
-        <p:style>
-          <a:lnRef idx="1">
-            <a:schemeClr val="accent1"/>
-          </a:lnRef>
-          <a:fillRef idx="3">
-            <a:schemeClr val="accent1"/>
-          </a:fillRef>
-          <a:effectRef idx="2">
-            <a:schemeClr val="accent1"/>
-          </a:effectRef>
-          <a:fontRef idx="minor">
-            <a:schemeClr val="lt1"/>
-          </a:fontRef>
-        </p:style>
-        <p:txBody>
-          <a:bodyPr rtlCol="0" anchor="ctr"/>
-          <a:lstStyle/>
-          <a:p>
-            <a:pPr algn="ctr"/>
-          </a:p>
-        </p:txBody>
-      </p:sp>
-      <p:sp>
-        <p:nvSpPr>
-          <p:cNvPr id="5" name="Rounded Rectangle 4"/>
-          <p:cNvSpPr/>
-          <p:nvPr/>
-        </p:nvSpPr>
-        <p:spPr>
-          <a:xfrm>
-            <a:off x="3545128" y="2377440"/>
-            <a:ext cx="2211933" cy="1371600"/>
-          </a:xfrm>
-          <a:prstGeom prst="roundRect">
-            <a:avLst/>
-          </a:prstGeom>
-          <a:solidFill>
-            <a:srgbClr val="EFF5FA"/>
-          </a:solidFill>
-          <a:ln w="22225">
-            <a:solidFill>
-              <a:srgbClr val="007ACC"/>
-            </a:solidFill>
-          </a:ln>
-        </p:spPr>
-        <p:style>
-          <a:lnRef idx="1">
-            <a:schemeClr val="accent1"/>
-          </a:lnRef>
-          <a:fillRef idx="3">
-            <a:schemeClr val="accent1"/>
-          </a:fillRef>
-          <a:effectRef idx="2">
-            <a:schemeClr val="accent1"/>
-          </a:effectRef>
-          <a:fontRef idx="minor">
-            <a:schemeClr val="lt1"/>
-          </a:fontRef>
-        </p:style>
-        <p:txBody>
-          <a:bodyPr rtlCol="0" anchor="ctr" wrap="square"/>
-          <a:lstStyle/>
-          <a:p>
-            <a:pPr algn="ctr"/>
-            <a:r>
-              <a:rPr sz="1500" b="1">
-                <a:solidFill>
-                  <a:srgbClr val="1F3355"/>
-                </a:solidFill>
-                <a:latin typeface="Meiryo UI"/>
-              </a:rPr>
-              <a:t>NGN-SIM / VNE</a:t>
-            </a:r>
-          </a:p>
-          <a:p>
-            <a:pPr algn="ctr"/>
-            <a:r>
-              <a:rPr sz="1100" b="0">
-                <a:solidFill>
-                  <a:srgbClr val="555555"/>
-                </a:solidFill>
-                <a:latin typeface="Meiryo UI"/>
-              </a:rPr>
-              <a:t>NTT の網と
-VNE の代わり</a:t>
-            </a:r>
-          </a:p>
-        </p:txBody>
-      </p:sp>
-      <p:sp>
-        <p:nvSpPr>
-          <p:cNvPr id="6" name="Right Arrow 5"/>
-          <p:cNvSpPr/>
-          <p:nvPr/>
-        </p:nvSpPr>
-        <p:spPr>
-          <a:xfrm>
-            <a:off x="5757062" y="2926080"/>
-            <a:ext cx="647395" cy="292608"/>
-          </a:xfrm>
-          <a:prstGeom prst="rightArrow">
-            <a:avLst/>
-          </a:prstGeom>
-          <a:solidFill>
-            <a:srgbClr val="007ACC"/>
-          </a:solidFill>
-          <a:ln>
-            <a:noFill/>
-          </a:ln>
-        </p:spPr>
-        <p:style>
-          <a:lnRef idx="1">
-            <a:schemeClr val="accent1"/>
-          </a:lnRef>
-          <a:fillRef idx="3">
-            <a:schemeClr val="accent1"/>
-          </a:fillRef>
-          <a:effectRef idx="2">
-            <a:schemeClr val="accent1"/>
-          </a:effectRef>
-          <a:fontRef idx="minor">
-            <a:schemeClr val="lt1"/>
-          </a:fontRef>
-        </p:style>
-        <p:txBody>
-          <a:bodyPr rtlCol="0" anchor="ctr"/>
-          <a:lstStyle/>
-          <a:p>
-            <a:pPr algn="ctr"/>
-          </a:p>
-        </p:txBody>
-      </p:sp>
-      <p:sp>
-        <p:nvSpPr>
-          <p:cNvPr id="7" name="Rounded Rectangle 6"/>
-          <p:cNvSpPr/>
-          <p:nvPr/>
-        </p:nvSpPr>
-        <p:spPr>
-          <a:xfrm>
-            <a:off x="6404457" y="2377440"/>
-            <a:ext cx="2211933" cy="1371600"/>
-          </a:xfrm>
-          <a:prstGeom prst="roundRect">
-            <a:avLst/>
-          </a:prstGeom>
-          <a:solidFill>
-            <a:srgbClr val="EFF5FA"/>
-          </a:solidFill>
-          <a:ln w="22225">
-            <a:solidFill>
-              <a:srgbClr val="007ACC"/>
-            </a:solidFill>
-          </a:ln>
-        </p:spPr>
-        <p:style>
-          <a:lnRef idx="1">
-            <a:schemeClr val="accent1"/>
-          </a:lnRef>
-          <a:fillRef idx="3">
-            <a:schemeClr val="accent1"/>
-          </a:fillRef>
-          <a:effectRef idx="2">
-            <a:schemeClr val="accent1"/>
-          </a:effectRef>
-          <a:fontRef idx="minor">
-            <a:schemeClr val="lt1"/>
-          </a:fontRef>
-        </p:style>
-        <p:txBody>
-          <a:bodyPr rtlCol="0" anchor="ctr" wrap="square"/>
-          <a:lstStyle/>
-          <a:p>
-            <a:pPr algn="ctr"/>
-            <a:r>
-              <a:rPr sz="1500" b="1">
-                <a:solidFill>
-                  <a:srgbClr val="1F3355"/>
-                </a:solidFill>
-                <a:latin typeface="Meiryo UI"/>
-              </a:rPr>
-              <a:t>Cisco 892FJ</a:t>
-            </a:r>
-          </a:p>
-          <a:p>
-            <a:pPr algn="ctr"/>
-            <a:r>
-              <a:rPr sz="1100" b="0">
-                <a:solidFill>
-                  <a:srgbClr val="555555"/>
-                </a:solidFill>
-                <a:latin typeface="Meiryo UI"/>
-              </a:rPr>
-              <a:t>あなたが触るのはここ
-コンソール接続</a:t>
-            </a:r>
-          </a:p>
-        </p:txBody>
-      </p:sp>
-      <p:sp>
-        <p:nvSpPr>
-          <p:cNvPr id="8" name="Right Arrow 7"/>
-          <p:cNvSpPr/>
-          <p:nvPr/>
-        </p:nvSpPr>
-        <p:spPr>
-          <a:xfrm>
-            <a:off x="8616391" y="2926080"/>
-            <a:ext cx="647395" cy="292608"/>
-          </a:xfrm>
-          <a:prstGeom prst="rightArrow">
-            <a:avLst/>
-          </a:prstGeom>
-          <a:solidFill>
-            <a:srgbClr val="007ACC"/>
-          </a:solidFill>
-          <a:ln>
-            <a:noFill/>
-          </a:ln>
-        </p:spPr>
-        <p:style>
-          <a:lnRef idx="1">
-            <a:schemeClr val="accent1"/>
-          </a:lnRef>
-          <a:fillRef idx="3">
-            <a:schemeClr val="accent1"/>
-          </a:fillRef>
-          <a:effectRef idx="2">
-            <a:schemeClr val="accent1"/>
-          </a:effectRef>
-          <a:fontRef idx="minor">
-            <a:schemeClr val="lt1"/>
-          </a:fontRef>
-        </p:style>
-        <p:txBody>
-          <a:bodyPr rtlCol="0" anchor="ctr"/>
-          <a:lstStyle/>
-          <a:p>
-            <a:pPr algn="ctr"/>
-          </a:p>
-        </p:txBody>
-      </p:sp>
-      <p:sp>
-        <p:nvSpPr>
-          <p:cNvPr id="9" name="Rounded Rectangle 8"/>
-          <p:cNvSpPr/>
-          <p:nvPr/>
-        </p:nvSpPr>
-        <p:spPr>
-          <a:xfrm>
-            <a:off x="9263786" y="2377440"/>
-            <a:ext cx="2211933" cy="1371600"/>
-          </a:xfrm>
-          <a:prstGeom prst="roundRect">
-            <a:avLst/>
-          </a:prstGeom>
-          <a:solidFill>
-            <a:srgbClr val="EFF5FA"/>
-          </a:solidFill>
-          <a:ln w="22225">
-            <a:solidFill>
-              <a:srgbClr val="007ACC"/>
-            </a:solidFill>
-          </a:ln>
-        </p:spPr>
-        <p:style>
-          <a:lnRef idx="1">
-            <a:schemeClr val="accent1"/>
-          </a:lnRef>
-          <a:fillRef idx="3">
-            <a:schemeClr val="accent1"/>
-          </a:fillRef>
-          <a:effectRef idx="2">
-            <a:schemeClr val="accent1"/>
-          </a:effectRef>
-          <a:fontRef idx="minor">
-            <a:schemeClr val="lt1"/>
-          </a:fontRef>
-        </p:style>
-        <p:txBody>
-          <a:bodyPr rtlCol="0" anchor="ctr" wrap="square"/>
-          <a:lstStyle/>
-          <a:p>
-            <a:pPr algn="ctr"/>
-            <a:r>
-              <a:rPr sz="1500" b="1">
-                <a:solidFill>
-                  <a:srgbClr val="1F3355"/>
-                </a:solidFill>
-                <a:latin typeface="Meiryo UI"/>
-              </a:rPr>
-              <a:t>検証用 PC</a:t>
-            </a:r>
-          </a:p>
-          <a:p>
-            <a:pPr algn="ctr"/>
-            <a:r>
-              <a:rPr sz="1100" b="0">
-                <a:solidFill>
-                  <a:srgbClr val="555555"/>
-                </a:solidFill>
-                <a:latin typeface="Meiryo UI"/>
-              </a:rPr>
-              <a:t>892FJ の LAN ポートに直結
-疎通と出口を確認</a:t>
-            </a:r>
-          </a:p>
-        </p:txBody>
-      </p:sp>
-      <p:sp>
-        <p:nvSpPr>
-          <p:cNvPr id="10" name="TextBox 9"/>
-          <p:cNvSpPr txBox="1"/>
-          <p:nvPr/>
-        </p:nvSpPr>
-        <p:spPr>
-          <a:xfrm>
-            <a:off x="685800" y="4114800"/>
-            <a:ext cx="10789920" cy="1828800"/>
-          </a:xfrm>
-          <a:prstGeom prst="rect">
-            <a:avLst/>
-          </a:prstGeom>
-          <a:noFill/>
-        </p:spPr>
-        <p:txBody>
-          <a:bodyPr wrap="square">
-            <a:spAutoFit/>
-          </a:bodyPr>
-          <a:lstStyle/>
-          <a:p>
-            <a:pPr algn="l">
-              <a:spcAft>
-                <a:spcPts val="600"/>
-              </a:spcAft>
-            </a:pPr>
-            <a:r>
-              <a:rPr sz="1400" b="0">
-                <a:solidFill>
-                  <a:srgbClr val="555555"/>
-                </a:solidFill>
-                <a:latin typeface="Meiryo UI"/>
-              </a:rPr>
-              <a:t>司会が使うのはこれだけです (受講者は打ちません):</a:t>
-            </a:r>
-          </a:p>
-          <a:p>
-            <a:pPr algn="l">
-              <a:spcAft>
-                <a:spcPts val="600"/>
-              </a:spcAft>
-            </a:pPr>
-            <a:r>
-              <a:rPr sz="1400" b="0">
-                <a:solidFill>
-                  <a:srgbClr val="555555"/>
-                </a:solidFill>
-                <a:latin typeface="Meiryo UI"/>
-              </a:rPr>
-              <a:t>  ./lab-mode.sh ra / pd        … 網の IPv6 の配り方を切り替える</a:t>
-            </a:r>
-          </a:p>
-          <a:p>
-            <a:pPr algn="l">
-              <a:spcAft>
-                <a:spcPts val="600"/>
-              </a:spcAft>
-            </a:pPr>
-            <a:r>
-              <a:rPr sz="1400" b="0">
-                <a:solidFill>
-                  <a:srgbClr val="555555"/>
-                </a:solidFill>
-                <a:latin typeface="Meiryo UI"/>
-              </a:rPr>
-              <a:t>  ./lab-mode.sh dslite &lt;CEのIPv6&gt; … IPv4 の運び方を DS-Lite にする</a:t>
-            </a:r>
-          </a:p>
-          <a:p>
-            <a:pPr algn="l">
-              <a:spcAft>
-                <a:spcPts val="600"/>
-              </a:spcAft>
-            </a:pPr>
-            <a:r>
-              <a:rPr sz="1400" b="0">
-                <a:solidFill>
-                  <a:srgbClr val="555555"/>
-                </a:solidFill>
-                <a:latin typeface="Meiryo UI"/>
-              </a:rPr>
-              <a:t>  ./lab-mode.sh break mtu|dns / restore … 障害を注入する / 戻す</a:t>
-            </a:r>
-          </a:p>
-        </p:txBody>
-      </p:sp>
-    </p:spTree>
-  </p:cSld>
-  <p:clrMapOvr>
-    <a:masterClrMapping/>
-  </p:clrMapOvr>
-</p:sld>
-</file>
-
-<file path=ppt/slides/slide5.xml><?xml version="1.0" encoding="utf-8"?>
 <p:sld xmlns:a="http://schemas.openxmlformats.org/drawingml/2006/main" xmlns:p="http://schemas.openxmlformats.org/presentationml/2006/main" xmlns:r="http://schemas.openxmlformats.org/officeDocument/2006/relationships">
   <p:cSld>
     <p:spTree>
@@ -11655,7 +12536,7 @@
 </p:sld>
 </file>
 
-<file path=ppt/slides/slide6.xml><?xml version="1.0" encoding="utf-8"?>
+<file path=ppt/slides/slide5.xml><?xml version="1.0" encoding="utf-8"?>
 <p:sld xmlns:a="http://schemas.openxmlformats.org/drawingml/2006/main" xmlns:p="http://schemas.openxmlformats.org/presentationml/2006/main" xmlns:r="http://schemas.openxmlformats.org/officeDocument/2006/relationships">
   <p:cSld>
     <p:spTree>
@@ -11695,7 +12576,7 @@
                 </a:solidFill>
                 <a:latin typeface="Meiryo UI"/>
               </a:rPr>
-              <a:t>0-3. 最低限の設定を入れる (10 分)</a:t>
+              <a:t>0-3. 最低限の設定を入れる (10 分) — 892FJ 側</a:t>
             </a:r>
           </a:p>
         </p:txBody>
@@ -11767,27 +12648,43 @@
           <a:p>
             <a:pPr algn="l">
               <a:spcAft>
-                <a:spcPts val="900"/>
-              </a:spcAft>
-            </a:pPr>
-            <a:r>
-              <a:rPr sz="1900" b="0">
+                <a:spcPts val="700"/>
+              </a:spcAft>
+            </a:pPr>
+            <a:r>
+              <a:rPr sz="1700" b="0">
                 <a:solidFill>
                   <a:srgbClr val="0B6040"/>
                 </a:solidFill>
                 <a:latin typeface="Consolas"/>
               </a:rPr>
+              <a:t>hostname CPE / no ip domain lookup / ipv6 unicast-routing</a:t>
+            </a:r>
+          </a:p>
+          <a:p>
+            <a:pPr algn="l">
+              <a:spcAft>
+                <a:spcPts val="700"/>
+              </a:spcAft>
+            </a:pPr>
+            <a:r>
+              <a:rPr sz="1700" b="0">
+                <a:solidFill>
+                  <a:srgbClr val="0B6040"/>
+                </a:solidFill>
+                <a:latin typeface="Consolas"/>
+              </a:rPr>
               <a:t>interface GigabitEthernet0   ← WAN</a:t>
             </a:r>
           </a:p>
           <a:p>
             <a:pPr lvl="1" algn="l">
               <a:spcAft>
-                <a:spcPts val="500"/>
-              </a:spcAft>
-            </a:pPr>
-            <a:r>
-              <a:rPr sz="1600" b="0">
+                <a:spcPts val="300"/>
+              </a:spcAft>
+            </a:pPr>
+            <a:r>
+              <a:rPr sz="1400" b="0">
                 <a:solidFill>
                   <a:srgbClr val="0B6040"/>
                 </a:solidFill>
@@ -11799,11 +12696,11 @@
           <a:p>
             <a:pPr lvl="1" algn="l">
               <a:spcAft>
-                <a:spcPts val="500"/>
-              </a:spcAft>
-            </a:pPr>
-            <a:r>
-              <a:rPr sz="1600" b="0">
+                <a:spcPts val="300"/>
+              </a:spcAft>
+            </a:pPr>
+            <a:r>
+              <a:rPr sz="1400" b="0">
                 <a:solidFill>
                   <a:srgbClr val="0B6040"/>
                 </a:solidFill>
@@ -11815,11 +12712,11 @@
           <a:p>
             <a:pPr lvl="1" algn="l">
               <a:spcAft>
-                <a:spcPts val="500"/>
-              </a:spcAft>
-            </a:pPr>
-            <a:r>
-              <a:rPr sz="1600" b="0">
+                <a:spcPts val="300"/>
+              </a:spcAft>
+            </a:pPr>
+            <a:r>
+              <a:rPr sz="1400" b="0">
                 <a:solidFill>
                   <a:srgbClr val="0B6040"/>
                 </a:solidFill>
@@ -11831,11 +12728,11 @@
           <a:p>
             <a:pPr lvl="1" algn="l">
               <a:spcAft>
-                <a:spcPts val="500"/>
-              </a:spcAft>
-            </a:pPr>
-            <a:r>
-              <a:rPr sz="1600" b="0">
+                <a:spcPts val="300"/>
+              </a:spcAft>
+            </a:pPr>
+            <a:r>
+              <a:rPr sz="1400" b="0">
                 <a:solidFill>
                   <a:srgbClr val="0B6040"/>
                 </a:solidFill>
@@ -11845,13 +12742,29 @@
             </a:r>
           </a:p>
           <a:p>
+            <a:pPr lvl="1" algn="l">
+              <a:spcAft>
+                <a:spcPts val="300"/>
+              </a:spcAft>
+            </a:pPr>
+            <a:r>
+              <a:rPr sz="1400" b="0">
+                <a:solidFill>
+                  <a:srgbClr val="0B6040"/>
+                </a:solidFill>
+                <a:latin typeface="Consolas"/>
+              </a:rPr>
+              <a:t> no shutdown</a:t>
+            </a:r>
+          </a:p>
+          <a:p>
             <a:pPr algn="l">
               <a:spcAft>
-                <a:spcPts val="900"/>
-              </a:spcAft>
-            </a:pPr>
-            <a:r>
-              <a:rPr sz="1900" b="0">
+                <a:spcPts val="700"/>
+              </a:spcAft>
+            </a:pPr>
+            <a:r>
+              <a:rPr sz="1700" b="0">
                 <a:solidFill>
                   <a:srgbClr val="0B6040"/>
                 </a:solidFill>
@@ -11863,11 +12776,11 @@
           <a:p>
             <a:pPr lvl="1" algn="l">
               <a:spcAft>
-                <a:spcPts val="500"/>
-              </a:spcAft>
-            </a:pPr>
-            <a:r>
-              <a:rPr sz="1600" b="0">
+                <a:spcPts val="300"/>
+              </a:spcAft>
+            </a:pPr>
+            <a:r>
+              <a:rPr sz="1400" b="0">
                 <a:solidFill>
                   <a:srgbClr val="0B6040"/>
                 </a:solidFill>
@@ -11879,11 +12792,11 @@
           <a:p>
             <a:pPr lvl="1" algn="l">
               <a:spcAft>
-                <a:spcPts val="500"/>
-              </a:spcAft>
-            </a:pPr>
-            <a:r>
-              <a:rPr sz="1600" b="0">
+                <a:spcPts val="300"/>
+              </a:spcAft>
+            </a:pPr>
+            <a:r>
+              <a:rPr sz="1400" b="0">
                 <a:solidFill>
                   <a:srgbClr val="0B6040"/>
                 </a:solidFill>
@@ -11893,83 +12806,83 @@
             </a:r>
           </a:p>
           <a:p>
+            <a:pPr lvl="1" algn="l">
+              <a:spcAft>
+                <a:spcPts val="300"/>
+              </a:spcAft>
+            </a:pPr>
+            <a:r>
+              <a:rPr sz="1400" b="0">
+                <a:solidFill>
+                  <a:srgbClr val="0B6040"/>
+                </a:solidFill>
+                <a:latin typeface="Consolas"/>
+              </a:rPr>
+              <a:t> no shutdown</a:t>
+            </a:r>
+          </a:p>
+          <a:p>
             <a:pPr algn="l">
               <a:spcAft>
-                <a:spcPts val="900"/>
-              </a:spcAft>
-            </a:pPr>
-            <a:r>
-              <a:rPr sz="1900" b="1">
-                <a:solidFill>
-                  <a:srgbClr val="1F3355"/>
-                </a:solidFill>
-                <a:latin typeface="Meiryo UI"/>
-              </a:rPr>
-              <a:t>1 行ずつ意味があります</a:t>
-            </a:r>
-          </a:p>
-          <a:p>
-            <a:pPr lvl="1" algn="l">
-              <a:spcAft>
-                <a:spcPts val="500"/>
-              </a:spcAft>
-            </a:pPr>
-            <a:r>
-              <a:rPr sz="1600" b="0">
-                <a:solidFill>
-                  <a:srgbClr val="555555"/>
-                </a:solidFill>
-                <a:latin typeface="Meiryo UI"/>
-              </a:rPr>
-              <a:t>ipv6 unicast-routing … IPv6 のルータとして動かす。無いと転送しません</a:t>
-            </a:r>
-          </a:p>
-          <a:p>
-            <a:pPr lvl="1" algn="l">
-              <a:spcAft>
-                <a:spcPts val="500"/>
-              </a:spcAft>
-            </a:pPr>
-            <a:r>
-              <a:rPr sz="1600" b="0">
-                <a:solidFill>
-                  <a:srgbClr val="555555"/>
-                </a:solidFill>
-                <a:latin typeface="Meiryo UI"/>
-              </a:rPr>
-              <a:t>ipv6 address autoconfig … 網から降る RA を使って 自分でアドレスを作る</a:t>
-            </a:r>
-          </a:p>
-          <a:p>
-            <a:pPr lvl="1" algn="l">
-              <a:spcAft>
-                <a:spcPts val="500"/>
-              </a:spcAft>
-            </a:pPr>
-            <a:r>
-              <a:rPr sz="1600" b="0">
-                <a:solidFill>
-                  <a:srgbClr val="555555"/>
-                </a:solidFill>
-                <a:latin typeface="Meiryo UI"/>
-              </a:rPr>
-              <a:t>ipv6 nd ra suppress all … 自分は RA を撒かない。実網で撒くと事故になります</a:t>
-            </a:r>
-          </a:p>
-          <a:p>
-            <a:pPr lvl="1" algn="l">
-              <a:spcAft>
-                <a:spcPts val="500"/>
-              </a:spcAft>
-            </a:pPr>
-            <a:r>
-              <a:rPr sz="1600" b="0">
-                <a:solidFill>
-                  <a:srgbClr val="555555"/>
-                </a:solidFill>
-                <a:latin typeface="Meiryo UI"/>
-              </a:rPr>
-              <a:t>ip tcp adjust-mss 1420 … 後半の MTU の演習で効きます。いまは入れておくだけ</a:t>
+                <a:spcPts val="700"/>
+              </a:spcAft>
+            </a:pPr>
+            <a:r>
+              <a:rPr sz="1700" b="0">
+                <a:solidFill>
+                  <a:srgbClr val="0B6040"/>
+                </a:solidFill>
+                <a:latin typeface="Consolas"/>
+              </a:rPr>
+              <a:t>interface FastEthernet0   ← 検証用 PC を挿すポート</a:t>
+            </a:r>
+          </a:p>
+          <a:p>
+            <a:pPr lvl="1" algn="l">
+              <a:spcAft>
+                <a:spcPts val="300"/>
+              </a:spcAft>
+            </a:pPr>
+            <a:r>
+              <a:rPr sz="1400" b="0">
+                <a:solidFill>
+                  <a:srgbClr val="0B6040"/>
+                </a:solidFill>
+                <a:latin typeface="Consolas"/>
+              </a:rPr>
+              <a:t> switchport access vlan 1</a:t>
+            </a:r>
+          </a:p>
+          <a:p>
+            <a:pPr lvl="1" algn="l">
+              <a:spcAft>
+                <a:spcPts val="300"/>
+              </a:spcAft>
+            </a:pPr>
+            <a:r>
+              <a:rPr sz="1400" b="0">
+                <a:solidFill>
+                  <a:srgbClr val="0B6040"/>
+                </a:solidFill>
+                <a:latin typeface="Consolas"/>
+              </a:rPr>
+              <a:t> no shutdown</a:t>
+            </a:r>
+          </a:p>
+          <a:p>
+            <a:pPr algn="l">
+              <a:spcAft>
+                <a:spcPts val="700"/>
+              </a:spcAft>
+            </a:pPr>
+            <a:r>
+              <a:rPr sz="1700" b="0">
+                <a:solidFill>
+                  <a:srgbClr val="0B6040"/>
+                </a:solidFill>
+                <a:latin typeface="Consolas"/>
+              </a:rPr>
+              <a:t>end  →  write memory   ← 保存を忘れないこと</a:t>
             </a:r>
           </a:p>
         </p:txBody>
@@ -12005,6 +12918,285 @@
                 <a:latin typeface="Meiryo UI"/>
               </a:rPr>
               <a:t>890 系は機種で構成が違います。show ip interface brief で実物を確認してから使ってください</a:t>
+            </a:r>
+          </a:p>
+        </p:txBody>
+      </p:sp>
+    </p:spTree>
+  </p:cSld>
+  <p:clrMapOvr>
+    <a:masterClrMapping/>
+  </p:clrMapOvr>
+</p:sld>
+</file>
+
+<file path=ppt/slides/slide6.xml><?xml version="1.0" encoding="utf-8"?>
+<p:sld xmlns:a="http://schemas.openxmlformats.org/drawingml/2006/main" xmlns:p="http://schemas.openxmlformats.org/presentationml/2006/main" xmlns:r="http://schemas.openxmlformats.org/officeDocument/2006/relationships">
+  <p:cSld>
+    <p:spTree>
+      <p:nvGrpSpPr>
+        <p:cNvPr id="1" name=""/>
+        <p:cNvGrpSpPr/>
+        <p:nvPr/>
+      </p:nvGrpSpPr>
+      <p:grpSpPr/>
+      <p:sp>
+        <p:nvSpPr>
+          <p:cNvPr id="2" name="TextBox 1"/>
+          <p:cNvSpPr txBox="1"/>
+          <p:nvPr/>
+        </p:nvSpPr>
+        <p:spPr>
+          <a:xfrm>
+            <a:off x="502920" y="320040"/>
+            <a:ext cx="11155680" cy="822960"/>
+          </a:xfrm>
+          <a:prstGeom prst="rect">
+            <a:avLst/>
+          </a:prstGeom>
+          <a:noFill/>
+        </p:spPr>
+        <p:txBody>
+          <a:bodyPr wrap="square">
+            <a:spAutoFit/>
+          </a:bodyPr>
+          <a:lstStyle/>
+          <a:p>
+            <a:pPr algn="l"/>
+            <a:r>
+              <a:rPr sz="2800" b="1">
+                <a:solidFill>
+                  <a:srgbClr val="1F3355"/>
+                </a:solidFill>
+                <a:latin typeface="Meiryo UI"/>
+              </a:rPr>
+              <a:t>0-3. つづき — 検証用 PC 側 (Windows)</a:t>
+            </a:r>
+          </a:p>
+        </p:txBody>
+      </p:sp>
+      <p:sp>
+        <p:nvSpPr>
+          <p:cNvPr id="3" name="Rectangle 2"/>
+          <p:cNvSpPr/>
+          <p:nvPr/>
+        </p:nvSpPr>
+        <p:spPr>
+          <a:xfrm>
+            <a:off x="502920" y="1115568"/>
+            <a:ext cx="11155680" cy="31750"/>
+          </a:xfrm>
+          <a:prstGeom prst="rect">
+            <a:avLst/>
+          </a:prstGeom>
+          <a:solidFill>
+            <a:srgbClr val="007ACC"/>
+          </a:solidFill>
+          <a:ln>
+            <a:noFill/>
+          </a:ln>
+        </p:spPr>
+        <p:style>
+          <a:lnRef idx="1">
+            <a:schemeClr val="accent1"/>
+          </a:lnRef>
+          <a:fillRef idx="3">
+            <a:schemeClr val="accent1"/>
+          </a:fillRef>
+          <a:effectRef idx="2">
+            <a:schemeClr val="accent1"/>
+          </a:effectRef>
+          <a:fontRef idx="minor">
+            <a:schemeClr val="lt1"/>
+          </a:fontRef>
+        </p:style>
+        <p:txBody>
+          <a:bodyPr rtlCol="0" anchor="ctr"/>
+          <a:lstStyle/>
+          <a:p>
+            <a:pPr algn="ctr"/>
+          </a:p>
+        </p:txBody>
+      </p:sp>
+      <p:sp>
+        <p:nvSpPr>
+          <p:cNvPr id="4" name="TextBox 3"/>
+          <p:cNvSpPr txBox="1"/>
+          <p:nvPr/>
+        </p:nvSpPr>
+        <p:spPr>
+          <a:xfrm>
+            <a:off x="594360" y="1371600"/>
+            <a:ext cx="10972800" cy="4983480"/>
+          </a:xfrm>
+          <a:prstGeom prst="rect">
+            <a:avLst/>
+          </a:prstGeom>
+          <a:noFill/>
+        </p:spPr>
+        <p:txBody>
+          <a:bodyPr wrap="square">
+            <a:spAutoFit/>
+          </a:bodyPr>
+          <a:lstStyle/>
+          <a:p>
+            <a:pPr algn="l">
+              <a:spcAft>
+                <a:spcPts val="1000"/>
+              </a:spcAft>
+            </a:pPr>
+            <a:r>
+              <a:rPr sz="2000" b="1">
+                <a:solidFill>
+                  <a:srgbClr val="1F3355"/>
+                </a:solidFill>
+                <a:latin typeface="Meiryo UI"/>
+              </a:rPr>
+              <a:t>今日は全部 Windows のコマンドで進めます。DHCP は使いません</a:t>
+            </a:r>
+          </a:p>
+          <a:p>
+            <a:pPr lvl="1" algn="l">
+              <a:spcAft>
+                <a:spcPts val="600"/>
+              </a:spcAft>
+            </a:pPr>
+            <a:r>
+              <a:rPr sz="1700" b="0">
+                <a:solidFill>
+                  <a:srgbClr val="555555"/>
+                </a:solidFill>
+                <a:latin typeface="Meiryo UI"/>
+              </a:rPr>
+              <a:t>892FJ の DHCP サーバは機種で挙動が違い、そこで詰まると本題に入れないため</a:t>
+            </a:r>
+          </a:p>
+          <a:p>
+            <a:pPr algn="l">
+              <a:spcAft>
+                <a:spcPts val="1000"/>
+              </a:spcAft>
+            </a:pPr>
+            <a:r>
+              <a:rPr sz="2000" b="1">
+                <a:solidFill>
+                  <a:srgbClr val="1F3355"/>
+                </a:solidFill>
+                <a:latin typeface="Meiryo UI"/>
+              </a:rPr>
+              <a:t>FastEthernet0 に繋いだ有線アダプタに、固定でこの 3 つを入れます</a:t>
+            </a:r>
+          </a:p>
+          <a:p>
+            <a:pPr lvl="1" algn="l">
+              <a:spcAft>
+                <a:spcPts val="600"/>
+              </a:spcAft>
+            </a:pPr>
+            <a:r>
+              <a:rPr sz="1700" b="0">
+                <a:solidFill>
+                  <a:srgbClr val="0B6040"/>
+                </a:solidFill>
+                <a:latin typeface="Consolas"/>
+              </a:rPr>
+              <a:t>IP アドレス        192.168.100.50 / 255.255.255.0</a:t>
+            </a:r>
+          </a:p>
+          <a:p>
+            <a:pPr lvl="1" algn="l">
+              <a:spcAft>
+                <a:spcPts val="600"/>
+              </a:spcAft>
+            </a:pPr>
+            <a:r>
+              <a:rPr sz="1700" b="0">
+                <a:solidFill>
+                  <a:srgbClr val="0B6040"/>
+                </a:solidFill>
+                <a:latin typeface="Consolas"/>
+              </a:rPr>
+              <a:t>デフォルトゲートウェイ  192.168.100.1   (= 892FJ の Vlan1)</a:t>
+            </a:r>
+          </a:p>
+          <a:p>
+            <a:pPr lvl="1" algn="l">
+              <a:spcAft>
+                <a:spcPts val="600"/>
+              </a:spcAft>
+            </a:pPr>
+            <a:r>
+              <a:rPr sz="1700" b="0">
+                <a:solidFill>
+                  <a:srgbClr val="0B6040"/>
+                </a:solidFill>
+                <a:latin typeface="Consolas"/>
+              </a:rPr>
+              <a:t>DNS サーバ         203.0.113.53    (= 模擬インターネットの DNS)</a:t>
+            </a:r>
+          </a:p>
+          <a:p>
+            <a:pPr algn="l">
+              <a:spcAft>
+                <a:spcPts val="1000"/>
+              </a:spcAft>
+            </a:pPr>
+            <a:r>
+              <a:rPr sz="2000" b="1">
+                <a:solidFill>
+                  <a:srgbClr val="1F3355"/>
+                </a:solidFill>
+                <a:latin typeface="Meiryo UI"/>
+              </a:rPr>
+              <a:t>PowerShell なら (インタフェース名は netsh interface show interface で確認)</a:t>
+            </a:r>
+          </a:p>
+          <a:p>
+            <a:pPr lvl="1" algn="l">
+              <a:spcAft>
+                <a:spcPts val="600"/>
+              </a:spcAft>
+            </a:pPr>
+            <a:r>
+              <a:rPr sz="1700" b="0">
+                <a:solidFill>
+                  <a:srgbClr val="0B6040"/>
+                </a:solidFill>
+                <a:latin typeface="Consolas"/>
+              </a:rPr>
+              <a:t>netsh interface ip set address "イーサネット" static 192.168.100.50 255.255.255.0 192.168.100.1</a:t>
+            </a:r>
+          </a:p>
+          <a:p>
+            <a:pPr lvl="1" algn="l">
+              <a:spcAft>
+                <a:spcPts val="600"/>
+              </a:spcAft>
+            </a:pPr>
+            <a:r>
+              <a:rPr sz="1700" b="0">
+                <a:solidFill>
+                  <a:srgbClr val="0B6040"/>
+                </a:solidFill>
+                <a:latin typeface="Consolas"/>
+              </a:rPr>
+              <a:t>netsh interface ip set dns     "イーサネット" static 203.0.113.53</a:t>
+            </a:r>
+          </a:p>
+          <a:p>
+            <a:pPr algn="l">
+              <a:spcAft>
+                <a:spcPts val="1000"/>
+              </a:spcAft>
+            </a:pPr>
+            <a:r>
+              <a:rPr sz="2000" b="1">
+                <a:solidFill>
+                  <a:srgbClr val="C0392B"/>
+                </a:solidFill>
+                <a:latin typeface="Meiryo UI"/>
+              </a:rPr>
+              <a:t>終わったら元に戻すのを忘れずに (第4部に戻し方があります)</a:t>
             </a:r>
           </a:p>
         </p:txBody>
@@ -12128,7 +13320,7 @@
                 </a:solidFill>
                 <a:latin typeface="Meiryo UI"/>
               </a:rPr>
-              <a:t>ゴール: 35 分。設定を変えずに、網の方式だけを変えます</a:t>
+              <a:t>ゴール: 30 分。設定を変えずに、網の方式だけを変えます</a:t>
             </a:r>
           </a:p>
         </p:txBody>
@@ -12181,7 +13373,7 @@
                 </a:solidFill>
                 <a:latin typeface="Meiryo UI"/>
               </a:rPr>
-              <a:t>演習 1: RA 方式で IPv6 が付く (10 分)</a:t>
+              <a:t>演習 1: RA 方式で IPv6 が付く — やり取りを目で見ながら (15 分)</a:t>
             </a:r>
           </a:p>
         </p:txBody>
@@ -12279,7 +13471,7 @@
                 </a:solidFill>
                 <a:latin typeface="Meiryo UI"/>
               </a:rPr>
-              <a:t>【あなた】892FJ で</a:t>
+              <a:t>【あなた】892FJ で。先に debug を仕掛けてから上げ下げします</a:t>
             </a:r>
           </a:p>
           <a:p>
@@ -12295,6 +13487,22 @@
                 </a:solidFill>
                 <a:latin typeface="Consolas"/>
               </a:rPr>
+              <a:t>CPE# debug ipv6 nd</a:t>
+            </a:r>
+          </a:p>
+          <a:p>
+            <a:pPr lvl="1" algn="l">
+              <a:spcAft>
+                <a:spcPts val="600"/>
+              </a:spcAft>
+            </a:pPr>
+            <a:r>
+              <a:rPr sz="1700" b="0">
+                <a:solidFill>
+                  <a:srgbClr val="0B6040"/>
+                </a:solidFill>
+                <a:latin typeface="Consolas"/>
+              </a:rPr>
               <a:t>CPE(config-if)# shutdown</a:t>
             </a:r>
           </a:p>
@@ -12315,6 +13523,22 @@
             </a:r>
           </a:p>
           <a:p>
+            <a:pPr algn="l">
+              <a:spcAft>
+                <a:spcPts val="1000"/>
+              </a:spcAft>
+            </a:pPr>
+            <a:r>
+              <a:rPr sz="2000" b="1">
+                <a:solidFill>
+                  <a:srgbClr val="1F3355"/>
+                </a:solidFill>
+                <a:latin typeface="Meiryo UI"/>
+              </a:rPr>
+              <a:t>出てくる出力 (アドレスが付くまでのやり取り)</a:t>
+            </a:r>
+          </a:p>
+          <a:p>
             <a:pPr lvl="1" algn="l">
               <a:spcAft>
                 <a:spcPts val="600"/>
@@ -12327,7 +13551,55 @@
                 </a:solidFill>
                 <a:latin typeface="Consolas"/>
               </a:rPr>
-              <a:t>CPE# show ipv6 interface GigabitEthernet0</a:t>
+              <a:t>ICMPv6-ND: Sending RS on GigabitEthernet0</a:t>
+            </a:r>
+          </a:p>
+          <a:p>
+            <a:pPr lvl="1" algn="l">
+              <a:spcAft>
+                <a:spcPts val="600"/>
+              </a:spcAft>
+            </a:pPr>
+            <a:r>
+              <a:rPr sz="1700" b="0">
+                <a:solidFill>
+                  <a:srgbClr val="0B6040"/>
+                </a:solidFill>
+                <a:latin typeface="Consolas"/>
+              </a:rPr>
+              <a:t>ICMPv6-ND: Received RA from FE80::AC:FF:FE00:1</a:t>
+            </a:r>
+          </a:p>
+          <a:p>
+            <a:pPr lvl="1" algn="l">
+              <a:spcAft>
+                <a:spcPts val="600"/>
+              </a:spcAft>
+            </a:pPr>
+            <a:r>
+              <a:rPr sz="1700" b="0">
+                <a:solidFill>
+                  <a:srgbClr val="0B6040"/>
+                </a:solidFill>
+                <a:latin typeface="Consolas"/>
+              </a:rPr>
+              <a:t>ICMPv6-ND:   Prefix 2001:DB8:1014:300::/64 onlink autoconfig</a:t>
+            </a:r>
+          </a:p>
+          <a:p>
+            <a:pPr lvl="1" algn="l">
+              <a:spcAft>
+                <a:spcPts val="600"/>
+              </a:spcAft>
+            </a:pPr>
+            <a:r>
+              <a:rPr sz="1700" b="0">
+                <a:solidFill>
+                  <a:srgbClr val="0B6040"/>
+                </a:solidFill>
+                <a:latin typeface="Consolas"/>
+              </a:rPr>
+              <a:t>ICMPv6-ND: Autoconfiguring address 2001:DB8:1014:300:E6AA:...</a:t>
             </a:r>
           </a:p>
           <a:p>
@@ -12339,11 +13611,11 @@
             <a:r>
               <a:rPr sz="2000" b="1">
                 <a:solidFill>
-                  <a:srgbClr val="1F3355"/>
-                </a:solidFill>
-                <a:latin typeface="Meiryo UI"/>
-              </a:rPr>
-              <a:t>出てくる出力</a:t>
+                  <a:srgbClr val="C0392B"/>
+                </a:solidFill>
+                <a:latin typeface="Meiryo UI"/>
+              </a:rPr>
+              <a:t>流れ終わったら必ず止める: CPE# undebug all</a:t>
             </a:r>
           </a:p>
           <a:p>
@@ -12359,39 +13631,7 @@
                 </a:solidFill>
                 <a:latin typeface="Consolas"/>
               </a:rPr>
-              <a:t>  IPv6 is enabled, link-local address is FE80::E6AA:5DFF:FE82:364A</a:t>
-            </a:r>
-          </a:p>
-          <a:p>
-            <a:pPr lvl="1" algn="l">
-              <a:spcAft>
-                <a:spcPts val="600"/>
-              </a:spcAft>
-            </a:pPr>
-            <a:r>
-              <a:rPr sz="1700" b="0">
-                <a:solidFill>
-                  <a:srgbClr val="0B6040"/>
-                </a:solidFill>
-                <a:latin typeface="Consolas"/>
-              </a:rPr>
-              <a:t>  Global unicast address(es):</a:t>
-            </a:r>
-          </a:p>
-          <a:p>
-            <a:pPr lvl="1" algn="l">
-              <a:spcAft>
-                <a:spcPts val="600"/>
-              </a:spcAft>
-            </a:pPr>
-            <a:r>
-              <a:rPr sz="1700" b="0">
-                <a:solidFill>
-                  <a:srgbClr val="0B6040"/>
-                </a:solidFill>
-                <a:latin typeface="Consolas"/>
-              </a:rPr>
-              <a:t>    2001:DB8:1014:300:E6AA:5DFF:FE82:364A, subnet is 2001:DB8:1014:300::/64</a:t>
+              <a:t>そのあと CPE# show ipv6 interface GigabitEthernet0 で結果を確認</a:t>
             </a:r>
           </a:p>
         </p:txBody>
@@ -12558,7 +13798,7 @@
                 </a:solidFill>
                 <a:latin typeface="Meiryo UI"/>
               </a:rPr>
-              <a:t>② その FE80:: を送信元にして「ルータいますか」と網に聞いた</a:t>
+              <a:t>② Sending RS … その FE80:: を送信元に「ルータいますか」と網に聞いた</a:t>
             </a:r>
           </a:p>
           <a:p>
@@ -12574,7 +13814,7 @@
                 </a:solidFill>
                 <a:latin typeface="Meiryo UI"/>
               </a:rPr>
-              <a:t>③ 網が RA で「前半は 2001:DB8:1014:300::/64 です」と答えた</a:t>
+              <a:t>③ Received RA … 網が「前半は 2001:DB8:1014:300::/64 です」と答えた</a:t>
             </a:r>
           </a:p>
           <a:p>
@@ -12590,7 +13830,23 @@
                 </a:solidFill>
                 <a:latin typeface="Meiryo UI"/>
               </a:rPr>
-              <a:t>892FJ が 後半 E6AA:5DFF:FE82:364A を自分で作って 完成させた</a:t>
+              <a:t>Prefix ... autoconfig ← この印が付いているから、自分で作ってよい</a:t>
+            </a:r>
+          </a:p>
+          <a:p>
+            <a:pPr lvl="1" algn="l">
+              <a:spcAft>
+                <a:spcPts val="600"/>
+              </a:spcAft>
+            </a:pPr>
+            <a:r>
+              <a:rPr sz="1700" b="0">
+                <a:solidFill>
+                  <a:srgbClr val="555555"/>
+                </a:solidFill>
+                <a:latin typeface="Meiryo UI"/>
+              </a:rPr>
+              <a:t>Autoconfiguring address ← 後半を自分で作って完成させた</a:t>
             </a:r>
           </a:p>
           <a:p>
@@ -12638,7 +13894,39 @@
                 </a:solidFill>
                 <a:latin typeface="Meiryo UI"/>
               </a:rPr>
-              <a:t>だから「事前にアドレスが分からない」。これが後の演習 4 で効いてきます</a:t>
+              <a:t>だから「事前にアドレスが分からない」。これが後の DS-Lite で効いてきます</a:t>
+            </a:r>
+          </a:p>
+          <a:p>
+            <a:pPr algn="l">
+              <a:spcAft>
+                <a:spcPts val="1000"/>
+              </a:spcAft>
+            </a:pPr>
+            <a:r>
+              <a:rPr sz="2000" b="1">
+                <a:solidFill>
+                  <a:srgbClr val="C0392B"/>
+                </a:solidFill>
+                <a:latin typeface="Meiryo UI"/>
+              </a:rPr>
+              <a:t>この Prefix ... autoconfig の 1 行を覚えておいてください</a:t>
+            </a:r>
+          </a:p>
+          <a:p>
+            <a:pPr lvl="1" algn="l">
+              <a:spcAft>
+                <a:spcPts val="600"/>
+              </a:spcAft>
+            </a:pPr>
+            <a:r>
+              <a:rPr sz="1700" b="0">
+                <a:solidFill>
+                  <a:srgbClr val="555555"/>
+                </a:solidFill>
+                <a:latin typeface="Meiryo UI"/>
+              </a:rPr>
+              <a:t>次の演習で、この 1 行だけが消えます</a:t>
             </a:r>
           </a:p>
         </p:txBody>

--- a/docs/ipoe-lab/slides/handson.pptx
+++ b/docs/ipoe-lab/slides/handson.pptx
@@ -11917,7 +11917,7 @@
                 </a:solidFill>
                 <a:latin typeface="Meiryo UI"/>
               </a:rPr>
-              <a:t>環境を使いたいときの窓口: ____________  /  伝えること: ① VNE 名 ② RA か PD か (不明可) ③ 持ち込む CPE の機種</a:t>
+              <a:t>環境を使いたいときの窓口: 會津まで (分からないことは何でも聞いてください)  /  伝えること: ① VNE 名 ② RA か PD か (不明可) ③ 持ち込む CPE の機種</a:t>
             </a:r>
           </a:p>
         </p:txBody>

--- a/docs/ipoe-lab/slides/handson.pptx
+++ b/docs/ipoe-lab/slides/handson.pptx
@@ -36,6 +36,8 @@
     <p:sldId id="284" r:id="rId36"/>
     <p:sldId id="285" r:id="rId37"/>
     <p:sldId id="286" r:id="rId38"/>
+    <p:sldId id="287" r:id="rId39"/>
+    <p:sldId id="288" r:id="rId40"/>
   </p:sldIdLst>
   <p:sldSz cx="12191695" cy="6858000" type="screen4x3"/>
   <p:notesSz cx="6858000" cy="9144000"/>
@@ -622,37 +624,32 @@
           <a:lstStyle/>
           <a:p>
             <a:r>
-              <a:t>【司会へ】</a:t>
-            </a:r>
-          </a:p>
-          <a:p>
-            <a:r>
-              <a:t>・**なぜ「両側」なのかを必ず説明すること。**経路 MTU は送る側が覚える。</a:t>
-            </a:r>
-          </a:p>
-          <a:p>
-            <a:r>
-              <a:t>  このダウンロードで大きいパケットを送っているのは **INET-SIM (サーバ) 側**なので、</a:t>
-            </a:r>
-          </a:p>
-          <a:p>
-            <a:r>
-              <a:t>  手元の PC だけ消してもサーバが小さいまま送り続けて再現しない。</a:t>
-            </a:r>
-          </a:p>
-          <a:p>
-            <a:r>
-              <a:t>・「片側だけ消して再現しない」は現場でもよくある足踏み。ここが持ち帰りどころ。</a:t>
-            </a:r>
-          </a:p>
-          <a:p>
-            <a:r>
-              <a:t>・**⚠ この演習は 892FJ での通し実走がまだ。**手順は OpenWrt CE での実測から組んである。</a:t>
-            </a:r>
-          </a:p>
-          <a:p>
-            <a:r>
-              <a:t>  **実施前に司会が一度通すこと。**出力が違ったら build-log.md に記録する。</a:t>
+              <a:t>【話す人へ】</a:t>
+            </a:r>
+          </a:p>
+          <a:p>
+            <a:r>
+              <a:t>・**先に予想させること。**「ルータに手で入れる」と答える人が多い。</a:t>
+            </a:r>
+          </a:p>
+          <a:p>
+            <a:r>
+              <a:t>  そこを外すのがこの演習の目的。</a:t>
+            </a:r>
+          </a:p>
+          <a:p>
+            <a:r>
+              <a:t>・**投入した設定に IPv4 が 1 つも無いこと**を指で示すと効く。</a:t>
+            </a:r>
+          </a:p>
+          <a:p>
+            <a:r>
+              <a:t>・C1111-8P は 1 台しかないので実演。受講者は手を止めて画面を見る。</a:t>
+            </a:r>
+          </a:p>
+          <a:p>
+            <a:r>
+              <a:t>・時間が押していても **前半は削らないこと。**説明会で一番腑に落ちない箇所。</a:t>
             </a:r>
           </a:p>
         </p:txBody>
@@ -727,37 +724,47 @@
           </a:p>
           <a:p>
             <a:r>
-              <a:t>・**LAN 内からの対照実験を飛ばさないこと。**これが無いと実験として成立しない</a:t>
-            </a:r>
-          </a:p>
-          <a:p>
-            <a:r>
-              <a:t>  (IPv4 の実務が長い受講者ほど、ここを突いてくる)。</a:t>
-            </a:r>
-          </a:p>
-          <a:p>
-            <a:r>
-              <a:t>・ip nat inside / outside を付けさせるのも同じ理由。付けずに落ちても</a:t>
-            </a:r>
-          </a:p>
-          <a:p>
-            <a:r>
-              <a:t>  「設定不備で落ちただけでは?」と言われて教訓が伝わらない。</a:t>
-            </a:r>
-          </a:p>
-          <a:p>
-            <a:r>
-              <a:t>・**⚠ この演習も 892FJ での通し実走がまだ。**出力は OpenWrt CE での実測 (R4) から。</a:t>
-            </a:r>
-          </a:p>
-          <a:p>
-            <a:r>
-              <a:t>  **実施前に司会が一度通すこと。**</a:t>
-            </a:r>
-          </a:p>
-          <a:p>
-            <a:r>
-              <a:t>・後始末: 静的 NAT の削除 + no ip nat inside / outside + ファイアウォール規則の削除。</a:t>
+              <a:t>・**なぜ「両側」なのかを必ず説明すること。**経路 MTU は送る側が覚える。</a:t>
+            </a:r>
+          </a:p>
+          <a:p>
+            <a:r>
+              <a:t>  このダウンロードで大きいパケットを送っているのは **INET-SIM (サーバ) 側**なので、</a:t>
+            </a:r>
+          </a:p>
+          <a:p>
+            <a:r>
+              <a:t>  手元の PC だけ消してもサーバが小さいまま送り続けて再現しない。</a:t>
+            </a:r>
+          </a:p>
+          <a:p>
+            <a:r>
+              <a:t>・「片側だけ消して再現しない」は現場でもよくある足踏み。ここが持ち帰りどころ。</a:t>
+            </a:r>
+          </a:p>
+          <a:p>
+            <a:r>
+              <a:t>・**MSS の調整は Vlan1 と Tunnel0 の 2 か所に入っている** (0-3 で入れた)。</a:t>
+            </a:r>
+          </a:p>
+          <a:p>
+            <a:r>
+              <a:t>  **片方だけ外すと再現しない。**模擬勉強会でここが漏れていた。</a:t>
+            </a:r>
+          </a:p>
+          <a:p>
+            <a:r>
+              <a:t>  show running-config | include adjust-mss で「何も出ない」ことを確認させること。</a:t>
+            </a:r>
+          </a:p>
+          <a:p>
+            <a:r>
+              <a:t>・**⚠ この演習は 892FJ での通し実走がまだ。**手順は OpenWrt CE での実測から組んである。</a:t>
+            </a:r>
+          </a:p>
+          <a:p>
+            <a:r>
+              <a:t>  **実施前に司会が一度通すこと。**出力が違ったら build-log.md に記録する。</a:t>
             </a:r>
           </a:p>
         </p:txBody>
@@ -832,12 +839,37 @@
           </a:p>
           <a:p>
             <a:r>
-              <a:t>・15 秒 / 0.2 秒 は自宅ラボの Linux クライアントでの実測値 (サイクル 5)。</a:t>
-            </a:r>
-          </a:p>
-          <a:p>
-            <a:r>
-              <a:t>  Windows 側の数字は端末によって多少ぶれる、と添えること。</a:t>
+              <a:t>・**LAN 内からの対照実験を飛ばさないこと。**これが無いと実験として成立しない</a:t>
+            </a:r>
+          </a:p>
+          <a:p>
+            <a:r>
+              <a:t>  (IPv4 の実務が長い受講者ほど、ここを突いてくる)。</a:t>
+            </a:r>
+          </a:p>
+          <a:p>
+            <a:r>
+              <a:t>・ip nat inside / outside を付けさせるのも同じ理由。付けずに落ちても</a:t>
+            </a:r>
+          </a:p>
+          <a:p>
+            <a:r>
+              <a:t>  「設定不備で落ちただけでは?」と言われて教訓が伝わらない。</a:t>
+            </a:r>
+          </a:p>
+          <a:p>
+            <a:r>
+              <a:t>・**⚠ この演習も 892FJ での通し実走がまだ。**出力は OpenWrt CE での実測 (R4) から。</a:t>
+            </a:r>
+          </a:p>
+          <a:p>
+            <a:r>
+              <a:t>  **実施前に司会が一度通すこと。**</a:t>
+            </a:r>
+          </a:p>
+          <a:p>
+            <a:r>
+              <a:t>・後始末: 静的 NAT の削除 + no ip nat inside / outside + ファイアウォール規則の削除。</a:t>
             </a:r>
           </a:p>
         </p:txBody>
@@ -912,32 +944,12 @@
           </a:p>
           <a:p>
             <a:r>
-              <a:t>・**全員が FAIL=0 に戻るまで解散しないこと。**戻し忘れが次回の演習を壊す。</a:t>
-            </a:r>
-          </a:p>
-          <a:p>
-            <a:r>
-              <a:t>・とくに 892FJ 側の adjust-mss / ip nat inside source / ip nat inside・outside の</a:t>
-            </a:r>
-          </a:p>
-          <a:p>
-            <a:r>
-              <a:t>  消し忘れが多い。</a:t>
-            </a:r>
-          </a:p>
-          <a:p>
-            <a:r>
-              <a:t>・**検証用 PC を dhcp に戻させるのを絶対に忘れないこと。**</a:t>
-            </a:r>
-          </a:p>
-          <a:p>
-            <a:r>
-              <a:t>  固定のまま席に戻ると社内ネットワークに繋がらず、問い合わせが来る。</a:t>
-            </a:r>
-          </a:p>
-          <a:p>
-            <a:r>
-              <a:t>・lab-mode.sh status で「障害の注入: なし」を全員に見せてから締める。</a:t>
+              <a:t>・15 秒 / 0.2 秒 は自宅ラボの Linux クライアントでの実測値 (サイクル 5)。</a:t>
+            </a:r>
+          </a:p>
+          <a:p>
+            <a:r>
+              <a:t>  Windows 側の数字は端末によって多少ぶれる、と添えること。</a:t>
             </a:r>
           </a:p>
         </p:txBody>
@@ -1012,6 +1024,106 @@
           </a:p>
           <a:p>
             <a:r>
+              <a:t>・**全員が FAIL=0 に戻るまで解散しないこと。**戻し忘れが次回の演習を壊す。</a:t>
+            </a:r>
+          </a:p>
+          <a:p>
+            <a:r>
+              <a:t>・とくに 892FJ 側の adjust-mss / ip nat inside source / ip nat inside・outside の</a:t>
+            </a:r>
+          </a:p>
+          <a:p>
+            <a:r>
+              <a:t>  消し忘れが多い。</a:t>
+            </a:r>
+          </a:p>
+          <a:p>
+            <a:r>
+              <a:t>・**検証用 PC を dhcp に戻させるのを絶対に忘れないこと。**</a:t>
+            </a:r>
+          </a:p>
+          <a:p>
+            <a:r>
+              <a:t>  固定のまま席に戻ると社内ネットワークに繋がらず、問い合わせが来る。</a:t>
+            </a:r>
+          </a:p>
+          <a:p>
+            <a:r>
+              <a:t>・lab-mode.sh status で「障害の注入: なし」を全員に見せてから締める。</a:t>
+            </a:r>
+          </a:p>
+        </p:txBody>
+      </p:sp>
+      <p:sp>
+        <p:nvSpPr>
+          <p:cNvPr id="4" name="Slide Number Placeholder 3"/>
+          <p:cNvSpPr>
+            <a:spLocks noGrp="1"/>
+          </p:cNvSpPr>
+          <p:nvPr>
+            <p:ph type="sldNum" idx="5" sz="quarter"/>
+          </p:nvPr>
+        </p:nvSpPr>
+        <p:spPr/>
+      </p:sp>
+    </p:spTree>
+  </p:cSld>
+  <p:clrMapOvr>
+    <a:masterClrMapping/>
+  </p:clrMapOvr>
+</p:notes>
+</file>
+
+<file path=ppt/notesSlides/notesSlide15.xml><?xml version="1.0" encoding="utf-8"?>
+<p:notes xmlns:a="http://schemas.openxmlformats.org/drawingml/2006/main" xmlns:p="http://schemas.openxmlformats.org/presentationml/2006/main" xmlns:r="http://schemas.openxmlformats.org/officeDocument/2006/relationships">
+  <p:cSld>
+    <p:spTree>
+      <p:nvGrpSpPr>
+        <p:cNvPr id="1" name=""/>
+        <p:cNvGrpSpPr/>
+        <p:nvPr/>
+      </p:nvGrpSpPr>
+      <p:grpSpPr>
+        <a:xfrm>
+          <a:off x="0" y="0"/>
+          <a:ext cx="0" cy="0"/>
+          <a:chOff x="0" y="0"/>
+          <a:chExt cx="0" cy="0"/>
+        </a:xfrm>
+      </p:grpSpPr>
+      <p:sp>
+        <p:nvSpPr>
+          <p:cNvPr id="2" name="Slide Image Placeholder 1"/>
+          <p:cNvSpPr>
+            <a:spLocks noGrp="1"/>
+          </p:cNvSpPr>
+          <p:nvPr>
+            <p:ph type="sldImg" idx="2"/>
+          </p:nvPr>
+        </p:nvSpPr>
+        <p:spPr/>
+      </p:sp>
+      <p:sp>
+        <p:nvSpPr>
+          <p:cNvPr id="3" name="Notes Placeholder 2"/>
+          <p:cNvSpPr>
+            <a:spLocks noGrp="1"/>
+          </p:cNvSpPr>
+          <p:nvPr>
+            <p:ph type="body" idx="3" sz="quarter"/>
+          </p:nvPr>
+        </p:nvSpPr>
+        <p:spPr/>
+        <p:txBody>
+          <a:bodyPr/>
+          <a:lstStyle/>
+          <a:p>
+            <a:r>
+              <a:t>【司会へ】</a:t>
+            </a:r>
+          </a:p>
+          <a:p>
+            <a:r>
               <a:t>・**このページが今日いちばんの持ち帰りです。**「自分でも試せる」で終わらせること。</a:t>
             </a:r>
           </a:p>
@@ -1133,7 +1245,7 @@
           </a:p>
           <a:p>
             <a:r>
-              <a:t>  ./lab-mode.sh mape                … IPv4 の運び方を MAP-E にする (CE は OpenWrt)</a:t>
+              <a:t>  ./lab-mode.sh mape                … IPv4 の運び方を MAP-E にする</a:t>
             </a:r>
           </a:p>
           <a:p>
@@ -1144,6 +1256,16 @@
           <a:p>
             <a:r>
               <a:t>  ./lab-mode.sh restore             … 障害を戻す</a:t>
+            </a:r>
+          </a:p>
+          <a:p>
+            <a:r>
+              <a:t>  ./lab-mode.sh prov on / prov log  … ルール配布サーバ起動 / 要求を見る (演習 5b)</a:t>
+            </a:r>
+          </a:p>
+          <a:p>
+            <a:r>
+              <a:t>  ./lab-mode.sh prov rule shared|fixed … 共有IP / 固定IP1相当 を切替 (演習 5b)</a:t>
             </a:r>
           </a:p>
           <a:p>
@@ -4885,7 +5007,7 @@
                 </a:solidFill>
                 <a:latin typeface="Meiryo UI"/>
               </a:rPr>
-              <a:t>対象: 説明会を受けた人 / 時間: 150 分 (休憩 10 分を含む。時間配分は仮案です)</a:t>
+              <a:t>対象: 説明会を受けた人 / 時間: 165 分 (休憩 10 分を含む。時間配分は仮案です)</a:t>
             </a:r>
           </a:p>
           <a:p>
@@ -8893,6 +9015,890 @@
       <p:grpSpPr/>
       <p:sp>
         <p:nvSpPr>
+          <p:cNvPr id="2" name="TextBox 1"/>
+          <p:cNvSpPr txBox="1"/>
+          <p:nvPr/>
+        </p:nvSpPr>
+        <p:spPr>
+          <a:xfrm>
+            <a:off x="502920" y="320040"/>
+            <a:ext cx="11155680" cy="822960"/>
+          </a:xfrm>
+          <a:prstGeom prst="rect">
+            <a:avLst/>
+          </a:prstGeom>
+          <a:noFill/>
+        </p:spPr>
+        <p:txBody>
+          <a:bodyPr wrap="square">
+            <a:spAutoFit/>
+          </a:bodyPr>
+          <a:lstStyle/>
+          <a:p>
+            <a:pPr algn="l"/>
+            <a:r>
+              <a:rPr sz="2800" b="1">
+                <a:solidFill>
+                  <a:srgbClr val="1F3355"/>
+                </a:solidFill>
+                <a:latin typeface="Meiryo UI"/>
+              </a:rPr>
+              <a:t>演習 5b: では MAP-E は誰が設定するのか (15 分・司会の実演)</a:t>
+            </a:r>
+          </a:p>
+        </p:txBody>
+      </p:sp>
+      <p:sp>
+        <p:nvSpPr>
+          <p:cNvPr id="3" name="Rectangle 2"/>
+          <p:cNvSpPr/>
+          <p:nvPr/>
+        </p:nvSpPr>
+        <p:spPr>
+          <a:xfrm>
+            <a:off x="502920" y="1115568"/>
+            <a:ext cx="11155680" cy="31750"/>
+          </a:xfrm>
+          <a:prstGeom prst="rect">
+            <a:avLst/>
+          </a:prstGeom>
+          <a:solidFill>
+            <a:srgbClr val="007ACC"/>
+          </a:solidFill>
+          <a:ln>
+            <a:noFill/>
+          </a:ln>
+        </p:spPr>
+        <p:style>
+          <a:lnRef idx="1">
+            <a:schemeClr val="accent1"/>
+          </a:lnRef>
+          <a:fillRef idx="3">
+            <a:schemeClr val="accent1"/>
+          </a:fillRef>
+          <a:effectRef idx="2">
+            <a:schemeClr val="accent1"/>
+          </a:effectRef>
+          <a:fontRef idx="minor">
+            <a:schemeClr val="lt1"/>
+          </a:fontRef>
+        </p:style>
+        <p:txBody>
+          <a:bodyPr rtlCol="0" anchor="ctr"/>
+          <a:lstStyle/>
+          <a:p>
+            <a:pPr algn="ctr"/>
+          </a:p>
+        </p:txBody>
+      </p:sp>
+      <p:sp>
+        <p:nvSpPr>
+          <p:cNvPr id="4" name="TextBox 3"/>
+          <p:cNvSpPr txBox="1"/>
+          <p:nvPr/>
+        </p:nvSpPr>
+        <p:spPr>
+          <a:xfrm>
+            <a:off x="594360" y="1371600"/>
+            <a:ext cx="10972800" cy="4983480"/>
+          </a:xfrm>
+          <a:prstGeom prst="rect">
+            <a:avLst/>
+          </a:prstGeom>
+          <a:noFill/>
+        </p:spPr>
+        <p:txBody>
+          <a:bodyPr wrap="square">
+            <a:spAutoFit/>
+          </a:bodyPr>
+          <a:lstStyle/>
+          <a:p>
+            <a:pPr algn="l">
+              <a:spcAft>
+                <a:spcPts val="800"/>
+              </a:spcAft>
+            </a:pPr>
+            <a:r>
+              <a:rPr sz="1800" b="1">
+                <a:solidFill>
+                  <a:srgbClr val="1F3355"/>
+                </a:solidFill>
+                <a:latin typeface="Meiryo UI"/>
+              </a:rPr>
+              <a:t>まず考えてください — 答えを聞く前に</a:t>
+            </a:r>
+          </a:p>
+          <a:p>
+            <a:pPr lvl="1" algn="l">
+              <a:spcAft>
+                <a:spcPts val="400"/>
+              </a:spcAft>
+            </a:pPr>
+            <a:r>
+              <a:rPr sz="1500" b="0">
+                <a:solidFill>
+                  <a:srgbClr val="555555"/>
+                </a:solidFill>
+                <a:latin typeface="Meiryo UI"/>
+              </a:rPr>
+              <a:t>892FJ には MAP-E の設定を入れられませんでした</a:t>
+            </a:r>
+          </a:p>
+          <a:p>
+            <a:pPr lvl="1" algn="l">
+              <a:spcAft>
+                <a:spcPts val="400"/>
+              </a:spcAft>
+            </a:pPr>
+            <a:r>
+              <a:rPr sz="1500" b="0">
+                <a:solidFill>
+                  <a:srgbClr val="555555"/>
+                </a:solidFill>
+                <a:latin typeface="Meiryo UI"/>
+              </a:rPr>
+              <a:t>では 対応している機種には、誰がどうやって設定を入れるのでしょうか</a:t>
+            </a:r>
+          </a:p>
+          <a:p>
+            <a:pPr algn="l">
+              <a:spcAft>
+                <a:spcPts val="800"/>
+              </a:spcAft>
+            </a:pPr>
+            <a:r>
+              <a:rPr sz="1800" b="1">
+                <a:solidFill>
+                  <a:srgbClr val="C0392B"/>
+                </a:solidFill>
+                <a:latin typeface="Meiryo UI"/>
+              </a:rPr>
+              <a:t>答え: 誰も入れません。CPE が事業者のサーバから取ってきます</a:t>
+            </a:r>
+          </a:p>
+          <a:p>
+            <a:pPr lvl="1" algn="l">
+              <a:spcAft>
+                <a:spcPts val="400"/>
+              </a:spcAft>
+            </a:pPr>
+            <a:r>
+              <a:rPr sz="1500" b="0">
+                <a:solidFill>
+                  <a:srgbClr val="0B6040"/>
+                </a:solidFill>
+                <a:latin typeface="Consolas"/>
+              </a:rPr>
+              <a:t>① CPE が起動する</a:t>
+            </a:r>
+          </a:p>
+          <a:p>
+            <a:pPr lvl="1" algn="l">
+              <a:spcAft>
+                <a:spcPts val="400"/>
+              </a:spcAft>
+            </a:pPr>
+            <a:r>
+              <a:rPr sz="1500" b="0">
+                <a:solidFill>
+                  <a:srgbClr val="0B6040"/>
+                </a:solidFill>
+                <a:latin typeface="Consolas"/>
+              </a:rPr>
+              <a:t>② 事業者のルール配布サーバに問い合わせる</a:t>
+            </a:r>
+          </a:p>
+          <a:p>
+            <a:pPr lvl="1" algn="l">
+              <a:spcAft>
+                <a:spcPts val="400"/>
+              </a:spcAft>
+            </a:pPr>
+            <a:r>
+              <a:rPr sz="1500" b="0">
+                <a:solidFill>
+                  <a:srgbClr val="0B6040"/>
+                </a:solidFill>
+                <a:latin typeface="Consolas"/>
+              </a:rPr>
+              <a:t>③ サーバがルールを返す</a:t>
+            </a:r>
+          </a:p>
+          <a:p>
+            <a:pPr lvl="1" algn="l">
+              <a:spcAft>
+                <a:spcPts val="400"/>
+              </a:spcAft>
+            </a:pPr>
+            <a:r>
+              <a:rPr sz="1500" b="0">
+                <a:solidFill>
+                  <a:srgbClr val="0B6040"/>
+                </a:solidFill>
+                <a:latin typeface="Consolas"/>
+              </a:rPr>
+              <a:t>④ CPE が 自分の IPv6 と ルール から IPv4 とポート範囲を計算する</a:t>
+            </a:r>
+          </a:p>
+          <a:p>
+            <a:pPr algn="l">
+              <a:spcAft>
+                <a:spcPts val="800"/>
+              </a:spcAft>
+            </a:pPr>
+            <a:r>
+              <a:rPr sz="1800" b="1">
+                <a:solidFill>
+                  <a:srgbClr val="1F3355"/>
+                </a:solidFill>
+                <a:latin typeface="Meiryo UI"/>
+              </a:rPr>
+              <a:t>【司会】C1111-8P に設定を入れて、サーバのログを見せる</a:t>
+            </a:r>
+          </a:p>
+          <a:p>
+            <a:pPr lvl="1" algn="l">
+              <a:spcAft>
+                <a:spcPts val="400"/>
+              </a:spcAft>
+            </a:pPr>
+            <a:r>
+              <a:rPr sz="1500" b="0">
+                <a:solidFill>
+                  <a:srgbClr val="0B6040"/>
+                </a:solidFill>
+                <a:latin typeface="Consolas"/>
+              </a:rPr>
+              <a:t>GET /rule.cgi/?ipv6Prefix=2001:DB8:1014:300::&amp;ipv6PrefixLength=64&amp;code=...</a:t>
+            </a:r>
+          </a:p>
+          <a:p>
+            <a:pPr lvl="1" algn="l">
+              <a:spcAft>
+                <a:spcPts val="400"/>
+              </a:spcAft>
+            </a:pPr>
+            <a:r>
+              <a:rPr sz="1500" b="0">
+                <a:solidFill>
+                  <a:srgbClr val="0B6040"/>
+                </a:solidFill>
+                <a:latin typeface="Consolas"/>
+              </a:rPr>
+              <a:t>User-Agent: cisco-IOS      ← ルータが自分から聞きに行っています</a:t>
+            </a:r>
+          </a:p>
+          <a:p>
+            <a:pPr algn="l">
+              <a:spcAft>
+                <a:spcPts val="800"/>
+              </a:spcAft>
+            </a:pPr>
+            <a:r>
+              <a:rPr sz="1800" b="1">
+                <a:solidFill>
+                  <a:srgbClr val="C0392B"/>
+                </a:solidFill>
+                <a:latin typeface="Meiryo UI"/>
+              </a:rPr>
+              <a:t>入れた設定の中に IPv4 もポート番号も 1 つもありません</a:t>
+            </a:r>
+          </a:p>
+          <a:p>
+            <a:pPr lvl="1" algn="l">
+              <a:spcAft>
+                <a:spcPts val="400"/>
+              </a:spcAft>
+            </a:pPr>
+            <a:r>
+              <a:rPr sz="1500" b="0">
+                <a:solidFill>
+                  <a:srgbClr val="555555"/>
+                </a:solidFill>
+                <a:latin typeface="Meiryo UI"/>
+              </a:rPr>
+              <a:t>それでも show nat64 map-e には Share-ratio 256 / Port-set-id 3 が入ります</a:t>
+            </a:r>
+          </a:p>
+          <a:p>
+            <a:pPr lvl="1" algn="l">
+              <a:spcAft>
+                <a:spcPts val="400"/>
+              </a:spcAft>
+            </a:pPr>
+            <a:r>
+              <a:rPr sz="1500" b="0">
+                <a:solidFill>
+                  <a:srgbClr val="555555"/>
+                </a:solidFill>
+                <a:latin typeface="Meiryo UI"/>
+              </a:rPr>
+              <a:t>検証用 PC から curl → src 198.51.100.20 で外に出ます</a:t>
+            </a:r>
+          </a:p>
+        </p:txBody>
+      </p:sp>
+    </p:spTree>
+  </p:cSld>
+  <p:clrMapOvr>
+    <a:masterClrMapping/>
+  </p:clrMapOvr>
+</p:sld>
+</file>
+
+<file path=ppt/slides/slide22.xml><?xml version="1.0" encoding="utf-8"?>
+<p:sld xmlns:a="http://schemas.openxmlformats.org/drawingml/2006/main" xmlns:p="http://schemas.openxmlformats.org/presentationml/2006/main" xmlns:r="http://schemas.openxmlformats.org/officeDocument/2006/relationships">
+  <p:cSld>
+    <p:spTree>
+      <p:nvGrpSpPr>
+        <p:cNvPr id="1" name=""/>
+        <p:cNvGrpSpPr/>
+        <p:nvPr/>
+      </p:nvGrpSpPr>
+      <p:grpSpPr/>
+      <p:sp>
+        <p:nvSpPr>
+          <p:cNvPr id="2" name="TextBox 1"/>
+          <p:cNvSpPr txBox="1"/>
+          <p:nvPr/>
+        </p:nvSpPr>
+        <p:spPr>
+          <a:xfrm>
+            <a:off x="502920" y="274320"/>
+            <a:ext cx="11155680" cy="731520"/>
+          </a:xfrm>
+          <a:prstGeom prst="rect">
+            <a:avLst/>
+          </a:prstGeom>
+          <a:noFill/>
+        </p:spPr>
+        <p:txBody>
+          <a:bodyPr wrap="square">
+            <a:spAutoFit/>
+          </a:bodyPr>
+          <a:lstStyle/>
+          <a:p>
+            <a:pPr algn="l"/>
+            <a:r>
+              <a:rPr sz="2600" b="1">
+                <a:solidFill>
+                  <a:srgbClr val="1F3355"/>
+                </a:solidFill>
+                <a:latin typeface="Meiryo UI"/>
+              </a:rPr>
+              <a:t>演習 5b の山場 — 配る値を 1 つ変えると、CPE の持ち分が変わる</a:t>
+            </a:r>
+          </a:p>
+        </p:txBody>
+      </p:sp>
+      <p:graphicFrame>
+        <p:nvGraphicFramePr>
+          <p:cNvPr id="3" name="Table 2"/>
+          <p:cNvGraphicFramePr>
+            <a:graphicFrameLocks noGrp="1"/>
+          </p:cNvGraphicFramePr>
+          <p:nvPr/>
+        </p:nvGraphicFramePr>
+        <p:xfrm>
+          <a:off x="502920" y="1143000"/>
+          <a:ext cx="10789920" cy="1865376"/>
+        </p:xfrm>
+        <a:graphic>
+          <a:graphicData uri="http://schemas.openxmlformats.org/drawingml/2006/table">
+            <a:tbl>
+              <a:tblPr>
+                <a:tableStyleId>{5C22544A-7EE6-4342-B048-85BDC9FD1C3A}</a:tableStyleId>
+              </a:tblPr>
+              <a:tblGrid>
+                <a:gridCol w="3108960"/>
+                <a:gridCol w="4023360"/>
+                <a:gridCol w="3657600"/>
+              </a:tblGrid>
+              <a:tr h="310896">
+                <a:tc>
+                  <a:txBody>
+                    <a:bodyPr/>
+                    <a:lstStyle/>
+                    <a:p>
+                      <a:pPr algn="l"/>
+                      <a:r>
+                        <a:rPr sz="1300" b="1">
+                          <a:solidFill>
+                            <a:srgbClr val="FFFFFF"/>
+                          </a:solidFill>
+                          <a:latin typeface="Meiryo UI"/>
+                        </a:rPr>
+                        <a:t/>
+                      </a:r>
+                    </a:p>
+                  </a:txBody>
+                  <a:tcPr>
+                    <a:solidFill>
+                      <a:srgbClr val="1F3355"/>
+                    </a:solidFill>
+                  </a:tcPr>
+                </a:tc>
+                <a:tc>
+                  <a:txBody>
+                    <a:bodyPr/>
+                    <a:lstStyle/>
+                    <a:p>
+                      <a:pPr algn="l"/>
+                      <a:r>
+                        <a:rPr sz="1300" b="1">
+                          <a:solidFill>
+                            <a:srgbClr val="FFFFFF"/>
+                          </a:solidFill>
+                          <a:latin typeface="Meiryo UI"/>
+                        </a:rPr>
+                        <a:t>共有IP (既定)</a:t>
+                      </a:r>
+                    </a:p>
+                  </a:txBody>
+                  <a:tcPr>
+                    <a:solidFill>
+                      <a:srgbClr val="1F3355"/>
+                    </a:solidFill>
+                  </a:tcPr>
+                </a:tc>
+                <a:tc>
+                  <a:txBody>
+                    <a:bodyPr/>
+                    <a:lstStyle/>
+                    <a:p>
+                      <a:pPr algn="l"/>
+                      <a:r>
+                        <a:rPr sz="1300" b="1">
+                          <a:solidFill>
+                            <a:srgbClr val="FFFFFF"/>
+                          </a:solidFill>
+                          <a:latin typeface="Meiryo UI"/>
+                        </a:rPr>
+                        <a:t>固定IP1 相当</a:t>
+                      </a:r>
+                    </a:p>
+                  </a:txBody>
+                  <a:tcPr>
+                    <a:solidFill>
+                      <a:srgbClr val="1F3355"/>
+                    </a:solidFill>
+                  </a:tcPr>
+                </a:tc>
+              </a:tr>
+              <a:tr h="310896">
+                <a:tc>
+                  <a:txBody>
+                    <a:bodyPr/>
+                    <a:lstStyle/>
+                    <a:p>
+                      <a:pPr algn="l"/>
+                      <a:r>
+                        <a:rPr sz="1200" b="0">
+                          <a:solidFill>
+                            <a:srgbClr val="1F3355"/>
+                          </a:solidFill>
+                          <a:latin typeface="Meiryo UI"/>
+                        </a:rPr>
+                        <a:t>司会のコマンド</a:t>
+                      </a:r>
+                    </a:p>
+                  </a:txBody>
+                  <a:tcPr>
+                    <a:solidFill>
+                      <a:srgbClr val="FFFFFF"/>
+                    </a:solidFill>
+                  </a:tcPr>
+                </a:tc>
+                <a:tc>
+                  <a:txBody>
+                    <a:bodyPr/>
+                    <a:lstStyle/>
+                    <a:p>
+                      <a:pPr algn="l"/>
+                      <a:r>
+                        <a:rPr sz="1200" b="0">
+                          <a:solidFill>
+                            <a:srgbClr val="1F3355"/>
+                          </a:solidFill>
+                          <a:latin typeface="Meiryo UI"/>
+                        </a:rPr>
+                        <a:t>./lab-mode.sh prov rule shared</a:t>
+                      </a:r>
+                    </a:p>
+                  </a:txBody>
+                  <a:tcPr>
+                    <a:solidFill>
+                      <a:srgbClr val="FFFFFF"/>
+                    </a:solidFill>
+                  </a:tcPr>
+                </a:tc>
+                <a:tc>
+                  <a:txBody>
+                    <a:bodyPr/>
+                    <a:lstStyle/>
+                    <a:p>
+                      <a:pPr algn="l"/>
+                      <a:r>
+                        <a:rPr sz="1200" b="0">
+                          <a:solidFill>
+                            <a:srgbClr val="1F3355"/>
+                          </a:solidFill>
+                          <a:latin typeface="Meiryo UI"/>
+                        </a:rPr>
+                        <a:t>./lab-mode.sh prov rule fixed</a:t>
+                      </a:r>
+                    </a:p>
+                  </a:txBody>
+                  <a:tcPr>
+                    <a:solidFill>
+                      <a:srgbClr val="FFFFFF"/>
+                    </a:solidFill>
+                  </a:tcPr>
+                </a:tc>
+              </a:tr>
+              <a:tr h="310896">
+                <a:tc>
+                  <a:txBody>
+                    <a:bodyPr/>
+                    <a:lstStyle/>
+                    <a:p>
+                      <a:pPr algn="l"/>
+                      <a:r>
+                        <a:rPr sz="1200" b="0">
+                          <a:solidFill>
+                            <a:srgbClr val="1F3355"/>
+                          </a:solidFill>
+                          <a:latin typeface="Meiryo UI"/>
+                        </a:rPr>
+                        <a:t>サーバが返す eaBitLength</a:t>
+                      </a:r>
+                    </a:p>
+                  </a:txBody>
+                  <a:tcPr>
+                    <a:solidFill>
+                      <a:srgbClr val="F2F6FA"/>
+                    </a:solidFill>
+                  </a:tcPr>
+                </a:tc>
+                <a:tc>
+                  <a:txBody>
+                    <a:bodyPr/>
+                    <a:lstStyle/>
+                    <a:p>
+                      <a:pPr algn="l"/>
+                      <a:r>
+                        <a:rPr sz="1200" b="0">
+                          <a:solidFill>
+                            <a:srgbClr val="1F3355"/>
+                          </a:solidFill>
+                          <a:latin typeface="Meiryo UI"/>
+                        </a:rPr>
+                        <a:t>16</a:t>
+                      </a:r>
+                    </a:p>
+                  </a:txBody>
+                  <a:tcPr>
+                    <a:solidFill>
+                      <a:srgbClr val="F2F6FA"/>
+                    </a:solidFill>
+                  </a:tcPr>
+                </a:tc>
+                <a:tc>
+                  <a:txBody>
+                    <a:bodyPr/>
+                    <a:lstStyle/>
+                    <a:p>
+                      <a:pPr algn="l"/>
+                      <a:r>
+                        <a:rPr sz="1200" b="0">
+                          <a:solidFill>
+                            <a:srgbClr val="1F3355"/>
+                          </a:solidFill>
+                          <a:latin typeface="Meiryo UI"/>
+                        </a:rPr>
+                        <a:t>8</a:t>
+                      </a:r>
+                    </a:p>
+                  </a:txBody>
+                  <a:tcPr>
+                    <a:solidFill>
+                      <a:srgbClr val="F2F6FA"/>
+                    </a:solidFill>
+                  </a:tcPr>
+                </a:tc>
+              </a:tr>
+              <a:tr h="310896">
+                <a:tc>
+                  <a:txBody>
+                    <a:bodyPr/>
+                    <a:lstStyle/>
+                    <a:p>
+                      <a:pPr algn="l"/>
+                      <a:r>
+                        <a:rPr sz="1200" b="0">
+                          <a:solidFill>
+                            <a:srgbClr val="1F3355"/>
+                          </a:solidFill>
+                          <a:latin typeface="Meiryo UI"/>
+                        </a:rPr>
+                        <a:t>Share-ratio</a:t>
+                      </a:r>
+                    </a:p>
+                  </a:txBody>
+                  <a:tcPr>
+                    <a:solidFill>
+                      <a:srgbClr val="FFFFFF"/>
+                    </a:solidFill>
+                  </a:tcPr>
+                </a:tc>
+                <a:tc>
+                  <a:txBody>
+                    <a:bodyPr/>
+                    <a:lstStyle/>
+                    <a:p>
+                      <a:pPr algn="l"/>
+                      <a:r>
+                        <a:rPr sz="1200" b="0">
+                          <a:solidFill>
+                            <a:srgbClr val="1F3355"/>
+                          </a:solidFill>
+                          <a:latin typeface="Meiryo UI"/>
+                        </a:rPr>
+                        <a:t>256 (256 人で分ける)</a:t>
+                      </a:r>
+                    </a:p>
+                  </a:txBody>
+                  <a:tcPr>
+                    <a:solidFill>
+                      <a:srgbClr val="FFFFFF"/>
+                    </a:solidFill>
+                  </a:tcPr>
+                </a:tc>
+                <a:tc>
+                  <a:txBody>
+                    <a:bodyPr/>
+                    <a:lstStyle/>
+                    <a:p>
+                      <a:pPr algn="l"/>
+                      <a:r>
+                        <a:rPr sz="1200" b="0">
+                          <a:solidFill>
+                            <a:srgbClr val="1F3355"/>
+                          </a:solidFill>
+                          <a:latin typeface="Meiryo UI"/>
+                        </a:rPr>
+                        <a:t>1 (分けない)</a:t>
+                      </a:r>
+                    </a:p>
+                  </a:txBody>
+                  <a:tcPr>
+                    <a:solidFill>
+                      <a:srgbClr val="FFFFFF"/>
+                    </a:solidFill>
+                  </a:tcPr>
+                </a:tc>
+              </a:tr>
+              <a:tr h="310896">
+                <a:tc>
+                  <a:txBody>
+                    <a:bodyPr/>
+                    <a:lstStyle/>
+                    <a:p>
+                      <a:pPr algn="l"/>
+                      <a:r>
+                        <a:rPr sz="1200" b="0">
+                          <a:solidFill>
+                            <a:srgbClr val="1F3355"/>
+                          </a:solidFill>
+                          <a:latin typeface="Meiryo UI"/>
+                        </a:rPr>
+                        <a:t>使えるポート</a:t>
+                      </a:r>
+                    </a:p>
+                  </a:txBody>
+                  <a:tcPr>
+                    <a:solidFill>
+                      <a:srgbClr val="F2F6FA"/>
+                    </a:solidFill>
+                  </a:tcPr>
+                </a:tc>
+                <a:tc>
+                  <a:txBody>
+                    <a:bodyPr/>
+                    <a:lstStyle/>
+                    <a:p>
+                      <a:pPr algn="l"/>
+                      <a:r>
+                        <a:rPr sz="1200" b="0">
+                          <a:solidFill>
+                            <a:srgbClr val="1F3355"/>
+                          </a:solidFill>
+                          <a:latin typeface="Meiryo UI"/>
+                        </a:rPr>
+                        <a:t>240 個</a:t>
+                      </a:r>
+                    </a:p>
+                  </a:txBody>
+                  <a:tcPr>
+                    <a:solidFill>
+                      <a:srgbClr val="F2F6FA"/>
+                    </a:solidFill>
+                  </a:tcPr>
+                </a:tc>
+                <a:tc>
+                  <a:txBody>
+                    <a:bodyPr/>
+                    <a:lstStyle/>
+                    <a:p>
+                      <a:pPr algn="l"/>
+                      <a:r>
+                        <a:rPr sz="1200" b="0">
+                          <a:solidFill>
+                            <a:srgbClr val="1F3355"/>
+                          </a:solidFill>
+                          <a:latin typeface="Meiryo UI"/>
+                        </a:rPr>
+                        <a:t>全部</a:t>
+                      </a:r>
+                    </a:p>
+                  </a:txBody>
+                  <a:tcPr>
+                    <a:solidFill>
+                      <a:srgbClr val="F2F6FA"/>
+                    </a:solidFill>
+                  </a:tcPr>
+                </a:tc>
+              </a:tr>
+              <a:tr h="310896">
+                <a:tc>
+                  <a:txBody>
+                    <a:bodyPr/>
+                    <a:lstStyle/>
+                    <a:p>
+                      <a:pPr algn="l"/>
+                      <a:r>
+                        <a:rPr sz="1200" b="0">
+                          <a:solidFill>
+                            <a:srgbClr val="1F3355"/>
+                          </a:solidFill>
+                          <a:latin typeface="Meiryo UI"/>
+                        </a:rPr>
+                        <a:t>共有 IPv4</a:t>
+                      </a:r>
+                    </a:p>
+                  </a:txBody>
+                  <a:tcPr>
+                    <a:solidFill>
+                      <a:srgbClr val="FFFFFF"/>
+                    </a:solidFill>
+                  </a:tcPr>
+                </a:tc>
+                <a:tc>
+                  <a:txBody>
+                    <a:bodyPr/>
+                    <a:lstStyle/>
+                    <a:p>
+                      <a:pPr algn="l"/>
+                      <a:r>
+                        <a:rPr sz="1200" b="0">
+                          <a:solidFill>
+                            <a:srgbClr val="1F3355"/>
+                          </a:solidFill>
+                          <a:latin typeface="Meiryo UI"/>
+                        </a:rPr>
+                        <a:t>198.51.100.20</a:t>
+                      </a:r>
+                    </a:p>
+                  </a:txBody>
+                  <a:tcPr>
+                    <a:solidFill>
+                      <a:srgbClr val="FFFFFF"/>
+                    </a:solidFill>
+                  </a:tcPr>
+                </a:tc>
+                <a:tc>
+                  <a:txBody>
+                    <a:bodyPr/>
+                    <a:lstStyle/>
+                    <a:p>
+                      <a:pPr algn="l"/>
+                      <a:r>
+                        <a:rPr sz="1200" b="0">
+                          <a:solidFill>
+                            <a:srgbClr val="1F3355"/>
+                          </a:solidFill>
+                          <a:latin typeface="Meiryo UI"/>
+                        </a:rPr>
+                        <a:t>198.51.100.20 (同じ!)</a:t>
+                      </a:r>
+                    </a:p>
+                  </a:txBody>
+                  <a:tcPr>
+                    <a:solidFill>
+                      <a:srgbClr val="FFFFFF"/>
+                    </a:solidFill>
+                  </a:tcPr>
+                </a:tc>
+              </a:tr>
+            </a:tbl>
+          </a:graphicData>
+        </a:graphic>
+      </p:graphicFrame>
+      <p:sp>
+        <p:nvSpPr>
+          <p:cNvPr id="4" name="TextBox 3"/>
+          <p:cNvSpPr txBox="1"/>
+          <p:nvPr/>
+        </p:nvSpPr>
+        <p:spPr>
+          <a:xfrm>
+            <a:off x="502920" y="3264408"/>
+            <a:ext cx="11155680" cy="548640"/>
+          </a:xfrm>
+          <a:prstGeom prst="rect">
+            <a:avLst/>
+          </a:prstGeom>
+          <a:noFill/>
+        </p:spPr>
+        <p:txBody>
+          <a:bodyPr wrap="square">
+            <a:spAutoFit/>
+          </a:bodyPr>
+          <a:lstStyle/>
+          <a:p>
+            <a:pPr algn="l"/>
+            <a:r>
+              <a:rPr sz="1200" b="0">
+                <a:solidFill>
+                  <a:srgbClr val="007ACC"/>
+                </a:solidFill>
+                <a:latin typeface="Meiryo UI"/>
+              </a:rPr>
+              <a:t>⚠ 司会へ: fixed 側は実機で未検証です (2026-08-15 時点)。当日までに一度通しておくこと</a:t>
+            </a:r>
+          </a:p>
+        </p:txBody>
+      </p:sp>
+    </p:spTree>
+  </p:cSld>
+  <p:clrMapOvr>
+    <a:masterClrMapping/>
+  </p:clrMapOvr>
+</p:sld>
+</file>
+
+<file path=ppt/slides/slide23.xml><?xml version="1.0" encoding="utf-8"?>
+<p:sld xmlns:a="http://schemas.openxmlformats.org/drawingml/2006/main" xmlns:p="http://schemas.openxmlformats.org/presentationml/2006/main" xmlns:r="http://schemas.openxmlformats.org/officeDocument/2006/relationships">
+  <p:cSld>
+    <p:spTree>
+      <p:nvGrpSpPr>
+        <p:cNvPr id="1" name=""/>
+        <p:cNvGrpSpPr/>
+        <p:nvPr/>
+      </p:nvGrpSpPr>
+      <p:grpSpPr/>
+      <p:sp>
+        <p:nvSpPr>
           <p:cNvPr id="2" name="Rectangle 1"/>
           <p:cNvSpPr/>
           <p:nvPr/>
@@ -9005,7 +10011,7 @@
 </p:sld>
 </file>
 
-<file path=ppt/slides/slide22.xml><?xml version="1.0" encoding="utf-8"?>
+<file path=ppt/slides/slide24.xml><?xml version="1.0" encoding="utf-8"?>
 <p:sld xmlns:a="http://schemas.openxmlformats.org/drawingml/2006/main" xmlns:p="http://schemas.openxmlformats.org/presentationml/2006/main" xmlns:r="http://schemas.openxmlformats.org/officeDocument/2006/relationships">
   <p:cSld>
     <p:spTree>
@@ -9191,7 +10197,7 @@
                 </a:solidFill>
                 <a:latin typeface="Meiryo UI"/>
               </a:rPr>
-              <a:t>② 【あなた】892FJ で MSS の調整を切る</a:t>
+              <a:t>② 【あなた】892FJ で MSS の調整を切る — 2 か所あります</a:t>
             </a:r>
           </a:p>
           <a:p>
@@ -9207,7 +10213,39 @@
                 </a:solidFill>
                 <a:latin typeface="Consolas"/>
               </a:rPr>
-              <a:t>interface Tunnel0 →  no ip tcp adjust-mss     → まだ落ちてきます</a:t>
+              <a:t>interface Tunnel0 →  no ip tcp adjust-mss</a:t>
+            </a:r>
+          </a:p>
+          <a:p>
+            <a:pPr lvl="1" algn="l">
+              <a:spcAft>
+                <a:spcPts val="600"/>
+              </a:spcAft>
+            </a:pPr>
+            <a:r>
+              <a:rPr sz="1700" b="0">
+                <a:solidFill>
+                  <a:srgbClr val="0B6040"/>
+                </a:solidFill>
+                <a:latin typeface="Consolas"/>
+              </a:rPr>
+              <a:t>interface Vlan1   →  no ip tcp adjust-mss     → まだ落ちてきます</a:t>
+            </a:r>
+          </a:p>
+          <a:p>
+            <a:pPr lvl="1" algn="l">
+              <a:spcAft>
+                <a:spcPts val="600"/>
+              </a:spcAft>
+            </a:pPr>
+            <a:r>
+              <a:rPr sz="1700" b="1">
+                <a:solidFill>
+                  <a:srgbClr val="C0392B"/>
+                </a:solidFill>
+                <a:latin typeface="Meiryo UI"/>
+              </a:rPr>
+              <a:t>片方だけ外しても、もう片方で抑えられて再現しません</a:t>
             </a:r>
           </a:p>
           <a:p>
@@ -9284,7 +10322,7 @@
 </p:sld>
 </file>
 
-<file path=ppt/slides/slide23.xml><?xml version="1.0" encoding="utf-8"?>
+<file path=ppt/slides/slide25.xml><?xml version="1.0" encoding="utf-8"?>
 <p:sld xmlns:a="http://schemas.openxmlformats.org/drawingml/2006/main" xmlns:p="http://schemas.openxmlformats.org/presentationml/2006/main" xmlns:r="http://schemas.openxmlformats.org/officeDocument/2006/relationships">
   <p:cSld>
     <p:spTree>
@@ -9590,7 +10628,7 @@
 </p:sld>
 </file>
 
-<file path=ppt/slides/slide24.xml><?xml version="1.0" encoding="utf-8"?>
+<file path=ppt/slides/slide26.xml><?xml version="1.0" encoding="utf-8"?>
 <p:sld xmlns:a="http://schemas.openxmlformats.org/drawingml/2006/main" xmlns:p="http://schemas.openxmlformats.org/presentationml/2006/main" xmlns:r="http://schemas.openxmlformats.org/officeDocument/2006/relationships">
   <p:cSld>
     <p:spTree>
@@ -9965,7 +11003,7 @@
 </p:sld>
 </file>
 
-<file path=ppt/slides/slide25.xml><?xml version="1.0" encoding="utf-8"?>
+<file path=ppt/slides/slide27.xml><?xml version="1.0" encoding="utf-8"?>
 <p:sld xmlns:a="http://schemas.openxmlformats.org/drawingml/2006/main" xmlns:p="http://schemas.openxmlformats.org/presentationml/2006/main" xmlns:r="http://schemas.openxmlformats.org/officeDocument/2006/relationships">
   <p:cSld>
     <p:spTree>
@@ -10260,7 +11298,7 @@
 </p:sld>
 </file>
 
-<file path=ppt/slides/slide26.xml><?xml version="1.0" encoding="utf-8"?>
+<file path=ppt/slides/slide28.xml><?xml version="1.0" encoding="utf-8"?>
 <p:sld xmlns:a="http://schemas.openxmlformats.org/drawingml/2006/main" xmlns:p="http://schemas.openxmlformats.org/presentationml/2006/main" xmlns:r="http://schemas.openxmlformats.org/officeDocument/2006/relationships">
   <p:cSld>
     <p:spTree>
@@ -10635,7 +11673,7 @@
 </p:sld>
 </file>
 
-<file path=ppt/slides/slide27.xml><?xml version="1.0" encoding="utf-8"?>
+<file path=ppt/slides/slide29.xml><?xml version="1.0" encoding="utf-8"?>
 <p:sld xmlns:a="http://schemas.openxmlformats.org/drawingml/2006/main" xmlns:p="http://schemas.openxmlformats.org/presentationml/2006/main" xmlns:r="http://schemas.openxmlformats.org/officeDocument/2006/relationships">
   <p:cSld>
     <p:spTree>
@@ -10747,612 +11785,6 @@
                 <a:latin typeface="Meiryo UI"/>
               </a:rPr>
               <a:t>ゴール: 10 分。戻し忘れは次の演習で「原因の分からない失敗」として出ます</a:t>
-            </a:r>
-          </a:p>
-        </p:txBody>
-      </p:sp>
-    </p:spTree>
-  </p:cSld>
-  <p:clrMapOvr>
-    <a:masterClrMapping/>
-  </p:clrMapOvr>
-</p:sld>
-</file>
-
-<file path=ppt/slides/slide28.xml><?xml version="1.0" encoding="utf-8"?>
-<p:sld xmlns:a="http://schemas.openxmlformats.org/drawingml/2006/main" xmlns:p="http://schemas.openxmlformats.org/presentationml/2006/main" xmlns:r="http://schemas.openxmlformats.org/officeDocument/2006/relationships">
-  <p:cSld>
-    <p:spTree>
-      <p:nvGrpSpPr>
-        <p:cNvPr id="1" name=""/>
-        <p:cNvGrpSpPr/>
-        <p:nvPr/>
-      </p:nvGrpSpPr>
-      <p:grpSpPr/>
-      <p:sp>
-        <p:nvSpPr>
-          <p:cNvPr id="2" name="TextBox 1"/>
-          <p:cNvSpPr txBox="1"/>
-          <p:nvPr/>
-        </p:nvSpPr>
-        <p:spPr>
-          <a:xfrm>
-            <a:off x="502920" y="320040"/>
-            <a:ext cx="11155680" cy="822960"/>
-          </a:xfrm>
-          <a:prstGeom prst="rect">
-            <a:avLst/>
-          </a:prstGeom>
-          <a:noFill/>
-        </p:spPr>
-        <p:txBody>
-          <a:bodyPr wrap="square">
-            <a:spAutoFit/>
-          </a:bodyPr>
-          <a:lstStyle/>
-          <a:p>
-            <a:pPr algn="l"/>
-            <a:r>
-              <a:rPr sz="2800" b="1">
-                <a:solidFill>
-                  <a:srgbClr val="1F3355"/>
-                </a:solidFill>
-                <a:latin typeface="Meiryo UI"/>
-              </a:rPr>
-              <a:t>演習 9: 元に戻す</a:t>
-            </a:r>
-          </a:p>
-        </p:txBody>
-      </p:sp>
-      <p:sp>
-        <p:nvSpPr>
-          <p:cNvPr id="3" name="Rectangle 2"/>
-          <p:cNvSpPr/>
-          <p:nvPr/>
-        </p:nvSpPr>
-        <p:spPr>
-          <a:xfrm>
-            <a:off x="502920" y="1115568"/>
-            <a:ext cx="11155680" cy="31750"/>
-          </a:xfrm>
-          <a:prstGeom prst="rect">
-            <a:avLst/>
-          </a:prstGeom>
-          <a:solidFill>
-            <a:srgbClr val="007ACC"/>
-          </a:solidFill>
-          <a:ln>
-            <a:noFill/>
-          </a:ln>
-        </p:spPr>
-        <p:style>
-          <a:lnRef idx="1">
-            <a:schemeClr val="accent1"/>
-          </a:lnRef>
-          <a:fillRef idx="3">
-            <a:schemeClr val="accent1"/>
-          </a:fillRef>
-          <a:effectRef idx="2">
-            <a:schemeClr val="accent1"/>
-          </a:effectRef>
-          <a:fontRef idx="minor">
-            <a:schemeClr val="lt1"/>
-          </a:fontRef>
-        </p:style>
-        <p:txBody>
-          <a:bodyPr rtlCol="0" anchor="ctr"/>
-          <a:lstStyle/>
-          <a:p>
-            <a:pPr algn="ctr"/>
-          </a:p>
-        </p:txBody>
-      </p:sp>
-      <p:sp>
-        <p:nvSpPr>
-          <p:cNvPr id="4" name="TextBox 3"/>
-          <p:cNvSpPr txBox="1"/>
-          <p:nvPr/>
-        </p:nvSpPr>
-        <p:spPr>
-          <a:xfrm>
-            <a:off x="594360" y="1371600"/>
-            <a:ext cx="10972800" cy="4983480"/>
-          </a:xfrm>
-          <a:prstGeom prst="rect">
-            <a:avLst/>
-          </a:prstGeom>
-          <a:noFill/>
-        </p:spPr>
-        <p:txBody>
-          <a:bodyPr wrap="square">
-            <a:spAutoFit/>
-          </a:bodyPr>
-          <a:lstStyle/>
-          <a:p>
-            <a:pPr algn="l">
-              <a:spcAft>
-                <a:spcPts val="1000"/>
-              </a:spcAft>
-            </a:pPr>
-            <a:r>
-              <a:rPr sz="2000" b="1">
-                <a:solidFill>
-                  <a:srgbClr val="1F3355"/>
-                </a:solidFill>
-                <a:latin typeface="Meiryo UI"/>
-              </a:rPr>
-              <a:t>【あなた】892FJ で確認</a:t>
-            </a:r>
-          </a:p>
-          <a:p>
-            <a:pPr lvl="1" algn="l">
-              <a:spcAft>
-                <a:spcPts val="600"/>
-              </a:spcAft>
-            </a:pPr>
-            <a:r>
-              <a:rPr sz="1700" b="0">
-                <a:solidFill>
-                  <a:srgbClr val="0B6040"/>
-                </a:solidFill>
-                <a:latin typeface="Consolas"/>
-              </a:rPr>
-              <a:t>CPE# show running-config | include adjust-mss</a:t>
-            </a:r>
-          </a:p>
-          <a:p>
-            <a:pPr lvl="1" algn="l">
-              <a:spcAft>
-                <a:spcPts val="600"/>
-              </a:spcAft>
-            </a:pPr>
-            <a:r>
-              <a:rPr sz="1700" b="0">
-                <a:solidFill>
-                  <a:srgbClr val="555555"/>
-                </a:solidFill>
-                <a:latin typeface="Meiryo UI"/>
-              </a:rPr>
-              <a:t>ip tcp adjust-mss 1420 が Tunnel0 と Vlan1 の両方にあること。無ければ入れ直す</a:t>
-            </a:r>
-          </a:p>
-          <a:p>
-            <a:pPr lvl="1" algn="l">
-              <a:spcAft>
-                <a:spcPts val="600"/>
-              </a:spcAft>
-            </a:pPr>
-            <a:r>
-              <a:rPr sz="1700" b="0">
-                <a:solidFill>
-                  <a:srgbClr val="0B6040"/>
-                </a:solidFill>
-                <a:latin typeface="Consolas"/>
-              </a:rPr>
-              <a:t>CPE# show running-config | include ip nat inside source</a:t>
-            </a:r>
-          </a:p>
-          <a:p>
-            <a:pPr lvl="1" algn="l">
-              <a:spcAft>
-                <a:spcPts val="600"/>
-              </a:spcAft>
-            </a:pPr>
-            <a:r>
-              <a:rPr sz="1700" b="0">
-                <a:solidFill>
-                  <a:srgbClr val="555555"/>
-                </a:solidFill>
-                <a:latin typeface="Meiryo UI"/>
-              </a:rPr>
-              <a:t>何も出ないこと (演習 7 の設定が残っていないこと)</a:t>
-            </a:r>
-          </a:p>
-          <a:p>
-            <a:pPr algn="l">
-              <a:spcAft>
-                <a:spcPts val="1000"/>
-              </a:spcAft>
-            </a:pPr>
-            <a:r>
-              <a:rPr sz="2000" b="0">
-                <a:solidFill>
-                  <a:srgbClr val="0B6040"/>
-                </a:solidFill>
-                <a:latin typeface="Consolas"/>
-              </a:rPr>
-              <a:t>【司会】 ./lab-mode.sh restore  →  ./lab-mode.sh status</a:t>
-            </a:r>
-          </a:p>
-          <a:p>
-            <a:pPr lvl="1" algn="l">
-              <a:spcAft>
-                <a:spcPts val="600"/>
-              </a:spcAft>
-            </a:pPr>
-            <a:r>
-              <a:rPr sz="1700" b="0">
-                <a:solidFill>
-                  <a:srgbClr val="555555"/>
-                </a:solidFill>
-                <a:latin typeface="Meiryo UI"/>
-              </a:rPr>
-              <a:t>「障害の注入: なし」になっていることを全員で確認します</a:t>
-            </a:r>
-          </a:p>
-          <a:p>
-            <a:pPr algn="l">
-              <a:spcAft>
-                <a:spcPts val="1000"/>
-              </a:spcAft>
-            </a:pPr>
-            <a:r>
-              <a:rPr sz="2000" b="1">
-                <a:solidFill>
-                  <a:srgbClr val="1F3355"/>
-                </a:solidFill>
-                <a:latin typeface="Meiryo UI"/>
-              </a:rPr>
-              <a:t>【あなた】最後に</a:t>
-            </a:r>
-          </a:p>
-          <a:p>
-            <a:pPr lvl="1" algn="l">
-              <a:spcAft>
-                <a:spcPts val="600"/>
-              </a:spcAft>
-            </a:pPr>
-            <a:r>
-              <a:rPr sz="1700" b="0">
-                <a:solidFill>
-                  <a:srgbClr val="0B6040"/>
-                </a:solidFill>
-                <a:latin typeface="Consolas"/>
-              </a:rPr>
-              <a:t>curl.exe http://203.0.113.80/     →  src: 203.0.113.1 に戻っていれば完了</a:t>
-            </a:r>
-          </a:p>
-          <a:p>
-            <a:pPr algn="l">
-              <a:spcAft>
-                <a:spcPts val="1000"/>
-              </a:spcAft>
-            </a:pPr>
-            <a:r>
-              <a:rPr sz="2000" b="1">
-                <a:solidFill>
-                  <a:srgbClr val="C0392B"/>
-                </a:solidFill>
-                <a:latin typeface="Meiryo UI"/>
-              </a:rPr>
-              <a:t>【あなた】検証用 PC のアドレスを自動取得に戻す ← 忘れると席で繋がりません</a:t>
-            </a:r>
-          </a:p>
-          <a:p>
-            <a:pPr lvl="1" algn="l">
-              <a:spcAft>
-                <a:spcPts val="600"/>
-              </a:spcAft>
-            </a:pPr>
-            <a:r>
-              <a:rPr sz="1700" b="0">
-                <a:solidFill>
-                  <a:srgbClr val="0B6040"/>
-                </a:solidFill>
-                <a:latin typeface="Consolas"/>
-              </a:rPr>
-              <a:t>netsh interface ip set address "イーサネット" dhcp</a:t>
-            </a:r>
-          </a:p>
-          <a:p>
-            <a:pPr lvl="1" algn="l">
-              <a:spcAft>
-                <a:spcPts val="600"/>
-              </a:spcAft>
-            </a:pPr>
-            <a:r>
-              <a:rPr sz="1700" b="0">
-                <a:solidFill>
-                  <a:srgbClr val="0B6040"/>
-                </a:solidFill>
-                <a:latin typeface="Consolas"/>
-              </a:rPr>
-              <a:t>netsh interface ip set dns     "イーサネット" dhcp</a:t>
-            </a:r>
-          </a:p>
-        </p:txBody>
-      </p:sp>
-    </p:spTree>
-  </p:cSld>
-  <p:clrMapOvr>
-    <a:masterClrMapping/>
-  </p:clrMapOvr>
-</p:sld>
-</file>
-
-<file path=ppt/slides/slide29.xml><?xml version="1.0" encoding="utf-8"?>
-<p:sld xmlns:a="http://schemas.openxmlformats.org/drawingml/2006/main" xmlns:p="http://schemas.openxmlformats.org/presentationml/2006/main" xmlns:r="http://schemas.openxmlformats.org/officeDocument/2006/relationships">
-  <p:cSld>
-    <p:spTree>
-      <p:nvGrpSpPr>
-        <p:cNvPr id="1" name=""/>
-        <p:cNvGrpSpPr/>
-        <p:nvPr/>
-      </p:nvGrpSpPr>
-      <p:grpSpPr/>
-      <p:sp>
-        <p:nvSpPr>
-          <p:cNvPr id="2" name="TextBox 1"/>
-          <p:cNvSpPr txBox="1"/>
-          <p:nvPr/>
-        </p:nvSpPr>
-        <p:spPr>
-          <a:xfrm>
-            <a:off x="502920" y="320040"/>
-            <a:ext cx="11155680" cy="822960"/>
-          </a:xfrm>
-          <a:prstGeom prst="rect">
-            <a:avLst/>
-          </a:prstGeom>
-          <a:noFill/>
-        </p:spPr>
-        <p:txBody>
-          <a:bodyPr wrap="square">
-            <a:spAutoFit/>
-          </a:bodyPr>
-          <a:lstStyle/>
-          <a:p>
-            <a:pPr algn="l"/>
-            <a:r>
-              <a:rPr sz="2800" b="1">
-                <a:solidFill>
-                  <a:srgbClr val="1F3355"/>
-                </a:solidFill>
-                <a:latin typeface="Meiryo UI"/>
-              </a:rPr>
-              <a:t>今日 手を動かして分かったこと</a:t>
-            </a:r>
-          </a:p>
-        </p:txBody>
-      </p:sp>
-      <p:sp>
-        <p:nvSpPr>
-          <p:cNvPr id="3" name="Rectangle 2"/>
-          <p:cNvSpPr/>
-          <p:nvPr/>
-        </p:nvSpPr>
-        <p:spPr>
-          <a:xfrm>
-            <a:off x="502920" y="1115568"/>
-            <a:ext cx="11155680" cy="31750"/>
-          </a:xfrm>
-          <a:prstGeom prst="rect">
-            <a:avLst/>
-          </a:prstGeom>
-          <a:solidFill>
-            <a:srgbClr val="007ACC"/>
-          </a:solidFill>
-          <a:ln>
-            <a:noFill/>
-          </a:ln>
-        </p:spPr>
-        <p:style>
-          <a:lnRef idx="1">
-            <a:schemeClr val="accent1"/>
-          </a:lnRef>
-          <a:fillRef idx="3">
-            <a:schemeClr val="accent1"/>
-          </a:fillRef>
-          <a:effectRef idx="2">
-            <a:schemeClr val="accent1"/>
-          </a:effectRef>
-          <a:fontRef idx="minor">
-            <a:schemeClr val="lt1"/>
-          </a:fontRef>
-        </p:style>
-        <p:txBody>
-          <a:bodyPr rtlCol="0" anchor="ctr"/>
-          <a:lstStyle/>
-          <a:p>
-            <a:pPr algn="ctr"/>
-          </a:p>
-        </p:txBody>
-      </p:sp>
-      <p:sp>
-        <p:nvSpPr>
-          <p:cNvPr id="4" name="TextBox 3"/>
-          <p:cNvSpPr txBox="1"/>
-          <p:nvPr/>
-        </p:nvSpPr>
-        <p:spPr>
-          <a:xfrm>
-            <a:off x="594360" y="1371600"/>
-            <a:ext cx="10972800" cy="4983480"/>
-          </a:xfrm>
-          <a:prstGeom prst="rect">
-            <a:avLst/>
-          </a:prstGeom>
-          <a:noFill/>
-        </p:spPr>
-        <p:txBody>
-          <a:bodyPr wrap="square">
-            <a:spAutoFit/>
-          </a:bodyPr>
-          <a:lstStyle/>
-          <a:p>
-            <a:pPr algn="l">
-              <a:spcAft>
-                <a:spcPts val="1000"/>
-              </a:spcAft>
-            </a:pPr>
-            <a:r>
-              <a:rPr sz="2000" b="1">
-                <a:solidFill>
-                  <a:srgbClr val="1F3355"/>
-                </a:solidFill>
-                <a:latin typeface="Meiryo UI"/>
-              </a:rPr>
-              <a:t>① 設定を変えなくても、網の方式が変わればアドレスが付かなくなる</a:t>
-            </a:r>
-          </a:p>
-          <a:p>
-            <a:pPr lvl="1" algn="l">
-              <a:spcAft>
-                <a:spcPts val="600"/>
-              </a:spcAft>
-            </a:pPr>
-            <a:r>
-              <a:rPr sz="1700" b="0">
-                <a:solidFill>
-                  <a:srgbClr val="555555"/>
-                </a:solidFill>
-                <a:latin typeface="Meiryo UI"/>
-              </a:rPr>
-              <a:t>演習 2。しかも RA 自体は届いているので、原因が見えません</a:t>
-            </a:r>
-          </a:p>
-          <a:p>
-            <a:pPr algn="l">
-              <a:spcAft>
-                <a:spcPts val="1000"/>
-              </a:spcAft>
-            </a:pPr>
-            <a:r>
-              <a:rPr sz="2000" b="1">
-                <a:solidFill>
-                  <a:srgbClr val="1F3355"/>
-                </a:solidFill>
-                <a:latin typeface="Meiryo UI"/>
-              </a:rPr>
-              <a:t>② ping が通っても、正しい経路を通ったことにはならない</a:t>
-            </a:r>
-          </a:p>
-          <a:p>
-            <a:pPr lvl="1" algn="l">
-              <a:spcAft>
-                <a:spcPts val="600"/>
-              </a:spcAft>
-            </a:pPr>
-            <a:r>
-              <a:rPr sz="1700" b="0">
-                <a:solidFill>
-                  <a:srgbClr val="555555"/>
-                </a:solidFill>
-                <a:latin typeface="Meiryo UI"/>
-              </a:rPr>
-              <a:t>演習 4。見るべきは 出口アドレス だけです</a:t>
-            </a:r>
-          </a:p>
-          <a:p>
-            <a:pPr algn="l">
-              <a:spcAft>
-                <a:spcPts val="1000"/>
-              </a:spcAft>
-            </a:pPr>
-            <a:r>
-              <a:rPr sz="2000" b="1">
-                <a:solidFill>
-                  <a:srgbClr val="1F3355"/>
-                </a:solidFill>
-                <a:latin typeface="Meiryo UI"/>
-              </a:rPr>
-              <a:t>③ 892FJ では MAP-E ができない</a:t>
-            </a:r>
-          </a:p>
-          <a:p>
-            <a:pPr lvl="1" algn="l">
-              <a:spcAft>
-                <a:spcPts val="600"/>
-              </a:spcAft>
-            </a:pPr>
-            <a:r>
-              <a:rPr sz="1700" b="0">
-                <a:solidFill>
-                  <a:srgbClr val="555555"/>
-                </a:solidFill>
-                <a:latin typeface="Meiryo UI"/>
-              </a:rPr>
-              <a:t>演習 5。機器と方式の組み合わせは、契約書を見た時点で分かります</a:t>
-            </a:r>
-          </a:p>
-          <a:p>
-            <a:pPr algn="l">
-              <a:spcAft>
-                <a:spcPts val="1000"/>
-              </a:spcAft>
-            </a:pPr>
-            <a:r>
-              <a:rPr sz="2000" b="1">
-                <a:solidFill>
-                  <a:srgbClr val="1F3355"/>
-                </a:solidFill>
-                <a:latin typeface="Meiryo UI"/>
-              </a:rPr>
-              <a:t>④ 障害は 3 つそろわないと再現しない</a:t>
-            </a:r>
-          </a:p>
-          <a:p>
-            <a:pPr lvl="1" algn="l">
-              <a:spcAft>
-                <a:spcPts val="600"/>
-              </a:spcAft>
-            </a:pPr>
-            <a:r>
-              <a:rPr sz="1700" b="0">
-                <a:solidFill>
-                  <a:srgbClr val="555555"/>
-                </a:solidFill>
-                <a:latin typeface="Meiryo UI"/>
-              </a:rPr>
-              <a:t>演習 6。「さっきまで再現していたのに」が起きます</a:t>
-            </a:r>
-          </a:p>
-          <a:p>
-            <a:pPr algn="l">
-              <a:spcAft>
-                <a:spcPts val="1000"/>
-              </a:spcAft>
-            </a:pPr>
-            <a:r>
-              <a:rPr sz="2000" b="1">
-                <a:solidFill>
-                  <a:srgbClr val="1F3355"/>
-                </a:solidFill>
-                <a:latin typeface="Meiryo UI"/>
-              </a:rPr>
-              <a:t>⑤ 同じ障害でも端末によって症状が違う</a:t>
-            </a:r>
-          </a:p>
-          <a:p>
-            <a:pPr lvl="1" algn="l">
-              <a:spcAft>
-                <a:spcPts val="600"/>
-              </a:spcAft>
-            </a:pPr>
-            <a:r>
-              <a:rPr sz="1700" b="0">
-                <a:solidFill>
-                  <a:srgbClr val="555555"/>
-                </a:solidFill>
-                <a:latin typeface="Meiryo UI"/>
-              </a:rPr>
-              <a:t>演習 8</a:t>
-            </a:r>
-          </a:p>
-          <a:p>
-            <a:pPr algn="l">
-              <a:spcAft>
-                <a:spcPts val="1000"/>
-              </a:spcAft>
-            </a:pPr>
-            <a:r>
-              <a:rPr sz="2000" b="1">
-                <a:solidFill>
-                  <a:srgbClr val="C0392B"/>
-                </a:solidFill>
-                <a:latin typeface="Meiryo UI"/>
-              </a:rPr>
-              <a:t>この 5 つは、教科書にもマニュアルにも書いてありません</a:t>
             </a:r>
           </a:p>
         </p:txBody>
@@ -11623,6 +12055,612 @@
 </file>
 
 <file path=ppt/slides/slide30.xml><?xml version="1.0" encoding="utf-8"?>
+<p:sld xmlns:a="http://schemas.openxmlformats.org/drawingml/2006/main" xmlns:p="http://schemas.openxmlformats.org/presentationml/2006/main" xmlns:r="http://schemas.openxmlformats.org/officeDocument/2006/relationships">
+  <p:cSld>
+    <p:spTree>
+      <p:nvGrpSpPr>
+        <p:cNvPr id="1" name=""/>
+        <p:cNvGrpSpPr/>
+        <p:nvPr/>
+      </p:nvGrpSpPr>
+      <p:grpSpPr/>
+      <p:sp>
+        <p:nvSpPr>
+          <p:cNvPr id="2" name="TextBox 1"/>
+          <p:cNvSpPr txBox="1"/>
+          <p:nvPr/>
+        </p:nvSpPr>
+        <p:spPr>
+          <a:xfrm>
+            <a:off x="502920" y="320040"/>
+            <a:ext cx="11155680" cy="822960"/>
+          </a:xfrm>
+          <a:prstGeom prst="rect">
+            <a:avLst/>
+          </a:prstGeom>
+          <a:noFill/>
+        </p:spPr>
+        <p:txBody>
+          <a:bodyPr wrap="square">
+            <a:spAutoFit/>
+          </a:bodyPr>
+          <a:lstStyle/>
+          <a:p>
+            <a:pPr algn="l"/>
+            <a:r>
+              <a:rPr sz="2800" b="1">
+                <a:solidFill>
+                  <a:srgbClr val="1F3355"/>
+                </a:solidFill>
+                <a:latin typeface="Meiryo UI"/>
+              </a:rPr>
+              <a:t>演習 9: 元に戻す</a:t>
+            </a:r>
+          </a:p>
+        </p:txBody>
+      </p:sp>
+      <p:sp>
+        <p:nvSpPr>
+          <p:cNvPr id="3" name="Rectangle 2"/>
+          <p:cNvSpPr/>
+          <p:nvPr/>
+        </p:nvSpPr>
+        <p:spPr>
+          <a:xfrm>
+            <a:off x="502920" y="1115568"/>
+            <a:ext cx="11155680" cy="31750"/>
+          </a:xfrm>
+          <a:prstGeom prst="rect">
+            <a:avLst/>
+          </a:prstGeom>
+          <a:solidFill>
+            <a:srgbClr val="007ACC"/>
+          </a:solidFill>
+          <a:ln>
+            <a:noFill/>
+          </a:ln>
+        </p:spPr>
+        <p:style>
+          <a:lnRef idx="1">
+            <a:schemeClr val="accent1"/>
+          </a:lnRef>
+          <a:fillRef idx="3">
+            <a:schemeClr val="accent1"/>
+          </a:fillRef>
+          <a:effectRef idx="2">
+            <a:schemeClr val="accent1"/>
+          </a:effectRef>
+          <a:fontRef idx="minor">
+            <a:schemeClr val="lt1"/>
+          </a:fontRef>
+        </p:style>
+        <p:txBody>
+          <a:bodyPr rtlCol="0" anchor="ctr"/>
+          <a:lstStyle/>
+          <a:p>
+            <a:pPr algn="ctr"/>
+          </a:p>
+        </p:txBody>
+      </p:sp>
+      <p:sp>
+        <p:nvSpPr>
+          <p:cNvPr id="4" name="TextBox 3"/>
+          <p:cNvSpPr txBox="1"/>
+          <p:nvPr/>
+        </p:nvSpPr>
+        <p:spPr>
+          <a:xfrm>
+            <a:off x="594360" y="1371600"/>
+            <a:ext cx="10972800" cy="4983480"/>
+          </a:xfrm>
+          <a:prstGeom prst="rect">
+            <a:avLst/>
+          </a:prstGeom>
+          <a:noFill/>
+        </p:spPr>
+        <p:txBody>
+          <a:bodyPr wrap="square">
+            <a:spAutoFit/>
+          </a:bodyPr>
+          <a:lstStyle/>
+          <a:p>
+            <a:pPr algn="l">
+              <a:spcAft>
+                <a:spcPts val="1000"/>
+              </a:spcAft>
+            </a:pPr>
+            <a:r>
+              <a:rPr sz="2000" b="1">
+                <a:solidFill>
+                  <a:srgbClr val="1F3355"/>
+                </a:solidFill>
+                <a:latin typeface="Meiryo UI"/>
+              </a:rPr>
+              <a:t>【あなた】892FJ で確認</a:t>
+            </a:r>
+          </a:p>
+          <a:p>
+            <a:pPr lvl="1" algn="l">
+              <a:spcAft>
+                <a:spcPts val="600"/>
+              </a:spcAft>
+            </a:pPr>
+            <a:r>
+              <a:rPr sz="1700" b="0">
+                <a:solidFill>
+                  <a:srgbClr val="0B6040"/>
+                </a:solidFill>
+                <a:latin typeface="Consolas"/>
+              </a:rPr>
+              <a:t>CPE# show running-config | include adjust-mss</a:t>
+            </a:r>
+          </a:p>
+          <a:p>
+            <a:pPr lvl="1" algn="l">
+              <a:spcAft>
+                <a:spcPts val="600"/>
+              </a:spcAft>
+            </a:pPr>
+            <a:r>
+              <a:rPr sz="1700" b="0">
+                <a:solidFill>
+                  <a:srgbClr val="555555"/>
+                </a:solidFill>
+                <a:latin typeface="Meiryo UI"/>
+              </a:rPr>
+              <a:t>ip tcp adjust-mss 1420 が Tunnel0 と Vlan1 の両方にあること。無ければ入れ直す</a:t>
+            </a:r>
+          </a:p>
+          <a:p>
+            <a:pPr lvl="1" algn="l">
+              <a:spcAft>
+                <a:spcPts val="600"/>
+              </a:spcAft>
+            </a:pPr>
+            <a:r>
+              <a:rPr sz="1700" b="0">
+                <a:solidFill>
+                  <a:srgbClr val="0B6040"/>
+                </a:solidFill>
+                <a:latin typeface="Consolas"/>
+              </a:rPr>
+              <a:t>CPE# show running-config | include ip nat inside source</a:t>
+            </a:r>
+          </a:p>
+          <a:p>
+            <a:pPr lvl="1" algn="l">
+              <a:spcAft>
+                <a:spcPts val="600"/>
+              </a:spcAft>
+            </a:pPr>
+            <a:r>
+              <a:rPr sz="1700" b="0">
+                <a:solidFill>
+                  <a:srgbClr val="555555"/>
+                </a:solidFill>
+                <a:latin typeface="Meiryo UI"/>
+              </a:rPr>
+              <a:t>何も出ないこと (演習 7 の設定が残っていないこと)</a:t>
+            </a:r>
+          </a:p>
+          <a:p>
+            <a:pPr algn="l">
+              <a:spcAft>
+                <a:spcPts val="1000"/>
+              </a:spcAft>
+            </a:pPr>
+            <a:r>
+              <a:rPr sz="2000" b="0">
+                <a:solidFill>
+                  <a:srgbClr val="0B6040"/>
+                </a:solidFill>
+                <a:latin typeface="Consolas"/>
+              </a:rPr>
+              <a:t>【司会】 ./lab-mode.sh restore  →  ./lab-mode.sh status</a:t>
+            </a:r>
+          </a:p>
+          <a:p>
+            <a:pPr lvl="1" algn="l">
+              <a:spcAft>
+                <a:spcPts val="600"/>
+              </a:spcAft>
+            </a:pPr>
+            <a:r>
+              <a:rPr sz="1700" b="0">
+                <a:solidFill>
+                  <a:srgbClr val="555555"/>
+                </a:solidFill>
+                <a:latin typeface="Meiryo UI"/>
+              </a:rPr>
+              <a:t>「障害の注入: なし」になっていることを全員で確認します</a:t>
+            </a:r>
+          </a:p>
+          <a:p>
+            <a:pPr algn="l">
+              <a:spcAft>
+                <a:spcPts val="1000"/>
+              </a:spcAft>
+            </a:pPr>
+            <a:r>
+              <a:rPr sz="2000" b="1">
+                <a:solidFill>
+                  <a:srgbClr val="1F3355"/>
+                </a:solidFill>
+                <a:latin typeface="Meiryo UI"/>
+              </a:rPr>
+              <a:t>【あなた】最後に</a:t>
+            </a:r>
+          </a:p>
+          <a:p>
+            <a:pPr lvl="1" algn="l">
+              <a:spcAft>
+                <a:spcPts val="600"/>
+              </a:spcAft>
+            </a:pPr>
+            <a:r>
+              <a:rPr sz="1700" b="0">
+                <a:solidFill>
+                  <a:srgbClr val="0B6040"/>
+                </a:solidFill>
+                <a:latin typeface="Consolas"/>
+              </a:rPr>
+              <a:t>curl.exe http://203.0.113.80/     →  src: 203.0.113.1 に戻っていれば完了</a:t>
+            </a:r>
+          </a:p>
+          <a:p>
+            <a:pPr algn="l">
+              <a:spcAft>
+                <a:spcPts val="1000"/>
+              </a:spcAft>
+            </a:pPr>
+            <a:r>
+              <a:rPr sz="2000" b="1">
+                <a:solidFill>
+                  <a:srgbClr val="C0392B"/>
+                </a:solidFill>
+                <a:latin typeface="Meiryo UI"/>
+              </a:rPr>
+              <a:t>【あなた】検証用 PC のアドレスを自動取得に戻す ← 忘れると席で繋がりません</a:t>
+            </a:r>
+          </a:p>
+          <a:p>
+            <a:pPr lvl="1" algn="l">
+              <a:spcAft>
+                <a:spcPts val="600"/>
+              </a:spcAft>
+            </a:pPr>
+            <a:r>
+              <a:rPr sz="1700" b="0">
+                <a:solidFill>
+                  <a:srgbClr val="0B6040"/>
+                </a:solidFill>
+                <a:latin typeface="Consolas"/>
+              </a:rPr>
+              <a:t>netsh interface ip set address "イーサネット" dhcp</a:t>
+            </a:r>
+          </a:p>
+          <a:p>
+            <a:pPr lvl="1" algn="l">
+              <a:spcAft>
+                <a:spcPts val="600"/>
+              </a:spcAft>
+            </a:pPr>
+            <a:r>
+              <a:rPr sz="1700" b="0">
+                <a:solidFill>
+                  <a:srgbClr val="0B6040"/>
+                </a:solidFill>
+                <a:latin typeface="Consolas"/>
+              </a:rPr>
+              <a:t>netsh interface ip set dns     "イーサネット" dhcp</a:t>
+            </a:r>
+          </a:p>
+        </p:txBody>
+      </p:sp>
+    </p:spTree>
+  </p:cSld>
+  <p:clrMapOvr>
+    <a:masterClrMapping/>
+  </p:clrMapOvr>
+</p:sld>
+</file>
+
+<file path=ppt/slides/slide31.xml><?xml version="1.0" encoding="utf-8"?>
+<p:sld xmlns:a="http://schemas.openxmlformats.org/drawingml/2006/main" xmlns:p="http://schemas.openxmlformats.org/presentationml/2006/main" xmlns:r="http://schemas.openxmlformats.org/officeDocument/2006/relationships">
+  <p:cSld>
+    <p:spTree>
+      <p:nvGrpSpPr>
+        <p:cNvPr id="1" name=""/>
+        <p:cNvGrpSpPr/>
+        <p:nvPr/>
+      </p:nvGrpSpPr>
+      <p:grpSpPr/>
+      <p:sp>
+        <p:nvSpPr>
+          <p:cNvPr id="2" name="TextBox 1"/>
+          <p:cNvSpPr txBox="1"/>
+          <p:nvPr/>
+        </p:nvSpPr>
+        <p:spPr>
+          <a:xfrm>
+            <a:off x="502920" y="320040"/>
+            <a:ext cx="11155680" cy="822960"/>
+          </a:xfrm>
+          <a:prstGeom prst="rect">
+            <a:avLst/>
+          </a:prstGeom>
+          <a:noFill/>
+        </p:spPr>
+        <p:txBody>
+          <a:bodyPr wrap="square">
+            <a:spAutoFit/>
+          </a:bodyPr>
+          <a:lstStyle/>
+          <a:p>
+            <a:pPr algn="l"/>
+            <a:r>
+              <a:rPr sz="2800" b="1">
+                <a:solidFill>
+                  <a:srgbClr val="1F3355"/>
+                </a:solidFill>
+                <a:latin typeface="Meiryo UI"/>
+              </a:rPr>
+              <a:t>今日 手を動かして分かったこと</a:t>
+            </a:r>
+          </a:p>
+        </p:txBody>
+      </p:sp>
+      <p:sp>
+        <p:nvSpPr>
+          <p:cNvPr id="3" name="Rectangle 2"/>
+          <p:cNvSpPr/>
+          <p:nvPr/>
+        </p:nvSpPr>
+        <p:spPr>
+          <a:xfrm>
+            <a:off x="502920" y="1115568"/>
+            <a:ext cx="11155680" cy="31750"/>
+          </a:xfrm>
+          <a:prstGeom prst="rect">
+            <a:avLst/>
+          </a:prstGeom>
+          <a:solidFill>
+            <a:srgbClr val="007ACC"/>
+          </a:solidFill>
+          <a:ln>
+            <a:noFill/>
+          </a:ln>
+        </p:spPr>
+        <p:style>
+          <a:lnRef idx="1">
+            <a:schemeClr val="accent1"/>
+          </a:lnRef>
+          <a:fillRef idx="3">
+            <a:schemeClr val="accent1"/>
+          </a:fillRef>
+          <a:effectRef idx="2">
+            <a:schemeClr val="accent1"/>
+          </a:effectRef>
+          <a:fontRef idx="minor">
+            <a:schemeClr val="lt1"/>
+          </a:fontRef>
+        </p:style>
+        <p:txBody>
+          <a:bodyPr rtlCol="0" anchor="ctr"/>
+          <a:lstStyle/>
+          <a:p>
+            <a:pPr algn="ctr"/>
+          </a:p>
+        </p:txBody>
+      </p:sp>
+      <p:sp>
+        <p:nvSpPr>
+          <p:cNvPr id="4" name="TextBox 3"/>
+          <p:cNvSpPr txBox="1"/>
+          <p:nvPr/>
+        </p:nvSpPr>
+        <p:spPr>
+          <a:xfrm>
+            <a:off x="594360" y="1371600"/>
+            <a:ext cx="10972800" cy="4983480"/>
+          </a:xfrm>
+          <a:prstGeom prst="rect">
+            <a:avLst/>
+          </a:prstGeom>
+          <a:noFill/>
+        </p:spPr>
+        <p:txBody>
+          <a:bodyPr wrap="square">
+            <a:spAutoFit/>
+          </a:bodyPr>
+          <a:lstStyle/>
+          <a:p>
+            <a:pPr algn="l">
+              <a:spcAft>
+                <a:spcPts val="1000"/>
+              </a:spcAft>
+            </a:pPr>
+            <a:r>
+              <a:rPr sz="2000" b="1">
+                <a:solidFill>
+                  <a:srgbClr val="1F3355"/>
+                </a:solidFill>
+                <a:latin typeface="Meiryo UI"/>
+              </a:rPr>
+              <a:t>① 設定を変えなくても、網の方式が変わればアドレスが付かなくなる</a:t>
+            </a:r>
+          </a:p>
+          <a:p>
+            <a:pPr lvl="1" algn="l">
+              <a:spcAft>
+                <a:spcPts val="600"/>
+              </a:spcAft>
+            </a:pPr>
+            <a:r>
+              <a:rPr sz="1700" b="0">
+                <a:solidFill>
+                  <a:srgbClr val="555555"/>
+                </a:solidFill>
+                <a:latin typeface="Meiryo UI"/>
+              </a:rPr>
+              <a:t>演習 2。しかも RA 自体は届いているので、原因が見えません</a:t>
+            </a:r>
+          </a:p>
+          <a:p>
+            <a:pPr algn="l">
+              <a:spcAft>
+                <a:spcPts val="1000"/>
+              </a:spcAft>
+            </a:pPr>
+            <a:r>
+              <a:rPr sz="2000" b="1">
+                <a:solidFill>
+                  <a:srgbClr val="1F3355"/>
+                </a:solidFill>
+                <a:latin typeface="Meiryo UI"/>
+              </a:rPr>
+              <a:t>② ping が通っても、正しい経路を通ったことにはならない</a:t>
+            </a:r>
+          </a:p>
+          <a:p>
+            <a:pPr lvl="1" algn="l">
+              <a:spcAft>
+                <a:spcPts val="600"/>
+              </a:spcAft>
+            </a:pPr>
+            <a:r>
+              <a:rPr sz="1700" b="0">
+                <a:solidFill>
+                  <a:srgbClr val="555555"/>
+                </a:solidFill>
+                <a:latin typeface="Meiryo UI"/>
+              </a:rPr>
+              <a:t>演習 4。見るべきは 出口アドレス だけです</a:t>
+            </a:r>
+          </a:p>
+          <a:p>
+            <a:pPr algn="l">
+              <a:spcAft>
+                <a:spcPts val="1000"/>
+              </a:spcAft>
+            </a:pPr>
+            <a:r>
+              <a:rPr sz="2000" b="1">
+                <a:solidFill>
+                  <a:srgbClr val="1F3355"/>
+                </a:solidFill>
+                <a:latin typeface="Meiryo UI"/>
+              </a:rPr>
+              <a:t>③ 892FJ では MAP-E ができない</a:t>
+            </a:r>
+          </a:p>
+          <a:p>
+            <a:pPr lvl="1" algn="l">
+              <a:spcAft>
+                <a:spcPts val="600"/>
+              </a:spcAft>
+            </a:pPr>
+            <a:r>
+              <a:rPr sz="1700" b="0">
+                <a:solidFill>
+                  <a:srgbClr val="555555"/>
+                </a:solidFill>
+                <a:latin typeface="Meiryo UI"/>
+              </a:rPr>
+              <a:t>演習 5。機器と方式の組み合わせは、契約書を見た時点で分かります</a:t>
+            </a:r>
+          </a:p>
+          <a:p>
+            <a:pPr algn="l">
+              <a:spcAft>
+                <a:spcPts val="1000"/>
+              </a:spcAft>
+            </a:pPr>
+            <a:r>
+              <a:rPr sz="2000" b="1">
+                <a:solidFill>
+                  <a:srgbClr val="1F3355"/>
+                </a:solidFill>
+                <a:latin typeface="Meiryo UI"/>
+              </a:rPr>
+              <a:t>④ 障害は 3 つそろわないと再現しない</a:t>
+            </a:r>
+          </a:p>
+          <a:p>
+            <a:pPr lvl="1" algn="l">
+              <a:spcAft>
+                <a:spcPts val="600"/>
+              </a:spcAft>
+            </a:pPr>
+            <a:r>
+              <a:rPr sz="1700" b="0">
+                <a:solidFill>
+                  <a:srgbClr val="555555"/>
+                </a:solidFill>
+                <a:latin typeface="Meiryo UI"/>
+              </a:rPr>
+              <a:t>演習 6。「さっきまで再現していたのに」が起きます</a:t>
+            </a:r>
+          </a:p>
+          <a:p>
+            <a:pPr algn="l">
+              <a:spcAft>
+                <a:spcPts val="1000"/>
+              </a:spcAft>
+            </a:pPr>
+            <a:r>
+              <a:rPr sz="2000" b="1">
+                <a:solidFill>
+                  <a:srgbClr val="1F3355"/>
+                </a:solidFill>
+                <a:latin typeface="Meiryo UI"/>
+              </a:rPr>
+              <a:t>⑤ 同じ障害でも端末によって症状が違う</a:t>
+            </a:r>
+          </a:p>
+          <a:p>
+            <a:pPr lvl="1" algn="l">
+              <a:spcAft>
+                <a:spcPts val="600"/>
+              </a:spcAft>
+            </a:pPr>
+            <a:r>
+              <a:rPr sz="1700" b="0">
+                <a:solidFill>
+                  <a:srgbClr val="555555"/>
+                </a:solidFill>
+                <a:latin typeface="Meiryo UI"/>
+              </a:rPr>
+              <a:t>演習 8</a:t>
+            </a:r>
+          </a:p>
+          <a:p>
+            <a:pPr algn="l">
+              <a:spcAft>
+                <a:spcPts val="1000"/>
+              </a:spcAft>
+            </a:pPr>
+            <a:r>
+              <a:rPr sz="2000" b="1">
+                <a:solidFill>
+                  <a:srgbClr val="C0392B"/>
+                </a:solidFill>
+                <a:latin typeface="Meiryo UI"/>
+              </a:rPr>
+              <a:t>この 5 つは、教科書にもマニュアルにも書いてありません</a:t>
+            </a:r>
+          </a:p>
+        </p:txBody>
+      </p:sp>
+    </p:spTree>
+  </p:cSld>
+  <p:clrMapOvr>
+    <a:masterClrMapping/>
+  </p:clrMapOvr>
+</p:sld>
+</file>
+
+<file path=ppt/slides/slide32.xml><?xml version="1.0" encoding="utf-8"?>
 <p:sld xmlns:a="http://schemas.openxmlformats.org/drawingml/2006/main" xmlns:p="http://schemas.openxmlformats.org/presentationml/2006/main" xmlns:r="http://schemas.openxmlformats.org/officeDocument/2006/relationships">
   <p:cSld>
     <p:spTree>
@@ -11824,7 +12862,7 @@
                           </a:solidFill>
                           <a:latin typeface="Meiryo UI"/>
                         </a:rPr>
-                        <a:t>司会が lab-mode.sh mape に切り替えます。CE は OpenWrt を使います (892FJ では不可)</a:t>
+                        <a:t>司会が lab-mode.sh mape に切り替えます。CE は C1111-8P か OpenWrt (892FJ では不可)。ルール配布サーバもあるので、本番と同じ自動設定の形で試せます</a:t>
                       </a:r>
                     </a:p>
                   </a:txBody>
@@ -11930,7 +12968,7 @@
 </p:sld>
 </file>
 
-<file path=ppt/slides/slide31.xml><?xml version="1.0" encoding="utf-8"?>
+<file path=ppt/slides/slide33.xml><?xml version="1.0" encoding="utf-8"?>
 <p:sld xmlns:a="http://schemas.openxmlformats.org/drawingml/2006/main" xmlns:p="http://schemas.openxmlformats.org/presentationml/2006/main" xmlns:r="http://schemas.openxmlformats.org/officeDocument/2006/relationships">
   <p:cSld>
     <p:spTree>

--- a/docs/ipoe-lab/slides/handson.pptx
+++ b/docs/ipoe-lab/slides/handson.pptx
@@ -650,6 +650,16 @@
           <a:p>
             <a:r>
               <a:t>・時間が押していても **前半は削らないこと。**説明会で一番腑に落ちない箇所。</a:t>
+            </a:r>
+          </a:p>
+          <a:p>
+            <a:r>
+              <a:t>・**後半 (配る値を変える) は reload が要るので 3 分ほど待つ。**</a:t>
+            </a:r>
+          </a:p>
+          <a:p>
+            <a:r>
+              <a:t>  待ち時間に「なぜ再起動が要るのか」を説明すると、そこが持ち帰りになる。</a:t>
             </a:r>
           </a:p>
         </p:txBody>
@@ -9401,7 +9411,7 @@
         </p:nvGraphicFramePr>
         <p:xfrm>
           <a:off x="502920" y="1143000"/>
-          <a:ext cx="10789920" cy="1865376"/>
+          <a:ext cx="10789920" cy="2487168"/>
         </p:xfrm>
         <a:graphic>
           <a:graphicData uri="http://schemas.openxmlformats.org/drawingml/2006/table">
@@ -9712,7 +9722,7 @@
                           </a:solidFill>
                           <a:latin typeface="Meiryo UI"/>
                         </a:rPr>
-                        <a:t>使えるポート</a:t>
+                        <a:t>Port-offset-bits</a:t>
                       </a:r>
                     </a:p>
                   </a:txBody>
@@ -9735,7 +9745,7 @@
                           </a:solidFill>
                           <a:latin typeface="Meiryo UI"/>
                         </a:rPr>
-                        <a:t>240 個</a:t>
+                        <a:t>4</a:t>
                       </a:r>
                     </a:p>
                   </a:txBody>
@@ -9758,7 +9768,7 @@
                           </a:solidFill>
                           <a:latin typeface="Meiryo UI"/>
                         </a:rPr>
-                        <a:t>全部</a:t>
+                        <a:t>6 (ルータが勝手に設定)</a:t>
                       </a:r>
                     </a:p>
                   </a:txBody>
@@ -9783,7 +9793,7 @@
                           </a:solidFill>
                           <a:latin typeface="Meiryo UI"/>
                         </a:rPr>
-                        <a:t>共有 IPv4</a:t>
+                        <a:t>使えるポート</a:t>
                       </a:r>
                     </a:p>
                   </a:txBody>
@@ -9806,7 +9816,7 @@
                           </a:solidFill>
                           <a:latin typeface="Meiryo UI"/>
                         </a:rPr>
-                        <a:t>198.51.100.20</a:t>
+                        <a:t>240 個</a:t>
                       </a:r>
                     </a:p>
                   </a:txBody>
@@ -9829,7 +9839,149 @@
                           </a:solidFill>
                           <a:latin typeface="Meiryo UI"/>
                         </a:rPr>
+                        <a:t>64512 個 (1024〜65535)</a:t>
+                      </a:r>
+                    </a:p>
+                  </a:txBody>
+                  <a:tcPr>
+                    <a:solidFill>
+                      <a:srgbClr val="FFFFFF"/>
+                    </a:solidFill>
+                  </a:tcPr>
+                </a:tc>
+              </a:tr>
+              <a:tr h="310896">
+                <a:tc>
+                  <a:txBody>
+                    <a:bodyPr/>
+                    <a:lstStyle/>
+                    <a:p>
+                      <a:pPr algn="l"/>
+                      <a:r>
+                        <a:rPr sz="1200" b="0">
+                          <a:solidFill>
+                            <a:srgbClr val="1F3355"/>
+                          </a:solidFill>
+                          <a:latin typeface="Meiryo UI"/>
+                        </a:rPr>
+                        <a:t>共有 IPv4</a:t>
+                      </a:r>
+                    </a:p>
+                  </a:txBody>
+                  <a:tcPr>
+                    <a:solidFill>
+                      <a:srgbClr val="F2F6FA"/>
+                    </a:solidFill>
+                  </a:tcPr>
+                </a:tc>
+                <a:tc>
+                  <a:txBody>
+                    <a:bodyPr/>
+                    <a:lstStyle/>
+                    <a:p>
+                      <a:pPr algn="l"/>
+                      <a:r>
+                        <a:rPr sz="1200" b="0">
+                          <a:solidFill>
+                            <a:srgbClr val="1F3355"/>
+                          </a:solidFill>
+                          <a:latin typeface="Meiryo UI"/>
+                        </a:rPr>
+                        <a:t>198.51.100.20</a:t>
+                      </a:r>
+                    </a:p>
+                  </a:txBody>
+                  <a:tcPr>
+                    <a:solidFill>
+                      <a:srgbClr val="F2F6FA"/>
+                    </a:solidFill>
+                  </a:tcPr>
+                </a:tc>
+                <a:tc>
+                  <a:txBody>
+                    <a:bodyPr/>
+                    <a:lstStyle/>
+                    <a:p>
+                      <a:pPr algn="l"/>
+                      <a:r>
+                        <a:rPr sz="1200" b="0">
+                          <a:solidFill>
+                            <a:srgbClr val="1F3355"/>
+                          </a:solidFill>
+                          <a:latin typeface="Meiryo UI"/>
+                        </a:rPr>
                         <a:t>198.51.100.20 (同じ!)</a:t>
+                      </a:r>
+                    </a:p>
+                  </a:txBody>
+                  <a:tcPr>
+                    <a:solidFill>
+                      <a:srgbClr val="F2F6FA"/>
+                    </a:solidFill>
+                  </a:tcPr>
+                </a:tc>
+              </a:tr>
+              <a:tr h="310896">
+                <a:tc>
+                  <a:txBody>
+                    <a:bodyPr/>
+                    <a:lstStyle/>
+                    <a:p>
+                      <a:pPr algn="l"/>
+                      <a:r>
+                        <a:rPr sz="1200" b="0">
+                          <a:solidFill>
+                            <a:srgbClr val="1F3355"/>
+                          </a:solidFill>
+                          <a:latin typeface="Meiryo UI"/>
+                        </a:rPr>
+                        <a:t>CE の MAP アドレス</a:t>
+                      </a:r>
+                    </a:p>
+                  </a:txBody>
+                  <a:tcPr>
+                    <a:solidFill>
+                      <a:srgbClr val="FFFFFF"/>
+                    </a:solidFill>
+                  </a:tcPr>
+                </a:tc>
+                <a:tc>
+                  <a:txBody>
+                    <a:bodyPr/>
+                    <a:lstStyle/>
+                    <a:p>
+                      <a:pPr algn="l"/>
+                      <a:r>
+                        <a:rPr sz="1200" b="0">
+                          <a:solidFill>
+                            <a:srgbClr val="1F3355"/>
+                          </a:solidFill>
+                          <a:latin typeface="Meiryo UI"/>
+                        </a:rPr>
+                        <a:t>...:1400:300</a:t>
+                      </a:r>
+                    </a:p>
+                  </a:txBody>
+                  <a:tcPr>
+                    <a:solidFill>
+                      <a:srgbClr val="FFFFFF"/>
+                    </a:solidFill>
+                  </a:tcPr>
+                </a:tc>
+                <a:tc>
+                  <a:txBody>
+                    <a:bodyPr/>
+                    <a:lstStyle/>
+                    <a:p>
+                      <a:pPr algn="l"/>
+                      <a:r>
+                        <a:rPr sz="1200" b="0">
+                          <a:solidFill>
+                            <a:srgbClr val="1F3355"/>
+                          </a:solidFill>
+                          <a:latin typeface="Meiryo UI"/>
+                        </a:rPr>
+                        <a:t>...:1400:0</a:t>
                       </a:r>
                     </a:p>
                   </a:txBody>
@@ -9852,7 +10004,7 @@
         </p:nvSpPr>
         <p:spPr>
           <a:xfrm>
-            <a:off x="502920" y="3264408"/>
+            <a:off x="502920" y="3886200"/>
             <a:ext cx="11155680" cy="548640"/>
           </a:xfrm>
           <a:prstGeom prst="rect">
@@ -9874,7 +10026,7 @@
                 </a:solidFill>
                 <a:latin typeface="Meiryo UI"/>
               </a:rPr>
-              <a:t>⚠ 司会へ: fixed 側は実機で未検証です (2026-08-15 時点)。当日までに一度通しておくこと</a:t>
+              <a:t>⚠ 取り直させるには reload が要ります。一度受理した CPE は shut/no shut では取りに来ません</a:t>
             </a:r>
           </a:p>
         </p:txBody>

--- a/docs/ipoe-lab/slides/handson.pptx
+++ b/docs/ipoe-lab/slides/handson.pptx
@@ -9580,7 +9580,7 @@
                           </a:solidFill>
                           <a:latin typeface="Meiryo UI"/>
                         </a:rPr>
-                        <a:t>サーバが返す eaBitLength</a:t>
+                        <a:t>サーバが返す ipv4Prefix</a:t>
                       </a:r>
                     </a:p>
                   </a:txBody>
@@ -9603,7 +9603,7 @@
                           </a:solidFill>
                           <a:latin typeface="Meiryo UI"/>
                         </a:rPr>
-                        <a:t>16</a:t>
+                        <a:t>198.51.100.0/24 (帯を配る)</a:t>
                       </a:r>
                     </a:p>
                   </a:txBody>
@@ -9626,7 +9626,7 @@
                           </a:solidFill>
                           <a:latin typeface="Meiryo UI"/>
                         </a:rPr>
-                        <a:t>8</a:t>
+                        <a:t>198.51.100.20/32 (名指し)</a:t>
                       </a:r>
                     </a:p>
                   </a:txBody>
@@ -9651,7 +9651,7 @@
                           </a:solidFill>
                           <a:latin typeface="Meiryo UI"/>
                         </a:rPr>
-                        <a:t>Share-ratio</a:t>
+                        <a:t>サーバが返す eaBitLength</a:t>
                       </a:r>
                     </a:p>
                   </a:txBody>
@@ -9674,7 +9674,7 @@
                           </a:solidFill>
                           <a:latin typeface="Meiryo UI"/>
                         </a:rPr>
-                        <a:t>256 (256 人で分ける)</a:t>
+                        <a:t>16 (CPE に計算させる)</a:t>
                       </a:r>
                     </a:p>
                   </a:txBody>
@@ -9697,7 +9697,7 @@
                           </a:solidFill>
                           <a:latin typeface="Meiryo UI"/>
                         </a:rPr>
-                        <a:t>1 (分けない)</a:t>
+                        <a:t>0 (計算させない)</a:t>
                       </a:r>
                     </a:p>
                   </a:txBody>
@@ -9722,7 +9722,7 @@
                           </a:solidFill>
                           <a:latin typeface="Meiryo UI"/>
                         </a:rPr>
-                        <a:t>Port-offset-bits</a:t>
+                        <a:t>Share-ratio</a:t>
                       </a:r>
                     </a:p>
                   </a:txBody>
@@ -9745,7 +9745,7 @@
                           </a:solidFill>
                           <a:latin typeface="Meiryo UI"/>
                         </a:rPr>
-                        <a:t>4</a:t>
+                        <a:t>256 (256 人で分ける)</a:t>
                       </a:r>
                     </a:p>
                   </a:txBody>
@@ -9768,7 +9768,7 @@
                           </a:solidFill>
                           <a:latin typeface="Meiryo UI"/>
                         </a:rPr>
-                        <a:t>6 (ルータが勝手に設定)</a:t>
+                        <a:t>1 (分けない)</a:t>
                       </a:r>
                     </a:p>
                   </a:txBody>
@@ -9864,7 +9864,7 @@
                           </a:solidFill>
                           <a:latin typeface="Meiryo UI"/>
                         </a:rPr>
-                        <a:t>共有 IPv4</a:t>
+                        <a:t>実際の送信元ポート</a:t>
                       </a:r>
                     </a:p>
                   </a:txBody>
@@ -9887,7 +9887,7 @@
                           </a:solidFill>
                           <a:latin typeface="Meiryo UI"/>
                         </a:rPr>
-                        <a:t>198.51.100.20</a:t>
+                        <a:t>4145</a:t>
                       </a:r>
                     </a:p>
                   </a:txBody>
@@ -9910,7 +9910,7 @@
                           </a:solidFill>
                           <a:latin typeface="Meiryo UI"/>
                         </a:rPr>
-                        <a:t>198.51.100.20 (同じ!)</a:t>
+                        <a:t>1025 / 1093 など</a:t>
                       </a:r>
                     </a:p>
                   </a:txBody>
@@ -9935,7 +9935,7 @@
                           </a:solidFill>
                           <a:latin typeface="Meiryo UI"/>
                         </a:rPr>
-                        <a:t>CE の MAP アドレス</a:t>
+                        <a:t>共有 IPv4</a:t>
                       </a:r>
                     </a:p>
                   </a:txBody>
@@ -9958,7 +9958,7 @@
                           </a:solidFill>
                           <a:latin typeface="Meiryo UI"/>
                         </a:rPr>
-                        <a:t>...:1400:300</a:t>
+                        <a:t>198.51.100.20</a:t>
                       </a:r>
                     </a:p>
                   </a:txBody>
@@ -9981,7 +9981,7 @@
                           </a:solidFill>
                           <a:latin typeface="Meiryo UI"/>
                         </a:rPr>
-                        <a:t>...:1400:0</a:t>
+                        <a:t>198.51.100.20 (同じ!)</a:t>
                       </a:r>
                     </a:p>
                   </a:txBody>

--- a/docs/ipoe-lab/slides/handson.pptx
+++ b/docs/ipoe-lab/slides/handson.pptx
@@ -5017,7 +5017,7 @@
                 </a:solidFill>
                 <a:latin typeface="Meiryo UI"/>
               </a:rPr>
-              <a:t>対象: 説明会を受けた人 / 時間: 165 分 (休憩 10 分を含む。時間配分は仮案です)</a:t>
+              <a:t>対象: 説明会を受けた人 / 時間: 200 分 (休憩含む)。120 分の短縮版あり</a:t>
             </a:r>
           </a:p>
           <a:p>
